--- a/docs/plots/carbo/jx_carbo_linsubhr_ratio_hosp2.pptx
+++ b/docs/plots/carbo/jx_carbo_linsubhr_ratio_hosp2.pptx
@@ -3002,588 +3002,561 @@
           </p:nvSpPr>
           <p:spPr>
             <a:xfrm>
-              <a:off x="817517" y="2158600"/>
-              <a:ext cx="7370972" cy="3215227"/>
+              <a:off x="817517" y="1896563"/>
+              <a:ext cx="7370972" cy="3549182"/>
             </a:xfrm>
             <a:custGeom>
               <a:avLst/>
               <a:pathLst>
-                <a:path w="7370972" h="3215227">
+                <a:path w="7370972" h="3549182">
                   <a:moveTo>
-                    <a:pt x="0" y="0"/>
+                    <a:pt x="700138" y="0"/>
                   </a:moveTo>
                   <a:lnTo>
-                    <a:pt x="73372" y="98586"/>
-                  </a:lnTo>
-                  <a:lnTo>
-                    <a:pt x="151006" y="199694"/>
-                  </a:lnTo>
-                  <a:lnTo>
-                    <a:pt x="228640" y="297697"/>
-                  </a:lnTo>
-                  <a:lnTo>
-                    <a:pt x="306274" y="392690"/>
-                  </a:lnTo>
-                  <a:lnTo>
-                    <a:pt x="383908" y="484766"/>
-                  </a:lnTo>
-                  <a:lnTo>
-                    <a:pt x="461542" y="574014"/>
-                  </a:lnTo>
-                  <a:lnTo>
-                    <a:pt x="539176" y="660520"/>
-                  </a:lnTo>
-                  <a:lnTo>
-                    <a:pt x="616810" y="744370"/>
-                  </a:lnTo>
-                  <a:lnTo>
-                    <a:pt x="694444" y="825644"/>
-                  </a:lnTo>
-                  <a:lnTo>
-                    <a:pt x="772078" y="904422"/>
-                  </a:lnTo>
-                  <a:lnTo>
-                    <a:pt x="849712" y="980781"/>
-                  </a:lnTo>
-                  <a:lnTo>
-                    <a:pt x="927346" y="1054795"/>
-                  </a:lnTo>
-                  <a:lnTo>
-                    <a:pt x="1004981" y="1126535"/>
-                  </a:lnTo>
-                  <a:lnTo>
-                    <a:pt x="1082615" y="1196072"/>
-                  </a:lnTo>
-                  <a:lnTo>
-                    <a:pt x="1160249" y="1263473"/>
-                  </a:lnTo>
-                  <a:lnTo>
-                    <a:pt x="1237883" y="1328804"/>
-                  </a:lnTo>
-                  <a:lnTo>
-                    <a:pt x="1315517" y="1392128"/>
-                  </a:lnTo>
-                  <a:lnTo>
-                    <a:pt x="1393151" y="1453508"/>
-                  </a:lnTo>
-                  <a:lnTo>
-                    <a:pt x="1470785" y="1513003"/>
-                  </a:lnTo>
-                  <a:lnTo>
-                    <a:pt x="1548419" y="1570670"/>
-                  </a:lnTo>
-                  <a:lnTo>
-                    <a:pt x="1626053" y="1626566"/>
-                  </a:lnTo>
-                  <a:lnTo>
-                    <a:pt x="1703687" y="1680745"/>
-                  </a:lnTo>
-                  <a:lnTo>
-                    <a:pt x="1781321" y="1733260"/>
-                  </a:lnTo>
-                  <a:lnTo>
-                    <a:pt x="1858955" y="1784163"/>
-                  </a:lnTo>
-                  <a:lnTo>
-                    <a:pt x="1936589" y="1833502"/>
-                  </a:lnTo>
-                  <a:lnTo>
-                    <a:pt x="2014223" y="1881325"/>
-                  </a:lnTo>
-                  <a:lnTo>
-                    <a:pt x="2091857" y="1927680"/>
-                  </a:lnTo>
-                  <a:lnTo>
-                    <a:pt x="2169491" y="1972611"/>
-                  </a:lnTo>
-                  <a:lnTo>
-                    <a:pt x="2247125" y="2016163"/>
-                  </a:lnTo>
-                  <a:lnTo>
-                    <a:pt x="2324759" y="2058376"/>
-                  </a:lnTo>
-                  <a:lnTo>
-                    <a:pt x="2402393" y="2099293"/>
-                  </a:lnTo>
-                  <a:lnTo>
-                    <a:pt x="2480027" y="2138954"/>
-                  </a:lnTo>
-                  <a:lnTo>
-                    <a:pt x="2557661" y="2177396"/>
-                  </a:lnTo>
-                  <a:lnTo>
-                    <a:pt x="2635295" y="2214657"/>
-                  </a:lnTo>
-                  <a:lnTo>
-                    <a:pt x="2712930" y="2250775"/>
-                  </a:lnTo>
-                  <a:lnTo>
-                    <a:pt x="2790564" y="2285782"/>
-                  </a:lnTo>
-                  <a:lnTo>
-                    <a:pt x="2868198" y="2319715"/>
-                  </a:lnTo>
-                  <a:lnTo>
-                    <a:pt x="2945832" y="2352606"/>
-                  </a:lnTo>
-                  <a:lnTo>
-                    <a:pt x="3023466" y="2384486"/>
-                  </a:lnTo>
-                  <a:lnTo>
-                    <a:pt x="3101100" y="2415387"/>
-                  </a:lnTo>
-                  <a:lnTo>
-                    <a:pt x="3178734" y="2445339"/>
-                  </a:lnTo>
-                  <a:lnTo>
-                    <a:pt x="3256368" y="2474371"/>
-                  </a:lnTo>
-                  <a:lnTo>
-                    <a:pt x="3334002" y="2502512"/>
-                  </a:lnTo>
-                  <a:lnTo>
-                    <a:pt x="3411636" y="2516667"/>
-                  </a:lnTo>
-                  <a:lnTo>
-                    <a:pt x="3489270" y="2503554"/>
-                  </a:lnTo>
-                  <a:lnTo>
-                    <a:pt x="3566904" y="2490244"/>
-                  </a:lnTo>
-                  <a:lnTo>
-                    <a:pt x="3644538" y="2476735"/>
-                  </a:lnTo>
-                  <a:lnTo>
-                    <a:pt x="3722172" y="2463022"/>
-                  </a:lnTo>
-                  <a:lnTo>
-                    <a:pt x="3799806" y="2449104"/>
-                  </a:lnTo>
-                  <a:lnTo>
-                    <a:pt x="3877440" y="2434977"/>
-                  </a:lnTo>
-                  <a:lnTo>
-                    <a:pt x="3955074" y="2420638"/>
-                  </a:lnTo>
-                  <a:lnTo>
-                    <a:pt x="4032708" y="2406084"/>
-                  </a:lnTo>
-                  <a:lnTo>
-                    <a:pt x="4110342" y="2391311"/>
-                  </a:lnTo>
-                  <a:lnTo>
-                    <a:pt x="4187976" y="2376317"/>
-                  </a:lnTo>
-                  <a:lnTo>
-                    <a:pt x="4265610" y="2361098"/>
-                  </a:lnTo>
-                  <a:lnTo>
-                    <a:pt x="4343244" y="2345651"/>
-                  </a:lnTo>
-                  <a:lnTo>
-                    <a:pt x="4420879" y="2329971"/>
-                  </a:lnTo>
-                  <a:lnTo>
-                    <a:pt x="4498513" y="2314057"/>
-                  </a:lnTo>
-                  <a:lnTo>
-                    <a:pt x="4576147" y="2297904"/>
-                  </a:lnTo>
-                  <a:lnTo>
-                    <a:pt x="4653781" y="2281508"/>
-                  </a:lnTo>
-                  <a:lnTo>
-                    <a:pt x="4731415" y="2264866"/>
-                  </a:lnTo>
-                  <a:lnTo>
-                    <a:pt x="4809049" y="2247975"/>
-                  </a:lnTo>
-                  <a:lnTo>
-                    <a:pt x="4886683" y="2230830"/>
-                  </a:lnTo>
-                  <a:lnTo>
-                    <a:pt x="4964317" y="2213428"/>
-                  </a:lnTo>
-                  <a:lnTo>
-                    <a:pt x="5041951" y="2195764"/>
-                  </a:lnTo>
-                  <a:lnTo>
-                    <a:pt x="5119585" y="2177836"/>
-                  </a:lnTo>
-                  <a:lnTo>
-                    <a:pt x="5197219" y="2159639"/>
-                  </a:lnTo>
-                  <a:lnTo>
-                    <a:pt x="5274853" y="2141169"/>
-                  </a:lnTo>
-                  <a:lnTo>
-                    <a:pt x="5352487" y="2122421"/>
-                  </a:lnTo>
-                  <a:lnTo>
-                    <a:pt x="5430121" y="2103392"/>
-                  </a:lnTo>
-                  <a:lnTo>
-                    <a:pt x="5507755" y="2084078"/>
-                  </a:lnTo>
-                  <a:lnTo>
-                    <a:pt x="5585389" y="2064474"/>
-                  </a:lnTo>
-                  <a:lnTo>
-                    <a:pt x="5663023" y="2044576"/>
-                  </a:lnTo>
-                  <a:lnTo>
-                    <a:pt x="5740657" y="2024379"/>
-                  </a:lnTo>
-                  <a:lnTo>
-                    <a:pt x="5818291" y="2003879"/>
-                  </a:lnTo>
-                  <a:lnTo>
-                    <a:pt x="5895925" y="1983072"/>
-                  </a:lnTo>
-                  <a:lnTo>
-                    <a:pt x="5973559" y="1961952"/>
-                  </a:lnTo>
-                  <a:lnTo>
-                    <a:pt x="6051193" y="1940515"/>
-                  </a:lnTo>
-                  <a:lnTo>
-                    <a:pt x="6128827" y="1918757"/>
-                  </a:lnTo>
-                  <a:lnTo>
-                    <a:pt x="6206462" y="1896672"/>
-                  </a:lnTo>
-                  <a:lnTo>
-                    <a:pt x="6284096" y="1874256"/>
-                  </a:lnTo>
-                  <a:lnTo>
-                    <a:pt x="6361730" y="1851504"/>
-                  </a:lnTo>
-                  <a:lnTo>
-                    <a:pt x="6439364" y="1828410"/>
-                  </a:lnTo>
-                  <a:lnTo>
-                    <a:pt x="6516998" y="1804970"/>
-                  </a:lnTo>
-                  <a:lnTo>
-                    <a:pt x="6594632" y="1781178"/>
-                  </a:lnTo>
-                  <a:lnTo>
-                    <a:pt x="6672266" y="1757029"/>
-                  </a:lnTo>
-                  <a:lnTo>
-                    <a:pt x="6749900" y="1732517"/>
-                  </a:lnTo>
-                  <a:lnTo>
-                    <a:pt x="6827534" y="1707638"/>
-                  </a:lnTo>
-                  <a:lnTo>
-                    <a:pt x="6905168" y="1682386"/>
-                  </a:lnTo>
-                  <a:lnTo>
-                    <a:pt x="6982802" y="1656754"/>
-                  </a:lnTo>
-                  <a:lnTo>
-                    <a:pt x="7060436" y="1630738"/>
-                  </a:lnTo>
-                  <a:lnTo>
-                    <a:pt x="7138070" y="1604332"/>
-                  </a:lnTo>
-                  <a:lnTo>
-                    <a:pt x="7215704" y="1577529"/>
-                  </a:lnTo>
-                  <a:lnTo>
-                    <a:pt x="7293338" y="1550325"/>
-                  </a:lnTo>
-                  <a:lnTo>
-                    <a:pt x="7370972" y="1522712"/>
-                  </a:lnTo>
-                  <a:lnTo>
-                    <a:pt x="7370972" y="3215227"/>
-                  </a:lnTo>
-                  <a:lnTo>
-                    <a:pt x="7293338" y="3209670"/>
-                  </a:lnTo>
-                  <a:lnTo>
-                    <a:pt x="7215704" y="3203936"/>
-                  </a:lnTo>
-                  <a:lnTo>
-                    <a:pt x="7138070" y="3198021"/>
-                  </a:lnTo>
-                  <a:lnTo>
-                    <a:pt x="7060436" y="3191919"/>
-                  </a:lnTo>
-                  <a:lnTo>
-                    <a:pt x="6982802" y="3185623"/>
-                  </a:lnTo>
-                  <a:lnTo>
-                    <a:pt x="6905168" y="3179128"/>
-                  </a:lnTo>
-                  <a:lnTo>
-                    <a:pt x="6827534" y="3172427"/>
-                  </a:lnTo>
-                  <a:lnTo>
-                    <a:pt x="6749900" y="3165514"/>
-                  </a:lnTo>
-                  <a:lnTo>
-                    <a:pt x="6672266" y="3158382"/>
-                  </a:lnTo>
-                  <a:lnTo>
-                    <a:pt x="6594632" y="3151023"/>
-                  </a:lnTo>
-                  <a:lnTo>
-                    <a:pt x="6516998" y="3143432"/>
-                  </a:lnTo>
-                  <a:lnTo>
-                    <a:pt x="6439364" y="3135600"/>
-                  </a:lnTo>
-                  <a:lnTo>
-                    <a:pt x="6361730" y="3127519"/>
-                  </a:lnTo>
-                  <a:lnTo>
-                    <a:pt x="6284096" y="3119183"/>
-                  </a:lnTo>
-                  <a:lnTo>
-                    <a:pt x="6206462" y="3110583"/>
-                  </a:lnTo>
-                  <a:lnTo>
-                    <a:pt x="6128827" y="3101710"/>
-                  </a:lnTo>
-                  <a:lnTo>
-                    <a:pt x="6051193" y="3092556"/>
-                  </a:lnTo>
-                  <a:lnTo>
-                    <a:pt x="5973559" y="3083112"/>
-                  </a:lnTo>
-                  <a:lnTo>
-                    <a:pt x="5895925" y="3073368"/>
-                  </a:lnTo>
-                  <a:lnTo>
-                    <a:pt x="5818291" y="3063316"/>
-                  </a:lnTo>
-                  <a:lnTo>
-                    <a:pt x="5740657" y="3052946"/>
-                  </a:lnTo>
-                  <a:lnTo>
-                    <a:pt x="5663023" y="3042246"/>
-                  </a:lnTo>
-                  <a:lnTo>
-                    <a:pt x="5585389" y="3031208"/>
-                  </a:lnTo>
-                  <a:lnTo>
-                    <a:pt x="5507755" y="3019820"/>
-                  </a:lnTo>
-                  <a:lnTo>
-                    <a:pt x="5430121" y="3008071"/>
-                  </a:lnTo>
-                  <a:lnTo>
-                    <a:pt x="5352487" y="2995950"/>
-                  </a:lnTo>
-                  <a:lnTo>
-                    <a:pt x="5274853" y="2983445"/>
-                  </a:lnTo>
-                  <a:lnTo>
-                    <a:pt x="5197219" y="2970543"/>
-                  </a:lnTo>
-                  <a:lnTo>
-                    <a:pt x="5119585" y="2957233"/>
-                  </a:lnTo>
-                  <a:lnTo>
-                    <a:pt x="5041951" y="2943501"/>
-                  </a:lnTo>
-                  <a:lnTo>
-                    <a:pt x="4964317" y="2929334"/>
-                  </a:lnTo>
-                  <a:lnTo>
-                    <a:pt x="4886683" y="2914718"/>
-                  </a:lnTo>
-                  <a:lnTo>
-                    <a:pt x="4809049" y="2899639"/>
-                  </a:lnTo>
-                  <a:lnTo>
-                    <a:pt x="4731415" y="2884082"/>
-                  </a:lnTo>
-                  <a:lnTo>
-                    <a:pt x="4653781" y="2868032"/>
-                  </a:lnTo>
-                  <a:lnTo>
-                    <a:pt x="4576147" y="2851473"/>
-                  </a:lnTo>
-                  <a:lnTo>
-                    <a:pt x="4498513" y="2834390"/>
-                  </a:lnTo>
-                  <a:lnTo>
-                    <a:pt x="4420879" y="2816765"/>
-                  </a:lnTo>
-                  <a:lnTo>
-                    <a:pt x="4343244" y="2798583"/>
-                  </a:lnTo>
-                  <a:lnTo>
-                    <a:pt x="4265610" y="2779823"/>
-                  </a:lnTo>
-                  <a:lnTo>
-                    <a:pt x="4187976" y="2760470"/>
-                  </a:lnTo>
-                  <a:lnTo>
-                    <a:pt x="4110342" y="2740503"/>
-                  </a:lnTo>
-                  <a:lnTo>
-                    <a:pt x="4032708" y="2719904"/>
-                  </a:lnTo>
-                  <a:lnTo>
-                    <a:pt x="3955074" y="2698652"/>
-                  </a:lnTo>
-                  <a:lnTo>
-                    <a:pt x="3877440" y="2676726"/>
-                  </a:lnTo>
-                  <a:lnTo>
-                    <a:pt x="3799806" y="2654106"/>
-                  </a:lnTo>
-                  <a:lnTo>
-                    <a:pt x="3722172" y="2630769"/>
-                  </a:lnTo>
-                  <a:lnTo>
-                    <a:pt x="3644538" y="2606692"/>
-                  </a:lnTo>
-                  <a:lnTo>
-                    <a:pt x="3566904" y="2581853"/>
-                  </a:lnTo>
-                  <a:lnTo>
-                    <a:pt x="3489270" y="2556226"/>
-                  </a:lnTo>
-                  <a:lnTo>
-                    <a:pt x="3411636" y="2529788"/>
-                  </a:lnTo>
-                  <a:lnTo>
-                    <a:pt x="3334002" y="2529587"/>
-                  </a:lnTo>
-                  <a:lnTo>
-                    <a:pt x="3256368" y="2542315"/>
-                  </a:lnTo>
-                  <a:lnTo>
-                    <a:pt x="3178734" y="2554855"/>
-                  </a:lnTo>
-                  <a:lnTo>
-                    <a:pt x="3101100" y="2567210"/>
-                  </a:lnTo>
-                  <a:lnTo>
-                    <a:pt x="3023466" y="2579382"/>
-                  </a:lnTo>
-                  <a:lnTo>
-                    <a:pt x="2945832" y="2591375"/>
-                  </a:lnTo>
-                  <a:lnTo>
-                    <a:pt x="2868198" y="2603190"/>
-                  </a:lnTo>
-                  <a:lnTo>
-                    <a:pt x="2790564" y="2614830"/>
-                  </a:lnTo>
-                  <a:lnTo>
-                    <a:pt x="2712930" y="2626298"/>
-                  </a:lnTo>
-                  <a:lnTo>
-                    <a:pt x="2635295" y="2637597"/>
-                  </a:lnTo>
-                  <a:lnTo>
-                    <a:pt x="2557661" y="2648728"/>
-                  </a:lnTo>
-                  <a:lnTo>
-                    <a:pt x="2480027" y="2659696"/>
-                  </a:lnTo>
-                  <a:lnTo>
-                    <a:pt x="2402393" y="2670501"/>
-                  </a:lnTo>
-                  <a:lnTo>
-                    <a:pt x="2324759" y="2681146"/>
-                  </a:lnTo>
-                  <a:lnTo>
-                    <a:pt x="2247125" y="2691634"/>
-                  </a:lnTo>
-                  <a:lnTo>
-                    <a:pt x="2169491" y="2701967"/>
-                  </a:lnTo>
-                  <a:lnTo>
-                    <a:pt x="2091857" y="2712147"/>
-                  </a:lnTo>
-                  <a:lnTo>
-                    <a:pt x="2014223" y="2722176"/>
-                  </a:lnTo>
-                  <a:lnTo>
-                    <a:pt x="1936589" y="2732058"/>
-                  </a:lnTo>
-                  <a:lnTo>
-                    <a:pt x="1858955" y="2741793"/>
-                  </a:lnTo>
-                  <a:lnTo>
-                    <a:pt x="1781321" y="2751384"/>
-                  </a:lnTo>
-                  <a:lnTo>
-                    <a:pt x="1703687" y="2760834"/>
-                  </a:lnTo>
-                  <a:lnTo>
-                    <a:pt x="1626053" y="2770144"/>
-                  </a:lnTo>
-                  <a:lnTo>
-                    <a:pt x="1548419" y="2779316"/>
-                  </a:lnTo>
-                  <a:lnTo>
-                    <a:pt x="1470785" y="2788353"/>
-                  </a:lnTo>
-                  <a:lnTo>
-                    <a:pt x="1393151" y="2797256"/>
-                  </a:lnTo>
-                  <a:lnTo>
-                    <a:pt x="1315517" y="2806027"/>
-                  </a:lnTo>
-                  <a:lnTo>
-                    <a:pt x="1237883" y="2814669"/>
-                  </a:lnTo>
-                  <a:lnTo>
-                    <a:pt x="1160249" y="2823183"/>
-                  </a:lnTo>
-                  <a:lnTo>
-                    <a:pt x="1082615" y="2831571"/>
-                  </a:lnTo>
-                  <a:lnTo>
-                    <a:pt x="1004981" y="2839835"/>
-                  </a:lnTo>
-                  <a:lnTo>
-                    <a:pt x="927346" y="2847977"/>
-                  </a:lnTo>
-                  <a:lnTo>
-                    <a:pt x="849712" y="2855999"/>
-                  </a:lnTo>
-                  <a:lnTo>
-                    <a:pt x="772078" y="2863902"/>
-                  </a:lnTo>
-                  <a:lnTo>
-                    <a:pt x="694444" y="2871688"/>
-                  </a:lnTo>
-                  <a:lnTo>
-                    <a:pt x="616810" y="2879359"/>
-                  </a:lnTo>
-                  <a:lnTo>
-                    <a:pt x="539176" y="2886917"/>
-                  </a:lnTo>
-                  <a:lnTo>
-                    <a:pt x="461542" y="2894363"/>
-                  </a:lnTo>
-                  <a:lnTo>
-                    <a:pt x="383908" y="2901699"/>
-                  </a:lnTo>
-                  <a:lnTo>
-                    <a:pt x="306274" y="2908926"/>
-                  </a:lnTo>
-                  <a:lnTo>
-                    <a:pt x="228640" y="2916047"/>
-                  </a:lnTo>
-                  <a:lnTo>
-                    <a:pt x="151006" y="2923062"/>
-                  </a:lnTo>
-                  <a:lnTo>
-                    <a:pt x="73372" y="2929974"/>
-                  </a:lnTo>
-                  <a:lnTo>
-                    <a:pt x="0" y="2936410"/>
+                    <a:pt x="772078" y="137928"/>
+                  </a:lnTo>
+                  <a:lnTo>
+                    <a:pt x="849712" y="280725"/>
+                  </a:lnTo>
+                  <a:lnTo>
+                    <a:pt x="927346" y="417720"/>
+                  </a:lnTo>
+                  <a:lnTo>
+                    <a:pt x="1004981" y="549149"/>
+                  </a:lnTo>
+                  <a:lnTo>
+                    <a:pt x="1082615" y="675239"/>
+                  </a:lnTo>
+                  <a:lnTo>
+                    <a:pt x="1160249" y="796205"/>
+                  </a:lnTo>
+                  <a:lnTo>
+                    <a:pt x="1237883" y="912257"/>
+                  </a:lnTo>
+                  <a:lnTo>
+                    <a:pt x="1315517" y="1023594"/>
+                  </a:lnTo>
+                  <a:lnTo>
+                    <a:pt x="1393151" y="1130408"/>
+                  </a:lnTo>
+                  <a:lnTo>
+                    <a:pt x="1470785" y="1232882"/>
+                  </a:lnTo>
+                  <a:lnTo>
+                    <a:pt x="1548419" y="1331193"/>
+                  </a:lnTo>
+                  <a:lnTo>
+                    <a:pt x="1626053" y="1425509"/>
+                  </a:lnTo>
+                  <a:lnTo>
+                    <a:pt x="1703687" y="1515994"/>
+                  </a:lnTo>
+                  <a:lnTo>
+                    <a:pt x="1781321" y="1602802"/>
+                  </a:lnTo>
+                  <a:lnTo>
+                    <a:pt x="1858955" y="1686083"/>
+                  </a:lnTo>
+                  <a:lnTo>
+                    <a:pt x="1936589" y="1765981"/>
+                  </a:lnTo>
+                  <a:lnTo>
+                    <a:pt x="2014223" y="1842633"/>
+                  </a:lnTo>
+                  <a:lnTo>
+                    <a:pt x="2091857" y="1916171"/>
+                  </a:lnTo>
+                  <a:lnTo>
+                    <a:pt x="2169491" y="1986720"/>
+                  </a:lnTo>
+                  <a:lnTo>
+                    <a:pt x="2247125" y="2054404"/>
+                  </a:lnTo>
+                  <a:lnTo>
+                    <a:pt x="2324759" y="2119338"/>
+                  </a:lnTo>
+                  <a:lnTo>
+                    <a:pt x="2402393" y="2181633"/>
+                  </a:lnTo>
+                  <a:lnTo>
+                    <a:pt x="2480027" y="2241398"/>
+                  </a:lnTo>
+                  <a:lnTo>
+                    <a:pt x="2557661" y="2298734"/>
+                  </a:lnTo>
+                  <a:lnTo>
+                    <a:pt x="2635295" y="2353741"/>
+                  </a:lnTo>
+                  <a:lnTo>
+                    <a:pt x="2712930" y="2406513"/>
+                  </a:lnTo>
+                  <a:lnTo>
+                    <a:pt x="2790564" y="2457141"/>
+                  </a:lnTo>
+                  <a:lnTo>
+                    <a:pt x="2868198" y="2505712"/>
+                  </a:lnTo>
+                  <a:lnTo>
+                    <a:pt x="2945832" y="2552310"/>
+                  </a:lnTo>
+                  <a:lnTo>
+                    <a:pt x="3023466" y="2597015"/>
+                  </a:lnTo>
+                  <a:lnTo>
+                    <a:pt x="3101100" y="2639903"/>
+                  </a:lnTo>
+                  <a:lnTo>
+                    <a:pt x="3178734" y="2681049"/>
+                  </a:lnTo>
+                  <a:lnTo>
+                    <a:pt x="3256368" y="2720523"/>
+                  </a:lnTo>
+                  <a:lnTo>
+                    <a:pt x="3334002" y="2758394"/>
+                  </a:lnTo>
+                  <a:lnTo>
+                    <a:pt x="3411636" y="2776928"/>
+                  </a:lnTo>
+                  <a:lnTo>
+                    <a:pt x="3489270" y="2758270"/>
+                  </a:lnTo>
+                  <a:lnTo>
+                    <a:pt x="3566904" y="2739215"/>
+                  </a:lnTo>
+                  <a:lnTo>
+                    <a:pt x="3644538" y="2719754"/>
+                  </a:lnTo>
+                  <a:lnTo>
+                    <a:pt x="3722172" y="2699878"/>
+                  </a:lnTo>
+                  <a:lnTo>
+                    <a:pt x="3799806" y="2679579"/>
+                  </a:lnTo>
+                  <a:lnTo>
+                    <a:pt x="3877440" y="2658847"/>
+                  </a:lnTo>
+                  <a:lnTo>
+                    <a:pt x="3955074" y="2637673"/>
+                  </a:lnTo>
+                  <a:lnTo>
+                    <a:pt x="4032708" y="2616049"/>
+                  </a:lnTo>
+                  <a:lnTo>
+                    <a:pt x="4110342" y="2593964"/>
+                  </a:lnTo>
+                  <a:lnTo>
+                    <a:pt x="4187976" y="2571408"/>
+                  </a:lnTo>
+                  <a:lnTo>
+                    <a:pt x="4265610" y="2548371"/>
+                  </a:lnTo>
+                  <a:lnTo>
+                    <a:pt x="4343244" y="2524844"/>
+                  </a:lnTo>
+                  <a:lnTo>
+                    <a:pt x="4420879" y="2500816"/>
+                  </a:lnTo>
+                  <a:lnTo>
+                    <a:pt x="4498513" y="2476275"/>
+                  </a:lnTo>
+                  <a:lnTo>
+                    <a:pt x="4576147" y="2451212"/>
+                  </a:lnTo>
+                  <a:lnTo>
+                    <a:pt x="4653781" y="2425615"/>
+                  </a:lnTo>
+                  <a:lnTo>
+                    <a:pt x="4731415" y="2399472"/>
+                  </a:lnTo>
+                  <a:lnTo>
+                    <a:pt x="4809049" y="2372773"/>
+                  </a:lnTo>
+                  <a:lnTo>
+                    <a:pt x="4886683" y="2345504"/>
+                  </a:lnTo>
+                  <a:lnTo>
+                    <a:pt x="4964317" y="2317655"/>
+                  </a:lnTo>
+                  <a:lnTo>
+                    <a:pt x="5041951" y="2289212"/>
+                  </a:lnTo>
+                  <a:lnTo>
+                    <a:pt x="5119585" y="2260164"/>
+                  </a:lnTo>
+                  <a:lnTo>
+                    <a:pt x="5197219" y="2230496"/>
+                  </a:lnTo>
+                  <a:lnTo>
+                    <a:pt x="5274853" y="2200196"/>
+                  </a:lnTo>
+                  <a:lnTo>
+                    <a:pt x="5352487" y="2169251"/>
+                  </a:lnTo>
+                  <a:lnTo>
+                    <a:pt x="5430121" y="2137646"/>
+                  </a:lnTo>
+                  <a:lnTo>
+                    <a:pt x="5507755" y="2105368"/>
+                  </a:lnTo>
+                  <a:lnTo>
+                    <a:pt x="5585389" y="2072403"/>
+                  </a:lnTo>
+                  <a:lnTo>
+                    <a:pt x="5663023" y="2038735"/>
+                  </a:lnTo>
+                  <a:lnTo>
+                    <a:pt x="5740657" y="2004350"/>
+                  </a:lnTo>
+                  <a:lnTo>
+                    <a:pt x="5818291" y="1969232"/>
+                  </a:lnTo>
+                  <a:lnTo>
+                    <a:pt x="5895925" y="1933366"/>
+                  </a:lnTo>
+                  <a:lnTo>
+                    <a:pt x="5973559" y="1896735"/>
+                  </a:lnTo>
+                  <a:lnTo>
+                    <a:pt x="6051193" y="1859325"/>
+                  </a:lnTo>
+                  <a:lnTo>
+                    <a:pt x="6128827" y="1821117"/>
+                  </a:lnTo>
+                  <a:lnTo>
+                    <a:pt x="6206462" y="1782095"/>
+                  </a:lnTo>
+                  <a:lnTo>
+                    <a:pt x="6284096" y="1742242"/>
+                  </a:lnTo>
+                  <a:lnTo>
+                    <a:pt x="6361730" y="1701540"/>
+                  </a:lnTo>
+                  <a:lnTo>
+                    <a:pt x="6439364" y="1659970"/>
+                  </a:lnTo>
+                  <a:lnTo>
+                    <a:pt x="6516998" y="1617515"/>
+                  </a:lnTo>
+                  <a:lnTo>
+                    <a:pt x="6594632" y="1574155"/>
+                  </a:lnTo>
+                  <a:lnTo>
+                    <a:pt x="6672266" y="1529872"/>
+                  </a:lnTo>
+                  <a:lnTo>
+                    <a:pt x="6749900" y="1484645"/>
+                  </a:lnTo>
+                  <a:lnTo>
+                    <a:pt x="6827534" y="1438455"/>
+                  </a:lnTo>
+                  <a:lnTo>
+                    <a:pt x="6905168" y="1391280"/>
+                  </a:lnTo>
+                  <a:lnTo>
+                    <a:pt x="6982802" y="1343100"/>
+                  </a:lnTo>
+                  <a:lnTo>
+                    <a:pt x="7060436" y="1293894"/>
+                  </a:lnTo>
+                  <a:lnTo>
+                    <a:pt x="7138070" y="1243639"/>
+                  </a:lnTo>
+                  <a:lnTo>
+                    <a:pt x="7215704" y="1192314"/>
+                  </a:lnTo>
+                  <a:lnTo>
+                    <a:pt x="7293338" y="1139895"/>
+                  </a:lnTo>
+                  <a:lnTo>
+                    <a:pt x="7370972" y="1086360"/>
+                  </a:lnTo>
+                  <a:lnTo>
+                    <a:pt x="7370972" y="3549182"/>
+                  </a:lnTo>
+                  <a:lnTo>
+                    <a:pt x="7293338" y="3544800"/>
+                  </a:lnTo>
+                  <a:lnTo>
+                    <a:pt x="7215704" y="3540233"/>
+                  </a:lnTo>
+                  <a:lnTo>
+                    <a:pt x="7138070" y="3535473"/>
+                  </a:lnTo>
+                  <a:lnTo>
+                    <a:pt x="7060436" y="3530511"/>
+                  </a:lnTo>
+                  <a:lnTo>
+                    <a:pt x="6982802" y="3525339"/>
+                  </a:lnTo>
+                  <a:lnTo>
+                    <a:pt x="6905168" y="3519947"/>
+                  </a:lnTo>
+                  <a:lnTo>
+                    <a:pt x="6827534" y="3514328"/>
+                  </a:lnTo>
+                  <a:lnTo>
+                    <a:pt x="6749900" y="3508470"/>
+                  </a:lnTo>
+                  <a:lnTo>
+                    <a:pt x="6672266" y="3502365"/>
+                  </a:lnTo>
+                  <a:lnTo>
+                    <a:pt x="6594632" y="3496001"/>
+                  </a:lnTo>
+                  <a:lnTo>
+                    <a:pt x="6516998" y="3489367"/>
+                  </a:lnTo>
+                  <a:lnTo>
+                    <a:pt x="6439364" y="3482453"/>
+                  </a:lnTo>
+                  <a:lnTo>
+                    <a:pt x="6361730" y="3475245"/>
+                  </a:lnTo>
+                  <a:lnTo>
+                    <a:pt x="6284096" y="3467733"/>
+                  </a:lnTo>
+                  <a:lnTo>
+                    <a:pt x="6206462" y="3459902"/>
+                  </a:lnTo>
+                  <a:lnTo>
+                    <a:pt x="6128827" y="3451739"/>
+                  </a:lnTo>
+                  <a:lnTo>
+                    <a:pt x="6051193" y="3443231"/>
+                  </a:lnTo>
+                  <a:lnTo>
+                    <a:pt x="5973559" y="3434363"/>
+                  </a:lnTo>
+                  <a:lnTo>
+                    <a:pt x="5895925" y="3425119"/>
+                  </a:lnTo>
+                  <a:lnTo>
+                    <a:pt x="5818291" y="3415484"/>
+                  </a:lnTo>
+                  <a:lnTo>
+                    <a:pt x="5740657" y="3405440"/>
+                  </a:lnTo>
+                  <a:lnTo>
+                    <a:pt x="5663023" y="3394972"/>
+                  </a:lnTo>
+                  <a:lnTo>
+                    <a:pt x="5585389" y="3384060"/>
+                  </a:lnTo>
+                  <a:lnTo>
+                    <a:pt x="5507755" y="3372685"/>
+                  </a:lnTo>
+                  <a:lnTo>
+                    <a:pt x="5430121" y="3360829"/>
+                  </a:lnTo>
+                  <a:lnTo>
+                    <a:pt x="5352487" y="3348471"/>
+                  </a:lnTo>
+                  <a:lnTo>
+                    <a:pt x="5274853" y="3335590"/>
+                  </a:lnTo>
+                  <a:lnTo>
+                    <a:pt x="5197219" y="3322163"/>
+                  </a:lnTo>
+                  <a:lnTo>
+                    <a:pt x="5119585" y="3308168"/>
+                  </a:lnTo>
+                  <a:lnTo>
+                    <a:pt x="5041951" y="3293580"/>
+                  </a:lnTo>
+                  <a:lnTo>
+                    <a:pt x="4964317" y="3278374"/>
+                  </a:lnTo>
+                  <a:lnTo>
+                    <a:pt x="4886683" y="3262524"/>
+                  </a:lnTo>
+                  <a:lnTo>
+                    <a:pt x="4809049" y="3246003"/>
+                  </a:lnTo>
+                  <a:lnTo>
+                    <a:pt x="4731415" y="3228782"/>
+                  </a:lnTo>
+                  <a:lnTo>
+                    <a:pt x="4653781" y="3210832"/>
+                  </a:lnTo>
+                  <a:lnTo>
+                    <a:pt x="4576147" y="3192122"/>
+                  </a:lnTo>
+                  <a:lnTo>
+                    <a:pt x="4498513" y="3172619"/>
+                  </a:lnTo>
+                  <a:lnTo>
+                    <a:pt x="4420879" y="3152291"/>
+                  </a:lnTo>
+                  <a:lnTo>
+                    <a:pt x="4343244" y="3131102"/>
+                  </a:lnTo>
+                  <a:lnTo>
+                    <a:pt x="4265610" y="3109015"/>
+                  </a:lnTo>
+                  <a:lnTo>
+                    <a:pt x="4187976" y="3085993"/>
+                  </a:lnTo>
+                  <a:lnTo>
+                    <a:pt x="4110342" y="3061996"/>
+                  </a:lnTo>
+                  <a:lnTo>
+                    <a:pt x="4032708" y="3036983"/>
+                  </a:lnTo>
+                  <a:lnTo>
+                    <a:pt x="3955074" y="3010910"/>
+                  </a:lnTo>
+                  <a:lnTo>
+                    <a:pt x="3877440" y="2983734"/>
+                  </a:lnTo>
+                  <a:lnTo>
+                    <a:pt x="3799806" y="2955406"/>
+                  </a:lnTo>
+                  <a:lnTo>
+                    <a:pt x="3722172" y="2925879"/>
+                  </a:lnTo>
+                  <a:lnTo>
+                    <a:pt x="3644538" y="2895102"/>
+                  </a:lnTo>
+                  <a:lnTo>
+                    <a:pt x="3566904" y="2863021"/>
+                  </a:lnTo>
+                  <a:lnTo>
+                    <a:pt x="3489270" y="2829581"/>
+                  </a:lnTo>
+                  <a:lnTo>
+                    <a:pt x="3411636" y="2794725"/>
+                  </a:lnTo>
+                  <a:lnTo>
+                    <a:pt x="3334002" y="2795196"/>
+                  </a:lnTo>
+                  <a:lnTo>
+                    <a:pt x="3256368" y="2813083"/>
+                  </a:lnTo>
+                  <a:lnTo>
+                    <a:pt x="3178734" y="2830598"/>
+                  </a:lnTo>
+                  <a:lnTo>
+                    <a:pt x="3101100" y="2847746"/>
+                  </a:lnTo>
+                  <a:lnTo>
+                    <a:pt x="3023466" y="2864537"/>
+                  </a:lnTo>
+                  <a:lnTo>
+                    <a:pt x="2945832" y="2880978"/>
+                  </a:lnTo>
+                  <a:lnTo>
+                    <a:pt x="2868198" y="2897076"/>
+                  </a:lnTo>
+                  <a:lnTo>
+                    <a:pt x="2790564" y="2912838"/>
+                  </a:lnTo>
+                  <a:lnTo>
+                    <a:pt x="2712930" y="2928271"/>
+                  </a:lnTo>
+                  <a:lnTo>
+                    <a:pt x="2635295" y="2943382"/>
+                  </a:lnTo>
+                  <a:lnTo>
+                    <a:pt x="2557661" y="2958178"/>
+                  </a:lnTo>
+                  <a:lnTo>
+                    <a:pt x="2480027" y="2972666"/>
+                  </a:lnTo>
+                  <a:lnTo>
+                    <a:pt x="2402393" y="2986851"/>
+                  </a:lnTo>
+                  <a:lnTo>
+                    <a:pt x="2324759" y="3000740"/>
+                  </a:lnTo>
+                  <a:lnTo>
+                    <a:pt x="2247125" y="3014340"/>
+                  </a:lnTo>
+                  <a:lnTo>
+                    <a:pt x="2169491" y="3027655"/>
+                  </a:lnTo>
+                  <a:lnTo>
+                    <a:pt x="2091857" y="3040693"/>
+                  </a:lnTo>
+                  <a:lnTo>
+                    <a:pt x="2014223" y="3053459"/>
+                  </a:lnTo>
+                  <a:lnTo>
+                    <a:pt x="1936589" y="3065959"/>
+                  </a:lnTo>
+                  <a:lnTo>
+                    <a:pt x="1858955" y="3078198"/>
+                  </a:lnTo>
+                  <a:lnTo>
+                    <a:pt x="1781321" y="3090181"/>
+                  </a:lnTo>
+                  <a:lnTo>
+                    <a:pt x="1703687" y="3101915"/>
+                  </a:lnTo>
+                  <a:lnTo>
+                    <a:pt x="1626053" y="3113404"/>
+                  </a:lnTo>
+                  <a:lnTo>
+                    <a:pt x="1548419" y="3124653"/>
+                  </a:lnTo>
+                  <a:lnTo>
+                    <a:pt x="1470785" y="3135667"/>
+                  </a:lnTo>
+                  <a:lnTo>
+                    <a:pt x="1393151" y="3146452"/>
+                  </a:lnTo>
+                  <a:lnTo>
+                    <a:pt x="1315517" y="3157012"/>
+                  </a:lnTo>
+                  <a:lnTo>
+                    <a:pt x="1237883" y="3167351"/>
+                  </a:lnTo>
+                  <a:lnTo>
+                    <a:pt x="1160249" y="3177475"/>
+                  </a:lnTo>
+                  <a:lnTo>
+                    <a:pt x="1082615" y="3187388"/>
+                  </a:lnTo>
+                  <a:lnTo>
+                    <a:pt x="1004981" y="3197093"/>
+                  </a:lnTo>
+                  <a:lnTo>
+                    <a:pt x="927346" y="3206597"/>
+                  </a:lnTo>
+                  <a:lnTo>
+                    <a:pt x="849712" y="3215902"/>
+                  </a:lnTo>
+                  <a:lnTo>
+                    <a:pt x="772078" y="3225013"/>
+                  </a:lnTo>
+                  <a:lnTo>
+                    <a:pt x="694444" y="3233934"/>
+                  </a:lnTo>
+                  <a:lnTo>
+                    <a:pt x="616810" y="3242668"/>
+                  </a:lnTo>
+                  <a:lnTo>
+                    <a:pt x="539176" y="3251221"/>
+                  </a:lnTo>
+                  <a:lnTo>
+                    <a:pt x="461542" y="3259595"/>
+                  </a:lnTo>
+                  <a:lnTo>
+                    <a:pt x="383908" y="3267794"/>
+                  </a:lnTo>
+                  <a:lnTo>
+                    <a:pt x="306274" y="3275823"/>
+                  </a:lnTo>
+                  <a:lnTo>
+                    <a:pt x="228640" y="3283684"/>
+                  </a:lnTo>
+                  <a:lnTo>
+                    <a:pt x="151006" y="3291381"/>
+                  </a:lnTo>
+                  <a:lnTo>
+                    <a:pt x="73372" y="3298917"/>
+                  </a:lnTo>
+                  <a:lnTo>
+                    <a:pt x="0" y="3305891"/>
                   </a:lnTo>
                   <a:close/>
                 </a:path>
@@ -3609,300 +3582,273 @@
           </p:nvSpPr>
           <p:spPr>
             <a:xfrm>
-              <a:off x="817517" y="2158600"/>
-              <a:ext cx="7370972" cy="2516667"/>
+              <a:off x="1517655" y="1896563"/>
+              <a:ext cx="6670834" cy="2776928"/>
             </a:xfrm>
             <a:custGeom>
               <a:avLst/>
               <a:pathLst>
-                <a:path w="7370972" h="2516667">
+                <a:path w="6670834" h="2776928">
                   <a:moveTo>
                     <a:pt x="0" y="0"/>
                   </a:moveTo>
                   <a:lnTo>
-                    <a:pt x="73372" y="98586"/>
-                  </a:lnTo>
-                  <a:lnTo>
-                    <a:pt x="151006" y="199694"/>
-                  </a:lnTo>
-                  <a:lnTo>
-                    <a:pt x="228640" y="297697"/>
-                  </a:lnTo>
-                  <a:lnTo>
-                    <a:pt x="306274" y="392690"/>
-                  </a:lnTo>
-                  <a:lnTo>
-                    <a:pt x="383908" y="484766"/>
-                  </a:lnTo>
-                  <a:lnTo>
-                    <a:pt x="461542" y="574014"/>
-                  </a:lnTo>
-                  <a:lnTo>
-                    <a:pt x="539176" y="660520"/>
-                  </a:lnTo>
-                  <a:lnTo>
-                    <a:pt x="616810" y="744370"/>
-                  </a:lnTo>
-                  <a:lnTo>
-                    <a:pt x="694444" y="825644"/>
-                  </a:lnTo>
-                  <a:lnTo>
-                    <a:pt x="772078" y="904422"/>
-                  </a:lnTo>
-                  <a:lnTo>
-                    <a:pt x="849712" y="980781"/>
-                  </a:lnTo>
-                  <a:lnTo>
-                    <a:pt x="927346" y="1054795"/>
-                  </a:lnTo>
-                  <a:lnTo>
-                    <a:pt x="1004981" y="1126535"/>
-                  </a:lnTo>
-                  <a:lnTo>
-                    <a:pt x="1082615" y="1196072"/>
-                  </a:lnTo>
-                  <a:lnTo>
-                    <a:pt x="1160249" y="1263473"/>
-                  </a:lnTo>
-                  <a:lnTo>
-                    <a:pt x="1237883" y="1328804"/>
-                  </a:lnTo>
-                  <a:lnTo>
-                    <a:pt x="1315517" y="1392128"/>
-                  </a:lnTo>
-                  <a:lnTo>
-                    <a:pt x="1393151" y="1453508"/>
-                  </a:lnTo>
-                  <a:lnTo>
-                    <a:pt x="1470785" y="1513003"/>
-                  </a:lnTo>
-                  <a:lnTo>
-                    <a:pt x="1548419" y="1570670"/>
-                  </a:lnTo>
-                  <a:lnTo>
-                    <a:pt x="1626053" y="1626566"/>
-                  </a:lnTo>
-                  <a:lnTo>
-                    <a:pt x="1703687" y="1680745"/>
-                  </a:lnTo>
-                  <a:lnTo>
-                    <a:pt x="1781321" y="1733260"/>
-                  </a:lnTo>
-                  <a:lnTo>
-                    <a:pt x="1858955" y="1784163"/>
-                  </a:lnTo>
-                  <a:lnTo>
-                    <a:pt x="1936589" y="1833502"/>
-                  </a:lnTo>
-                  <a:lnTo>
-                    <a:pt x="2014223" y="1881325"/>
-                  </a:lnTo>
-                  <a:lnTo>
-                    <a:pt x="2091857" y="1927680"/>
-                  </a:lnTo>
-                  <a:lnTo>
-                    <a:pt x="2169491" y="1972611"/>
-                  </a:lnTo>
-                  <a:lnTo>
-                    <a:pt x="2247125" y="2016163"/>
-                  </a:lnTo>
-                  <a:lnTo>
-                    <a:pt x="2324759" y="2058376"/>
-                  </a:lnTo>
-                  <a:lnTo>
-                    <a:pt x="2402393" y="2099293"/>
-                  </a:lnTo>
-                  <a:lnTo>
-                    <a:pt x="2480027" y="2138954"/>
-                  </a:lnTo>
-                  <a:lnTo>
-                    <a:pt x="2557661" y="2177396"/>
-                  </a:lnTo>
-                  <a:lnTo>
-                    <a:pt x="2635295" y="2214657"/>
-                  </a:lnTo>
-                  <a:lnTo>
-                    <a:pt x="2712930" y="2250775"/>
-                  </a:lnTo>
-                  <a:lnTo>
-                    <a:pt x="2790564" y="2285782"/>
-                  </a:lnTo>
-                  <a:lnTo>
-                    <a:pt x="2868198" y="2319715"/>
-                  </a:lnTo>
-                  <a:lnTo>
-                    <a:pt x="2945832" y="2352606"/>
-                  </a:lnTo>
-                  <a:lnTo>
-                    <a:pt x="3023466" y="2384486"/>
-                  </a:lnTo>
-                  <a:lnTo>
-                    <a:pt x="3101100" y="2415387"/>
-                  </a:lnTo>
-                  <a:lnTo>
-                    <a:pt x="3178734" y="2445339"/>
-                  </a:lnTo>
-                  <a:lnTo>
-                    <a:pt x="3256368" y="2474371"/>
-                  </a:lnTo>
-                  <a:lnTo>
-                    <a:pt x="3334002" y="2502512"/>
-                  </a:lnTo>
-                  <a:lnTo>
-                    <a:pt x="3411636" y="2516667"/>
-                  </a:lnTo>
-                  <a:lnTo>
-                    <a:pt x="3489270" y="2503554"/>
-                  </a:lnTo>
-                  <a:lnTo>
-                    <a:pt x="3566904" y="2490244"/>
-                  </a:lnTo>
-                  <a:lnTo>
-                    <a:pt x="3644538" y="2476735"/>
-                  </a:lnTo>
-                  <a:lnTo>
-                    <a:pt x="3722172" y="2463022"/>
-                  </a:lnTo>
-                  <a:lnTo>
-                    <a:pt x="3799806" y="2449104"/>
-                  </a:lnTo>
-                  <a:lnTo>
-                    <a:pt x="3877440" y="2434977"/>
-                  </a:lnTo>
-                  <a:lnTo>
-                    <a:pt x="3955074" y="2420638"/>
-                  </a:lnTo>
-                  <a:lnTo>
-                    <a:pt x="4032708" y="2406084"/>
-                  </a:lnTo>
-                  <a:lnTo>
-                    <a:pt x="4110342" y="2391311"/>
-                  </a:lnTo>
-                  <a:lnTo>
-                    <a:pt x="4187976" y="2376317"/>
-                  </a:lnTo>
-                  <a:lnTo>
-                    <a:pt x="4265610" y="2361098"/>
-                  </a:lnTo>
-                  <a:lnTo>
-                    <a:pt x="4343244" y="2345651"/>
-                  </a:lnTo>
-                  <a:lnTo>
-                    <a:pt x="4420879" y="2329971"/>
-                  </a:lnTo>
-                  <a:lnTo>
-                    <a:pt x="4498513" y="2314057"/>
-                  </a:lnTo>
-                  <a:lnTo>
-                    <a:pt x="4576147" y="2297904"/>
-                  </a:lnTo>
-                  <a:lnTo>
-                    <a:pt x="4653781" y="2281508"/>
-                  </a:lnTo>
-                  <a:lnTo>
-                    <a:pt x="4731415" y="2264866"/>
-                  </a:lnTo>
-                  <a:lnTo>
-                    <a:pt x="4809049" y="2247975"/>
-                  </a:lnTo>
-                  <a:lnTo>
-                    <a:pt x="4886683" y="2230830"/>
-                  </a:lnTo>
-                  <a:lnTo>
-                    <a:pt x="4964317" y="2213428"/>
-                  </a:lnTo>
-                  <a:lnTo>
-                    <a:pt x="5041951" y="2195764"/>
-                  </a:lnTo>
-                  <a:lnTo>
-                    <a:pt x="5119585" y="2177836"/>
-                  </a:lnTo>
-                  <a:lnTo>
-                    <a:pt x="5197219" y="2159639"/>
-                  </a:lnTo>
-                  <a:lnTo>
-                    <a:pt x="5274853" y="2141169"/>
-                  </a:lnTo>
-                  <a:lnTo>
-                    <a:pt x="5352487" y="2122421"/>
-                  </a:lnTo>
-                  <a:lnTo>
-                    <a:pt x="5430121" y="2103392"/>
-                  </a:lnTo>
-                  <a:lnTo>
-                    <a:pt x="5507755" y="2084078"/>
-                  </a:lnTo>
-                  <a:lnTo>
-                    <a:pt x="5585389" y="2064474"/>
-                  </a:lnTo>
-                  <a:lnTo>
-                    <a:pt x="5663023" y="2044576"/>
-                  </a:lnTo>
-                  <a:lnTo>
-                    <a:pt x="5740657" y="2024379"/>
-                  </a:lnTo>
-                  <a:lnTo>
-                    <a:pt x="5818291" y="2003879"/>
-                  </a:lnTo>
-                  <a:lnTo>
-                    <a:pt x="5895925" y="1983072"/>
-                  </a:lnTo>
-                  <a:lnTo>
-                    <a:pt x="5973559" y="1961952"/>
-                  </a:lnTo>
-                  <a:lnTo>
-                    <a:pt x="6051193" y="1940515"/>
-                  </a:lnTo>
-                  <a:lnTo>
-                    <a:pt x="6128827" y="1918757"/>
-                  </a:lnTo>
-                  <a:lnTo>
-                    <a:pt x="6206462" y="1896672"/>
-                  </a:lnTo>
-                  <a:lnTo>
-                    <a:pt x="6284096" y="1874256"/>
-                  </a:lnTo>
-                  <a:lnTo>
-                    <a:pt x="6361730" y="1851504"/>
-                  </a:lnTo>
-                  <a:lnTo>
-                    <a:pt x="6439364" y="1828410"/>
-                  </a:lnTo>
-                  <a:lnTo>
-                    <a:pt x="6516998" y="1804970"/>
-                  </a:lnTo>
-                  <a:lnTo>
-                    <a:pt x="6594632" y="1781178"/>
-                  </a:lnTo>
-                  <a:lnTo>
-                    <a:pt x="6672266" y="1757029"/>
-                  </a:lnTo>
-                  <a:lnTo>
-                    <a:pt x="6749900" y="1732517"/>
-                  </a:lnTo>
-                  <a:lnTo>
-                    <a:pt x="6827534" y="1707638"/>
-                  </a:lnTo>
-                  <a:lnTo>
-                    <a:pt x="6905168" y="1682386"/>
-                  </a:lnTo>
-                  <a:lnTo>
-                    <a:pt x="6982802" y="1656754"/>
-                  </a:lnTo>
-                  <a:lnTo>
-                    <a:pt x="7060436" y="1630738"/>
-                  </a:lnTo>
-                  <a:lnTo>
-                    <a:pt x="7138070" y="1604332"/>
-                  </a:lnTo>
-                  <a:lnTo>
-                    <a:pt x="7215704" y="1577529"/>
-                  </a:lnTo>
-                  <a:lnTo>
-                    <a:pt x="7293338" y="1550325"/>
-                  </a:lnTo>
-                  <a:lnTo>
-                    <a:pt x="7370972" y="1522712"/>
+                    <a:pt x="71940" y="137928"/>
+                  </a:lnTo>
+                  <a:lnTo>
+                    <a:pt x="149574" y="280725"/>
+                  </a:lnTo>
+                  <a:lnTo>
+                    <a:pt x="227208" y="417720"/>
+                  </a:lnTo>
+                  <a:lnTo>
+                    <a:pt x="304842" y="549149"/>
+                  </a:lnTo>
+                  <a:lnTo>
+                    <a:pt x="382476" y="675239"/>
+                  </a:lnTo>
+                  <a:lnTo>
+                    <a:pt x="460111" y="796205"/>
+                  </a:lnTo>
+                  <a:lnTo>
+                    <a:pt x="537745" y="912257"/>
+                  </a:lnTo>
+                  <a:lnTo>
+                    <a:pt x="615379" y="1023594"/>
+                  </a:lnTo>
+                  <a:lnTo>
+                    <a:pt x="693013" y="1130408"/>
+                  </a:lnTo>
+                  <a:lnTo>
+                    <a:pt x="770647" y="1232882"/>
+                  </a:lnTo>
+                  <a:lnTo>
+                    <a:pt x="848281" y="1331193"/>
+                  </a:lnTo>
+                  <a:lnTo>
+                    <a:pt x="925915" y="1425509"/>
+                  </a:lnTo>
+                  <a:lnTo>
+                    <a:pt x="1003549" y="1515994"/>
+                  </a:lnTo>
+                  <a:lnTo>
+                    <a:pt x="1081183" y="1602802"/>
+                  </a:lnTo>
+                  <a:lnTo>
+                    <a:pt x="1158817" y="1686083"/>
+                  </a:lnTo>
+                  <a:lnTo>
+                    <a:pt x="1236451" y="1765981"/>
+                  </a:lnTo>
+                  <a:lnTo>
+                    <a:pt x="1314085" y="1842633"/>
+                  </a:lnTo>
+                  <a:lnTo>
+                    <a:pt x="1391719" y="1916171"/>
+                  </a:lnTo>
+                  <a:lnTo>
+                    <a:pt x="1469353" y="1986720"/>
+                  </a:lnTo>
+                  <a:lnTo>
+                    <a:pt x="1546987" y="2054404"/>
+                  </a:lnTo>
+                  <a:lnTo>
+                    <a:pt x="1624621" y="2119338"/>
+                  </a:lnTo>
+                  <a:lnTo>
+                    <a:pt x="1702255" y="2181633"/>
+                  </a:lnTo>
+                  <a:lnTo>
+                    <a:pt x="1779889" y="2241398"/>
+                  </a:lnTo>
+                  <a:lnTo>
+                    <a:pt x="1857523" y="2298734"/>
+                  </a:lnTo>
+                  <a:lnTo>
+                    <a:pt x="1935157" y="2353741"/>
+                  </a:lnTo>
+                  <a:lnTo>
+                    <a:pt x="2012791" y="2406513"/>
+                  </a:lnTo>
+                  <a:lnTo>
+                    <a:pt x="2090425" y="2457141"/>
+                  </a:lnTo>
+                  <a:lnTo>
+                    <a:pt x="2168059" y="2505712"/>
+                  </a:lnTo>
+                  <a:lnTo>
+                    <a:pt x="2245694" y="2552310"/>
+                  </a:lnTo>
+                  <a:lnTo>
+                    <a:pt x="2323328" y="2597015"/>
+                  </a:lnTo>
+                  <a:lnTo>
+                    <a:pt x="2400962" y="2639903"/>
+                  </a:lnTo>
+                  <a:lnTo>
+                    <a:pt x="2478596" y="2681049"/>
+                  </a:lnTo>
+                  <a:lnTo>
+                    <a:pt x="2556230" y="2720523"/>
+                  </a:lnTo>
+                  <a:lnTo>
+                    <a:pt x="2633864" y="2758394"/>
+                  </a:lnTo>
+                  <a:lnTo>
+                    <a:pt x="2711498" y="2776928"/>
+                  </a:lnTo>
+                  <a:lnTo>
+                    <a:pt x="2789132" y="2758270"/>
+                  </a:lnTo>
+                  <a:lnTo>
+                    <a:pt x="2866766" y="2739215"/>
+                  </a:lnTo>
+                  <a:lnTo>
+                    <a:pt x="2944400" y="2719754"/>
+                  </a:lnTo>
+                  <a:lnTo>
+                    <a:pt x="3022034" y="2699878"/>
+                  </a:lnTo>
+                  <a:lnTo>
+                    <a:pt x="3099668" y="2679579"/>
+                  </a:lnTo>
+                  <a:lnTo>
+                    <a:pt x="3177302" y="2658847"/>
+                  </a:lnTo>
+                  <a:lnTo>
+                    <a:pt x="3254936" y="2637673"/>
+                  </a:lnTo>
+                  <a:lnTo>
+                    <a:pt x="3332570" y="2616049"/>
+                  </a:lnTo>
+                  <a:lnTo>
+                    <a:pt x="3410204" y="2593964"/>
+                  </a:lnTo>
+                  <a:lnTo>
+                    <a:pt x="3487838" y="2571408"/>
+                  </a:lnTo>
+                  <a:lnTo>
+                    <a:pt x="3565472" y="2548371"/>
+                  </a:lnTo>
+                  <a:lnTo>
+                    <a:pt x="3643106" y="2524844"/>
+                  </a:lnTo>
+                  <a:lnTo>
+                    <a:pt x="3720740" y="2500816"/>
+                  </a:lnTo>
+                  <a:lnTo>
+                    <a:pt x="3798374" y="2476275"/>
+                  </a:lnTo>
+                  <a:lnTo>
+                    <a:pt x="3876008" y="2451212"/>
+                  </a:lnTo>
+                  <a:lnTo>
+                    <a:pt x="3953643" y="2425615"/>
+                  </a:lnTo>
+                  <a:lnTo>
+                    <a:pt x="4031277" y="2399472"/>
+                  </a:lnTo>
+                  <a:lnTo>
+                    <a:pt x="4108911" y="2372773"/>
+                  </a:lnTo>
+                  <a:lnTo>
+                    <a:pt x="4186545" y="2345504"/>
+                  </a:lnTo>
+                  <a:lnTo>
+                    <a:pt x="4264179" y="2317655"/>
+                  </a:lnTo>
+                  <a:lnTo>
+                    <a:pt x="4341813" y="2289212"/>
+                  </a:lnTo>
+                  <a:lnTo>
+                    <a:pt x="4419447" y="2260164"/>
+                  </a:lnTo>
+                  <a:lnTo>
+                    <a:pt x="4497081" y="2230496"/>
+                  </a:lnTo>
+                  <a:lnTo>
+                    <a:pt x="4574715" y="2200196"/>
+                  </a:lnTo>
+                  <a:lnTo>
+                    <a:pt x="4652349" y="2169251"/>
+                  </a:lnTo>
+                  <a:lnTo>
+                    <a:pt x="4729983" y="2137646"/>
+                  </a:lnTo>
+                  <a:lnTo>
+                    <a:pt x="4807617" y="2105368"/>
+                  </a:lnTo>
+                  <a:lnTo>
+                    <a:pt x="4885251" y="2072403"/>
+                  </a:lnTo>
+                  <a:lnTo>
+                    <a:pt x="4962885" y="2038735"/>
+                  </a:lnTo>
+                  <a:lnTo>
+                    <a:pt x="5040519" y="2004350"/>
+                  </a:lnTo>
+                  <a:lnTo>
+                    <a:pt x="5118153" y="1969232"/>
+                  </a:lnTo>
+                  <a:lnTo>
+                    <a:pt x="5195787" y="1933366"/>
+                  </a:lnTo>
+                  <a:lnTo>
+                    <a:pt x="5273421" y="1896735"/>
+                  </a:lnTo>
+                  <a:lnTo>
+                    <a:pt x="5351055" y="1859325"/>
+                  </a:lnTo>
+                  <a:lnTo>
+                    <a:pt x="5428689" y="1821117"/>
+                  </a:lnTo>
+                  <a:lnTo>
+                    <a:pt x="5506323" y="1782095"/>
+                  </a:lnTo>
+                  <a:lnTo>
+                    <a:pt x="5583957" y="1742242"/>
+                  </a:lnTo>
+                  <a:lnTo>
+                    <a:pt x="5661592" y="1701540"/>
+                  </a:lnTo>
+                  <a:lnTo>
+                    <a:pt x="5739226" y="1659970"/>
+                  </a:lnTo>
+                  <a:lnTo>
+                    <a:pt x="5816860" y="1617515"/>
+                  </a:lnTo>
+                  <a:lnTo>
+                    <a:pt x="5894494" y="1574155"/>
+                  </a:lnTo>
+                  <a:lnTo>
+                    <a:pt x="5972128" y="1529872"/>
+                  </a:lnTo>
+                  <a:lnTo>
+                    <a:pt x="6049762" y="1484645"/>
+                  </a:lnTo>
+                  <a:lnTo>
+                    <a:pt x="6127396" y="1438455"/>
+                  </a:lnTo>
+                  <a:lnTo>
+                    <a:pt x="6205030" y="1391280"/>
+                  </a:lnTo>
+                  <a:lnTo>
+                    <a:pt x="6282664" y="1343100"/>
+                  </a:lnTo>
+                  <a:lnTo>
+                    <a:pt x="6360298" y="1293894"/>
+                  </a:lnTo>
+                  <a:lnTo>
+                    <a:pt x="6437932" y="1243639"/>
+                  </a:lnTo>
+                  <a:lnTo>
+                    <a:pt x="6515566" y="1192314"/>
+                  </a:lnTo>
+                  <a:lnTo>
+                    <a:pt x="6593200" y="1139895"/>
+                  </a:lnTo>
+                  <a:lnTo>
+                    <a:pt x="6670834" y="1086360"/>
                   </a:lnTo>
                 </a:path>
               </a:pathLst>
@@ -3922,300 +3868,300 @@
           </p:nvSpPr>
           <p:spPr>
             <a:xfrm>
-              <a:off x="817517" y="4688187"/>
-              <a:ext cx="7370972" cy="685639"/>
+              <a:off x="817517" y="4691289"/>
+              <a:ext cx="7370972" cy="754456"/>
             </a:xfrm>
             <a:custGeom>
               <a:avLst/>
               <a:pathLst>
-                <a:path w="7370972" h="685639">
+                <a:path w="7370972" h="754456">
                   <a:moveTo>
-                    <a:pt x="7370972" y="685639"/>
+                    <a:pt x="7370972" y="754456"/>
                   </a:moveTo>
                   <a:lnTo>
-                    <a:pt x="7293338" y="680082"/>
-                  </a:lnTo>
-                  <a:lnTo>
-                    <a:pt x="7215704" y="674349"/>
-                  </a:lnTo>
-                  <a:lnTo>
-                    <a:pt x="7138070" y="668434"/>
-                  </a:lnTo>
-                  <a:lnTo>
-                    <a:pt x="7060436" y="662332"/>
-                  </a:lnTo>
-                  <a:lnTo>
-                    <a:pt x="6982802" y="656036"/>
-                  </a:lnTo>
-                  <a:lnTo>
-                    <a:pt x="6905168" y="649541"/>
-                  </a:lnTo>
-                  <a:lnTo>
-                    <a:pt x="6827534" y="642840"/>
-                  </a:lnTo>
-                  <a:lnTo>
-                    <a:pt x="6749900" y="635927"/>
-                  </a:lnTo>
-                  <a:lnTo>
-                    <a:pt x="6672266" y="628794"/>
-                  </a:lnTo>
-                  <a:lnTo>
-                    <a:pt x="6594632" y="621436"/>
-                  </a:lnTo>
-                  <a:lnTo>
-                    <a:pt x="6516998" y="613845"/>
-                  </a:lnTo>
-                  <a:lnTo>
-                    <a:pt x="6439364" y="606012"/>
-                  </a:lnTo>
-                  <a:lnTo>
-                    <a:pt x="6361730" y="597932"/>
-                  </a:lnTo>
-                  <a:lnTo>
-                    <a:pt x="6284096" y="589596"/>
-                  </a:lnTo>
-                  <a:lnTo>
-                    <a:pt x="6206462" y="580996"/>
-                  </a:lnTo>
-                  <a:lnTo>
-                    <a:pt x="6128827" y="572123"/>
-                  </a:lnTo>
-                  <a:lnTo>
-                    <a:pt x="6051193" y="562969"/>
-                  </a:lnTo>
-                  <a:lnTo>
-                    <a:pt x="5973559" y="553524"/>
-                  </a:lnTo>
-                  <a:lnTo>
-                    <a:pt x="5895925" y="543781"/>
-                  </a:lnTo>
-                  <a:lnTo>
-                    <a:pt x="5818291" y="533729"/>
-                  </a:lnTo>
-                  <a:lnTo>
-                    <a:pt x="5740657" y="523358"/>
-                  </a:lnTo>
-                  <a:lnTo>
-                    <a:pt x="5663023" y="512659"/>
-                  </a:lnTo>
-                  <a:lnTo>
-                    <a:pt x="5585389" y="501621"/>
-                  </a:lnTo>
-                  <a:lnTo>
-                    <a:pt x="5507755" y="490233"/>
-                  </a:lnTo>
-                  <a:lnTo>
-                    <a:pt x="5430121" y="478484"/>
-                  </a:lnTo>
-                  <a:lnTo>
-                    <a:pt x="5352487" y="466363"/>
-                  </a:lnTo>
-                  <a:lnTo>
-                    <a:pt x="5274853" y="453857"/>
-                  </a:lnTo>
-                  <a:lnTo>
-                    <a:pt x="5197219" y="440956"/>
-                  </a:lnTo>
-                  <a:lnTo>
-                    <a:pt x="5119585" y="427646"/>
-                  </a:lnTo>
-                  <a:lnTo>
-                    <a:pt x="5041951" y="413914"/>
-                  </a:lnTo>
-                  <a:lnTo>
-                    <a:pt x="4964317" y="399747"/>
-                  </a:lnTo>
-                  <a:lnTo>
-                    <a:pt x="4886683" y="385131"/>
-                  </a:lnTo>
-                  <a:lnTo>
-                    <a:pt x="4809049" y="370051"/>
-                  </a:lnTo>
-                  <a:lnTo>
-                    <a:pt x="4731415" y="354494"/>
-                  </a:lnTo>
-                  <a:lnTo>
-                    <a:pt x="4653781" y="338444"/>
-                  </a:lnTo>
-                  <a:lnTo>
-                    <a:pt x="4576147" y="321886"/>
-                  </a:lnTo>
-                  <a:lnTo>
-                    <a:pt x="4498513" y="304803"/>
-                  </a:lnTo>
-                  <a:lnTo>
-                    <a:pt x="4420879" y="287178"/>
-                  </a:lnTo>
-                  <a:lnTo>
-                    <a:pt x="4343244" y="268995"/>
-                  </a:lnTo>
-                  <a:lnTo>
-                    <a:pt x="4265610" y="250236"/>
-                  </a:lnTo>
-                  <a:lnTo>
-                    <a:pt x="4187976" y="230883"/>
-                  </a:lnTo>
-                  <a:lnTo>
-                    <a:pt x="4110342" y="210916"/>
-                  </a:lnTo>
-                  <a:lnTo>
-                    <a:pt x="4032708" y="190317"/>
-                  </a:lnTo>
-                  <a:lnTo>
-                    <a:pt x="3955074" y="169064"/>
-                  </a:lnTo>
-                  <a:lnTo>
-                    <a:pt x="3877440" y="147139"/>
-                  </a:lnTo>
-                  <a:lnTo>
-                    <a:pt x="3799806" y="124519"/>
-                  </a:lnTo>
-                  <a:lnTo>
-                    <a:pt x="3722172" y="101182"/>
-                  </a:lnTo>
-                  <a:lnTo>
-                    <a:pt x="3644538" y="77105"/>
-                  </a:lnTo>
-                  <a:lnTo>
-                    <a:pt x="3566904" y="52266"/>
-                  </a:lnTo>
-                  <a:lnTo>
-                    <a:pt x="3489270" y="26639"/>
-                  </a:lnTo>
-                  <a:lnTo>
-                    <a:pt x="3411636" y="201"/>
-                  </a:lnTo>
-                  <a:lnTo>
-                    <a:pt x="3334002" y="0"/>
-                  </a:lnTo>
-                  <a:lnTo>
-                    <a:pt x="3256368" y="12728"/>
-                  </a:lnTo>
-                  <a:lnTo>
-                    <a:pt x="3178734" y="25268"/>
-                  </a:lnTo>
-                  <a:lnTo>
-                    <a:pt x="3101100" y="37623"/>
-                  </a:lnTo>
-                  <a:lnTo>
-                    <a:pt x="3023466" y="49795"/>
-                  </a:lnTo>
-                  <a:lnTo>
-                    <a:pt x="2945832" y="61787"/>
-                  </a:lnTo>
-                  <a:lnTo>
-                    <a:pt x="2868198" y="73602"/>
-                  </a:lnTo>
-                  <a:lnTo>
-                    <a:pt x="2790564" y="85243"/>
-                  </a:lnTo>
-                  <a:lnTo>
-                    <a:pt x="2712930" y="96711"/>
-                  </a:lnTo>
-                  <a:lnTo>
-                    <a:pt x="2635295" y="108010"/>
-                  </a:lnTo>
-                  <a:lnTo>
-                    <a:pt x="2557661" y="119141"/>
-                  </a:lnTo>
-                  <a:lnTo>
-                    <a:pt x="2480027" y="130108"/>
-                  </a:lnTo>
-                  <a:lnTo>
-                    <a:pt x="2402393" y="140913"/>
-                  </a:lnTo>
-                  <a:lnTo>
-                    <a:pt x="2324759" y="151559"/>
-                  </a:lnTo>
-                  <a:lnTo>
-                    <a:pt x="2247125" y="162046"/>
-                  </a:lnTo>
-                  <a:lnTo>
-                    <a:pt x="2169491" y="172379"/>
-                  </a:lnTo>
-                  <a:lnTo>
-                    <a:pt x="2091857" y="182559"/>
-                  </a:lnTo>
-                  <a:lnTo>
-                    <a:pt x="2014223" y="192589"/>
-                  </a:lnTo>
-                  <a:lnTo>
-                    <a:pt x="1936589" y="202470"/>
-                  </a:lnTo>
-                  <a:lnTo>
-                    <a:pt x="1858955" y="212206"/>
-                  </a:lnTo>
-                  <a:lnTo>
-                    <a:pt x="1781321" y="221797"/>
-                  </a:lnTo>
-                  <a:lnTo>
-                    <a:pt x="1703687" y="231247"/>
-                  </a:lnTo>
-                  <a:lnTo>
-                    <a:pt x="1626053" y="240556"/>
-                  </a:lnTo>
-                  <a:lnTo>
-                    <a:pt x="1548419" y="249729"/>
-                  </a:lnTo>
-                  <a:lnTo>
-                    <a:pt x="1470785" y="258765"/>
-                  </a:lnTo>
-                  <a:lnTo>
-                    <a:pt x="1393151" y="267668"/>
-                  </a:lnTo>
-                  <a:lnTo>
-                    <a:pt x="1315517" y="276440"/>
-                  </a:lnTo>
-                  <a:lnTo>
-                    <a:pt x="1237883" y="285082"/>
-                  </a:lnTo>
-                  <a:lnTo>
-                    <a:pt x="1160249" y="293596"/>
-                  </a:lnTo>
-                  <a:lnTo>
-                    <a:pt x="1082615" y="301984"/>
-                  </a:lnTo>
-                  <a:lnTo>
-                    <a:pt x="1004981" y="310248"/>
-                  </a:lnTo>
-                  <a:lnTo>
-                    <a:pt x="927346" y="318390"/>
-                  </a:lnTo>
-                  <a:lnTo>
-                    <a:pt x="849712" y="326412"/>
-                  </a:lnTo>
-                  <a:lnTo>
-                    <a:pt x="772078" y="334315"/>
-                  </a:lnTo>
-                  <a:lnTo>
-                    <a:pt x="694444" y="342101"/>
-                  </a:lnTo>
-                  <a:lnTo>
-                    <a:pt x="616810" y="349772"/>
-                  </a:lnTo>
-                  <a:lnTo>
-                    <a:pt x="539176" y="357330"/>
-                  </a:lnTo>
-                  <a:lnTo>
-                    <a:pt x="461542" y="364776"/>
-                  </a:lnTo>
-                  <a:lnTo>
-                    <a:pt x="383908" y="372112"/>
-                  </a:lnTo>
-                  <a:lnTo>
-                    <a:pt x="306274" y="379339"/>
-                  </a:lnTo>
-                  <a:lnTo>
-                    <a:pt x="228640" y="386460"/>
-                  </a:lnTo>
-                  <a:lnTo>
-                    <a:pt x="151006" y="393475"/>
-                  </a:lnTo>
-                  <a:lnTo>
-                    <a:pt x="73372" y="400387"/>
-                  </a:lnTo>
-                  <a:lnTo>
-                    <a:pt x="0" y="406822"/>
+                    <a:pt x="7293338" y="750074"/>
+                  </a:lnTo>
+                  <a:lnTo>
+                    <a:pt x="7215704" y="745507"/>
+                  </a:lnTo>
+                  <a:lnTo>
+                    <a:pt x="7138070" y="740747"/>
+                  </a:lnTo>
+                  <a:lnTo>
+                    <a:pt x="7060436" y="735785"/>
+                  </a:lnTo>
+                  <a:lnTo>
+                    <a:pt x="6982802" y="730613"/>
+                  </a:lnTo>
+                  <a:lnTo>
+                    <a:pt x="6905168" y="725222"/>
+                  </a:lnTo>
+                  <a:lnTo>
+                    <a:pt x="6827534" y="719602"/>
+                  </a:lnTo>
+                  <a:lnTo>
+                    <a:pt x="6749900" y="713745"/>
+                  </a:lnTo>
+                  <a:lnTo>
+                    <a:pt x="6672266" y="707639"/>
+                  </a:lnTo>
+                  <a:lnTo>
+                    <a:pt x="6594632" y="701275"/>
+                  </a:lnTo>
+                  <a:lnTo>
+                    <a:pt x="6516998" y="694641"/>
+                  </a:lnTo>
+                  <a:lnTo>
+                    <a:pt x="6439364" y="687727"/>
+                  </a:lnTo>
+                  <a:lnTo>
+                    <a:pt x="6361730" y="680519"/>
+                  </a:lnTo>
+                  <a:lnTo>
+                    <a:pt x="6284096" y="673007"/>
+                  </a:lnTo>
+                  <a:lnTo>
+                    <a:pt x="6206462" y="665176"/>
+                  </a:lnTo>
+                  <a:lnTo>
+                    <a:pt x="6128827" y="657014"/>
+                  </a:lnTo>
+                  <a:lnTo>
+                    <a:pt x="6051193" y="648506"/>
+                  </a:lnTo>
+                  <a:lnTo>
+                    <a:pt x="5973559" y="639637"/>
+                  </a:lnTo>
+                  <a:lnTo>
+                    <a:pt x="5895925" y="630393"/>
+                  </a:lnTo>
+                  <a:lnTo>
+                    <a:pt x="5818291" y="620758"/>
+                  </a:lnTo>
+                  <a:lnTo>
+                    <a:pt x="5740657" y="610715"/>
+                  </a:lnTo>
+                  <a:lnTo>
+                    <a:pt x="5663023" y="600246"/>
+                  </a:lnTo>
+                  <a:lnTo>
+                    <a:pt x="5585389" y="589334"/>
+                  </a:lnTo>
+                  <a:lnTo>
+                    <a:pt x="5507755" y="577959"/>
+                  </a:lnTo>
+                  <a:lnTo>
+                    <a:pt x="5430121" y="566104"/>
+                  </a:lnTo>
+                  <a:lnTo>
+                    <a:pt x="5352487" y="553746"/>
+                  </a:lnTo>
+                  <a:lnTo>
+                    <a:pt x="5274853" y="540864"/>
+                  </a:lnTo>
+                  <a:lnTo>
+                    <a:pt x="5197219" y="527437"/>
+                  </a:lnTo>
+                  <a:lnTo>
+                    <a:pt x="5119585" y="513442"/>
+                  </a:lnTo>
+                  <a:lnTo>
+                    <a:pt x="5041951" y="498854"/>
+                  </a:lnTo>
+                  <a:lnTo>
+                    <a:pt x="4964317" y="483648"/>
+                  </a:lnTo>
+                  <a:lnTo>
+                    <a:pt x="4886683" y="467798"/>
+                  </a:lnTo>
+                  <a:lnTo>
+                    <a:pt x="4809049" y="451277"/>
+                  </a:lnTo>
+                  <a:lnTo>
+                    <a:pt x="4731415" y="434056"/>
+                  </a:lnTo>
+                  <a:lnTo>
+                    <a:pt x="4653781" y="416106"/>
+                  </a:lnTo>
+                  <a:lnTo>
+                    <a:pt x="4576147" y="397396"/>
+                  </a:lnTo>
+                  <a:lnTo>
+                    <a:pt x="4498513" y="377894"/>
+                  </a:lnTo>
+                  <a:lnTo>
+                    <a:pt x="4420879" y="357565"/>
+                  </a:lnTo>
+                  <a:lnTo>
+                    <a:pt x="4343244" y="336376"/>
+                  </a:lnTo>
+                  <a:lnTo>
+                    <a:pt x="4265610" y="314289"/>
+                  </a:lnTo>
+                  <a:lnTo>
+                    <a:pt x="4187976" y="291267"/>
+                  </a:lnTo>
+                  <a:lnTo>
+                    <a:pt x="4110342" y="267270"/>
+                  </a:lnTo>
+                  <a:lnTo>
+                    <a:pt x="4032708" y="242257"/>
+                  </a:lnTo>
+                  <a:lnTo>
+                    <a:pt x="3955074" y="216185"/>
+                  </a:lnTo>
+                  <a:lnTo>
+                    <a:pt x="3877440" y="189008"/>
+                  </a:lnTo>
+                  <a:lnTo>
+                    <a:pt x="3799806" y="160680"/>
+                  </a:lnTo>
+                  <a:lnTo>
+                    <a:pt x="3722172" y="131153"/>
+                  </a:lnTo>
+                  <a:lnTo>
+                    <a:pt x="3644538" y="100376"/>
+                  </a:lnTo>
+                  <a:lnTo>
+                    <a:pt x="3566904" y="68295"/>
+                  </a:lnTo>
+                  <a:lnTo>
+                    <a:pt x="3489270" y="34855"/>
+                  </a:lnTo>
+                  <a:lnTo>
+                    <a:pt x="3411636" y="0"/>
+                  </a:lnTo>
+                  <a:lnTo>
+                    <a:pt x="3334002" y="470"/>
+                  </a:lnTo>
+                  <a:lnTo>
+                    <a:pt x="3256368" y="18358"/>
+                  </a:lnTo>
+                  <a:lnTo>
+                    <a:pt x="3178734" y="35872"/>
+                  </a:lnTo>
+                  <a:lnTo>
+                    <a:pt x="3101100" y="53021"/>
+                  </a:lnTo>
+                  <a:lnTo>
+                    <a:pt x="3023466" y="69812"/>
+                  </a:lnTo>
+                  <a:lnTo>
+                    <a:pt x="2945832" y="86252"/>
+                  </a:lnTo>
+                  <a:lnTo>
+                    <a:pt x="2868198" y="102350"/>
+                  </a:lnTo>
+                  <a:lnTo>
+                    <a:pt x="2790564" y="118112"/>
+                  </a:lnTo>
+                  <a:lnTo>
+                    <a:pt x="2712930" y="133545"/>
+                  </a:lnTo>
+                  <a:lnTo>
+                    <a:pt x="2635295" y="148657"/>
+                  </a:lnTo>
+                  <a:lnTo>
+                    <a:pt x="2557661" y="163453"/>
+                  </a:lnTo>
+                  <a:lnTo>
+                    <a:pt x="2480027" y="177940"/>
+                  </a:lnTo>
+                  <a:lnTo>
+                    <a:pt x="2402393" y="192125"/>
+                  </a:lnTo>
+                  <a:lnTo>
+                    <a:pt x="2324759" y="206014"/>
+                  </a:lnTo>
+                  <a:lnTo>
+                    <a:pt x="2247125" y="219614"/>
+                  </a:lnTo>
+                  <a:lnTo>
+                    <a:pt x="2169491" y="232929"/>
+                  </a:lnTo>
+                  <a:lnTo>
+                    <a:pt x="2091857" y="245967"/>
+                  </a:lnTo>
+                  <a:lnTo>
+                    <a:pt x="2014223" y="258733"/>
+                  </a:lnTo>
+                  <a:lnTo>
+                    <a:pt x="1936589" y="271233"/>
+                  </a:lnTo>
+                  <a:lnTo>
+                    <a:pt x="1858955" y="283472"/>
+                  </a:lnTo>
+                  <a:lnTo>
+                    <a:pt x="1781321" y="295456"/>
+                  </a:lnTo>
+                  <a:lnTo>
+                    <a:pt x="1703687" y="307189"/>
+                  </a:lnTo>
+                  <a:lnTo>
+                    <a:pt x="1626053" y="318678"/>
+                  </a:lnTo>
+                  <a:lnTo>
+                    <a:pt x="1548419" y="329927"/>
+                  </a:lnTo>
+                  <a:lnTo>
+                    <a:pt x="1470785" y="340942"/>
+                  </a:lnTo>
+                  <a:lnTo>
+                    <a:pt x="1393151" y="351726"/>
+                  </a:lnTo>
+                  <a:lnTo>
+                    <a:pt x="1315517" y="362286"/>
+                  </a:lnTo>
+                  <a:lnTo>
+                    <a:pt x="1237883" y="372626"/>
+                  </a:lnTo>
+                  <a:lnTo>
+                    <a:pt x="1160249" y="382749"/>
+                  </a:lnTo>
+                  <a:lnTo>
+                    <a:pt x="1082615" y="392662"/>
+                  </a:lnTo>
+                  <a:lnTo>
+                    <a:pt x="1004981" y="402368"/>
+                  </a:lnTo>
+                  <a:lnTo>
+                    <a:pt x="927346" y="411871"/>
+                  </a:lnTo>
+                  <a:lnTo>
+                    <a:pt x="849712" y="421176"/>
+                  </a:lnTo>
+                  <a:lnTo>
+                    <a:pt x="772078" y="430287"/>
+                  </a:lnTo>
+                  <a:lnTo>
+                    <a:pt x="694444" y="439208"/>
+                  </a:lnTo>
+                  <a:lnTo>
+                    <a:pt x="616810" y="447943"/>
+                  </a:lnTo>
+                  <a:lnTo>
+                    <a:pt x="539176" y="456495"/>
+                  </a:lnTo>
+                  <a:lnTo>
+                    <a:pt x="461542" y="464869"/>
+                  </a:lnTo>
+                  <a:lnTo>
+                    <a:pt x="383908" y="473069"/>
+                  </a:lnTo>
+                  <a:lnTo>
+                    <a:pt x="306274" y="481097"/>
+                  </a:lnTo>
+                  <a:lnTo>
+                    <a:pt x="228640" y="488958"/>
+                  </a:lnTo>
+                  <a:lnTo>
+                    <a:pt x="151006" y="496655"/>
+                  </a:lnTo>
+                  <a:lnTo>
+                    <a:pt x="73372" y="504191"/>
+                  </a:lnTo>
+                  <a:lnTo>
+                    <a:pt x="0" y="511165"/>
                   </a:lnTo>
                 </a:path>
               </a:pathLst>
@@ -4235,300 +4181,300 @@
           </p:nvSpPr>
           <p:spPr>
             <a:xfrm>
-              <a:off x="817517" y="4308256"/>
-              <a:ext cx="7370972" cy="668595"/>
+              <a:off x="817517" y="4192380"/>
+              <a:ext cx="7370972" cy="841548"/>
             </a:xfrm>
             <a:custGeom>
               <a:avLst/>
               <a:pathLst>
-                <a:path w="7370972" h="668595">
+                <a:path w="7370972" h="841548">
                   <a:moveTo>
                     <a:pt x="0" y="0"/>
                   </a:moveTo>
                   <a:lnTo>
-                    <a:pt x="73372" y="9524"/>
-                  </a:lnTo>
-                  <a:lnTo>
-                    <a:pt x="151006" y="19521"/>
-                  </a:lnTo>
-                  <a:lnTo>
-                    <a:pt x="228640" y="29436"/>
-                  </a:lnTo>
-                  <a:lnTo>
-                    <a:pt x="306274" y="39270"/>
-                  </a:lnTo>
-                  <a:lnTo>
-                    <a:pt x="383908" y="49025"/>
-                  </a:lnTo>
-                  <a:lnTo>
-                    <a:pt x="461542" y="58701"/>
-                  </a:lnTo>
-                  <a:lnTo>
-                    <a:pt x="539176" y="68298"/>
-                  </a:lnTo>
-                  <a:lnTo>
-                    <a:pt x="616810" y="77817"/>
-                  </a:lnTo>
-                  <a:lnTo>
-                    <a:pt x="694444" y="87259"/>
-                  </a:lnTo>
-                  <a:lnTo>
-                    <a:pt x="772078" y="96624"/>
-                  </a:lnTo>
-                  <a:lnTo>
-                    <a:pt x="849712" y="105913"/>
-                  </a:lnTo>
-                  <a:lnTo>
-                    <a:pt x="927346" y="115127"/>
-                  </a:lnTo>
-                  <a:lnTo>
-                    <a:pt x="1004981" y="124266"/>
-                  </a:lnTo>
-                  <a:lnTo>
-                    <a:pt x="1082615" y="133331"/>
-                  </a:lnTo>
-                  <a:lnTo>
-                    <a:pt x="1160249" y="142322"/>
-                  </a:lnTo>
-                  <a:lnTo>
-                    <a:pt x="1237883" y="151240"/>
-                  </a:lnTo>
-                  <a:lnTo>
-                    <a:pt x="1315517" y="160086"/>
-                  </a:lnTo>
-                  <a:lnTo>
-                    <a:pt x="1393151" y="168860"/>
-                  </a:lnTo>
-                  <a:lnTo>
-                    <a:pt x="1470785" y="177563"/>
-                  </a:lnTo>
-                  <a:lnTo>
-                    <a:pt x="1548419" y="186195"/>
-                  </a:lnTo>
-                  <a:lnTo>
-                    <a:pt x="1626053" y="194757"/>
-                  </a:lnTo>
-                  <a:lnTo>
-                    <a:pt x="1703687" y="203250"/>
-                  </a:lnTo>
-                  <a:lnTo>
-                    <a:pt x="1781321" y="211673"/>
-                  </a:lnTo>
-                  <a:lnTo>
-                    <a:pt x="1858955" y="220028"/>
-                  </a:lnTo>
-                  <a:lnTo>
-                    <a:pt x="1936589" y="228316"/>
-                  </a:lnTo>
-                  <a:lnTo>
-                    <a:pt x="2014223" y="236536"/>
-                  </a:lnTo>
-                  <a:lnTo>
-                    <a:pt x="2091857" y="244690"/>
-                  </a:lnTo>
-                  <a:lnTo>
-                    <a:pt x="2169491" y="252777"/>
-                  </a:lnTo>
-                  <a:lnTo>
-                    <a:pt x="2247125" y="260798"/>
-                  </a:lnTo>
-                  <a:lnTo>
-                    <a:pt x="2324759" y="268755"/>
-                  </a:lnTo>
-                  <a:lnTo>
-                    <a:pt x="2402393" y="276647"/>
-                  </a:lnTo>
-                  <a:lnTo>
-                    <a:pt x="2480027" y="284475"/>
-                  </a:lnTo>
-                  <a:lnTo>
-                    <a:pt x="2557661" y="292239"/>
-                  </a:lnTo>
-                  <a:lnTo>
-                    <a:pt x="2635295" y="299940"/>
-                  </a:lnTo>
-                  <a:lnTo>
-                    <a:pt x="2712930" y="307579"/>
-                  </a:lnTo>
-                  <a:lnTo>
-                    <a:pt x="2790564" y="315156"/>
-                  </a:lnTo>
-                  <a:lnTo>
-                    <a:pt x="2868198" y="322671"/>
-                  </a:lnTo>
-                  <a:lnTo>
-                    <a:pt x="2945832" y="330125"/>
-                  </a:lnTo>
-                  <a:lnTo>
-                    <a:pt x="3023466" y="337519"/>
-                  </a:lnTo>
-                  <a:lnTo>
-                    <a:pt x="3101100" y="344853"/>
-                  </a:lnTo>
-                  <a:lnTo>
-                    <a:pt x="3178734" y="352127"/>
-                  </a:lnTo>
-                  <a:lnTo>
-                    <a:pt x="3256368" y="359342"/>
-                  </a:lnTo>
-                  <a:lnTo>
-                    <a:pt x="3334002" y="366498"/>
-                  </a:lnTo>
-                  <a:lnTo>
-                    <a:pt x="3411636" y="373597"/>
-                  </a:lnTo>
-                  <a:lnTo>
-                    <a:pt x="3489270" y="380638"/>
-                  </a:lnTo>
-                  <a:lnTo>
-                    <a:pt x="3566904" y="387621"/>
-                  </a:lnTo>
-                  <a:lnTo>
-                    <a:pt x="3644538" y="394548"/>
-                  </a:lnTo>
-                  <a:lnTo>
-                    <a:pt x="3722172" y="401419"/>
-                  </a:lnTo>
-                  <a:lnTo>
-                    <a:pt x="3799806" y="408234"/>
-                  </a:lnTo>
-                  <a:lnTo>
-                    <a:pt x="3877440" y="414994"/>
-                  </a:lnTo>
-                  <a:lnTo>
-                    <a:pt x="3955074" y="421698"/>
-                  </a:lnTo>
-                  <a:lnTo>
-                    <a:pt x="4032708" y="428349"/>
-                  </a:lnTo>
-                  <a:lnTo>
-                    <a:pt x="4110342" y="434945"/>
-                  </a:lnTo>
-                  <a:lnTo>
-                    <a:pt x="4187976" y="441488"/>
-                  </a:lnTo>
-                  <a:lnTo>
-                    <a:pt x="4265610" y="447978"/>
-                  </a:lnTo>
-                  <a:lnTo>
-                    <a:pt x="4343244" y="454415"/>
-                  </a:lnTo>
-                  <a:lnTo>
-                    <a:pt x="4420879" y="460800"/>
-                  </a:lnTo>
-                  <a:lnTo>
-                    <a:pt x="4498513" y="467133"/>
-                  </a:lnTo>
-                  <a:lnTo>
-                    <a:pt x="4576147" y="473414"/>
-                  </a:lnTo>
-                  <a:lnTo>
-                    <a:pt x="4653781" y="479645"/>
-                  </a:lnTo>
-                  <a:lnTo>
-                    <a:pt x="4731415" y="485825"/>
-                  </a:lnTo>
-                  <a:lnTo>
-                    <a:pt x="4809049" y="491954"/>
-                  </a:lnTo>
-                  <a:lnTo>
-                    <a:pt x="4886683" y="498035"/>
-                  </a:lnTo>
-                  <a:lnTo>
-                    <a:pt x="4964317" y="504065"/>
-                  </a:lnTo>
-                  <a:lnTo>
-                    <a:pt x="5041951" y="510047"/>
-                  </a:lnTo>
-                  <a:lnTo>
-                    <a:pt x="5119585" y="515980"/>
-                  </a:lnTo>
-                  <a:lnTo>
-                    <a:pt x="5197219" y="521865"/>
-                  </a:lnTo>
-                  <a:lnTo>
-                    <a:pt x="5274853" y="527702"/>
-                  </a:lnTo>
-                  <a:lnTo>
-                    <a:pt x="5352487" y="533492"/>
-                  </a:lnTo>
-                  <a:lnTo>
-                    <a:pt x="5430121" y="539235"/>
-                  </a:lnTo>
-                  <a:lnTo>
-                    <a:pt x="5507755" y="544931"/>
-                  </a:lnTo>
-                  <a:lnTo>
-                    <a:pt x="5585389" y="550581"/>
-                  </a:lnTo>
-                  <a:lnTo>
-                    <a:pt x="5663023" y="556186"/>
-                  </a:lnTo>
-                  <a:lnTo>
-                    <a:pt x="5740657" y="561744"/>
-                  </a:lnTo>
-                  <a:lnTo>
-                    <a:pt x="5818291" y="567258"/>
-                  </a:lnTo>
-                  <a:lnTo>
-                    <a:pt x="5895925" y="572726"/>
-                  </a:lnTo>
-                  <a:lnTo>
-                    <a:pt x="5973559" y="578151"/>
-                  </a:lnTo>
-                  <a:lnTo>
-                    <a:pt x="6051193" y="583531"/>
-                  </a:lnTo>
-                  <a:lnTo>
-                    <a:pt x="6128827" y="588868"/>
-                  </a:lnTo>
-                  <a:lnTo>
-                    <a:pt x="6206462" y="594161"/>
-                  </a:lnTo>
-                  <a:lnTo>
-                    <a:pt x="6284096" y="599412"/>
-                  </a:lnTo>
-                  <a:lnTo>
-                    <a:pt x="6361730" y="604619"/>
-                  </a:lnTo>
-                  <a:lnTo>
-                    <a:pt x="6439364" y="609785"/>
-                  </a:lnTo>
-                  <a:lnTo>
-                    <a:pt x="6516998" y="614908"/>
-                  </a:lnTo>
-                  <a:lnTo>
-                    <a:pt x="6594632" y="619990"/>
-                  </a:lnTo>
-                  <a:lnTo>
-                    <a:pt x="6672266" y="625031"/>
-                  </a:lnTo>
-                  <a:lnTo>
-                    <a:pt x="6749900" y="630031"/>
-                  </a:lnTo>
-                  <a:lnTo>
-                    <a:pt x="6827534" y="634990"/>
-                  </a:lnTo>
-                  <a:lnTo>
-                    <a:pt x="6905168" y="639909"/>
-                  </a:lnTo>
-                  <a:lnTo>
-                    <a:pt x="6982802" y="644788"/>
-                  </a:lnTo>
-                  <a:lnTo>
-                    <a:pt x="7060436" y="649627"/>
-                  </a:lnTo>
-                  <a:lnTo>
-                    <a:pt x="7138070" y="654428"/>
-                  </a:lnTo>
-                  <a:lnTo>
-                    <a:pt x="7215704" y="659189"/>
-                  </a:lnTo>
-                  <a:lnTo>
-                    <a:pt x="7293338" y="663911"/>
-                  </a:lnTo>
-                  <a:lnTo>
-                    <a:pt x="7370972" y="668595"/>
+                    <a:pt x="73372" y="13017"/>
+                  </a:lnTo>
+                  <a:lnTo>
+                    <a:pt x="151006" y="26651"/>
+                  </a:lnTo>
+                  <a:lnTo>
+                    <a:pt x="228640" y="40146"/>
+                  </a:lnTo>
+                  <a:lnTo>
+                    <a:pt x="306274" y="53505"/>
+                  </a:lnTo>
+                  <a:lnTo>
+                    <a:pt x="383908" y="66728"/>
+                  </a:lnTo>
+                  <a:lnTo>
+                    <a:pt x="461542" y="79816"/>
+                  </a:lnTo>
+                  <a:lnTo>
+                    <a:pt x="539176" y="92772"/>
+                  </a:lnTo>
+                  <a:lnTo>
+                    <a:pt x="616810" y="105597"/>
+                  </a:lnTo>
+                  <a:lnTo>
+                    <a:pt x="694444" y="118291"/>
+                  </a:lnTo>
+                  <a:lnTo>
+                    <a:pt x="772078" y="130857"/>
+                  </a:lnTo>
+                  <a:lnTo>
+                    <a:pt x="849712" y="143295"/>
+                  </a:lnTo>
+                  <a:lnTo>
+                    <a:pt x="927346" y="155607"/>
+                  </a:lnTo>
+                  <a:lnTo>
+                    <a:pt x="1004981" y="167794"/>
+                  </a:lnTo>
+                  <a:lnTo>
+                    <a:pt x="1082615" y="179858"/>
+                  </a:lnTo>
+                  <a:lnTo>
+                    <a:pt x="1160249" y="191799"/>
+                  </a:lnTo>
+                  <a:lnTo>
+                    <a:pt x="1237883" y="203619"/>
+                  </a:lnTo>
+                  <a:lnTo>
+                    <a:pt x="1315517" y="215319"/>
+                  </a:lnTo>
+                  <a:lnTo>
+                    <a:pt x="1393151" y="226900"/>
+                  </a:lnTo>
+                  <a:lnTo>
+                    <a:pt x="1470785" y="238364"/>
+                  </a:lnTo>
+                  <a:lnTo>
+                    <a:pt x="1548419" y="249711"/>
+                  </a:lnTo>
+                  <a:lnTo>
+                    <a:pt x="1626053" y="260943"/>
+                  </a:lnTo>
+                  <a:lnTo>
+                    <a:pt x="1703687" y="272062"/>
+                  </a:lnTo>
+                  <a:lnTo>
+                    <a:pt x="1781321" y="283067"/>
+                  </a:lnTo>
+                  <a:lnTo>
+                    <a:pt x="1858955" y="293961"/>
+                  </a:lnTo>
+                  <a:lnTo>
+                    <a:pt x="1936589" y="304745"/>
+                  </a:lnTo>
+                  <a:lnTo>
+                    <a:pt x="2014223" y="315419"/>
+                  </a:lnTo>
+                  <a:lnTo>
+                    <a:pt x="2091857" y="325984"/>
+                  </a:lnTo>
+                  <a:lnTo>
+                    <a:pt x="2169491" y="336443"/>
+                  </a:lnTo>
+                  <a:lnTo>
+                    <a:pt x="2247125" y="346795"/>
+                  </a:lnTo>
+                  <a:lnTo>
+                    <a:pt x="2324759" y="357043"/>
+                  </a:lnTo>
+                  <a:lnTo>
+                    <a:pt x="2402393" y="367186"/>
+                  </a:lnTo>
+                  <a:lnTo>
+                    <a:pt x="2480027" y="377226"/>
+                  </a:lnTo>
+                  <a:lnTo>
+                    <a:pt x="2557661" y="387165"/>
+                  </a:lnTo>
+                  <a:lnTo>
+                    <a:pt x="2635295" y="397003"/>
+                  </a:lnTo>
+                  <a:lnTo>
+                    <a:pt x="2712930" y="406741"/>
+                  </a:lnTo>
+                  <a:lnTo>
+                    <a:pt x="2790564" y="416380"/>
+                  </a:lnTo>
+                  <a:lnTo>
+                    <a:pt x="2868198" y="425921"/>
+                  </a:lnTo>
+                  <a:lnTo>
+                    <a:pt x="2945832" y="435366"/>
+                  </a:lnTo>
+                  <a:lnTo>
+                    <a:pt x="3023466" y="444715"/>
+                  </a:lnTo>
+                  <a:lnTo>
+                    <a:pt x="3101100" y="453969"/>
+                  </a:lnTo>
+                  <a:lnTo>
+                    <a:pt x="3178734" y="463129"/>
+                  </a:lnTo>
+                  <a:lnTo>
+                    <a:pt x="3256368" y="472196"/>
+                  </a:lnTo>
+                  <a:lnTo>
+                    <a:pt x="3334002" y="481171"/>
+                  </a:lnTo>
+                  <a:lnTo>
+                    <a:pt x="3411636" y="490055"/>
+                  </a:lnTo>
+                  <a:lnTo>
+                    <a:pt x="3489270" y="498849"/>
+                  </a:lnTo>
+                  <a:lnTo>
+                    <a:pt x="3566904" y="507553"/>
+                  </a:lnTo>
+                  <a:lnTo>
+                    <a:pt x="3644538" y="516170"/>
+                  </a:lnTo>
+                  <a:lnTo>
+                    <a:pt x="3722172" y="524699"/>
+                  </a:lnTo>
+                  <a:lnTo>
+                    <a:pt x="3799806" y="533141"/>
+                  </a:lnTo>
+                  <a:lnTo>
+                    <a:pt x="3877440" y="541498"/>
+                  </a:lnTo>
+                  <a:lnTo>
+                    <a:pt x="3955074" y="549770"/>
+                  </a:lnTo>
+                  <a:lnTo>
+                    <a:pt x="4032708" y="557958"/>
+                  </a:lnTo>
+                  <a:lnTo>
+                    <a:pt x="4110342" y="566063"/>
+                  </a:lnTo>
+                  <a:lnTo>
+                    <a:pt x="4187976" y="574086"/>
+                  </a:lnTo>
+                  <a:lnTo>
+                    <a:pt x="4265610" y="582027"/>
+                  </a:lnTo>
+                  <a:lnTo>
+                    <a:pt x="4343244" y="589888"/>
+                  </a:lnTo>
+                  <a:lnTo>
+                    <a:pt x="4420879" y="597669"/>
+                  </a:lnTo>
+                  <a:lnTo>
+                    <a:pt x="4498513" y="605371"/>
+                  </a:lnTo>
+                  <a:lnTo>
+                    <a:pt x="4576147" y="612995"/>
+                  </a:lnTo>
+                  <a:lnTo>
+                    <a:pt x="4653781" y="620542"/>
+                  </a:lnTo>
+                  <a:lnTo>
+                    <a:pt x="4731415" y="628012"/>
+                  </a:lnTo>
+                  <a:lnTo>
+                    <a:pt x="4809049" y="635406"/>
+                  </a:lnTo>
+                  <a:lnTo>
+                    <a:pt x="4886683" y="642725"/>
+                  </a:lnTo>
+                  <a:lnTo>
+                    <a:pt x="4964317" y="649970"/>
+                  </a:lnTo>
+                  <a:lnTo>
+                    <a:pt x="5041951" y="657141"/>
+                  </a:lnTo>
+                  <a:lnTo>
+                    <a:pt x="5119585" y="664240"/>
+                  </a:lnTo>
+                  <a:lnTo>
+                    <a:pt x="5197219" y="671267"/>
+                  </a:lnTo>
+                  <a:lnTo>
+                    <a:pt x="5274853" y="678222"/>
+                  </a:lnTo>
+                  <a:lnTo>
+                    <a:pt x="5352487" y="685107"/>
+                  </a:lnTo>
+                  <a:lnTo>
+                    <a:pt x="5430121" y="691922"/>
+                  </a:lnTo>
+                  <a:lnTo>
+                    <a:pt x="5507755" y="698668"/>
+                  </a:lnTo>
+                  <a:lnTo>
+                    <a:pt x="5585389" y="705345"/>
+                  </a:lnTo>
+                  <a:lnTo>
+                    <a:pt x="5663023" y="711955"/>
+                  </a:lnTo>
+                  <a:lnTo>
+                    <a:pt x="5740657" y="718498"/>
+                  </a:lnTo>
+                  <a:lnTo>
+                    <a:pt x="5818291" y="724974"/>
+                  </a:lnTo>
+                  <a:lnTo>
+                    <a:pt x="5895925" y="731384"/>
+                  </a:lnTo>
+                  <a:lnTo>
+                    <a:pt x="5973559" y="737730"/>
+                  </a:lnTo>
+                  <a:lnTo>
+                    <a:pt x="6051193" y="744011"/>
+                  </a:lnTo>
+                  <a:lnTo>
+                    <a:pt x="6128827" y="750228"/>
+                  </a:lnTo>
+                  <a:lnTo>
+                    <a:pt x="6206462" y="756383"/>
+                  </a:lnTo>
+                  <a:lnTo>
+                    <a:pt x="6284096" y="762474"/>
+                  </a:lnTo>
+                  <a:lnTo>
+                    <a:pt x="6361730" y="768504"/>
+                  </a:lnTo>
+                  <a:lnTo>
+                    <a:pt x="6439364" y="774473"/>
+                  </a:lnTo>
+                  <a:lnTo>
+                    <a:pt x="6516998" y="780382"/>
+                  </a:lnTo>
+                  <a:lnTo>
+                    <a:pt x="6594632" y="786230"/>
+                  </a:lnTo>
+                  <a:lnTo>
+                    <a:pt x="6672266" y="792019"/>
+                  </a:lnTo>
+                  <a:lnTo>
+                    <a:pt x="6749900" y="797749"/>
+                  </a:lnTo>
+                  <a:lnTo>
+                    <a:pt x="6827534" y="803421"/>
+                  </a:lnTo>
+                  <a:lnTo>
+                    <a:pt x="6905168" y="809036"/>
+                  </a:lnTo>
+                  <a:lnTo>
+                    <a:pt x="6982802" y="814594"/>
+                  </a:lnTo>
+                  <a:lnTo>
+                    <a:pt x="7060436" y="820095"/>
+                  </a:lnTo>
+                  <a:lnTo>
+                    <a:pt x="7138070" y="825540"/>
+                  </a:lnTo>
+                  <a:lnTo>
+                    <a:pt x="7215704" y="830931"/>
+                  </a:lnTo>
+                  <a:lnTo>
+                    <a:pt x="7293338" y="836266"/>
+                  </a:lnTo>
+                  <a:lnTo>
+                    <a:pt x="7370972" y="841548"/>
                   </a:lnTo>
                 </a:path>
               </a:pathLst>

--- a/docs/plots/carbo/jx_carbo_linsubhr_ratio_hosp2.pptx
+++ b/docs/plots/carbo/jx_carbo_linsubhr_ratio_hosp2.pptx
@@ -3003,560 +3003,539 @@
           <p:spPr>
             <a:xfrm>
               <a:off x="817517" y="1896563"/>
-              <a:ext cx="7370972" cy="3549182"/>
+              <a:ext cx="7370972" cy="3592843"/>
             </a:xfrm>
             <a:custGeom>
               <a:avLst/>
               <a:pathLst>
-                <a:path w="7370972" h="3549182">
+                <a:path w="7370972" h="3592843">
                   <a:moveTo>
-                    <a:pt x="700138" y="0"/>
+                    <a:pt x="1250330" y="0"/>
                   </a:moveTo>
                   <a:lnTo>
-                    <a:pt x="772078" y="137928"/>
-                  </a:lnTo>
-                  <a:lnTo>
-                    <a:pt x="849712" y="280725"/>
-                  </a:lnTo>
-                  <a:lnTo>
-                    <a:pt x="927346" y="417720"/>
-                  </a:lnTo>
-                  <a:lnTo>
-                    <a:pt x="1004981" y="549149"/>
-                  </a:lnTo>
-                  <a:lnTo>
-                    <a:pt x="1082615" y="675239"/>
-                  </a:lnTo>
-                  <a:lnTo>
-                    <a:pt x="1160249" y="796205"/>
-                  </a:lnTo>
-                  <a:lnTo>
-                    <a:pt x="1237883" y="912257"/>
-                  </a:lnTo>
-                  <a:lnTo>
-                    <a:pt x="1315517" y="1023594"/>
-                  </a:lnTo>
-                  <a:lnTo>
-                    <a:pt x="1393151" y="1130408"/>
-                  </a:lnTo>
-                  <a:lnTo>
-                    <a:pt x="1470785" y="1232882"/>
-                  </a:lnTo>
-                  <a:lnTo>
-                    <a:pt x="1548419" y="1331193"/>
-                  </a:lnTo>
-                  <a:lnTo>
-                    <a:pt x="1626053" y="1425509"/>
-                  </a:lnTo>
-                  <a:lnTo>
-                    <a:pt x="1703687" y="1515994"/>
-                  </a:lnTo>
-                  <a:lnTo>
-                    <a:pt x="1781321" y="1602802"/>
-                  </a:lnTo>
-                  <a:lnTo>
-                    <a:pt x="1858955" y="1686083"/>
-                  </a:lnTo>
-                  <a:lnTo>
-                    <a:pt x="1936589" y="1765981"/>
-                  </a:lnTo>
-                  <a:lnTo>
-                    <a:pt x="2014223" y="1842633"/>
-                  </a:lnTo>
-                  <a:lnTo>
-                    <a:pt x="2091857" y="1916171"/>
-                  </a:lnTo>
-                  <a:lnTo>
-                    <a:pt x="2169491" y="1986720"/>
-                  </a:lnTo>
-                  <a:lnTo>
-                    <a:pt x="2247125" y="2054404"/>
-                  </a:lnTo>
-                  <a:lnTo>
-                    <a:pt x="2324759" y="2119338"/>
-                  </a:lnTo>
-                  <a:lnTo>
-                    <a:pt x="2402393" y="2181633"/>
-                  </a:lnTo>
-                  <a:lnTo>
-                    <a:pt x="2480027" y="2241398"/>
-                  </a:lnTo>
-                  <a:lnTo>
-                    <a:pt x="2557661" y="2298734"/>
-                  </a:lnTo>
-                  <a:lnTo>
-                    <a:pt x="2635295" y="2353741"/>
-                  </a:lnTo>
-                  <a:lnTo>
-                    <a:pt x="2712930" y="2406513"/>
-                  </a:lnTo>
-                  <a:lnTo>
-                    <a:pt x="2790564" y="2457141"/>
-                  </a:lnTo>
-                  <a:lnTo>
-                    <a:pt x="2868198" y="2505712"/>
-                  </a:lnTo>
-                  <a:lnTo>
-                    <a:pt x="2945832" y="2552310"/>
-                  </a:lnTo>
-                  <a:lnTo>
-                    <a:pt x="3023466" y="2597015"/>
-                  </a:lnTo>
-                  <a:lnTo>
-                    <a:pt x="3101100" y="2639903"/>
-                  </a:lnTo>
-                  <a:lnTo>
-                    <a:pt x="3178734" y="2681049"/>
-                  </a:lnTo>
-                  <a:lnTo>
-                    <a:pt x="3256368" y="2720523"/>
-                  </a:lnTo>
-                  <a:lnTo>
-                    <a:pt x="3334002" y="2758394"/>
-                  </a:lnTo>
-                  <a:lnTo>
-                    <a:pt x="3411636" y="2776928"/>
-                  </a:lnTo>
-                  <a:lnTo>
-                    <a:pt x="3489270" y="2758270"/>
-                  </a:lnTo>
-                  <a:lnTo>
-                    <a:pt x="3566904" y="2739215"/>
-                  </a:lnTo>
-                  <a:lnTo>
-                    <a:pt x="3644538" y="2719754"/>
-                  </a:lnTo>
-                  <a:lnTo>
-                    <a:pt x="3722172" y="2699878"/>
-                  </a:lnTo>
-                  <a:lnTo>
-                    <a:pt x="3799806" y="2679579"/>
-                  </a:lnTo>
-                  <a:lnTo>
-                    <a:pt x="3877440" y="2658847"/>
-                  </a:lnTo>
-                  <a:lnTo>
-                    <a:pt x="3955074" y="2637673"/>
-                  </a:lnTo>
-                  <a:lnTo>
-                    <a:pt x="4032708" y="2616049"/>
-                  </a:lnTo>
-                  <a:lnTo>
-                    <a:pt x="4110342" y="2593964"/>
-                  </a:lnTo>
-                  <a:lnTo>
-                    <a:pt x="4187976" y="2571408"/>
-                  </a:lnTo>
-                  <a:lnTo>
-                    <a:pt x="4265610" y="2548371"/>
-                  </a:lnTo>
-                  <a:lnTo>
-                    <a:pt x="4343244" y="2524844"/>
-                  </a:lnTo>
-                  <a:lnTo>
-                    <a:pt x="4420879" y="2500816"/>
-                  </a:lnTo>
-                  <a:lnTo>
-                    <a:pt x="4498513" y="2476275"/>
-                  </a:lnTo>
-                  <a:lnTo>
-                    <a:pt x="4576147" y="2451212"/>
-                  </a:lnTo>
-                  <a:lnTo>
-                    <a:pt x="4653781" y="2425615"/>
-                  </a:lnTo>
-                  <a:lnTo>
-                    <a:pt x="4731415" y="2399472"/>
-                  </a:lnTo>
-                  <a:lnTo>
-                    <a:pt x="4809049" y="2372773"/>
-                  </a:lnTo>
-                  <a:lnTo>
-                    <a:pt x="4886683" y="2345504"/>
-                  </a:lnTo>
-                  <a:lnTo>
-                    <a:pt x="4964317" y="2317655"/>
-                  </a:lnTo>
-                  <a:lnTo>
-                    <a:pt x="5041951" y="2289212"/>
-                  </a:lnTo>
-                  <a:lnTo>
-                    <a:pt x="5119585" y="2260164"/>
-                  </a:lnTo>
-                  <a:lnTo>
-                    <a:pt x="5197219" y="2230496"/>
-                  </a:lnTo>
-                  <a:lnTo>
-                    <a:pt x="5274853" y="2200196"/>
-                  </a:lnTo>
-                  <a:lnTo>
-                    <a:pt x="5352487" y="2169251"/>
-                  </a:lnTo>
-                  <a:lnTo>
-                    <a:pt x="5430121" y="2137646"/>
-                  </a:lnTo>
-                  <a:lnTo>
-                    <a:pt x="5507755" y="2105368"/>
-                  </a:lnTo>
-                  <a:lnTo>
-                    <a:pt x="5585389" y="2072403"/>
-                  </a:lnTo>
-                  <a:lnTo>
-                    <a:pt x="5663023" y="2038735"/>
-                  </a:lnTo>
-                  <a:lnTo>
-                    <a:pt x="5740657" y="2004350"/>
-                  </a:lnTo>
-                  <a:lnTo>
-                    <a:pt x="5818291" y="1969232"/>
-                  </a:lnTo>
-                  <a:lnTo>
-                    <a:pt x="5895925" y="1933366"/>
-                  </a:lnTo>
-                  <a:lnTo>
-                    <a:pt x="5973559" y="1896735"/>
-                  </a:lnTo>
-                  <a:lnTo>
-                    <a:pt x="6051193" y="1859325"/>
-                  </a:lnTo>
-                  <a:lnTo>
-                    <a:pt x="6128827" y="1821117"/>
-                  </a:lnTo>
-                  <a:lnTo>
-                    <a:pt x="6206462" y="1782095"/>
-                  </a:lnTo>
-                  <a:lnTo>
-                    <a:pt x="6284096" y="1742242"/>
-                  </a:lnTo>
-                  <a:lnTo>
-                    <a:pt x="6361730" y="1701540"/>
-                  </a:lnTo>
-                  <a:lnTo>
-                    <a:pt x="6439364" y="1659970"/>
-                  </a:lnTo>
-                  <a:lnTo>
-                    <a:pt x="6516998" y="1617515"/>
-                  </a:lnTo>
-                  <a:lnTo>
-                    <a:pt x="6594632" y="1574155"/>
-                  </a:lnTo>
-                  <a:lnTo>
-                    <a:pt x="6672266" y="1529872"/>
-                  </a:lnTo>
-                  <a:lnTo>
-                    <a:pt x="6749900" y="1484645"/>
-                  </a:lnTo>
-                  <a:lnTo>
-                    <a:pt x="6827534" y="1438455"/>
-                  </a:lnTo>
-                  <a:lnTo>
-                    <a:pt x="6905168" y="1391280"/>
-                  </a:lnTo>
-                  <a:lnTo>
-                    <a:pt x="6982802" y="1343100"/>
-                  </a:lnTo>
-                  <a:lnTo>
-                    <a:pt x="7060436" y="1293894"/>
-                  </a:lnTo>
-                  <a:lnTo>
-                    <a:pt x="7138070" y="1243639"/>
-                  </a:lnTo>
-                  <a:lnTo>
-                    <a:pt x="7215704" y="1192314"/>
-                  </a:lnTo>
-                  <a:lnTo>
-                    <a:pt x="7293338" y="1139895"/>
-                  </a:lnTo>
-                  <a:lnTo>
-                    <a:pt x="7370972" y="1086360"/>
-                  </a:lnTo>
-                  <a:lnTo>
-                    <a:pt x="7370972" y="3549182"/>
-                  </a:lnTo>
-                  <a:lnTo>
-                    <a:pt x="7293338" y="3544800"/>
-                  </a:lnTo>
-                  <a:lnTo>
-                    <a:pt x="7215704" y="3540233"/>
-                  </a:lnTo>
-                  <a:lnTo>
-                    <a:pt x="7138070" y="3535473"/>
-                  </a:lnTo>
-                  <a:lnTo>
-                    <a:pt x="7060436" y="3530511"/>
-                  </a:lnTo>
-                  <a:lnTo>
-                    <a:pt x="6982802" y="3525339"/>
-                  </a:lnTo>
-                  <a:lnTo>
-                    <a:pt x="6905168" y="3519947"/>
-                  </a:lnTo>
-                  <a:lnTo>
-                    <a:pt x="6827534" y="3514328"/>
-                  </a:lnTo>
-                  <a:lnTo>
-                    <a:pt x="6749900" y="3508470"/>
-                  </a:lnTo>
-                  <a:lnTo>
-                    <a:pt x="6672266" y="3502365"/>
-                  </a:lnTo>
-                  <a:lnTo>
-                    <a:pt x="6594632" y="3496001"/>
-                  </a:lnTo>
-                  <a:lnTo>
-                    <a:pt x="6516998" y="3489367"/>
-                  </a:lnTo>
-                  <a:lnTo>
-                    <a:pt x="6439364" y="3482453"/>
-                  </a:lnTo>
-                  <a:lnTo>
-                    <a:pt x="6361730" y="3475245"/>
-                  </a:lnTo>
-                  <a:lnTo>
-                    <a:pt x="6284096" y="3467733"/>
-                  </a:lnTo>
-                  <a:lnTo>
-                    <a:pt x="6206462" y="3459902"/>
-                  </a:lnTo>
-                  <a:lnTo>
-                    <a:pt x="6128827" y="3451739"/>
-                  </a:lnTo>
-                  <a:lnTo>
-                    <a:pt x="6051193" y="3443231"/>
-                  </a:lnTo>
-                  <a:lnTo>
-                    <a:pt x="5973559" y="3434363"/>
-                  </a:lnTo>
-                  <a:lnTo>
-                    <a:pt x="5895925" y="3425119"/>
-                  </a:lnTo>
-                  <a:lnTo>
-                    <a:pt x="5818291" y="3415484"/>
-                  </a:lnTo>
-                  <a:lnTo>
-                    <a:pt x="5740657" y="3405440"/>
-                  </a:lnTo>
-                  <a:lnTo>
-                    <a:pt x="5663023" y="3394972"/>
-                  </a:lnTo>
-                  <a:lnTo>
-                    <a:pt x="5585389" y="3384060"/>
-                  </a:lnTo>
-                  <a:lnTo>
-                    <a:pt x="5507755" y="3372685"/>
-                  </a:lnTo>
-                  <a:lnTo>
-                    <a:pt x="5430121" y="3360829"/>
-                  </a:lnTo>
-                  <a:lnTo>
-                    <a:pt x="5352487" y="3348471"/>
-                  </a:lnTo>
-                  <a:lnTo>
-                    <a:pt x="5274853" y="3335590"/>
-                  </a:lnTo>
-                  <a:lnTo>
-                    <a:pt x="5197219" y="3322163"/>
-                  </a:lnTo>
-                  <a:lnTo>
-                    <a:pt x="5119585" y="3308168"/>
-                  </a:lnTo>
-                  <a:lnTo>
-                    <a:pt x="5041951" y="3293580"/>
-                  </a:lnTo>
-                  <a:lnTo>
-                    <a:pt x="4964317" y="3278374"/>
-                  </a:lnTo>
-                  <a:lnTo>
-                    <a:pt x="4886683" y="3262524"/>
-                  </a:lnTo>
-                  <a:lnTo>
-                    <a:pt x="4809049" y="3246003"/>
-                  </a:lnTo>
-                  <a:lnTo>
-                    <a:pt x="4731415" y="3228782"/>
-                  </a:lnTo>
-                  <a:lnTo>
-                    <a:pt x="4653781" y="3210832"/>
-                  </a:lnTo>
-                  <a:lnTo>
-                    <a:pt x="4576147" y="3192122"/>
-                  </a:lnTo>
-                  <a:lnTo>
-                    <a:pt x="4498513" y="3172619"/>
-                  </a:lnTo>
-                  <a:lnTo>
-                    <a:pt x="4420879" y="3152291"/>
-                  </a:lnTo>
-                  <a:lnTo>
-                    <a:pt x="4343244" y="3131102"/>
-                  </a:lnTo>
-                  <a:lnTo>
-                    <a:pt x="4265610" y="3109015"/>
-                  </a:lnTo>
-                  <a:lnTo>
-                    <a:pt x="4187976" y="3085993"/>
-                  </a:lnTo>
-                  <a:lnTo>
-                    <a:pt x="4110342" y="3061996"/>
-                  </a:lnTo>
-                  <a:lnTo>
-                    <a:pt x="4032708" y="3036983"/>
-                  </a:lnTo>
-                  <a:lnTo>
-                    <a:pt x="3955074" y="3010910"/>
-                  </a:lnTo>
-                  <a:lnTo>
-                    <a:pt x="3877440" y="2983734"/>
-                  </a:lnTo>
-                  <a:lnTo>
-                    <a:pt x="3799806" y="2955406"/>
-                  </a:lnTo>
-                  <a:lnTo>
-                    <a:pt x="3722172" y="2925879"/>
-                  </a:lnTo>
-                  <a:lnTo>
-                    <a:pt x="3644538" y="2895102"/>
-                  </a:lnTo>
-                  <a:lnTo>
-                    <a:pt x="3566904" y="2863021"/>
-                  </a:lnTo>
-                  <a:lnTo>
-                    <a:pt x="3489270" y="2829581"/>
-                  </a:lnTo>
-                  <a:lnTo>
-                    <a:pt x="3411636" y="2794725"/>
-                  </a:lnTo>
-                  <a:lnTo>
-                    <a:pt x="3334002" y="2795196"/>
-                  </a:lnTo>
-                  <a:lnTo>
-                    <a:pt x="3256368" y="2813083"/>
-                  </a:lnTo>
-                  <a:lnTo>
-                    <a:pt x="3178734" y="2830598"/>
-                  </a:lnTo>
-                  <a:lnTo>
-                    <a:pt x="3101100" y="2847746"/>
-                  </a:lnTo>
-                  <a:lnTo>
-                    <a:pt x="3023466" y="2864537"/>
-                  </a:lnTo>
-                  <a:lnTo>
-                    <a:pt x="2945832" y="2880978"/>
-                  </a:lnTo>
-                  <a:lnTo>
-                    <a:pt x="2868198" y="2897076"/>
-                  </a:lnTo>
-                  <a:lnTo>
-                    <a:pt x="2790564" y="2912838"/>
-                  </a:lnTo>
-                  <a:lnTo>
-                    <a:pt x="2712930" y="2928271"/>
-                  </a:lnTo>
-                  <a:lnTo>
-                    <a:pt x="2635295" y="2943382"/>
-                  </a:lnTo>
-                  <a:lnTo>
-                    <a:pt x="2557661" y="2958178"/>
-                  </a:lnTo>
-                  <a:lnTo>
-                    <a:pt x="2480027" y="2972666"/>
-                  </a:lnTo>
-                  <a:lnTo>
-                    <a:pt x="2402393" y="2986851"/>
-                  </a:lnTo>
-                  <a:lnTo>
-                    <a:pt x="2324759" y="3000740"/>
-                  </a:lnTo>
-                  <a:lnTo>
-                    <a:pt x="2247125" y="3014340"/>
-                  </a:lnTo>
-                  <a:lnTo>
-                    <a:pt x="2169491" y="3027655"/>
-                  </a:lnTo>
-                  <a:lnTo>
-                    <a:pt x="2091857" y="3040693"/>
-                  </a:lnTo>
-                  <a:lnTo>
-                    <a:pt x="2014223" y="3053459"/>
-                  </a:lnTo>
-                  <a:lnTo>
-                    <a:pt x="1936589" y="3065959"/>
-                  </a:lnTo>
-                  <a:lnTo>
-                    <a:pt x="1858955" y="3078198"/>
-                  </a:lnTo>
-                  <a:lnTo>
-                    <a:pt x="1781321" y="3090181"/>
-                  </a:lnTo>
-                  <a:lnTo>
-                    <a:pt x="1703687" y="3101915"/>
-                  </a:lnTo>
-                  <a:lnTo>
-                    <a:pt x="1626053" y="3113404"/>
-                  </a:lnTo>
-                  <a:lnTo>
-                    <a:pt x="1548419" y="3124653"/>
-                  </a:lnTo>
-                  <a:lnTo>
-                    <a:pt x="1470785" y="3135667"/>
-                  </a:lnTo>
-                  <a:lnTo>
-                    <a:pt x="1393151" y="3146452"/>
-                  </a:lnTo>
-                  <a:lnTo>
-                    <a:pt x="1315517" y="3157012"/>
-                  </a:lnTo>
-                  <a:lnTo>
-                    <a:pt x="1237883" y="3167351"/>
-                  </a:lnTo>
-                  <a:lnTo>
-                    <a:pt x="1160249" y="3177475"/>
-                  </a:lnTo>
-                  <a:lnTo>
-                    <a:pt x="1082615" y="3187388"/>
-                  </a:lnTo>
-                  <a:lnTo>
-                    <a:pt x="1004981" y="3197093"/>
-                  </a:lnTo>
-                  <a:lnTo>
-                    <a:pt x="927346" y="3206597"/>
-                  </a:lnTo>
-                  <a:lnTo>
-                    <a:pt x="849712" y="3215902"/>
-                  </a:lnTo>
-                  <a:lnTo>
-                    <a:pt x="772078" y="3225013"/>
-                  </a:lnTo>
-                  <a:lnTo>
-                    <a:pt x="694444" y="3233934"/>
-                  </a:lnTo>
-                  <a:lnTo>
-                    <a:pt x="616810" y="3242668"/>
-                  </a:lnTo>
-                  <a:lnTo>
-                    <a:pt x="539176" y="3251221"/>
-                  </a:lnTo>
-                  <a:lnTo>
-                    <a:pt x="461542" y="3259595"/>
-                  </a:lnTo>
-                  <a:lnTo>
-                    <a:pt x="383908" y="3267794"/>
-                  </a:lnTo>
-                  <a:lnTo>
-                    <a:pt x="306274" y="3275823"/>
-                  </a:lnTo>
-                  <a:lnTo>
-                    <a:pt x="228640" y="3283684"/>
-                  </a:lnTo>
-                  <a:lnTo>
-                    <a:pt x="151006" y="3291381"/>
-                  </a:lnTo>
-                  <a:lnTo>
-                    <a:pt x="73372" y="3298917"/>
-                  </a:lnTo>
-                  <a:lnTo>
-                    <a:pt x="0" y="3305891"/>
+                    <a:pt x="1315517" y="157144"/>
+                  </a:lnTo>
+                  <a:lnTo>
+                    <a:pt x="1393151" y="334785"/>
+                  </a:lnTo>
+                  <a:lnTo>
+                    <a:pt x="1470785" y="503398"/>
+                  </a:lnTo>
+                  <a:lnTo>
+                    <a:pt x="1548419" y="663442"/>
+                  </a:lnTo>
+                  <a:lnTo>
+                    <a:pt x="1626053" y="815352"/>
+                  </a:lnTo>
+                  <a:lnTo>
+                    <a:pt x="1703687" y="959543"/>
+                  </a:lnTo>
+                  <a:lnTo>
+                    <a:pt x="1781321" y="1096406"/>
+                  </a:lnTo>
+                  <a:lnTo>
+                    <a:pt x="1858955" y="1226313"/>
+                  </a:lnTo>
+                  <a:lnTo>
+                    <a:pt x="1936589" y="1349619"/>
+                  </a:lnTo>
+                  <a:lnTo>
+                    <a:pt x="2014223" y="1466658"/>
+                  </a:lnTo>
+                  <a:lnTo>
+                    <a:pt x="2091857" y="1577749"/>
+                  </a:lnTo>
+                  <a:lnTo>
+                    <a:pt x="2169491" y="1683195"/>
+                  </a:lnTo>
+                  <a:lnTo>
+                    <a:pt x="2247125" y="1783282"/>
+                  </a:lnTo>
+                  <a:lnTo>
+                    <a:pt x="2324759" y="1878282"/>
+                  </a:lnTo>
+                  <a:lnTo>
+                    <a:pt x="2402393" y="1968455"/>
+                  </a:lnTo>
+                  <a:lnTo>
+                    <a:pt x="2480027" y="2054045"/>
+                  </a:lnTo>
+                  <a:lnTo>
+                    <a:pt x="2557661" y="2135286"/>
+                  </a:lnTo>
+                  <a:lnTo>
+                    <a:pt x="2635295" y="2212397"/>
+                  </a:lnTo>
+                  <a:lnTo>
+                    <a:pt x="2712930" y="2285590"/>
+                  </a:lnTo>
+                  <a:lnTo>
+                    <a:pt x="2790564" y="2355064"/>
+                  </a:lnTo>
+                  <a:lnTo>
+                    <a:pt x="2868198" y="2421006"/>
+                  </a:lnTo>
+                  <a:lnTo>
+                    <a:pt x="2945832" y="2483598"/>
+                  </a:lnTo>
+                  <a:lnTo>
+                    <a:pt x="3023466" y="2543009"/>
+                  </a:lnTo>
+                  <a:lnTo>
+                    <a:pt x="3101100" y="2599400"/>
+                  </a:lnTo>
+                  <a:lnTo>
+                    <a:pt x="3178734" y="2652926"/>
+                  </a:lnTo>
+                  <a:lnTo>
+                    <a:pt x="3256368" y="2703731"/>
+                  </a:lnTo>
+                  <a:lnTo>
+                    <a:pt x="3334002" y="2751955"/>
+                  </a:lnTo>
+                  <a:lnTo>
+                    <a:pt x="3411636" y="2776759"/>
+                  </a:lnTo>
+                  <a:lnTo>
+                    <a:pt x="3489270" y="2757571"/>
+                  </a:lnTo>
+                  <a:lnTo>
+                    <a:pt x="3566904" y="2737964"/>
+                  </a:lnTo>
+                  <a:lnTo>
+                    <a:pt x="3644538" y="2717927"/>
+                  </a:lnTo>
+                  <a:lnTo>
+                    <a:pt x="3722172" y="2697451"/>
+                  </a:lnTo>
+                  <a:lnTo>
+                    <a:pt x="3799806" y="2676526"/>
+                  </a:lnTo>
+                  <a:lnTo>
+                    <a:pt x="3877440" y="2655143"/>
+                  </a:lnTo>
+                  <a:lnTo>
+                    <a:pt x="3955074" y="2633292"/>
+                  </a:lnTo>
+                  <a:lnTo>
+                    <a:pt x="4032708" y="2610962"/>
+                  </a:lnTo>
+                  <a:lnTo>
+                    <a:pt x="4110342" y="2588143"/>
+                  </a:lnTo>
+                  <a:lnTo>
+                    <a:pt x="4187976" y="2564823"/>
+                  </a:lnTo>
+                  <a:lnTo>
+                    <a:pt x="4265610" y="2540993"/>
+                  </a:lnTo>
+                  <a:lnTo>
+                    <a:pt x="4343244" y="2516642"/>
+                  </a:lnTo>
+                  <a:lnTo>
+                    <a:pt x="4420879" y="2491756"/>
+                  </a:lnTo>
+                  <a:lnTo>
+                    <a:pt x="4498513" y="2466326"/>
+                  </a:lnTo>
+                  <a:lnTo>
+                    <a:pt x="4576147" y="2440338"/>
+                  </a:lnTo>
+                  <a:lnTo>
+                    <a:pt x="4653781" y="2413781"/>
+                  </a:lnTo>
+                  <a:lnTo>
+                    <a:pt x="4731415" y="2386642"/>
+                  </a:lnTo>
+                  <a:lnTo>
+                    <a:pt x="4809049" y="2358909"/>
+                  </a:lnTo>
+                  <a:lnTo>
+                    <a:pt x="4886683" y="2330568"/>
+                  </a:lnTo>
+                  <a:lnTo>
+                    <a:pt x="4964317" y="2301607"/>
+                  </a:lnTo>
+                  <a:lnTo>
+                    <a:pt x="5041951" y="2272011"/>
+                  </a:lnTo>
+                  <a:lnTo>
+                    <a:pt x="5119585" y="2241767"/>
+                  </a:lnTo>
+                  <a:lnTo>
+                    <a:pt x="5197219" y="2210860"/>
+                  </a:lnTo>
+                  <a:lnTo>
+                    <a:pt x="5274853" y="2179276"/>
+                  </a:lnTo>
+                  <a:lnTo>
+                    <a:pt x="5352487" y="2147000"/>
+                  </a:lnTo>
+                  <a:lnTo>
+                    <a:pt x="5430121" y="2114017"/>
+                  </a:lnTo>
+                  <a:lnTo>
+                    <a:pt x="5507755" y="2080312"/>
+                  </a:lnTo>
+                  <a:lnTo>
+                    <a:pt x="5585389" y="2045868"/>
+                  </a:lnTo>
+                  <a:lnTo>
+                    <a:pt x="5663023" y="2010670"/>
+                  </a:lnTo>
+                  <a:lnTo>
+                    <a:pt x="5740657" y="1974701"/>
+                  </a:lnTo>
+                  <a:lnTo>
+                    <a:pt x="5818291" y="1937943"/>
+                  </a:lnTo>
+                  <a:lnTo>
+                    <a:pt x="5895925" y="1900381"/>
+                  </a:lnTo>
+                  <a:lnTo>
+                    <a:pt x="5973559" y="1861996"/>
+                  </a:lnTo>
+                  <a:lnTo>
+                    <a:pt x="6051193" y="1822769"/>
+                  </a:lnTo>
+                  <a:lnTo>
+                    <a:pt x="6128827" y="1782684"/>
+                  </a:lnTo>
+                  <a:lnTo>
+                    <a:pt x="6206462" y="1741720"/>
+                  </a:lnTo>
+                  <a:lnTo>
+                    <a:pt x="6284096" y="1699859"/>
+                  </a:lnTo>
+                  <a:lnTo>
+                    <a:pt x="6361730" y="1657082"/>
+                  </a:lnTo>
+                  <a:lnTo>
+                    <a:pt x="6439364" y="1613366"/>
+                  </a:lnTo>
+                  <a:lnTo>
+                    <a:pt x="6516998" y="1568694"/>
+                  </a:lnTo>
+                  <a:lnTo>
+                    <a:pt x="6594632" y="1523043"/>
+                  </a:lnTo>
+                  <a:lnTo>
+                    <a:pt x="6672266" y="1476391"/>
+                  </a:lnTo>
+                  <a:lnTo>
+                    <a:pt x="6749900" y="1428718"/>
+                  </a:lnTo>
+                  <a:lnTo>
+                    <a:pt x="6827534" y="1380000"/>
+                  </a:lnTo>
+                  <a:lnTo>
+                    <a:pt x="6905168" y="1330215"/>
+                  </a:lnTo>
+                  <a:lnTo>
+                    <a:pt x="6982802" y="1279340"/>
+                  </a:lnTo>
+                  <a:lnTo>
+                    <a:pt x="7060436" y="1227350"/>
+                  </a:lnTo>
+                  <a:lnTo>
+                    <a:pt x="7138070" y="1174221"/>
+                  </a:lnTo>
+                  <a:lnTo>
+                    <a:pt x="7215704" y="1119929"/>
+                  </a:lnTo>
+                  <a:lnTo>
+                    <a:pt x="7293338" y="1064447"/>
+                  </a:lnTo>
+                  <a:lnTo>
+                    <a:pt x="7370972" y="1007749"/>
+                  </a:lnTo>
+                  <a:lnTo>
+                    <a:pt x="7370972" y="3592843"/>
+                  </a:lnTo>
+                  <a:lnTo>
+                    <a:pt x="7293338" y="3589641"/>
+                  </a:lnTo>
+                  <a:lnTo>
+                    <a:pt x="7215704" y="3586268"/>
+                  </a:lnTo>
+                  <a:lnTo>
+                    <a:pt x="7138070" y="3582714"/>
+                  </a:lnTo>
+                  <a:lnTo>
+                    <a:pt x="7060436" y="3578970"/>
+                  </a:lnTo>
+                  <a:lnTo>
+                    <a:pt x="6982802" y="3575025"/>
+                  </a:lnTo>
+                  <a:lnTo>
+                    <a:pt x="6905168" y="3570870"/>
+                  </a:lnTo>
+                  <a:lnTo>
+                    <a:pt x="6827534" y="3566491"/>
+                  </a:lnTo>
+                  <a:lnTo>
+                    <a:pt x="6749900" y="3561879"/>
+                  </a:lnTo>
+                  <a:lnTo>
+                    <a:pt x="6672266" y="3557019"/>
+                  </a:lnTo>
+                  <a:lnTo>
+                    <a:pt x="6594632" y="3551899"/>
+                  </a:lnTo>
+                  <a:lnTo>
+                    <a:pt x="6516998" y="3546505"/>
+                  </a:lnTo>
+                  <a:lnTo>
+                    <a:pt x="6439364" y="3540823"/>
+                  </a:lnTo>
+                  <a:lnTo>
+                    <a:pt x="6361730" y="3534836"/>
+                  </a:lnTo>
+                  <a:lnTo>
+                    <a:pt x="6284096" y="3528528"/>
+                  </a:lnTo>
+                  <a:lnTo>
+                    <a:pt x="6206462" y="3521883"/>
+                  </a:lnTo>
+                  <a:lnTo>
+                    <a:pt x="6128827" y="3514882"/>
+                  </a:lnTo>
+                  <a:lnTo>
+                    <a:pt x="6051193" y="3507506"/>
+                  </a:lnTo>
+                  <a:lnTo>
+                    <a:pt x="5973559" y="3499736"/>
+                  </a:lnTo>
+                  <a:lnTo>
+                    <a:pt x="5895925" y="3491549"/>
+                  </a:lnTo>
+                  <a:lnTo>
+                    <a:pt x="5818291" y="3482924"/>
+                  </a:lnTo>
+                  <a:lnTo>
+                    <a:pt x="5740657" y="3473837"/>
+                  </a:lnTo>
+                  <a:lnTo>
+                    <a:pt x="5663023" y="3464263"/>
+                  </a:lnTo>
+                  <a:lnTo>
+                    <a:pt x="5585389" y="3454177"/>
+                  </a:lnTo>
+                  <a:lnTo>
+                    <a:pt x="5507755" y="3443551"/>
+                  </a:lnTo>
+                  <a:lnTo>
+                    <a:pt x="5430121" y="3432356"/>
+                  </a:lnTo>
+                  <a:lnTo>
+                    <a:pt x="5352487" y="3420562"/>
+                  </a:lnTo>
+                  <a:lnTo>
+                    <a:pt x="5274853" y="3408136"/>
+                  </a:lnTo>
+                  <a:lnTo>
+                    <a:pt x="5197219" y="3395045"/>
+                  </a:lnTo>
+                  <a:lnTo>
+                    <a:pt x="5119585" y="3381253"/>
+                  </a:lnTo>
+                  <a:lnTo>
+                    <a:pt x="5041951" y="3366723"/>
+                  </a:lnTo>
+                  <a:lnTo>
+                    <a:pt x="4964317" y="3351414"/>
+                  </a:lnTo>
+                  <a:lnTo>
+                    <a:pt x="4886683" y="3335286"/>
+                  </a:lnTo>
+                  <a:lnTo>
+                    <a:pt x="4809049" y="3318295"/>
+                  </a:lnTo>
+                  <a:lnTo>
+                    <a:pt x="4731415" y="3300393"/>
+                  </a:lnTo>
+                  <a:lnTo>
+                    <a:pt x="4653781" y="3281534"/>
+                  </a:lnTo>
+                  <a:lnTo>
+                    <a:pt x="4576147" y="3261664"/>
+                  </a:lnTo>
+                  <a:lnTo>
+                    <a:pt x="4498513" y="3240731"/>
+                  </a:lnTo>
+                  <a:lnTo>
+                    <a:pt x="4420879" y="3218677"/>
+                  </a:lnTo>
+                  <a:lnTo>
+                    <a:pt x="4343244" y="3195442"/>
+                  </a:lnTo>
+                  <a:lnTo>
+                    <a:pt x="4265610" y="3170963"/>
+                  </a:lnTo>
+                  <a:lnTo>
+                    <a:pt x="4187976" y="3145174"/>
+                  </a:lnTo>
+                  <a:lnTo>
+                    <a:pt x="4110342" y="3118003"/>
+                  </a:lnTo>
+                  <a:lnTo>
+                    <a:pt x="4032708" y="3089378"/>
+                  </a:lnTo>
+                  <a:lnTo>
+                    <a:pt x="3955074" y="3059221"/>
+                  </a:lnTo>
+                  <a:lnTo>
+                    <a:pt x="3877440" y="3027448"/>
+                  </a:lnTo>
+                  <a:lnTo>
+                    <a:pt x="3799806" y="2993975"/>
+                  </a:lnTo>
+                  <a:lnTo>
+                    <a:pt x="3722172" y="2958709"/>
+                  </a:lnTo>
+                  <a:lnTo>
+                    <a:pt x="3644538" y="2921556"/>
+                  </a:lnTo>
+                  <a:lnTo>
+                    <a:pt x="3566904" y="2882413"/>
+                  </a:lnTo>
+                  <a:lnTo>
+                    <a:pt x="3489270" y="2841174"/>
+                  </a:lnTo>
+                  <a:lnTo>
+                    <a:pt x="3411636" y="2797727"/>
+                  </a:lnTo>
+                  <a:lnTo>
+                    <a:pt x="3334002" y="2795535"/>
+                  </a:lnTo>
+                  <a:lnTo>
+                    <a:pt x="3256368" y="2813908"/>
+                  </a:lnTo>
+                  <a:lnTo>
+                    <a:pt x="3178734" y="2831888"/>
+                  </a:lnTo>
+                  <a:lnTo>
+                    <a:pt x="3101100" y="2849482"/>
+                  </a:lnTo>
+                  <a:lnTo>
+                    <a:pt x="3023466" y="2866699"/>
+                  </a:lnTo>
+                  <a:lnTo>
+                    <a:pt x="2945832" y="2883547"/>
+                  </a:lnTo>
+                  <a:lnTo>
+                    <a:pt x="2868198" y="2900033"/>
+                  </a:lnTo>
+                  <a:lnTo>
+                    <a:pt x="2790564" y="2916167"/>
+                  </a:lnTo>
+                  <a:lnTo>
+                    <a:pt x="2712930" y="2931954"/>
+                  </a:lnTo>
+                  <a:lnTo>
+                    <a:pt x="2635295" y="2947403"/>
+                  </a:lnTo>
+                  <a:lnTo>
+                    <a:pt x="2557661" y="2962521"/>
+                  </a:lnTo>
+                  <a:lnTo>
+                    <a:pt x="2480027" y="2977315"/>
+                  </a:lnTo>
+                  <a:lnTo>
+                    <a:pt x="2402393" y="2991792"/>
+                  </a:lnTo>
+                  <a:lnTo>
+                    <a:pt x="2324759" y="3005958"/>
+                  </a:lnTo>
+                  <a:lnTo>
+                    <a:pt x="2247125" y="3019821"/>
+                  </a:lnTo>
+                  <a:lnTo>
+                    <a:pt x="2169491" y="3033386"/>
+                  </a:lnTo>
+                  <a:lnTo>
+                    <a:pt x="2091857" y="3046661"/>
+                  </a:lnTo>
+                  <a:lnTo>
+                    <a:pt x="2014223" y="3059651"/>
+                  </a:lnTo>
+                  <a:lnTo>
+                    <a:pt x="1936589" y="3072363"/>
+                  </a:lnTo>
+                  <a:lnTo>
+                    <a:pt x="1858955" y="3084802"/>
+                  </a:lnTo>
+                  <a:lnTo>
+                    <a:pt x="1781321" y="3096975"/>
+                  </a:lnTo>
+                  <a:lnTo>
+                    <a:pt x="1703687" y="3108886"/>
+                  </a:lnTo>
+                  <a:lnTo>
+                    <a:pt x="1626053" y="3120543"/>
+                  </a:lnTo>
+                  <a:lnTo>
+                    <a:pt x="1548419" y="3131949"/>
+                  </a:lnTo>
+                  <a:lnTo>
+                    <a:pt x="1470785" y="3143111"/>
+                  </a:lnTo>
+                  <a:lnTo>
+                    <a:pt x="1393151" y="3154034"/>
+                  </a:lnTo>
+                  <a:lnTo>
+                    <a:pt x="1315517" y="3164722"/>
+                  </a:lnTo>
+                  <a:lnTo>
+                    <a:pt x="1237883" y="3175181"/>
+                  </a:lnTo>
+                  <a:lnTo>
+                    <a:pt x="1160249" y="3185417"/>
+                  </a:lnTo>
+                  <a:lnTo>
+                    <a:pt x="1082615" y="3195432"/>
+                  </a:lnTo>
+                  <a:lnTo>
+                    <a:pt x="1004981" y="3205233"/>
+                  </a:lnTo>
+                  <a:lnTo>
+                    <a:pt x="927346" y="3214824"/>
+                  </a:lnTo>
+                  <a:lnTo>
+                    <a:pt x="849712" y="3224210"/>
+                  </a:lnTo>
+                  <a:lnTo>
+                    <a:pt x="772078" y="3233394"/>
+                  </a:lnTo>
+                  <a:lnTo>
+                    <a:pt x="694444" y="3242381"/>
+                  </a:lnTo>
+                  <a:lnTo>
+                    <a:pt x="616810" y="3251176"/>
+                  </a:lnTo>
+                  <a:lnTo>
+                    <a:pt x="539176" y="3259782"/>
+                  </a:lnTo>
+                  <a:lnTo>
+                    <a:pt x="461542" y="3268203"/>
+                  </a:lnTo>
+                  <a:lnTo>
+                    <a:pt x="383908" y="3276444"/>
+                  </a:lnTo>
+                  <a:lnTo>
+                    <a:pt x="306274" y="3284509"/>
+                  </a:lnTo>
+                  <a:lnTo>
+                    <a:pt x="228640" y="3292400"/>
+                  </a:lnTo>
+                  <a:lnTo>
+                    <a:pt x="151006" y="3300123"/>
+                  </a:lnTo>
+                  <a:lnTo>
+                    <a:pt x="73372" y="3307679"/>
+                  </a:lnTo>
+                  <a:lnTo>
+                    <a:pt x="0" y="3314668"/>
                   </a:lnTo>
                   <a:close/>
                 </a:path>
@@ -3582,273 +3561,252 @@
           </p:nvSpPr>
           <p:spPr>
             <a:xfrm>
-              <a:off x="1517655" y="1896563"/>
-              <a:ext cx="6670834" cy="2776928"/>
+              <a:off x="2067848" y="1896563"/>
+              <a:ext cx="6120642" cy="2776759"/>
             </a:xfrm>
             <a:custGeom>
               <a:avLst/>
               <a:pathLst>
-                <a:path w="6670834" h="2776928">
+                <a:path w="6120642" h="2776759">
                   <a:moveTo>
                     <a:pt x="0" y="0"/>
                   </a:moveTo>
                   <a:lnTo>
-                    <a:pt x="71940" y="137928"/>
-                  </a:lnTo>
-                  <a:lnTo>
-                    <a:pt x="149574" y="280725"/>
-                  </a:lnTo>
-                  <a:lnTo>
-                    <a:pt x="227208" y="417720"/>
-                  </a:lnTo>
-                  <a:lnTo>
-                    <a:pt x="304842" y="549149"/>
-                  </a:lnTo>
-                  <a:lnTo>
-                    <a:pt x="382476" y="675239"/>
-                  </a:lnTo>
-                  <a:lnTo>
-                    <a:pt x="460111" y="796205"/>
-                  </a:lnTo>
-                  <a:lnTo>
-                    <a:pt x="537745" y="912257"/>
-                  </a:lnTo>
-                  <a:lnTo>
-                    <a:pt x="615379" y="1023594"/>
-                  </a:lnTo>
-                  <a:lnTo>
-                    <a:pt x="693013" y="1130408"/>
-                  </a:lnTo>
-                  <a:lnTo>
-                    <a:pt x="770647" y="1232882"/>
-                  </a:lnTo>
-                  <a:lnTo>
-                    <a:pt x="848281" y="1331193"/>
-                  </a:lnTo>
-                  <a:lnTo>
-                    <a:pt x="925915" y="1425509"/>
-                  </a:lnTo>
-                  <a:lnTo>
-                    <a:pt x="1003549" y="1515994"/>
-                  </a:lnTo>
-                  <a:lnTo>
-                    <a:pt x="1081183" y="1602802"/>
-                  </a:lnTo>
-                  <a:lnTo>
-                    <a:pt x="1158817" y="1686083"/>
-                  </a:lnTo>
-                  <a:lnTo>
-                    <a:pt x="1236451" y="1765981"/>
-                  </a:lnTo>
-                  <a:lnTo>
-                    <a:pt x="1314085" y="1842633"/>
-                  </a:lnTo>
-                  <a:lnTo>
-                    <a:pt x="1391719" y="1916171"/>
-                  </a:lnTo>
-                  <a:lnTo>
-                    <a:pt x="1469353" y="1986720"/>
-                  </a:lnTo>
-                  <a:lnTo>
-                    <a:pt x="1546987" y="2054404"/>
-                  </a:lnTo>
-                  <a:lnTo>
-                    <a:pt x="1624621" y="2119338"/>
-                  </a:lnTo>
-                  <a:lnTo>
-                    <a:pt x="1702255" y="2181633"/>
-                  </a:lnTo>
-                  <a:lnTo>
-                    <a:pt x="1779889" y="2241398"/>
-                  </a:lnTo>
-                  <a:lnTo>
-                    <a:pt x="1857523" y="2298734"/>
-                  </a:lnTo>
-                  <a:lnTo>
-                    <a:pt x="1935157" y="2353741"/>
-                  </a:lnTo>
-                  <a:lnTo>
-                    <a:pt x="2012791" y="2406513"/>
-                  </a:lnTo>
-                  <a:lnTo>
-                    <a:pt x="2090425" y="2457141"/>
-                  </a:lnTo>
-                  <a:lnTo>
-                    <a:pt x="2168059" y="2505712"/>
-                  </a:lnTo>
-                  <a:lnTo>
-                    <a:pt x="2245694" y="2552310"/>
-                  </a:lnTo>
-                  <a:lnTo>
-                    <a:pt x="2323328" y="2597015"/>
-                  </a:lnTo>
-                  <a:lnTo>
-                    <a:pt x="2400962" y="2639903"/>
-                  </a:lnTo>
-                  <a:lnTo>
-                    <a:pt x="2478596" y="2681049"/>
-                  </a:lnTo>
-                  <a:lnTo>
-                    <a:pt x="2556230" y="2720523"/>
-                  </a:lnTo>
-                  <a:lnTo>
-                    <a:pt x="2633864" y="2758394"/>
-                  </a:lnTo>
-                  <a:lnTo>
-                    <a:pt x="2711498" y="2776928"/>
-                  </a:lnTo>
-                  <a:lnTo>
-                    <a:pt x="2789132" y="2758270"/>
-                  </a:lnTo>
-                  <a:lnTo>
-                    <a:pt x="2866766" y="2739215"/>
-                  </a:lnTo>
-                  <a:lnTo>
-                    <a:pt x="2944400" y="2719754"/>
-                  </a:lnTo>
-                  <a:lnTo>
-                    <a:pt x="3022034" y="2699878"/>
-                  </a:lnTo>
-                  <a:lnTo>
-                    <a:pt x="3099668" y="2679579"/>
-                  </a:lnTo>
-                  <a:lnTo>
-                    <a:pt x="3177302" y="2658847"/>
-                  </a:lnTo>
-                  <a:lnTo>
-                    <a:pt x="3254936" y="2637673"/>
-                  </a:lnTo>
-                  <a:lnTo>
-                    <a:pt x="3332570" y="2616049"/>
-                  </a:lnTo>
-                  <a:lnTo>
-                    <a:pt x="3410204" y="2593964"/>
-                  </a:lnTo>
-                  <a:lnTo>
-                    <a:pt x="3487838" y="2571408"/>
-                  </a:lnTo>
-                  <a:lnTo>
-                    <a:pt x="3565472" y="2548371"/>
-                  </a:lnTo>
-                  <a:lnTo>
-                    <a:pt x="3643106" y="2524844"/>
-                  </a:lnTo>
-                  <a:lnTo>
-                    <a:pt x="3720740" y="2500816"/>
-                  </a:lnTo>
-                  <a:lnTo>
-                    <a:pt x="3798374" y="2476275"/>
-                  </a:lnTo>
-                  <a:lnTo>
-                    <a:pt x="3876008" y="2451212"/>
-                  </a:lnTo>
-                  <a:lnTo>
-                    <a:pt x="3953643" y="2425615"/>
-                  </a:lnTo>
-                  <a:lnTo>
-                    <a:pt x="4031277" y="2399472"/>
-                  </a:lnTo>
-                  <a:lnTo>
-                    <a:pt x="4108911" y="2372773"/>
-                  </a:lnTo>
-                  <a:lnTo>
-                    <a:pt x="4186545" y="2345504"/>
-                  </a:lnTo>
-                  <a:lnTo>
-                    <a:pt x="4264179" y="2317655"/>
-                  </a:lnTo>
-                  <a:lnTo>
-                    <a:pt x="4341813" y="2289212"/>
-                  </a:lnTo>
-                  <a:lnTo>
-                    <a:pt x="4419447" y="2260164"/>
-                  </a:lnTo>
-                  <a:lnTo>
-                    <a:pt x="4497081" y="2230496"/>
-                  </a:lnTo>
-                  <a:lnTo>
-                    <a:pt x="4574715" y="2200196"/>
-                  </a:lnTo>
-                  <a:lnTo>
-                    <a:pt x="4652349" y="2169251"/>
-                  </a:lnTo>
-                  <a:lnTo>
-                    <a:pt x="4729983" y="2137646"/>
-                  </a:lnTo>
-                  <a:lnTo>
-                    <a:pt x="4807617" y="2105368"/>
-                  </a:lnTo>
-                  <a:lnTo>
-                    <a:pt x="4885251" y="2072403"/>
-                  </a:lnTo>
-                  <a:lnTo>
-                    <a:pt x="4962885" y="2038735"/>
-                  </a:lnTo>
-                  <a:lnTo>
-                    <a:pt x="5040519" y="2004350"/>
-                  </a:lnTo>
-                  <a:lnTo>
-                    <a:pt x="5118153" y="1969232"/>
-                  </a:lnTo>
-                  <a:lnTo>
-                    <a:pt x="5195787" y="1933366"/>
-                  </a:lnTo>
-                  <a:lnTo>
-                    <a:pt x="5273421" y="1896735"/>
-                  </a:lnTo>
-                  <a:lnTo>
-                    <a:pt x="5351055" y="1859325"/>
-                  </a:lnTo>
-                  <a:lnTo>
-                    <a:pt x="5428689" y="1821117"/>
-                  </a:lnTo>
-                  <a:lnTo>
-                    <a:pt x="5506323" y="1782095"/>
-                  </a:lnTo>
-                  <a:lnTo>
-                    <a:pt x="5583957" y="1742242"/>
-                  </a:lnTo>
-                  <a:lnTo>
-                    <a:pt x="5661592" y="1701540"/>
-                  </a:lnTo>
-                  <a:lnTo>
-                    <a:pt x="5739226" y="1659970"/>
-                  </a:lnTo>
-                  <a:lnTo>
-                    <a:pt x="5816860" y="1617515"/>
-                  </a:lnTo>
-                  <a:lnTo>
-                    <a:pt x="5894494" y="1574155"/>
-                  </a:lnTo>
-                  <a:lnTo>
-                    <a:pt x="5972128" y="1529872"/>
-                  </a:lnTo>
-                  <a:lnTo>
-                    <a:pt x="6049762" y="1484645"/>
-                  </a:lnTo>
-                  <a:lnTo>
-                    <a:pt x="6127396" y="1438455"/>
-                  </a:lnTo>
-                  <a:lnTo>
-                    <a:pt x="6205030" y="1391280"/>
-                  </a:lnTo>
-                  <a:lnTo>
-                    <a:pt x="6282664" y="1343100"/>
-                  </a:lnTo>
-                  <a:lnTo>
-                    <a:pt x="6360298" y="1293894"/>
-                  </a:lnTo>
-                  <a:lnTo>
-                    <a:pt x="6437932" y="1243639"/>
-                  </a:lnTo>
-                  <a:lnTo>
-                    <a:pt x="6515566" y="1192314"/>
-                  </a:lnTo>
-                  <a:lnTo>
-                    <a:pt x="6593200" y="1139895"/>
-                  </a:lnTo>
-                  <a:lnTo>
-                    <a:pt x="6670834" y="1086360"/>
+                    <a:pt x="65186" y="157144"/>
+                  </a:lnTo>
+                  <a:lnTo>
+                    <a:pt x="142820" y="334785"/>
+                  </a:lnTo>
+                  <a:lnTo>
+                    <a:pt x="220454" y="503398"/>
+                  </a:lnTo>
+                  <a:lnTo>
+                    <a:pt x="298088" y="663442"/>
+                  </a:lnTo>
+                  <a:lnTo>
+                    <a:pt x="375722" y="815352"/>
+                  </a:lnTo>
+                  <a:lnTo>
+                    <a:pt x="453356" y="959543"/>
+                  </a:lnTo>
+                  <a:lnTo>
+                    <a:pt x="530990" y="1096406"/>
+                  </a:lnTo>
+                  <a:lnTo>
+                    <a:pt x="608624" y="1226313"/>
+                  </a:lnTo>
+                  <a:lnTo>
+                    <a:pt x="686258" y="1349619"/>
+                  </a:lnTo>
+                  <a:lnTo>
+                    <a:pt x="763893" y="1466658"/>
+                  </a:lnTo>
+                  <a:lnTo>
+                    <a:pt x="841527" y="1577749"/>
+                  </a:lnTo>
+                  <a:lnTo>
+                    <a:pt x="919161" y="1683195"/>
+                  </a:lnTo>
+                  <a:lnTo>
+                    <a:pt x="996795" y="1783282"/>
+                  </a:lnTo>
+                  <a:lnTo>
+                    <a:pt x="1074429" y="1878282"/>
+                  </a:lnTo>
+                  <a:lnTo>
+                    <a:pt x="1152063" y="1968455"/>
+                  </a:lnTo>
+                  <a:lnTo>
+                    <a:pt x="1229697" y="2054045"/>
+                  </a:lnTo>
+                  <a:lnTo>
+                    <a:pt x="1307331" y="2135286"/>
+                  </a:lnTo>
+                  <a:lnTo>
+                    <a:pt x="1384965" y="2212397"/>
+                  </a:lnTo>
+                  <a:lnTo>
+                    <a:pt x="1462599" y="2285590"/>
+                  </a:lnTo>
+                  <a:lnTo>
+                    <a:pt x="1540233" y="2355064"/>
+                  </a:lnTo>
+                  <a:lnTo>
+                    <a:pt x="1617867" y="2421006"/>
+                  </a:lnTo>
+                  <a:lnTo>
+                    <a:pt x="1695501" y="2483598"/>
+                  </a:lnTo>
+                  <a:lnTo>
+                    <a:pt x="1773135" y="2543009"/>
+                  </a:lnTo>
+                  <a:lnTo>
+                    <a:pt x="1850769" y="2599400"/>
+                  </a:lnTo>
+                  <a:lnTo>
+                    <a:pt x="1928403" y="2652926"/>
+                  </a:lnTo>
+                  <a:lnTo>
+                    <a:pt x="2006037" y="2703731"/>
+                  </a:lnTo>
+                  <a:lnTo>
+                    <a:pt x="2083671" y="2751955"/>
+                  </a:lnTo>
+                  <a:lnTo>
+                    <a:pt x="2161305" y="2776759"/>
+                  </a:lnTo>
+                  <a:lnTo>
+                    <a:pt x="2238939" y="2757571"/>
+                  </a:lnTo>
+                  <a:lnTo>
+                    <a:pt x="2316573" y="2737964"/>
+                  </a:lnTo>
+                  <a:lnTo>
+                    <a:pt x="2394207" y="2717927"/>
+                  </a:lnTo>
+                  <a:lnTo>
+                    <a:pt x="2471842" y="2697451"/>
+                  </a:lnTo>
+                  <a:lnTo>
+                    <a:pt x="2549476" y="2676526"/>
+                  </a:lnTo>
+                  <a:lnTo>
+                    <a:pt x="2627110" y="2655143"/>
+                  </a:lnTo>
+                  <a:lnTo>
+                    <a:pt x="2704744" y="2633292"/>
+                  </a:lnTo>
+                  <a:lnTo>
+                    <a:pt x="2782378" y="2610962"/>
+                  </a:lnTo>
+                  <a:lnTo>
+                    <a:pt x="2860012" y="2588143"/>
+                  </a:lnTo>
+                  <a:lnTo>
+                    <a:pt x="2937646" y="2564823"/>
+                  </a:lnTo>
+                  <a:lnTo>
+                    <a:pt x="3015280" y="2540993"/>
+                  </a:lnTo>
+                  <a:lnTo>
+                    <a:pt x="3092914" y="2516642"/>
+                  </a:lnTo>
+                  <a:lnTo>
+                    <a:pt x="3170548" y="2491756"/>
+                  </a:lnTo>
+                  <a:lnTo>
+                    <a:pt x="3248182" y="2466326"/>
+                  </a:lnTo>
+                  <a:lnTo>
+                    <a:pt x="3325816" y="2440338"/>
+                  </a:lnTo>
+                  <a:lnTo>
+                    <a:pt x="3403450" y="2413781"/>
+                  </a:lnTo>
+                  <a:lnTo>
+                    <a:pt x="3481084" y="2386642"/>
+                  </a:lnTo>
+                  <a:lnTo>
+                    <a:pt x="3558718" y="2358909"/>
+                  </a:lnTo>
+                  <a:lnTo>
+                    <a:pt x="3636352" y="2330568"/>
+                  </a:lnTo>
+                  <a:lnTo>
+                    <a:pt x="3713986" y="2301607"/>
+                  </a:lnTo>
+                  <a:lnTo>
+                    <a:pt x="3791620" y="2272011"/>
+                  </a:lnTo>
+                  <a:lnTo>
+                    <a:pt x="3869254" y="2241767"/>
+                  </a:lnTo>
+                  <a:lnTo>
+                    <a:pt x="3946888" y="2210860"/>
+                  </a:lnTo>
+                  <a:lnTo>
+                    <a:pt x="4024522" y="2179276"/>
+                  </a:lnTo>
+                  <a:lnTo>
+                    <a:pt x="4102156" y="2147000"/>
+                  </a:lnTo>
+                  <a:lnTo>
+                    <a:pt x="4179790" y="2114017"/>
+                  </a:lnTo>
+                  <a:lnTo>
+                    <a:pt x="4257425" y="2080312"/>
+                  </a:lnTo>
+                  <a:lnTo>
+                    <a:pt x="4335059" y="2045868"/>
+                  </a:lnTo>
+                  <a:lnTo>
+                    <a:pt x="4412693" y="2010670"/>
+                  </a:lnTo>
+                  <a:lnTo>
+                    <a:pt x="4490327" y="1974701"/>
+                  </a:lnTo>
+                  <a:lnTo>
+                    <a:pt x="4567961" y="1937943"/>
+                  </a:lnTo>
+                  <a:lnTo>
+                    <a:pt x="4645595" y="1900381"/>
+                  </a:lnTo>
+                  <a:lnTo>
+                    <a:pt x="4723229" y="1861996"/>
+                  </a:lnTo>
+                  <a:lnTo>
+                    <a:pt x="4800863" y="1822769"/>
+                  </a:lnTo>
+                  <a:lnTo>
+                    <a:pt x="4878497" y="1782684"/>
+                  </a:lnTo>
+                  <a:lnTo>
+                    <a:pt x="4956131" y="1741720"/>
+                  </a:lnTo>
+                  <a:lnTo>
+                    <a:pt x="5033765" y="1699859"/>
+                  </a:lnTo>
+                  <a:lnTo>
+                    <a:pt x="5111399" y="1657082"/>
+                  </a:lnTo>
+                  <a:lnTo>
+                    <a:pt x="5189033" y="1613366"/>
+                  </a:lnTo>
+                  <a:lnTo>
+                    <a:pt x="5266667" y="1568694"/>
+                  </a:lnTo>
+                  <a:lnTo>
+                    <a:pt x="5344301" y="1523043"/>
+                  </a:lnTo>
+                  <a:lnTo>
+                    <a:pt x="5421935" y="1476391"/>
+                  </a:lnTo>
+                  <a:lnTo>
+                    <a:pt x="5499569" y="1428718"/>
+                  </a:lnTo>
+                  <a:lnTo>
+                    <a:pt x="5577203" y="1380000"/>
+                  </a:lnTo>
+                  <a:lnTo>
+                    <a:pt x="5654837" y="1330215"/>
+                  </a:lnTo>
+                  <a:lnTo>
+                    <a:pt x="5732471" y="1279340"/>
+                  </a:lnTo>
+                  <a:lnTo>
+                    <a:pt x="5810105" y="1227350"/>
+                  </a:lnTo>
+                  <a:lnTo>
+                    <a:pt x="5887739" y="1174221"/>
+                  </a:lnTo>
+                  <a:lnTo>
+                    <a:pt x="5965374" y="1119929"/>
+                  </a:lnTo>
+                  <a:lnTo>
+                    <a:pt x="6043008" y="1064447"/>
+                  </a:lnTo>
+                  <a:lnTo>
+                    <a:pt x="6120642" y="1007749"/>
                   </a:lnTo>
                 </a:path>
               </a:pathLst>
@@ -3868,300 +3826,300 @@
           </p:nvSpPr>
           <p:spPr>
             <a:xfrm>
-              <a:off x="817517" y="4691289"/>
-              <a:ext cx="7370972" cy="754456"/>
+              <a:off x="817517" y="4692098"/>
+              <a:ext cx="7370972" cy="797308"/>
             </a:xfrm>
             <a:custGeom>
               <a:avLst/>
               <a:pathLst>
-                <a:path w="7370972" h="754456">
+                <a:path w="7370972" h="797308">
                   <a:moveTo>
-                    <a:pt x="7370972" y="754456"/>
+                    <a:pt x="7370972" y="797308"/>
                   </a:moveTo>
                   <a:lnTo>
-                    <a:pt x="7293338" y="750074"/>
-                  </a:lnTo>
-                  <a:lnTo>
-                    <a:pt x="7215704" y="745507"/>
-                  </a:lnTo>
-                  <a:lnTo>
-                    <a:pt x="7138070" y="740747"/>
-                  </a:lnTo>
-                  <a:lnTo>
-                    <a:pt x="7060436" y="735785"/>
-                  </a:lnTo>
-                  <a:lnTo>
-                    <a:pt x="6982802" y="730613"/>
-                  </a:lnTo>
-                  <a:lnTo>
-                    <a:pt x="6905168" y="725222"/>
-                  </a:lnTo>
-                  <a:lnTo>
-                    <a:pt x="6827534" y="719602"/>
-                  </a:lnTo>
-                  <a:lnTo>
-                    <a:pt x="6749900" y="713745"/>
-                  </a:lnTo>
-                  <a:lnTo>
-                    <a:pt x="6672266" y="707639"/>
-                  </a:lnTo>
-                  <a:lnTo>
-                    <a:pt x="6594632" y="701275"/>
-                  </a:lnTo>
-                  <a:lnTo>
-                    <a:pt x="6516998" y="694641"/>
-                  </a:lnTo>
-                  <a:lnTo>
-                    <a:pt x="6439364" y="687727"/>
-                  </a:lnTo>
-                  <a:lnTo>
-                    <a:pt x="6361730" y="680519"/>
-                  </a:lnTo>
-                  <a:lnTo>
-                    <a:pt x="6284096" y="673007"/>
-                  </a:lnTo>
-                  <a:lnTo>
-                    <a:pt x="6206462" y="665176"/>
-                  </a:lnTo>
-                  <a:lnTo>
-                    <a:pt x="6128827" y="657014"/>
-                  </a:lnTo>
-                  <a:lnTo>
-                    <a:pt x="6051193" y="648506"/>
-                  </a:lnTo>
-                  <a:lnTo>
-                    <a:pt x="5973559" y="639637"/>
-                  </a:lnTo>
-                  <a:lnTo>
-                    <a:pt x="5895925" y="630393"/>
-                  </a:lnTo>
-                  <a:lnTo>
-                    <a:pt x="5818291" y="620758"/>
-                  </a:lnTo>
-                  <a:lnTo>
-                    <a:pt x="5740657" y="610715"/>
-                  </a:lnTo>
-                  <a:lnTo>
-                    <a:pt x="5663023" y="600246"/>
-                  </a:lnTo>
-                  <a:lnTo>
-                    <a:pt x="5585389" y="589334"/>
-                  </a:lnTo>
-                  <a:lnTo>
-                    <a:pt x="5507755" y="577959"/>
-                  </a:lnTo>
-                  <a:lnTo>
-                    <a:pt x="5430121" y="566104"/>
-                  </a:lnTo>
-                  <a:lnTo>
-                    <a:pt x="5352487" y="553746"/>
-                  </a:lnTo>
-                  <a:lnTo>
-                    <a:pt x="5274853" y="540864"/>
-                  </a:lnTo>
-                  <a:lnTo>
-                    <a:pt x="5197219" y="527437"/>
-                  </a:lnTo>
-                  <a:lnTo>
-                    <a:pt x="5119585" y="513442"/>
-                  </a:lnTo>
-                  <a:lnTo>
-                    <a:pt x="5041951" y="498854"/>
-                  </a:lnTo>
-                  <a:lnTo>
-                    <a:pt x="4964317" y="483648"/>
-                  </a:lnTo>
-                  <a:lnTo>
-                    <a:pt x="4886683" y="467798"/>
-                  </a:lnTo>
-                  <a:lnTo>
-                    <a:pt x="4809049" y="451277"/>
-                  </a:lnTo>
-                  <a:lnTo>
-                    <a:pt x="4731415" y="434056"/>
-                  </a:lnTo>
-                  <a:lnTo>
-                    <a:pt x="4653781" y="416106"/>
-                  </a:lnTo>
-                  <a:lnTo>
-                    <a:pt x="4576147" y="397396"/>
-                  </a:lnTo>
-                  <a:lnTo>
-                    <a:pt x="4498513" y="377894"/>
-                  </a:lnTo>
-                  <a:lnTo>
-                    <a:pt x="4420879" y="357565"/>
-                  </a:lnTo>
-                  <a:lnTo>
-                    <a:pt x="4343244" y="336376"/>
-                  </a:lnTo>
-                  <a:lnTo>
-                    <a:pt x="4265610" y="314289"/>
-                  </a:lnTo>
-                  <a:lnTo>
-                    <a:pt x="4187976" y="291267"/>
-                  </a:lnTo>
-                  <a:lnTo>
-                    <a:pt x="4110342" y="267270"/>
-                  </a:lnTo>
-                  <a:lnTo>
-                    <a:pt x="4032708" y="242257"/>
-                  </a:lnTo>
-                  <a:lnTo>
-                    <a:pt x="3955074" y="216185"/>
-                  </a:lnTo>
-                  <a:lnTo>
-                    <a:pt x="3877440" y="189008"/>
-                  </a:lnTo>
-                  <a:lnTo>
-                    <a:pt x="3799806" y="160680"/>
-                  </a:lnTo>
-                  <a:lnTo>
-                    <a:pt x="3722172" y="131153"/>
-                  </a:lnTo>
-                  <a:lnTo>
-                    <a:pt x="3644538" y="100376"/>
-                  </a:lnTo>
-                  <a:lnTo>
-                    <a:pt x="3566904" y="68295"/>
-                  </a:lnTo>
-                  <a:lnTo>
-                    <a:pt x="3489270" y="34855"/>
-                  </a:lnTo>
-                  <a:lnTo>
-                    <a:pt x="3411636" y="0"/>
-                  </a:lnTo>
-                  <a:lnTo>
-                    <a:pt x="3334002" y="470"/>
-                  </a:lnTo>
-                  <a:lnTo>
-                    <a:pt x="3256368" y="18358"/>
-                  </a:lnTo>
-                  <a:lnTo>
-                    <a:pt x="3178734" y="35872"/>
-                  </a:lnTo>
-                  <a:lnTo>
-                    <a:pt x="3101100" y="53021"/>
-                  </a:lnTo>
-                  <a:lnTo>
-                    <a:pt x="3023466" y="69812"/>
-                  </a:lnTo>
-                  <a:lnTo>
-                    <a:pt x="2945832" y="86252"/>
-                  </a:lnTo>
-                  <a:lnTo>
-                    <a:pt x="2868198" y="102350"/>
-                  </a:lnTo>
-                  <a:lnTo>
-                    <a:pt x="2790564" y="118112"/>
-                  </a:lnTo>
-                  <a:lnTo>
-                    <a:pt x="2712930" y="133545"/>
-                  </a:lnTo>
-                  <a:lnTo>
-                    <a:pt x="2635295" y="148657"/>
-                  </a:lnTo>
-                  <a:lnTo>
-                    <a:pt x="2557661" y="163453"/>
-                  </a:lnTo>
-                  <a:lnTo>
-                    <a:pt x="2480027" y="177940"/>
-                  </a:lnTo>
-                  <a:lnTo>
-                    <a:pt x="2402393" y="192125"/>
-                  </a:lnTo>
-                  <a:lnTo>
-                    <a:pt x="2324759" y="206014"/>
-                  </a:lnTo>
-                  <a:lnTo>
-                    <a:pt x="2247125" y="219614"/>
-                  </a:lnTo>
-                  <a:lnTo>
-                    <a:pt x="2169491" y="232929"/>
-                  </a:lnTo>
-                  <a:lnTo>
-                    <a:pt x="2091857" y="245967"/>
-                  </a:lnTo>
-                  <a:lnTo>
-                    <a:pt x="2014223" y="258733"/>
-                  </a:lnTo>
-                  <a:lnTo>
-                    <a:pt x="1936589" y="271233"/>
-                  </a:lnTo>
-                  <a:lnTo>
-                    <a:pt x="1858955" y="283472"/>
-                  </a:lnTo>
-                  <a:lnTo>
-                    <a:pt x="1781321" y="295456"/>
-                  </a:lnTo>
-                  <a:lnTo>
-                    <a:pt x="1703687" y="307189"/>
-                  </a:lnTo>
-                  <a:lnTo>
-                    <a:pt x="1626053" y="318678"/>
-                  </a:lnTo>
-                  <a:lnTo>
-                    <a:pt x="1548419" y="329927"/>
-                  </a:lnTo>
-                  <a:lnTo>
-                    <a:pt x="1470785" y="340942"/>
-                  </a:lnTo>
-                  <a:lnTo>
-                    <a:pt x="1393151" y="351726"/>
-                  </a:lnTo>
-                  <a:lnTo>
-                    <a:pt x="1315517" y="362286"/>
-                  </a:lnTo>
-                  <a:lnTo>
-                    <a:pt x="1237883" y="372626"/>
-                  </a:lnTo>
-                  <a:lnTo>
-                    <a:pt x="1160249" y="382749"/>
-                  </a:lnTo>
-                  <a:lnTo>
-                    <a:pt x="1082615" y="392662"/>
-                  </a:lnTo>
-                  <a:lnTo>
-                    <a:pt x="1004981" y="402368"/>
-                  </a:lnTo>
-                  <a:lnTo>
-                    <a:pt x="927346" y="411871"/>
-                  </a:lnTo>
-                  <a:lnTo>
-                    <a:pt x="849712" y="421176"/>
-                  </a:lnTo>
-                  <a:lnTo>
-                    <a:pt x="772078" y="430287"/>
-                  </a:lnTo>
-                  <a:lnTo>
-                    <a:pt x="694444" y="439208"/>
-                  </a:lnTo>
-                  <a:lnTo>
-                    <a:pt x="616810" y="447943"/>
-                  </a:lnTo>
-                  <a:lnTo>
-                    <a:pt x="539176" y="456495"/>
-                  </a:lnTo>
-                  <a:lnTo>
-                    <a:pt x="461542" y="464869"/>
-                  </a:lnTo>
-                  <a:lnTo>
-                    <a:pt x="383908" y="473069"/>
-                  </a:lnTo>
-                  <a:lnTo>
-                    <a:pt x="306274" y="481097"/>
-                  </a:lnTo>
-                  <a:lnTo>
-                    <a:pt x="228640" y="488958"/>
-                  </a:lnTo>
-                  <a:lnTo>
-                    <a:pt x="151006" y="496655"/>
-                  </a:lnTo>
-                  <a:lnTo>
-                    <a:pt x="73372" y="504191"/>
-                  </a:lnTo>
-                  <a:lnTo>
-                    <a:pt x="0" y="511165"/>
+                    <a:pt x="7293338" y="794106"/>
+                  </a:lnTo>
+                  <a:lnTo>
+                    <a:pt x="7215704" y="790733"/>
+                  </a:lnTo>
+                  <a:lnTo>
+                    <a:pt x="7138070" y="787179"/>
+                  </a:lnTo>
+                  <a:lnTo>
+                    <a:pt x="7060436" y="783435"/>
+                  </a:lnTo>
+                  <a:lnTo>
+                    <a:pt x="6982802" y="779490"/>
+                  </a:lnTo>
+                  <a:lnTo>
+                    <a:pt x="6905168" y="775335"/>
+                  </a:lnTo>
+                  <a:lnTo>
+                    <a:pt x="6827534" y="770956"/>
+                  </a:lnTo>
+                  <a:lnTo>
+                    <a:pt x="6749900" y="766344"/>
+                  </a:lnTo>
+                  <a:lnTo>
+                    <a:pt x="6672266" y="761484"/>
+                  </a:lnTo>
+                  <a:lnTo>
+                    <a:pt x="6594632" y="756364"/>
+                  </a:lnTo>
+                  <a:lnTo>
+                    <a:pt x="6516998" y="750970"/>
+                  </a:lnTo>
+                  <a:lnTo>
+                    <a:pt x="6439364" y="745288"/>
+                  </a:lnTo>
+                  <a:lnTo>
+                    <a:pt x="6361730" y="739301"/>
+                  </a:lnTo>
+                  <a:lnTo>
+                    <a:pt x="6284096" y="732993"/>
+                  </a:lnTo>
+                  <a:lnTo>
+                    <a:pt x="6206462" y="726348"/>
+                  </a:lnTo>
+                  <a:lnTo>
+                    <a:pt x="6128827" y="719347"/>
+                  </a:lnTo>
+                  <a:lnTo>
+                    <a:pt x="6051193" y="711971"/>
+                  </a:lnTo>
+                  <a:lnTo>
+                    <a:pt x="5973559" y="704200"/>
+                  </a:lnTo>
+                  <a:lnTo>
+                    <a:pt x="5895925" y="696014"/>
+                  </a:lnTo>
+                  <a:lnTo>
+                    <a:pt x="5818291" y="687389"/>
+                  </a:lnTo>
+                  <a:lnTo>
+                    <a:pt x="5740657" y="678302"/>
+                  </a:lnTo>
+                  <a:lnTo>
+                    <a:pt x="5663023" y="668728"/>
+                  </a:lnTo>
+                  <a:lnTo>
+                    <a:pt x="5585389" y="658642"/>
+                  </a:lnTo>
+                  <a:lnTo>
+                    <a:pt x="5507755" y="648016"/>
+                  </a:lnTo>
+                  <a:lnTo>
+                    <a:pt x="5430121" y="636821"/>
+                  </a:lnTo>
+                  <a:lnTo>
+                    <a:pt x="5352487" y="625027"/>
+                  </a:lnTo>
+                  <a:lnTo>
+                    <a:pt x="5274853" y="612601"/>
+                  </a:lnTo>
+                  <a:lnTo>
+                    <a:pt x="5197219" y="599510"/>
+                  </a:lnTo>
+                  <a:lnTo>
+                    <a:pt x="5119585" y="585718"/>
+                  </a:lnTo>
+                  <a:lnTo>
+                    <a:pt x="5041951" y="571188"/>
+                  </a:lnTo>
+                  <a:lnTo>
+                    <a:pt x="4964317" y="555879"/>
+                  </a:lnTo>
+                  <a:lnTo>
+                    <a:pt x="4886683" y="539751"/>
+                  </a:lnTo>
+                  <a:lnTo>
+                    <a:pt x="4809049" y="522760"/>
+                  </a:lnTo>
+                  <a:lnTo>
+                    <a:pt x="4731415" y="504858"/>
+                  </a:lnTo>
+                  <a:lnTo>
+                    <a:pt x="4653781" y="485999"/>
+                  </a:lnTo>
+                  <a:lnTo>
+                    <a:pt x="4576147" y="466129"/>
+                  </a:lnTo>
+                  <a:lnTo>
+                    <a:pt x="4498513" y="445196"/>
+                  </a:lnTo>
+                  <a:lnTo>
+                    <a:pt x="4420879" y="423142"/>
+                  </a:lnTo>
+                  <a:lnTo>
+                    <a:pt x="4343244" y="399907"/>
+                  </a:lnTo>
+                  <a:lnTo>
+                    <a:pt x="4265610" y="375428"/>
+                  </a:lnTo>
+                  <a:lnTo>
+                    <a:pt x="4187976" y="349639"/>
+                  </a:lnTo>
+                  <a:lnTo>
+                    <a:pt x="4110342" y="322468"/>
+                  </a:lnTo>
+                  <a:lnTo>
+                    <a:pt x="4032708" y="293843"/>
+                  </a:lnTo>
+                  <a:lnTo>
+                    <a:pt x="3955074" y="263686"/>
+                  </a:lnTo>
+                  <a:lnTo>
+                    <a:pt x="3877440" y="231913"/>
+                  </a:lnTo>
+                  <a:lnTo>
+                    <a:pt x="3799806" y="198440"/>
+                  </a:lnTo>
+                  <a:lnTo>
+                    <a:pt x="3722172" y="163174"/>
+                  </a:lnTo>
+                  <a:lnTo>
+                    <a:pt x="3644538" y="126021"/>
+                  </a:lnTo>
+                  <a:lnTo>
+                    <a:pt x="3566904" y="86878"/>
+                  </a:lnTo>
+                  <a:lnTo>
+                    <a:pt x="3489270" y="45639"/>
+                  </a:lnTo>
+                  <a:lnTo>
+                    <a:pt x="3411636" y="2192"/>
+                  </a:lnTo>
+                  <a:lnTo>
+                    <a:pt x="3334002" y="0"/>
+                  </a:lnTo>
+                  <a:lnTo>
+                    <a:pt x="3256368" y="18373"/>
+                  </a:lnTo>
+                  <a:lnTo>
+                    <a:pt x="3178734" y="36353"/>
+                  </a:lnTo>
+                  <a:lnTo>
+                    <a:pt x="3101100" y="53947"/>
+                  </a:lnTo>
+                  <a:lnTo>
+                    <a:pt x="3023466" y="71164"/>
+                  </a:lnTo>
+                  <a:lnTo>
+                    <a:pt x="2945832" y="88012"/>
+                  </a:lnTo>
+                  <a:lnTo>
+                    <a:pt x="2868198" y="104498"/>
+                  </a:lnTo>
+                  <a:lnTo>
+                    <a:pt x="2790564" y="120632"/>
+                  </a:lnTo>
+                  <a:lnTo>
+                    <a:pt x="2712930" y="136419"/>
+                  </a:lnTo>
+                  <a:lnTo>
+                    <a:pt x="2635295" y="151868"/>
+                  </a:lnTo>
+                  <a:lnTo>
+                    <a:pt x="2557661" y="166986"/>
+                  </a:lnTo>
+                  <a:lnTo>
+                    <a:pt x="2480027" y="181780"/>
+                  </a:lnTo>
+                  <a:lnTo>
+                    <a:pt x="2402393" y="196257"/>
+                  </a:lnTo>
+                  <a:lnTo>
+                    <a:pt x="2324759" y="210423"/>
+                  </a:lnTo>
+                  <a:lnTo>
+                    <a:pt x="2247125" y="224286"/>
+                  </a:lnTo>
+                  <a:lnTo>
+                    <a:pt x="2169491" y="237851"/>
+                  </a:lnTo>
+                  <a:lnTo>
+                    <a:pt x="2091857" y="251126"/>
+                  </a:lnTo>
+                  <a:lnTo>
+                    <a:pt x="2014223" y="264116"/>
+                  </a:lnTo>
+                  <a:lnTo>
+                    <a:pt x="1936589" y="276828"/>
+                  </a:lnTo>
+                  <a:lnTo>
+                    <a:pt x="1858955" y="289267"/>
+                  </a:lnTo>
+                  <a:lnTo>
+                    <a:pt x="1781321" y="301440"/>
+                  </a:lnTo>
+                  <a:lnTo>
+                    <a:pt x="1703687" y="313351"/>
+                  </a:lnTo>
+                  <a:lnTo>
+                    <a:pt x="1626053" y="325008"/>
+                  </a:lnTo>
+                  <a:lnTo>
+                    <a:pt x="1548419" y="336414"/>
+                  </a:lnTo>
+                  <a:lnTo>
+                    <a:pt x="1470785" y="347576"/>
+                  </a:lnTo>
+                  <a:lnTo>
+                    <a:pt x="1393151" y="358498"/>
+                  </a:lnTo>
+                  <a:lnTo>
+                    <a:pt x="1315517" y="369187"/>
+                  </a:lnTo>
+                  <a:lnTo>
+                    <a:pt x="1237883" y="379646"/>
+                  </a:lnTo>
+                  <a:lnTo>
+                    <a:pt x="1160249" y="389881"/>
+                  </a:lnTo>
+                  <a:lnTo>
+                    <a:pt x="1082615" y="399897"/>
+                  </a:lnTo>
+                  <a:lnTo>
+                    <a:pt x="1004981" y="409698"/>
+                  </a:lnTo>
+                  <a:lnTo>
+                    <a:pt x="927346" y="419289"/>
+                  </a:lnTo>
+                  <a:lnTo>
+                    <a:pt x="849712" y="428674"/>
+                  </a:lnTo>
+                  <a:lnTo>
+                    <a:pt x="772078" y="437859"/>
+                  </a:lnTo>
+                  <a:lnTo>
+                    <a:pt x="694444" y="446846"/>
+                  </a:lnTo>
+                  <a:lnTo>
+                    <a:pt x="616810" y="455640"/>
+                  </a:lnTo>
+                  <a:lnTo>
+                    <a:pt x="539176" y="464247"/>
+                  </a:lnTo>
+                  <a:lnTo>
+                    <a:pt x="461542" y="472668"/>
+                  </a:lnTo>
+                  <a:lnTo>
+                    <a:pt x="383908" y="480909"/>
+                  </a:lnTo>
+                  <a:lnTo>
+                    <a:pt x="306274" y="488974"/>
+                  </a:lnTo>
+                  <a:lnTo>
+                    <a:pt x="228640" y="496865"/>
+                  </a:lnTo>
+                  <a:lnTo>
+                    <a:pt x="151006" y="504588"/>
+                  </a:lnTo>
+                  <a:lnTo>
+                    <a:pt x="73372" y="512144"/>
+                  </a:lnTo>
+                  <a:lnTo>
+                    <a:pt x="0" y="519133"/>
                   </a:lnTo>
                 </a:path>
               </a:pathLst>
@@ -4181,300 +4139,300 @@
           </p:nvSpPr>
           <p:spPr>
             <a:xfrm>
-              <a:off x="817517" y="4192380"/>
-              <a:ext cx="7370972" cy="841548"/>
+              <a:off x="817517" y="3858332"/>
+              <a:ext cx="7370972" cy="1293173"/>
             </a:xfrm>
             <a:custGeom>
               <a:avLst/>
               <a:pathLst>
-                <a:path w="7370972" h="841548">
+                <a:path w="7370972" h="1293173">
                   <a:moveTo>
                     <a:pt x="0" y="0"/>
                   </a:moveTo>
                   <a:lnTo>
-                    <a:pt x="73372" y="13017"/>
-                  </a:lnTo>
-                  <a:lnTo>
-                    <a:pt x="151006" y="26651"/>
-                  </a:lnTo>
-                  <a:lnTo>
-                    <a:pt x="228640" y="40146"/>
-                  </a:lnTo>
-                  <a:lnTo>
-                    <a:pt x="306274" y="53505"/>
-                  </a:lnTo>
-                  <a:lnTo>
-                    <a:pt x="383908" y="66728"/>
-                  </a:lnTo>
-                  <a:lnTo>
-                    <a:pt x="461542" y="79816"/>
-                  </a:lnTo>
-                  <a:lnTo>
-                    <a:pt x="539176" y="92772"/>
-                  </a:lnTo>
-                  <a:lnTo>
-                    <a:pt x="616810" y="105597"/>
-                  </a:lnTo>
-                  <a:lnTo>
-                    <a:pt x="694444" y="118291"/>
-                  </a:lnTo>
-                  <a:lnTo>
-                    <a:pt x="772078" y="130857"/>
-                  </a:lnTo>
-                  <a:lnTo>
-                    <a:pt x="849712" y="143295"/>
-                  </a:lnTo>
-                  <a:lnTo>
-                    <a:pt x="927346" y="155607"/>
-                  </a:lnTo>
-                  <a:lnTo>
-                    <a:pt x="1004981" y="167794"/>
-                  </a:lnTo>
-                  <a:lnTo>
-                    <a:pt x="1082615" y="179858"/>
-                  </a:lnTo>
-                  <a:lnTo>
-                    <a:pt x="1160249" y="191799"/>
-                  </a:lnTo>
-                  <a:lnTo>
-                    <a:pt x="1237883" y="203619"/>
-                  </a:lnTo>
-                  <a:lnTo>
-                    <a:pt x="1315517" y="215319"/>
-                  </a:lnTo>
-                  <a:lnTo>
-                    <a:pt x="1393151" y="226900"/>
-                  </a:lnTo>
-                  <a:lnTo>
-                    <a:pt x="1470785" y="238364"/>
-                  </a:lnTo>
-                  <a:lnTo>
-                    <a:pt x="1548419" y="249711"/>
-                  </a:lnTo>
-                  <a:lnTo>
-                    <a:pt x="1626053" y="260943"/>
-                  </a:lnTo>
-                  <a:lnTo>
-                    <a:pt x="1703687" y="272062"/>
-                  </a:lnTo>
-                  <a:lnTo>
-                    <a:pt x="1781321" y="283067"/>
-                  </a:lnTo>
-                  <a:lnTo>
-                    <a:pt x="1858955" y="293961"/>
-                  </a:lnTo>
-                  <a:lnTo>
-                    <a:pt x="1936589" y="304745"/>
-                  </a:lnTo>
-                  <a:lnTo>
-                    <a:pt x="2014223" y="315419"/>
-                  </a:lnTo>
-                  <a:lnTo>
-                    <a:pt x="2091857" y="325984"/>
-                  </a:lnTo>
-                  <a:lnTo>
-                    <a:pt x="2169491" y="336443"/>
-                  </a:lnTo>
-                  <a:lnTo>
-                    <a:pt x="2247125" y="346795"/>
-                  </a:lnTo>
-                  <a:lnTo>
-                    <a:pt x="2324759" y="357043"/>
-                  </a:lnTo>
-                  <a:lnTo>
-                    <a:pt x="2402393" y="367186"/>
-                  </a:lnTo>
-                  <a:lnTo>
-                    <a:pt x="2480027" y="377226"/>
-                  </a:lnTo>
-                  <a:lnTo>
-                    <a:pt x="2557661" y="387165"/>
-                  </a:lnTo>
-                  <a:lnTo>
-                    <a:pt x="2635295" y="397003"/>
-                  </a:lnTo>
-                  <a:lnTo>
-                    <a:pt x="2712930" y="406741"/>
-                  </a:lnTo>
-                  <a:lnTo>
-                    <a:pt x="2790564" y="416380"/>
-                  </a:lnTo>
-                  <a:lnTo>
-                    <a:pt x="2868198" y="425921"/>
-                  </a:lnTo>
-                  <a:lnTo>
-                    <a:pt x="2945832" y="435366"/>
-                  </a:lnTo>
-                  <a:lnTo>
-                    <a:pt x="3023466" y="444715"/>
-                  </a:lnTo>
-                  <a:lnTo>
-                    <a:pt x="3101100" y="453969"/>
-                  </a:lnTo>
-                  <a:lnTo>
-                    <a:pt x="3178734" y="463129"/>
-                  </a:lnTo>
-                  <a:lnTo>
-                    <a:pt x="3256368" y="472196"/>
-                  </a:lnTo>
-                  <a:lnTo>
-                    <a:pt x="3334002" y="481171"/>
-                  </a:lnTo>
-                  <a:lnTo>
-                    <a:pt x="3411636" y="490055"/>
-                  </a:lnTo>
-                  <a:lnTo>
-                    <a:pt x="3489270" y="498849"/>
-                  </a:lnTo>
-                  <a:lnTo>
-                    <a:pt x="3566904" y="507553"/>
-                  </a:lnTo>
-                  <a:lnTo>
-                    <a:pt x="3644538" y="516170"/>
-                  </a:lnTo>
-                  <a:lnTo>
-                    <a:pt x="3722172" y="524699"/>
-                  </a:lnTo>
-                  <a:lnTo>
-                    <a:pt x="3799806" y="533141"/>
-                  </a:lnTo>
-                  <a:lnTo>
-                    <a:pt x="3877440" y="541498"/>
-                  </a:lnTo>
-                  <a:lnTo>
-                    <a:pt x="3955074" y="549770"/>
-                  </a:lnTo>
-                  <a:lnTo>
-                    <a:pt x="4032708" y="557958"/>
-                  </a:lnTo>
-                  <a:lnTo>
-                    <a:pt x="4110342" y="566063"/>
-                  </a:lnTo>
-                  <a:lnTo>
-                    <a:pt x="4187976" y="574086"/>
-                  </a:lnTo>
-                  <a:lnTo>
-                    <a:pt x="4265610" y="582027"/>
-                  </a:lnTo>
-                  <a:lnTo>
-                    <a:pt x="4343244" y="589888"/>
-                  </a:lnTo>
-                  <a:lnTo>
-                    <a:pt x="4420879" y="597669"/>
-                  </a:lnTo>
-                  <a:lnTo>
-                    <a:pt x="4498513" y="605371"/>
-                  </a:lnTo>
-                  <a:lnTo>
-                    <a:pt x="4576147" y="612995"/>
-                  </a:lnTo>
-                  <a:lnTo>
-                    <a:pt x="4653781" y="620542"/>
-                  </a:lnTo>
-                  <a:lnTo>
-                    <a:pt x="4731415" y="628012"/>
-                  </a:lnTo>
-                  <a:lnTo>
-                    <a:pt x="4809049" y="635406"/>
-                  </a:lnTo>
-                  <a:lnTo>
-                    <a:pt x="4886683" y="642725"/>
-                  </a:lnTo>
-                  <a:lnTo>
-                    <a:pt x="4964317" y="649970"/>
-                  </a:lnTo>
-                  <a:lnTo>
-                    <a:pt x="5041951" y="657141"/>
-                  </a:lnTo>
-                  <a:lnTo>
-                    <a:pt x="5119585" y="664240"/>
-                  </a:lnTo>
-                  <a:lnTo>
-                    <a:pt x="5197219" y="671267"/>
-                  </a:lnTo>
-                  <a:lnTo>
-                    <a:pt x="5274853" y="678222"/>
-                  </a:lnTo>
-                  <a:lnTo>
-                    <a:pt x="5352487" y="685107"/>
-                  </a:lnTo>
-                  <a:lnTo>
-                    <a:pt x="5430121" y="691922"/>
-                  </a:lnTo>
-                  <a:lnTo>
-                    <a:pt x="5507755" y="698668"/>
-                  </a:lnTo>
-                  <a:lnTo>
-                    <a:pt x="5585389" y="705345"/>
-                  </a:lnTo>
-                  <a:lnTo>
-                    <a:pt x="5663023" y="711955"/>
-                  </a:lnTo>
-                  <a:lnTo>
-                    <a:pt x="5740657" y="718498"/>
-                  </a:lnTo>
-                  <a:lnTo>
-                    <a:pt x="5818291" y="724974"/>
-                  </a:lnTo>
-                  <a:lnTo>
-                    <a:pt x="5895925" y="731384"/>
-                  </a:lnTo>
-                  <a:lnTo>
-                    <a:pt x="5973559" y="737730"/>
-                  </a:lnTo>
-                  <a:lnTo>
-                    <a:pt x="6051193" y="744011"/>
-                  </a:lnTo>
-                  <a:lnTo>
-                    <a:pt x="6128827" y="750228"/>
-                  </a:lnTo>
-                  <a:lnTo>
-                    <a:pt x="6206462" y="756383"/>
-                  </a:lnTo>
-                  <a:lnTo>
-                    <a:pt x="6284096" y="762474"/>
-                  </a:lnTo>
-                  <a:lnTo>
-                    <a:pt x="6361730" y="768504"/>
-                  </a:lnTo>
-                  <a:lnTo>
-                    <a:pt x="6439364" y="774473"/>
-                  </a:lnTo>
-                  <a:lnTo>
-                    <a:pt x="6516998" y="780382"/>
-                  </a:lnTo>
-                  <a:lnTo>
-                    <a:pt x="6594632" y="786230"/>
-                  </a:lnTo>
-                  <a:lnTo>
-                    <a:pt x="6672266" y="792019"/>
-                  </a:lnTo>
-                  <a:lnTo>
-                    <a:pt x="6749900" y="797749"/>
-                  </a:lnTo>
-                  <a:lnTo>
-                    <a:pt x="6827534" y="803421"/>
-                  </a:lnTo>
-                  <a:lnTo>
-                    <a:pt x="6905168" y="809036"/>
-                  </a:lnTo>
-                  <a:lnTo>
-                    <a:pt x="6982802" y="814594"/>
-                  </a:lnTo>
-                  <a:lnTo>
-                    <a:pt x="7060436" y="820095"/>
-                  </a:lnTo>
-                  <a:lnTo>
-                    <a:pt x="7138070" y="825540"/>
-                  </a:lnTo>
-                  <a:lnTo>
-                    <a:pt x="7215704" y="830931"/>
-                  </a:lnTo>
-                  <a:lnTo>
-                    <a:pt x="7293338" y="836266"/>
-                  </a:lnTo>
-                  <a:lnTo>
-                    <a:pt x="7370972" y="841548"/>
+                    <a:pt x="73372" y="24195"/>
+                  </a:lnTo>
+                  <a:lnTo>
+                    <a:pt x="151006" y="49408"/>
+                  </a:lnTo>
+                  <a:lnTo>
+                    <a:pt x="228640" y="74240"/>
+                  </a:lnTo>
+                  <a:lnTo>
+                    <a:pt x="306274" y="98696"/>
+                  </a:lnTo>
+                  <a:lnTo>
+                    <a:pt x="383908" y="122783"/>
+                  </a:lnTo>
+                  <a:lnTo>
+                    <a:pt x="461542" y="146505"/>
+                  </a:lnTo>
+                  <a:lnTo>
+                    <a:pt x="539176" y="169868"/>
+                  </a:lnTo>
+                  <a:lnTo>
+                    <a:pt x="616810" y="192877"/>
+                  </a:lnTo>
+                  <a:lnTo>
+                    <a:pt x="694444" y="215539"/>
+                  </a:lnTo>
+                  <a:lnTo>
+                    <a:pt x="772078" y="237857"/>
+                  </a:lnTo>
+                  <a:lnTo>
+                    <a:pt x="849712" y="259838"/>
+                  </a:lnTo>
+                  <a:lnTo>
+                    <a:pt x="927346" y="281487"/>
+                  </a:lnTo>
+                  <a:lnTo>
+                    <a:pt x="1004981" y="302808"/>
+                  </a:lnTo>
+                  <a:lnTo>
+                    <a:pt x="1082615" y="323807"/>
+                  </a:lnTo>
+                  <a:lnTo>
+                    <a:pt x="1160249" y="344487"/>
+                  </a:lnTo>
+                  <a:lnTo>
+                    <a:pt x="1237883" y="364855"/>
+                  </a:lnTo>
+                  <a:lnTo>
+                    <a:pt x="1315517" y="384915"/>
+                  </a:lnTo>
+                  <a:lnTo>
+                    <a:pt x="1393151" y="404672"/>
+                  </a:lnTo>
+                  <a:lnTo>
+                    <a:pt x="1470785" y="424129"/>
+                  </a:lnTo>
+                  <a:lnTo>
+                    <a:pt x="1548419" y="443292"/>
+                  </a:lnTo>
+                  <a:lnTo>
+                    <a:pt x="1626053" y="462166"/>
+                  </a:lnTo>
+                  <a:lnTo>
+                    <a:pt x="1703687" y="480753"/>
+                  </a:lnTo>
+                  <a:lnTo>
+                    <a:pt x="1781321" y="499060"/>
+                  </a:lnTo>
+                  <a:lnTo>
+                    <a:pt x="1858955" y="517090"/>
+                  </a:lnTo>
+                  <a:lnTo>
+                    <a:pt x="1936589" y="534846"/>
+                  </a:lnTo>
+                  <a:lnTo>
+                    <a:pt x="2014223" y="552335"/>
+                  </a:lnTo>
+                  <a:lnTo>
+                    <a:pt x="2091857" y="569558"/>
+                  </a:lnTo>
+                  <a:lnTo>
+                    <a:pt x="2169491" y="586522"/>
+                  </a:lnTo>
+                  <a:lnTo>
+                    <a:pt x="2247125" y="603228"/>
+                  </a:lnTo>
+                  <a:lnTo>
+                    <a:pt x="2324759" y="619682"/>
+                  </a:lnTo>
+                  <a:lnTo>
+                    <a:pt x="2402393" y="635887"/>
+                  </a:lnTo>
+                  <a:lnTo>
+                    <a:pt x="2480027" y="651846"/>
+                  </a:lnTo>
+                  <a:lnTo>
+                    <a:pt x="2557661" y="667565"/>
+                  </a:lnTo>
+                  <a:lnTo>
+                    <a:pt x="2635295" y="683045"/>
+                  </a:lnTo>
+                  <a:lnTo>
+                    <a:pt x="2712930" y="698292"/>
+                  </a:lnTo>
+                  <a:lnTo>
+                    <a:pt x="2790564" y="713307"/>
+                  </a:lnTo>
+                  <a:lnTo>
+                    <a:pt x="2868198" y="728096"/>
+                  </a:lnTo>
+                  <a:lnTo>
+                    <a:pt x="2945832" y="742661"/>
+                  </a:lnTo>
+                  <a:lnTo>
+                    <a:pt x="3023466" y="757005"/>
+                  </a:lnTo>
+                  <a:lnTo>
+                    <a:pt x="3101100" y="771133"/>
+                  </a:lnTo>
+                  <a:lnTo>
+                    <a:pt x="3178734" y="785046"/>
+                  </a:lnTo>
+                  <a:lnTo>
+                    <a:pt x="3256368" y="798750"/>
+                  </a:lnTo>
+                  <a:lnTo>
+                    <a:pt x="3334002" y="812246"/>
+                  </a:lnTo>
+                  <a:lnTo>
+                    <a:pt x="3411636" y="825537"/>
+                  </a:lnTo>
+                  <a:lnTo>
+                    <a:pt x="3489270" y="838628"/>
+                  </a:lnTo>
+                  <a:lnTo>
+                    <a:pt x="3566904" y="851521"/>
+                  </a:lnTo>
+                  <a:lnTo>
+                    <a:pt x="3644538" y="864218"/>
+                  </a:lnTo>
+                  <a:lnTo>
+                    <a:pt x="3722172" y="876724"/>
+                  </a:lnTo>
+                  <a:lnTo>
+                    <a:pt x="3799806" y="889040"/>
+                  </a:lnTo>
+                  <a:lnTo>
+                    <a:pt x="3877440" y="901170"/>
+                  </a:lnTo>
+                  <a:lnTo>
+                    <a:pt x="3955074" y="913117"/>
+                  </a:lnTo>
+                  <a:lnTo>
+                    <a:pt x="4032708" y="924883"/>
+                  </a:lnTo>
+                  <a:lnTo>
+                    <a:pt x="4110342" y="936471"/>
+                  </a:lnTo>
+                  <a:lnTo>
+                    <a:pt x="4187976" y="947883"/>
+                  </a:lnTo>
+                  <a:lnTo>
+                    <a:pt x="4265610" y="959123"/>
+                  </a:lnTo>
+                  <a:lnTo>
+                    <a:pt x="4343244" y="970193"/>
+                  </a:lnTo>
+                  <a:lnTo>
+                    <a:pt x="4420879" y="981095"/>
+                  </a:lnTo>
+                  <a:lnTo>
+                    <a:pt x="4498513" y="991833"/>
+                  </a:lnTo>
+                  <a:lnTo>
+                    <a:pt x="4576147" y="1002408"/>
+                  </a:lnTo>
+                  <a:lnTo>
+                    <a:pt x="4653781" y="1012823"/>
+                  </a:lnTo>
+                  <a:lnTo>
+                    <a:pt x="4731415" y="1023080"/>
+                  </a:lnTo>
+                  <a:lnTo>
+                    <a:pt x="4809049" y="1033182"/>
+                  </a:lnTo>
+                  <a:lnTo>
+                    <a:pt x="4886683" y="1043132"/>
+                  </a:lnTo>
+                  <a:lnTo>
+                    <a:pt x="4964317" y="1052931"/>
+                  </a:lnTo>
+                  <a:lnTo>
+                    <a:pt x="5041951" y="1062582"/>
+                  </a:lnTo>
+                  <a:lnTo>
+                    <a:pt x="5119585" y="1072086"/>
+                  </a:lnTo>
+                  <a:lnTo>
+                    <a:pt x="5197219" y="1081447"/>
+                  </a:lnTo>
+                  <a:lnTo>
+                    <a:pt x="5274853" y="1090667"/>
+                  </a:lnTo>
+                  <a:lnTo>
+                    <a:pt x="5352487" y="1099747"/>
+                  </a:lnTo>
+                  <a:lnTo>
+                    <a:pt x="5430121" y="1108689"/>
+                  </a:lnTo>
+                  <a:lnTo>
+                    <a:pt x="5507755" y="1117496"/>
+                  </a:lnTo>
+                  <a:lnTo>
+                    <a:pt x="5585389" y="1126170"/>
+                  </a:lnTo>
+                  <a:lnTo>
+                    <a:pt x="5663023" y="1134713"/>
+                  </a:lnTo>
+                  <a:lnTo>
+                    <a:pt x="5740657" y="1143127"/>
+                  </a:lnTo>
+                  <a:lnTo>
+                    <a:pt x="5818291" y="1151413"/>
+                  </a:lnTo>
+                  <a:lnTo>
+                    <a:pt x="5895925" y="1159574"/>
+                  </a:lnTo>
+                  <a:lnTo>
+                    <a:pt x="5973559" y="1167611"/>
+                  </a:lnTo>
+                  <a:lnTo>
+                    <a:pt x="6051193" y="1175527"/>
+                  </a:lnTo>
+                  <a:lnTo>
+                    <a:pt x="6128827" y="1183323"/>
+                  </a:lnTo>
+                  <a:lnTo>
+                    <a:pt x="6206462" y="1191001"/>
+                  </a:lnTo>
+                  <a:lnTo>
+                    <a:pt x="6284096" y="1198563"/>
+                  </a:lnTo>
+                  <a:lnTo>
+                    <a:pt x="6361730" y="1206011"/>
+                  </a:lnTo>
+                  <a:lnTo>
+                    <a:pt x="6439364" y="1213346"/>
+                  </a:lnTo>
+                  <a:lnTo>
+                    <a:pt x="6516998" y="1220570"/>
+                  </a:lnTo>
+                  <a:lnTo>
+                    <a:pt x="6594632" y="1227685"/>
+                  </a:lnTo>
+                  <a:lnTo>
+                    <a:pt x="6672266" y="1234692"/>
+                  </a:lnTo>
+                  <a:lnTo>
+                    <a:pt x="6749900" y="1241593"/>
+                  </a:lnTo>
+                  <a:lnTo>
+                    <a:pt x="6827534" y="1248389"/>
+                  </a:lnTo>
+                  <a:lnTo>
+                    <a:pt x="6905168" y="1255083"/>
+                  </a:lnTo>
+                  <a:lnTo>
+                    <a:pt x="6982802" y="1261676"/>
+                  </a:lnTo>
+                  <a:lnTo>
+                    <a:pt x="7060436" y="1268169"/>
+                  </a:lnTo>
+                  <a:lnTo>
+                    <a:pt x="7138070" y="1274563"/>
+                  </a:lnTo>
+                  <a:lnTo>
+                    <a:pt x="7215704" y="1280861"/>
+                  </a:lnTo>
+                  <a:lnTo>
+                    <a:pt x="7293338" y="1287064"/>
+                  </a:lnTo>
+                  <a:lnTo>
+                    <a:pt x="7370972" y="1293173"/>
                   </a:lnTo>
                 </a:path>
               </a:pathLst>

--- a/docs/plots/carbo/jx_carbo_linsubhr_ratio_hosp2.pptx
+++ b/docs/plots/carbo/jx_carbo_linsubhr_ratio_hosp2.pptx
@@ -3003,539 +3003,560 @@
           <p:spPr>
             <a:xfrm>
               <a:off x="817517" y="1896563"/>
-              <a:ext cx="7370972" cy="3592843"/>
+              <a:ext cx="7370972" cy="3549182"/>
             </a:xfrm>
             <a:custGeom>
               <a:avLst/>
               <a:pathLst>
-                <a:path w="7370972" h="3592843">
+                <a:path w="7370972" h="3549182">
                   <a:moveTo>
-                    <a:pt x="1250330" y="0"/>
+                    <a:pt x="700138" y="0"/>
                   </a:moveTo>
                   <a:lnTo>
-                    <a:pt x="1315517" y="157144"/>
-                  </a:lnTo>
-                  <a:lnTo>
-                    <a:pt x="1393151" y="334785"/>
-                  </a:lnTo>
-                  <a:lnTo>
-                    <a:pt x="1470785" y="503398"/>
-                  </a:lnTo>
-                  <a:lnTo>
-                    <a:pt x="1548419" y="663442"/>
-                  </a:lnTo>
-                  <a:lnTo>
-                    <a:pt x="1626053" y="815352"/>
-                  </a:lnTo>
-                  <a:lnTo>
-                    <a:pt x="1703687" y="959543"/>
-                  </a:lnTo>
-                  <a:lnTo>
-                    <a:pt x="1781321" y="1096406"/>
-                  </a:lnTo>
-                  <a:lnTo>
-                    <a:pt x="1858955" y="1226313"/>
-                  </a:lnTo>
-                  <a:lnTo>
-                    <a:pt x="1936589" y="1349619"/>
-                  </a:lnTo>
-                  <a:lnTo>
-                    <a:pt x="2014223" y="1466658"/>
-                  </a:lnTo>
-                  <a:lnTo>
-                    <a:pt x="2091857" y="1577749"/>
-                  </a:lnTo>
-                  <a:lnTo>
-                    <a:pt x="2169491" y="1683195"/>
-                  </a:lnTo>
-                  <a:lnTo>
-                    <a:pt x="2247125" y="1783282"/>
-                  </a:lnTo>
-                  <a:lnTo>
-                    <a:pt x="2324759" y="1878282"/>
-                  </a:lnTo>
-                  <a:lnTo>
-                    <a:pt x="2402393" y="1968455"/>
-                  </a:lnTo>
-                  <a:lnTo>
-                    <a:pt x="2480027" y="2054045"/>
-                  </a:lnTo>
-                  <a:lnTo>
-                    <a:pt x="2557661" y="2135286"/>
-                  </a:lnTo>
-                  <a:lnTo>
-                    <a:pt x="2635295" y="2212397"/>
-                  </a:lnTo>
-                  <a:lnTo>
-                    <a:pt x="2712930" y="2285590"/>
-                  </a:lnTo>
-                  <a:lnTo>
-                    <a:pt x="2790564" y="2355064"/>
-                  </a:lnTo>
-                  <a:lnTo>
-                    <a:pt x="2868198" y="2421006"/>
-                  </a:lnTo>
-                  <a:lnTo>
-                    <a:pt x="2945832" y="2483598"/>
-                  </a:lnTo>
-                  <a:lnTo>
-                    <a:pt x="3023466" y="2543009"/>
-                  </a:lnTo>
-                  <a:lnTo>
-                    <a:pt x="3101100" y="2599400"/>
-                  </a:lnTo>
-                  <a:lnTo>
-                    <a:pt x="3178734" y="2652926"/>
-                  </a:lnTo>
-                  <a:lnTo>
-                    <a:pt x="3256368" y="2703731"/>
-                  </a:lnTo>
-                  <a:lnTo>
-                    <a:pt x="3334002" y="2751955"/>
-                  </a:lnTo>
-                  <a:lnTo>
-                    <a:pt x="3411636" y="2776759"/>
-                  </a:lnTo>
-                  <a:lnTo>
-                    <a:pt x="3489270" y="2757571"/>
-                  </a:lnTo>
-                  <a:lnTo>
-                    <a:pt x="3566904" y="2737964"/>
-                  </a:lnTo>
-                  <a:lnTo>
-                    <a:pt x="3644538" y="2717927"/>
-                  </a:lnTo>
-                  <a:lnTo>
-                    <a:pt x="3722172" y="2697451"/>
-                  </a:lnTo>
-                  <a:lnTo>
-                    <a:pt x="3799806" y="2676526"/>
-                  </a:lnTo>
-                  <a:lnTo>
-                    <a:pt x="3877440" y="2655143"/>
-                  </a:lnTo>
-                  <a:lnTo>
-                    <a:pt x="3955074" y="2633292"/>
-                  </a:lnTo>
-                  <a:lnTo>
-                    <a:pt x="4032708" y="2610962"/>
-                  </a:lnTo>
-                  <a:lnTo>
-                    <a:pt x="4110342" y="2588143"/>
-                  </a:lnTo>
-                  <a:lnTo>
-                    <a:pt x="4187976" y="2564823"/>
-                  </a:lnTo>
-                  <a:lnTo>
-                    <a:pt x="4265610" y="2540993"/>
-                  </a:lnTo>
-                  <a:lnTo>
-                    <a:pt x="4343244" y="2516642"/>
-                  </a:lnTo>
-                  <a:lnTo>
-                    <a:pt x="4420879" y="2491756"/>
-                  </a:lnTo>
-                  <a:lnTo>
-                    <a:pt x="4498513" y="2466326"/>
-                  </a:lnTo>
-                  <a:lnTo>
-                    <a:pt x="4576147" y="2440338"/>
-                  </a:lnTo>
-                  <a:lnTo>
-                    <a:pt x="4653781" y="2413781"/>
-                  </a:lnTo>
-                  <a:lnTo>
-                    <a:pt x="4731415" y="2386642"/>
-                  </a:lnTo>
-                  <a:lnTo>
-                    <a:pt x="4809049" y="2358909"/>
-                  </a:lnTo>
-                  <a:lnTo>
-                    <a:pt x="4886683" y="2330568"/>
-                  </a:lnTo>
-                  <a:lnTo>
-                    <a:pt x="4964317" y="2301607"/>
-                  </a:lnTo>
-                  <a:lnTo>
-                    <a:pt x="5041951" y="2272011"/>
-                  </a:lnTo>
-                  <a:lnTo>
-                    <a:pt x="5119585" y="2241767"/>
-                  </a:lnTo>
-                  <a:lnTo>
-                    <a:pt x="5197219" y="2210860"/>
-                  </a:lnTo>
-                  <a:lnTo>
-                    <a:pt x="5274853" y="2179276"/>
-                  </a:lnTo>
-                  <a:lnTo>
-                    <a:pt x="5352487" y="2147000"/>
-                  </a:lnTo>
-                  <a:lnTo>
-                    <a:pt x="5430121" y="2114017"/>
-                  </a:lnTo>
-                  <a:lnTo>
-                    <a:pt x="5507755" y="2080312"/>
-                  </a:lnTo>
-                  <a:lnTo>
-                    <a:pt x="5585389" y="2045868"/>
-                  </a:lnTo>
-                  <a:lnTo>
-                    <a:pt x="5663023" y="2010670"/>
-                  </a:lnTo>
-                  <a:lnTo>
-                    <a:pt x="5740657" y="1974701"/>
-                  </a:lnTo>
-                  <a:lnTo>
-                    <a:pt x="5818291" y="1937943"/>
-                  </a:lnTo>
-                  <a:lnTo>
-                    <a:pt x="5895925" y="1900381"/>
-                  </a:lnTo>
-                  <a:lnTo>
-                    <a:pt x="5973559" y="1861996"/>
-                  </a:lnTo>
-                  <a:lnTo>
-                    <a:pt x="6051193" y="1822769"/>
-                  </a:lnTo>
-                  <a:lnTo>
-                    <a:pt x="6128827" y="1782684"/>
-                  </a:lnTo>
-                  <a:lnTo>
-                    <a:pt x="6206462" y="1741720"/>
-                  </a:lnTo>
-                  <a:lnTo>
-                    <a:pt x="6284096" y="1699859"/>
-                  </a:lnTo>
-                  <a:lnTo>
-                    <a:pt x="6361730" y="1657082"/>
-                  </a:lnTo>
-                  <a:lnTo>
-                    <a:pt x="6439364" y="1613366"/>
-                  </a:lnTo>
-                  <a:lnTo>
-                    <a:pt x="6516998" y="1568694"/>
-                  </a:lnTo>
-                  <a:lnTo>
-                    <a:pt x="6594632" y="1523043"/>
-                  </a:lnTo>
-                  <a:lnTo>
-                    <a:pt x="6672266" y="1476391"/>
-                  </a:lnTo>
-                  <a:lnTo>
-                    <a:pt x="6749900" y="1428718"/>
-                  </a:lnTo>
-                  <a:lnTo>
-                    <a:pt x="6827534" y="1380000"/>
-                  </a:lnTo>
-                  <a:lnTo>
-                    <a:pt x="6905168" y="1330215"/>
-                  </a:lnTo>
-                  <a:lnTo>
-                    <a:pt x="6982802" y="1279340"/>
-                  </a:lnTo>
-                  <a:lnTo>
-                    <a:pt x="7060436" y="1227350"/>
-                  </a:lnTo>
-                  <a:lnTo>
-                    <a:pt x="7138070" y="1174221"/>
-                  </a:lnTo>
-                  <a:lnTo>
-                    <a:pt x="7215704" y="1119929"/>
-                  </a:lnTo>
-                  <a:lnTo>
-                    <a:pt x="7293338" y="1064447"/>
-                  </a:lnTo>
-                  <a:lnTo>
-                    <a:pt x="7370972" y="1007749"/>
-                  </a:lnTo>
-                  <a:lnTo>
-                    <a:pt x="7370972" y="3592843"/>
-                  </a:lnTo>
-                  <a:lnTo>
-                    <a:pt x="7293338" y="3589641"/>
-                  </a:lnTo>
-                  <a:lnTo>
-                    <a:pt x="7215704" y="3586268"/>
-                  </a:lnTo>
-                  <a:lnTo>
-                    <a:pt x="7138070" y="3582714"/>
-                  </a:lnTo>
-                  <a:lnTo>
-                    <a:pt x="7060436" y="3578970"/>
-                  </a:lnTo>
-                  <a:lnTo>
-                    <a:pt x="6982802" y="3575025"/>
-                  </a:lnTo>
-                  <a:lnTo>
-                    <a:pt x="6905168" y="3570870"/>
-                  </a:lnTo>
-                  <a:lnTo>
-                    <a:pt x="6827534" y="3566491"/>
-                  </a:lnTo>
-                  <a:lnTo>
-                    <a:pt x="6749900" y="3561879"/>
-                  </a:lnTo>
-                  <a:lnTo>
-                    <a:pt x="6672266" y="3557019"/>
-                  </a:lnTo>
-                  <a:lnTo>
-                    <a:pt x="6594632" y="3551899"/>
-                  </a:lnTo>
-                  <a:lnTo>
-                    <a:pt x="6516998" y="3546505"/>
-                  </a:lnTo>
-                  <a:lnTo>
-                    <a:pt x="6439364" y="3540823"/>
-                  </a:lnTo>
-                  <a:lnTo>
-                    <a:pt x="6361730" y="3534836"/>
-                  </a:lnTo>
-                  <a:lnTo>
-                    <a:pt x="6284096" y="3528528"/>
-                  </a:lnTo>
-                  <a:lnTo>
-                    <a:pt x="6206462" y="3521883"/>
-                  </a:lnTo>
-                  <a:lnTo>
-                    <a:pt x="6128827" y="3514882"/>
-                  </a:lnTo>
-                  <a:lnTo>
-                    <a:pt x="6051193" y="3507506"/>
-                  </a:lnTo>
-                  <a:lnTo>
-                    <a:pt x="5973559" y="3499736"/>
-                  </a:lnTo>
-                  <a:lnTo>
-                    <a:pt x="5895925" y="3491549"/>
-                  </a:lnTo>
-                  <a:lnTo>
-                    <a:pt x="5818291" y="3482924"/>
-                  </a:lnTo>
-                  <a:lnTo>
-                    <a:pt x="5740657" y="3473837"/>
-                  </a:lnTo>
-                  <a:lnTo>
-                    <a:pt x="5663023" y="3464263"/>
-                  </a:lnTo>
-                  <a:lnTo>
-                    <a:pt x="5585389" y="3454177"/>
-                  </a:lnTo>
-                  <a:lnTo>
-                    <a:pt x="5507755" y="3443551"/>
-                  </a:lnTo>
-                  <a:lnTo>
-                    <a:pt x="5430121" y="3432356"/>
-                  </a:lnTo>
-                  <a:lnTo>
-                    <a:pt x="5352487" y="3420562"/>
-                  </a:lnTo>
-                  <a:lnTo>
-                    <a:pt x="5274853" y="3408136"/>
-                  </a:lnTo>
-                  <a:lnTo>
-                    <a:pt x="5197219" y="3395045"/>
-                  </a:lnTo>
-                  <a:lnTo>
-                    <a:pt x="5119585" y="3381253"/>
-                  </a:lnTo>
-                  <a:lnTo>
-                    <a:pt x="5041951" y="3366723"/>
-                  </a:lnTo>
-                  <a:lnTo>
-                    <a:pt x="4964317" y="3351414"/>
-                  </a:lnTo>
-                  <a:lnTo>
-                    <a:pt x="4886683" y="3335286"/>
-                  </a:lnTo>
-                  <a:lnTo>
-                    <a:pt x="4809049" y="3318295"/>
-                  </a:lnTo>
-                  <a:lnTo>
-                    <a:pt x="4731415" y="3300393"/>
-                  </a:lnTo>
-                  <a:lnTo>
-                    <a:pt x="4653781" y="3281534"/>
-                  </a:lnTo>
-                  <a:lnTo>
-                    <a:pt x="4576147" y="3261664"/>
-                  </a:lnTo>
-                  <a:lnTo>
-                    <a:pt x="4498513" y="3240731"/>
-                  </a:lnTo>
-                  <a:lnTo>
-                    <a:pt x="4420879" y="3218677"/>
-                  </a:lnTo>
-                  <a:lnTo>
-                    <a:pt x="4343244" y="3195442"/>
-                  </a:lnTo>
-                  <a:lnTo>
-                    <a:pt x="4265610" y="3170963"/>
-                  </a:lnTo>
-                  <a:lnTo>
-                    <a:pt x="4187976" y="3145174"/>
-                  </a:lnTo>
-                  <a:lnTo>
-                    <a:pt x="4110342" y="3118003"/>
-                  </a:lnTo>
-                  <a:lnTo>
-                    <a:pt x="4032708" y="3089378"/>
-                  </a:lnTo>
-                  <a:lnTo>
-                    <a:pt x="3955074" y="3059221"/>
-                  </a:lnTo>
-                  <a:lnTo>
-                    <a:pt x="3877440" y="3027448"/>
-                  </a:lnTo>
-                  <a:lnTo>
-                    <a:pt x="3799806" y="2993975"/>
-                  </a:lnTo>
-                  <a:lnTo>
-                    <a:pt x="3722172" y="2958709"/>
-                  </a:lnTo>
-                  <a:lnTo>
-                    <a:pt x="3644538" y="2921556"/>
-                  </a:lnTo>
-                  <a:lnTo>
-                    <a:pt x="3566904" y="2882413"/>
-                  </a:lnTo>
-                  <a:lnTo>
-                    <a:pt x="3489270" y="2841174"/>
-                  </a:lnTo>
-                  <a:lnTo>
-                    <a:pt x="3411636" y="2797727"/>
-                  </a:lnTo>
-                  <a:lnTo>
-                    <a:pt x="3334002" y="2795535"/>
-                  </a:lnTo>
-                  <a:lnTo>
-                    <a:pt x="3256368" y="2813908"/>
-                  </a:lnTo>
-                  <a:lnTo>
-                    <a:pt x="3178734" y="2831888"/>
-                  </a:lnTo>
-                  <a:lnTo>
-                    <a:pt x="3101100" y="2849482"/>
-                  </a:lnTo>
-                  <a:lnTo>
-                    <a:pt x="3023466" y="2866699"/>
-                  </a:lnTo>
-                  <a:lnTo>
-                    <a:pt x="2945832" y="2883547"/>
-                  </a:lnTo>
-                  <a:lnTo>
-                    <a:pt x="2868198" y="2900033"/>
-                  </a:lnTo>
-                  <a:lnTo>
-                    <a:pt x="2790564" y="2916167"/>
-                  </a:lnTo>
-                  <a:lnTo>
-                    <a:pt x="2712930" y="2931954"/>
-                  </a:lnTo>
-                  <a:lnTo>
-                    <a:pt x="2635295" y="2947403"/>
-                  </a:lnTo>
-                  <a:lnTo>
-                    <a:pt x="2557661" y="2962521"/>
-                  </a:lnTo>
-                  <a:lnTo>
-                    <a:pt x="2480027" y="2977315"/>
-                  </a:lnTo>
-                  <a:lnTo>
-                    <a:pt x="2402393" y="2991792"/>
-                  </a:lnTo>
-                  <a:lnTo>
-                    <a:pt x="2324759" y="3005958"/>
-                  </a:lnTo>
-                  <a:lnTo>
-                    <a:pt x="2247125" y="3019821"/>
-                  </a:lnTo>
-                  <a:lnTo>
-                    <a:pt x="2169491" y="3033386"/>
-                  </a:lnTo>
-                  <a:lnTo>
-                    <a:pt x="2091857" y="3046661"/>
-                  </a:lnTo>
-                  <a:lnTo>
-                    <a:pt x="2014223" y="3059651"/>
-                  </a:lnTo>
-                  <a:lnTo>
-                    <a:pt x="1936589" y="3072363"/>
-                  </a:lnTo>
-                  <a:lnTo>
-                    <a:pt x="1858955" y="3084802"/>
-                  </a:lnTo>
-                  <a:lnTo>
-                    <a:pt x="1781321" y="3096975"/>
-                  </a:lnTo>
-                  <a:lnTo>
-                    <a:pt x="1703687" y="3108886"/>
-                  </a:lnTo>
-                  <a:lnTo>
-                    <a:pt x="1626053" y="3120543"/>
-                  </a:lnTo>
-                  <a:lnTo>
-                    <a:pt x="1548419" y="3131949"/>
-                  </a:lnTo>
-                  <a:lnTo>
-                    <a:pt x="1470785" y="3143111"/>
-                  </a:lnTo>
-                  <a:lnTo>
-                    <a:pt x="1393151" y="3154034"/>
-                  </a:lnTo>
-                  <a:lnTo>
-                    <a:pt x="1315517" y="3164722"/>
-                  </a:lnTo>
-                  <a:lnTo>
-                    <a:pt x="1237883" y="3175181"/>
-                  </a:lnTo>
-                  <a:lnTo>
-                    <a:pt x="1160249" y="3185417"/>
-                  </a:lnTo>
-                  <a:lnTo>
-                    <a:pt x="1082615" y="3195432"/>
-                  </a:lnTo>
-                  <a:lnTo>
-                    <a:pt x="1004981" y="3205233"/>
-                  </a:lnTo>
-                  <a:lnTo>
-                    <a:pt x="927346" y="3214824"/>
-                  </a:lnTo>
-                  <a:lnTo>
-                    <a:pt x="849712" y="3224210"/>
-                  </a:lnTo>
-                  <a:lnTo>
-                    <a:pt x="772078" y="3233394"/>
-                  </a:lnTo>
-                  <a:lnTo>
-                    <a:pt x="694444" y="3242381"/>
-                  </a:lnTo>
-                  <a:lnTo>
-                    <a:pt x="616810" y="3251176"/>
-                  </a:lnTo>
-                  <a:lnTo>
-                    <a:pt x="539176" y="3259782"/>
-                  </a:lnTo>
-                  <a:lnTo>
-                    <a:pt x="461542" y="3268203"/>
-                  </a:lnTo>
-                  <a:lnTo>
-                    <a:pt x="383908" y="3276444"/>
-                  </a:lnTo>
-                  <a:lnTo>
-                    <a:pt x="306274" y="3284509"/>
-                  </a:lnTo>
-                  <a:lnTo>
-                    <a:pt x="228640" y="3292400"/>
-                  </a:lnTo>
-                  <a:lnTo>
-                    <a:pt x="151006" y="3300123"/>
-                  </a:lnTo>
-                  <a:lnTo>
-                    <a:pt x="73372" y="3307679"/>
-                  </a:lnTo>
-                  <a:lnTo>
-                    <a:pt x="0" y="3314668"/>
+                    <a:pt x="772078" y="137928"/>
+                  </a:lnTo>
+                  <a:lnTo>
+                    <a:pt x="849712" y="280725"/>
+                  </a:lnTo>
+                  <a:lnTo>
+                    <a:pt x="927346" y="417720"/>
+                  </a:lnTo>
+                  <a:lnTo>
+                    <a:pt x="1004981" y="549149"/>
+                  </a:lnTo>
+                  <a:lnTo>
+                    <a:pt x="1082615" y="675239"/>
+                  </a:lnTo>
+                  <a:lnTo>
+                    <a:pt x="1160249" y="796205"/>
+                  </a:lnTo>
+                  <a:lnTo>
+                    <a:pt x="1237883" y="912257"/>
+                  </a:lnTo>
+                  <a:lnTo>
+                    <a:pt x="1315517" y="1023594"/>
+                  </a:lnTo>
+                  <a:lnTo>
+                    <a:pt x="1393151" y="1130408"/>
+                  </a:lnTo>
+                  <a:lnTo>
+                    <a:pt x="1470785" y="1232882"/>
+                  </a:lnTo>
+                  <a:lnTo>
+                    <a:pt x="1548419" y="1331193"/>
+                  </a:lnTo>
+                  <a:lnTo>
+                    <a:pt x="1626053" y="1425509"/>
+                  </a:lnTo>
+                  <a:lnTo>
+                    <a:pt x="1703687" y="1515994"/>
+                  </a:lnTo>
+                  <a:lnTo>
+                    <a:pt x="1781321" y="1602802"/>
+                  </a:lnTo>
+                  <a:lnTo>
+                    <a:pt x="1858955" y="1686083"/>
+                  </a:lnTo>
+                  <a:lnTo>
+                    <a:pt x="1936589" y="1765981"/>
+                  </a:lnTo>
+                  <a:lnTo>
+                    <a:pt x="2014223" y="1842633"/>
+                  </a:lnTo>
+                  <a:lnTo>
+                    <a:pt x="2091857" y="1916171"/>
+                  </a:lnTo>
+                  <a:lnTo>
+                    <a:pt x="2169491" y="1986720"/>
+                  </a:lnTo>
+                  <a:lnTo>
+                    <a:pt x="2247125" y="2054404"/>
+                  </a:lnTo>
+                  <a:lnTo>
+                    <a:pt x="2324759" y="2119338"/>
+                  </a:lnTo>
+                  <a:lnTo>
+                    <a:pt x="2402393" y="2181633"/>
+                  </a:lnTo>
+                  <a:lnTo>
+                    <a:pt x="2480027" y="2241398"/>
+                  </a:lnTo>
+                  <a:lnTo>
+                    <a:pt x="2557661" y="2298734"/>
+                  </a:lnTo>
+                  <a:lnTo>
+                    <a:pt x="2635295" y="2353741"/>
+                  </a:lnTo>
+                  <a:lnTo>
+                    <a:pt x="2712930" y="2406513"/>
+                  </a:lnTo>
+                  <a:lnTo>
+                    <a:pt x="2790564" y="2457141"/>
+                  </a:lnTo>
+                  <a:lnTo>
+                    <a:pt x="2868198" y="2505712"/>
+                  </a:lnTo>
+                  <a:lnTo>
+                    <a:pt x="2945832" y="2552310"/>
+                  </a:lnTo>
+                  <a:lnTo>
+                    <a:pt x="3023466" y="2597015"/>
+                  </a:lnTo>
+                  <a:lnTo>
+                    <a:pt x="3101100" y="2639903"/>
+                  </a:lnTo>
+                  <a:lnTo>
+                    <a:pt x="3178734" y="2681049"/>
+                  </a:lnTo>
+                  <a:lnTo>
+                    <a:pt x="3256368" y="2720523"/>
+                  </a:lnTo>
+                  <a:lnTo>
+                    <a:pt x="3334002" y="2758394"/>
+                  </a:lnTo>
+                  <a:lnTo>
+                    <a:pt x="3411636" y="2776928"/>
+                  </a:lnTo>
+                  <a:lnTo>
+                    <a:pt x="3489270" y="2758270"/>
+                  </a:lnTo>
+                  <a:lnTo>
+                    <a:pt x="3566904" y="2739215"/>
+                  </a:lnTo>
+                  <a:lnTo>
+                    <a:pt x="3644538" y="2719754"/>
+                  </a:lnTo>
+                  <a:lnTo>
+                    <a:pt x="3722172" y="2699878"/>
+                  </a:lnTo>
+                  <a:lnTo>
+                    <a:pt x="3799806" y="2679579"/>
+                  </a:lnTo>
+                  <a:lnTo>
+                    <a:pt x="3877440" y="2658847"/>
+                  </a:lnTo>
+                  <a:lnTo>
+                    <a:pt x="3955074" y="2637673"/>
+                  </a:lnTo>
+                  <a:lnTo>
+                    <a:pt x="4032708" y="2616049"/>
+                  </a:lnTo>
+                  <a:lnTo>
+                    <a:pt x="4110342" y="2593964"/>
+                  </a:lnTo>
+                  <a:lnTo>
+                    <a:pt x="4187976" y="2571408"/>
+                  </a:lnTo>
+                  <a:lnTo>
+                    <a:pt x="4265610" y="2548371"/>
+                  </a:lnTo>
+                  <a:lnTo>
+                    <a:pt x="4343244" y="2524844"/>
+                  </a:lnTo>
+                  <a:lnTo>
+                    <a:pt x="4420879" y="2500816"/>
+                  </a:lnTo>
+                  <a:lnTo>
+                    <a:pt x="4498513" y="2476275"/>
+                  </a:lnTo>
+                  <a:lnTo>
+                    <a:pt x="4576147" y="2451212"/>
+                  </a:lnTo>
+                  <a:lnTo>
+                    <a:pt x="4653781" y="2425615"/>
+                  </a:lnTo>
+                  <a:lnTo>
+                    <a:pt x="4731415" y="2399472"/>
+                  </a:lnTo>
+                  <a:lnTo>
+                    <a:pt x="4809049" y="2372773"/>
+                  </a:lnTo>
+                  <a:lnTo>
+                    <a:pt x="4886683" y="2345504"/>
+                  </a:lnTo>
+                  <a:lnTo>
+                    <a:pt x="4964317" y="2317655"/>
+                  </a:lnTo>
+                  <a:lnTo>
+                    <a:pt x="5041951" y="2289212"/>
+                  </a:lnTo>
+                  <a:lnTo>
+                    <a:pt x="5119585" y="2260164"/>
+                  </a:lnTo>
+                  <a:lnTo>
+                    <a:pt x="5197219" y="2230496"/>
+                  </a:lnTo>
+                  <a:lnTo>
+                    <a:pt x="5274853" y="2200196"/>
+                  </a:lnTo>
+                  <a:lnTo>
+                    <a:pt x="5352487" y="2169251"/>
+                  </a:lnTo>
+                  <a:lnTo>
+                    <a:pt x="5430121" y="2137646"/>
+                  </a:lnTo>
+                  <a:lnTo>
+                    <a:pt x="5507755" y="2105368"/>
+                  </a:lnTo>
+                  <a:lnTo>
+                    <a:pt x="5585389" y="2072403"/>
+                  </a:lnTo>
+                  <a:lnTo>
+                    <a:pt x="5663023" y="2038735"/>
+                  </a:lnTo>
+                  <a:lnTo>
+                    <a:pt x="5740657" y="2004350"/>
+                  </a:lnTo>
+                  <a:lnTo>
+                    <a:pt x="5818291" y="1969232"/>
+                  </a:lnTo>
+                  <a:lnTo>
+                    <a:pt x="5895925" y="1933366"/>
+                  </a:lnTo>
+                  <a:lnTo>
+                    <a:pt x="5973559" y="1896735"/>
+                  </a:lnTo>
+                  <a:lnTo>
+                    <a:pt x="6051193" y="1859325"/>
+                  </a:lnTo>
+                  <a:lnTo>
+                    <a:pt x="6128827" y="1821117"/>
+                  </a:lnTo>
+                  <a:lnTo>
+                    <a:pt x="6206462" y="1782095"/>
+                  </a:lnTo>
+                  <a:lnTo>
+                    <a:pt x="6284096" y="1742242"/>
+                  </a:lnTo>
+                  <a:lnTo>
+                    <a:pt x="6361730" y="1701540"/>
+                  </a:lnTo>
+                  <a:lnTo>
+                    <a:pt x="6439364" y="1659970"/>
+                  </a:lnTo>
+                  <a:lnTo>
+                    <a:pt x="6516998" y="1617515"/>
+                  </a:lnTo>
+                  <a:lnTo>
+                    <a:pt x="6594632" y="1574155"/>
+                  </a:lnTo>
+                  <a:lnTo>
+                    <a:pt x="6672266" y="1529872"/>
+                  </a:lnTo>
+                  <a:lnTo>
+                    <a:pt x="6749900" y="1484645"/>
+                  </a:lnTo>
+                  <a:lnTo>
+                    <a:pt x="6827534" y="1438455"/>
+                  </a:lnTo>
+                  <a:lnTo>
+                    <a:pt x="6905168" y="1391280"/>
+                  </a:lnTo>
+                  <a:lnTo>
+                    <a:pt x="6982802" y="1343100"/>
+                  </a:lnTo>
+                  <a:lnTo>
+                    <a:pt x="7060436" y="1293894"/>
+                  </a:lnTo>
+                  <a:lnTo>
+                    <a:pt x="7138070" y="1243639"/>
+                  </a:lnTo>
+                  <a:lnTo>
+                    <a:pt x="7215704" y="1192314"/>
+                  </a:lnTo>
+                  <a:lnTo>
+                    <a:pt x="7293338" y="1139895"/>
+                  </a:lnTo>
+                  <a:lnTo>
+                    <a:pt x="7370972" y="1086360"/>
+                  </a:lnTo>
+                  <a:lnTo>
+                    <a:pt x="7370972" y="3549182"/>
+                  </a:lnTo>
+                  <a:lnTo>
+                    <a:pt x="7293338" y="3544800"/>
+                  </a:lnTo>
+                  <a:lnTo>
+                    <a:pt x="7215704" y="3540233"/>
+                  </a:lnTo>
+                  <a:lnTo>
+                    <a:pt x="7138070" y="3535473"/>
+                  </a:lnTo>
+                  <a:lnTo>
+                    <a:pt x="7060436" y="3530511"/>
+                  </a:lnTo>
+                  <a:lnTo>
+                    <a:pt x="6982802" y="3525339"/>
+                  </a:lnTo>
+                  <a:lnTo>
+                    <a:pt x="6905168" y="3519947"/>
+                  </a:lnTo>
+                  <a:lnTo>
+                    <a:pt x="6827534" y="3514328"/>
+                  </a:lnTo>
+                  <a:lnTo>
+                    <a:pt x="6749900" y="3508470"/>
+                  </a:lnTo>
+                  <a:lnTo>
+                    <a:pt x="6672266" y="3502365"/>
+                  </a:lnTo>
+                  <a:lnTo>
+                    <a:pt x="6594632" y="3496001"/>
+                  </a:lnTo>
+                  <a:lnTo>
+                    <a:pt x="6516998" y="3489367"/>
+                  </a:lnTo>
+                  <a:lnTo>
+                    <a:pt x="6439364" y="3482453"/>
+                  </a:lnTo>
+                  <a:lnTo>
+                    <a:pt x="6361730" y="3475245"/>
+                  </a:lnTo>
+                  <a:lnTo>
+                    <a:pt x="6284096" y="3467733"/>
+                  </a:lnTo>
+                  <a:lnTo>
+                    <a:pt x="6206462" y="3459902"/>
+                  </a:lnTo>
+                  <a:lnTo>
+                    <a:pt x="6128827" y="3451739"/>
+                  </a:lnTo>
+                  <a:lnTo>
+                    <a:pt x="6051193" y="3443231"/>
+                  </a:lnTo>
+                  <a:lnTo>
+                    <a:pt x="5973559" y="3434363"/>
+                  </a:lnTo>
+                  <a:lnTo>
+                    <a:pt x="5895925" y="3425119"/>
+                  </a:lnTo>
+                  <a:lnTo>
+                    <a:pt x="5818291" y="3415484"/>
+                  </a:lnTo>
+                  <a:lnTo>
+                    <a:pt x="5740657" y="3405440"/>
+                  </a:lnTo>
+                  <a:lnTo>
+                    <a:pt x="5663023" y="3394972"/>
+                  </a:lnTo>
+                  <a:lnTo>
+                    <a:pt x="5585389" y="3384060"/>
+                  </a:lnTo>
+                  <a:lnTo>
+                    <a:pt x="5507755" y="3372685"/>
+                  </a:lnTo>
+                  <a:lnTo>
+                    <a:pt x="5430121" y="3360829"/>
+                  </a:lnTo>
+                  <a:lnTo>
+                    <a:pt x="5352487" y="3348471"/>
+                  </a:lnTo>
+                  <a:lnTo>
+                    <a:pt x="5274853" y="3335590"/>
+                  </a:lnTo>
+                  <a:lnTo>
+                    <a:pt x="5197219" y="3322163"/>
+                  </a:lnTo>
+                  <a:lnTo>
+                    <a:pt x="5119585" y="3308168"/>
+                  </a:lnTo>
+                  <a:lnTo>
+                    <a:pt x="5041951" y="3293580"/>
+                  </a:lnTo>
+                  <a:lnTo>
+                    <a:pt x="4964317" y="3278374"/>
+                  </a:lnTo>
+                  <a:lnTo>
+                    <a:pt x="4886683" y="3262524"/>
+                  </a:lnTo>
+                  <a:lnTo>
+                    <a:pt x="4809049" y="3246003"/>
+                  </a:lnTo>
+                  <a:lnTo>
+                    <a:pt x="4731415" y="3228782"/>
+                  </a:lnTo>
+                  <a:lnTo>
+                    <a:pt x="4653781" y="3210832"/>
+                  </a:lnTo>
+                  <a:lnTo>
+                    <a:pt x="4576147" y="3192122"/>
+                  </a:lnTo>
+                  <a:lnTo>
+                    <a:pt x="4498513" y="3172619"/>
+                  </a:lnTo>
+                  <a:lnTo>
+                    <a:pt x="4420879" y="3152291"/>
+                  </a:lnTo>
+                  <a:lnTo>
+                    <a:pt x="4343244" y="3131102"/>
+                  </a:lnTo>
+                  <a:lnTo>
+                    <a:pt x="4265610" y="3109015"/>
+                  </a:lnTo>
+                  <a:lnTo>
+                    <a:pt x="4187976" y="3085993"/>
+                  </a:lnTo>
+                  <a:lnTo>
+                    <a:pt x="4110342" y="3061996"/>
+                  </a:lnTo>
+                  <a:lnTo>
+                    <a:pt x="4032708" y="3036983"/>
+                  </a:lnTo>
+                  <a:lnTo>
+                    <a:pt x="3955074" y="3010910"/>
+                  </a:lnTo>
+                  <a:lnTo>
+                    <a:pt x="3877440" y="2983734"/>
+                  </a:lnTo>
+                  <a:lnTo>
+                    <a:pt x="3799806" y="2955406"/>
+                  </a:lnTo>
+                  <a:lnTo>
+                    <a:pt x="3722172" y="2925879"/>
+                  </a:lnTo>
+                  <a:lnTo>
+                    <a:pt x="3644538" y="2895102"/>
+                  </a:lnTo>
+                  <a:lnTo>
+                    <a:pt x="3566904" y="2863021"/>
+                  </a:lnTo>
+                  <a:lnTo>
+                    <a:pt x="3489270" y="2829581"/>
+                  </a:lnTo>
+                  <a:lnTo>
+                    <a:pt x="3411636" y="2794725"/>
+                  </a:lnTo>
+                  <a:lnTo>
+                    <a:pt x="3334002" y="2795196"/>
+                  </a:lnTo>
+                  <a:lnTo>
+                    <a:pt x="3256368" y="2813083"/>
+                  </a:lnTo>
+                  <a:lnTo>
+                    <a:pt x="3178734" y="2830598"/>
+                  </a:lnTo>
+                  <a:lnTo>
+                    <a:pt x="3101100" y="2847746"/>
+                  </a:lnTo>
+                  <a:lnTo>
+                    <a:pt x="3023466" y="2864537"/>
+                  </a:lnTo>
+                  <a:lnTo>
+                    <a:pt x="2945832" y="2880978"/>
+                  </a:lnTo>
+                  <a:lnTo>
+                    <a:pt x="2868198" y="2897076"/>
+                  </a:lnTo>
+                  <a:lnTo>
+                    <a:pt x="2790564" y="2912838"/>
+                  </a:lnTo>
+                  <a:lnTo>
+                    <a:pt x="2712930" y="2928271"/>
+                  </a:lnTo>
+                  <a:lnTo>
+                    <a:pt x="2635295" y="2943382"/>
+                  </a:lnTo>
+                  <a:lnTo>
+                    <a:pt x="2557661" y="2958178"/>
+                  </a:lnTo>
+                  <a:lnTo>
+                    <a:pt x="2480027" y="2972666"/>
+                  </a:lnTo>
+                  <a:lnTo>
+                    <a:pt x="2402393" y="2986851"/>
+                  </a:lnTo>
+                  <a:lnTo>
+                    <a:pt x="2324759" y="3000740"/>
+                  </a:lnTo>
+                  <a:lnTo>
+                    <a:pt x="2247125" y="3014340"/>
+                  </a:lnTo>
+                  <a:lnTo>
+                    <a:pt x="2169491" y="3027655"/>
+                  </a:lnTo>
+                  <a:lnTo>
+                    <a:pt x="2091857" y="3040693"/>
+                  </a:lnTo>
+                  <a:lnTo>
+                    <a:pt x="2014223" y="3053459"/>
+                  </a:lnTo>
+                  <a:lnTo>
+                    <a:pt x="1936589" y="3065959"/>
+                  </a:lnTo>
+                  <a:lnTo>
+                    <a:pt x="1858955" y="3078198"/>
+                  </a:lnTo>
+                  <a:lnTo>
+                    <a:pt x="1781321" y="3090181"/>
+                  </a:lnTo>
+                  <a:lnTo>
+                    <a:pt x="1703687" y="3101915"/>
+                  </a:lnTo>
+                  <a:lnTo>
+                    <a:pt x="1626053" y="3113404"/>
+                  </a:lnTo>
+                  <a:lnTo>
+                    <a:pt x="1548419" y="3124653"/>
+                  </a:lnTo>
+                  <a:lnTo>
+                    <a:pt x="1470785" y="3135667"/>
+                  </a:lnTo>
+                  <a:lnTo>
+                    <a:pt x="1393151" y="3146452"/>
+                  </a:lnTo>
+                  <a:lnTo>
+                    <a:pt x="1315517" y="3157012"/>
+                  </a:lnTo>
+                  <a:lnTo>
+                    <a:pt x="1237883" y="3167351"/>
+                  </a:lnTo>
+                  <a:lnTo>
+                    <a:pt x="1160249" y="3177475"/>
+                  </a:lnTo>
+                  <a:lnTo>
+                    <a:pt x="1082615" y="3187388"/>
+                  </a:lnTo>
+                  <a:lnTo>
+                    <a:pt x="1004981" y="3197093"/>
+                  </a:lnTo>
+                  <a:lnTo>
+                    <a:pt x="927346" y="3206597"/>
+                  </a:lnTo>
+                  <a:lnTo>
+                    <a:pt x="849712" y="3215902"/>
+                  </a:lnTo>
+                  <a:lnTo>
+                    <a:pt x="772078" y="3225013"/>
+                  </a:lnTo>
+                  <a:lnTo>
+                    <a:pt x="694444" y="3233934"/>
+                  </a:lnTo>
+                  <a:lnTo>
+                    <a:pt x="616810" y="3242668"/>
+                  </a:lnTo>
+                  <a:lnTo>
+                    <a:pt x="539176" y="3251221"/>
+                  </a:lnTo>
+                  <a:lnTo>
+                    <a:pt x="461542" y="3259595"/>
+                  </a:lnTo>
+                  <a:lnTo>
+                    <a:pt x="383908" y="3267794"/>
+                  </a:lnTo>
+                  <a:lnTo>
+                    <a:pt x="306274" y="3275823"/>
+                  </a:lnTo>
+                  <a:lnTo>
+                    <a:pt x="228640" y="3283684"/>
+                  </a:lnTo>
+                  <a:lnTo>
+                    <a:pt x="151006" y="3291381"/>
+                  </a:lnTo>
+                  <a:lnTo>
+                    <a:pt x="73372" y="3298917"/>
+                  </a:lnTo>
+                  <a:lnTo>
+                    <a:pt x="0" y="3305891"/>
                   </a:lnTo>
                   <a:close/>
                 </a:path>
@@ -3561,252 +3582,273 @@
           </p:nvSpPr>
           <p:spPr>
             <a:xfrm>
-              <a:off x="2067848" y="1896563"/>
-              <a:ext cx="6120642" cy="2776759"/>
+              <a:off x="1517655" y="1896563"/>
+              <a:ext cx="6670834" cy="2776928"/>
             </a:xfrm>
             <a:custGeom>
               <a:avLst/>
               <a:pathLst>
-                <a:path w="6120642" h="2776759">
+                <a:path w="6670834" h="2776928">
                   <a:moveTo>
                     <a:pt x="0" y="0"/>
                   </a:moveTo>
                   <a:lnTo>
-                    <a:pt x="65186" y="157144"/>
-                  </a:lnTo>
-                  <a:lnTo>
-                    <a:pt x="142820" y="334785"/>
-                  </a:lnTo>
-                  <a:lnTo>
-                    <a:pt x="220454" y="503398"/>
-                  </a:lnTo>
-                  <a:lnTo>
-                    <a:pt x="298088" y="663442"/>
-                  </a:lnTo>
-                  <a:lnTo>
-                    <a:pt x="375722" y="815352"/>
-                  </a:lnTo>
-                  <a:lnTo>
-                    <a:pt x="453356" y="959543"/>
-                  </a:lnTo>
-                  <a:lnTo>
-                    <a:pt x="530990" y="1096406"/>
-                  </a:lnTo>
-                  <a:lnTo>
-                    <a:pt x="608624" y="1226313"/>
-                  </a:lnTo>
-                  <a:lnTo>
-                    <a:pt x="686258" y="1349619"/>
-                  </a:lnTo>
-                  <a:lnTo>
-                    <a:pt x="763893" y="1466658"/>
-                  </a:lnTo>
-                  <a:lnTo>
-                    <a:pt x="841527" y="1577749"/>
-                  </a:lnTo>
-                  <a:lnTo>
-                    <a:pt x="919161" y="1683195"/>
-                  </a:lnTo>
-                  <a:lnTo>
-                    <a:pt x="996795" y="1783282"/>
-                  </a:lnTo>
-                  <a:lnTo>
-                    <a:pt x="1074429" y="1878282"/>
-                  </a:lnTo>
-                  <a:lnTo>
-                    <a:pt x="1152063" y="1968455"/>
-                  </a:lnTo>
-                  <a:lnTo>
-                    <a:pt x="1229697" y="2054045"/>
-                  </a:lnTo>
-                  <a:lnTo>
-                    <a:pt x="1307331" y="2135286"/>
-                  </a:lnTo>
-                  <a:lnTo>
-                    <a:pt x="1384965" y="2212397"/>
-                  </a:lnTo>
-                  <a:lnTo>
-                    <a:pt x="1462599" y="2285590"/>
-                  </a:lnTo>
-                  <a:lnTo>
-                    <a:pt x="1540233" y="2355064"/>
-                  </a:lnTo>
-                  <a:lnTo>
-                    <a:pt x="1617867" y="2421006"/>
-                  </a:lnTo>
-                  <a:lnTo>
-                    <a:pt x="1695501" y="2483598"/>
-                  </a:lnTo>
-                  <a:lnTo>
-                    <a:pt x="1773135" y="2543009"/>
-                  </a:lnTo>
-                  <a:lnTo>
-                    <a:pt x="1850769" y="2599400"/>
-                  </a:lnTo>
-                  <a:lnTo>
-                    <a:pt x="1928403" y="2652926"/>
-                  </a:lnTo>
-                  <a:lnTo>
-                    <a:pt x="2006037" y="2703731"/>
-                  </a:lnTo>
-                  <a:lnTo>
-                    <a:pt x="2083671" y="2751955"/>
-                  </a:lnTo>
-                  <a:lnTo>
-                    <a:pt x="2161305" y="2776759"/>
-                  </a:lnTo>
-                  <a:lnTo>
-                    <a:pt x="2238939" y="2757571"/>
-                  </a:lnTo>
-                  <a:lnTo>
-                    <a:pt x="2316573" y="2737964"/>
-                  </a:lnTo>
-                  <a:lnTo>
-                    <a:pt x="2394207" y="2717927"/>
-                  </a:lnTo>
-                  <a:lnTo>
-                    <a:pt x="2471842" y="2697451"/>
-                  </a:lnTo>
-                  <a:lnTo>
-                    <a:pt x="2549476" y="2676526"/>
-                  </a:lnTo>
-                  <a:lnTo>
-                    <a:pt x="2627110" y="2655143"/>
-                  </a:lnTo>
-                  <a:lnTo>
-                    <a:pt x="2704744" y="2633292"/>
-                  </a:lnTo>
-                  <a:lnTo>
-                    <a:pt x="2782378" y="2610962"/>
-                  </a:lnTo>
-                  <a:lnTo>
-                    <a:pt x="2860012" y="2588143"/>
-                  </a:lnTo>
-                  <a:lnTo>
-                    <a:pt x="2937646" y="2564823"/>
-                  </a:lnTo>
-                  <a:lnTo>
-                    <a:pt x="3015280" y="2540993"/>
-                  </a:lnTo>
-                  <a:lnTo>
-                    <a:pt x="3092914" y="2516642"/>
-                  </a:lnTo>
-                  <a:lnTo>
-                    <a:pt x="3170548" y="2491756"/>
-                  </a:lnTo>
-                  <a:lnTo>
-                    <a:pt x="3248182" y="2466326"/>
-                  </a:lnTo>
-                  <a:lnTo>
-                    <a:pt x="3325816" y="2440338"/>
-                  </a:lnTo>
-                  <a:lnTo>
-                    <a:pt x="3403450" y="2413781"/>
-                  </a:lnTo>
-                  <a:lnTo>
-                    <a:pt x="3481084" y="2386642"/>
-                  </a:lnTo>
-                  <a:lnTo>
-                    <a:pt x="3558718" y="2358909"/>
-                  </a:lnTo>
-                  <a:lnTo>
-                    <a:pt x="3636352" y="2330568"/>
-                  </a:lnTo>
-                  <a:lnTo>
-                    <a:pt x="3713986" y="2301607"/>
-                  </a:lnTo>
-                  <a:lnTo>
-                    <a:pt x="3791620" y="2272011"/>
-                  </a:lnTo>
-                  <a:lnTo>
-                    <a:pt x="3869254" y="2241767"/>
-                  </a:lnTo>
-                  <a:lnTo>
-                    <a:pt x="3946888" y="2210860"/>
-                  </a:lnTo>
-                  <a:lnTo>
-                    <a:pt x="4024522" y="2179276"/>
-                  </a:lnTo>
-                  <a:lnTo>
-                    <a:pt x="4102156" y="2147000"/>
-                  </a:lnTo>
-                  <a:lnTo>
-                    <a:pt x="4179790" y="2114017"/>
-                  </a:lnTo>
-                  <a:lnTo>
-                    <a:pt x="4257425" y="2080312"/>
-                  </a:lnTo>
-                  <a:lnTo>
-                    <a:pt x="4335059" y="2045868"/>
-                  </a:lnTo>
-                  <a:lnTo>
-                    <a:pt x="4412693" y="2010670"/>
-                  </a:lnTo>
-                  <a:lnTo>
-                    <a:pt x="4490327" y="1974701"/>
-                  </a:lnTo>
-                  <a:lnTo>
-                    <a:pt x="4567961" y="1937943"/>
-                  </a:lnTo>
-                  <a:lnTo>
-                    <a:pt x="4645595" y="1900381"/>
-                  </a:lnTo>
-                  <a:lnTo>
-                    <a:pt x="4723229" y="1861996"/>
-                  </a:lnTo>
-                  <a:lnTo>
-                    <a:pt x="4800863" y="1822769"/>
-                  </a:lnTo>
-                  <a:lnTo>
-                    <a:pt x="4878497" y="1782684"/>
-                  </a:lnTo>
-                  <a:lnTo>
-                    <a:pt x="4956131" y="1741720"/>
-                  </a:lnTo>
-                  <a:lnTo>
-                    <a:pt x="5033765" y="1699859"/>
-                  </a:lnTo>
-                  <a:lnTo>
-                    <a:pt x="5111399" y="1657082"/>
-                  </a:lnTo>
-                  <a:lnTo>
-                    <a:pt x="5189033" y="1613366"/>
-                  </a:lnTo>
-                  <a:lnTo>
-                    <a:pt x="5266667" y="1568694"/>
-                  </a:lnTo>
-                  <a:lnTo>
-                    <a:pt x="5344301" y="1523043"/>
-                  </a:lnTo>
-                  <a:lnTo>
-                    <a:pt x="5421935" y="1476391"/>
-                  </a:lnTo>
-                  <a:lnTo>
-                    <a:pt x="5499569" y="1428718"/>
-                  </a:lnTo>
-                  <a:lnTo>
-                    <a:pt x="5577203" y="1380000"/>
-                  </a:lnTo>
-                  <a:lnTo>
-                    <a:pt x="5654837" y="1330215"/>
-                  </a:lnTo>
-                  <a:lnTo>
-                    <a:pt x="5732471" y="1279340"/>
-                  </a:lnTo>
-                  <a:lnTo>
-                    <a:pt x="5810105" y="1227350"/>
-                  </a:lnTo>
-                  <a:lnTo>
-                    <a:pt x="5887739" y="1174221"/>
-                  </a:lnTo>
-                  <a:lnTo>
-                    <a:pt x="5965374" y="1119929"/>
-                  </a:lnTo>
-                  <a:lnTo>
-                    <a:pt x="6043008" y="1064447"/>
-                  </a:lnTo>
-                  <a:lnTo>
-                    <a:pt x="6120642" y="1007749"/>
+                    <a:pt x="71940" y="137928"/>
+                  </a:lnTo>
+                  <a:lnTo>
+                    <a:pt x="149574" y="280725"/>
+                  </a:lnTo>
+                  <a:lnTo>
+                    <a:pt x="227208" y="417720"/>
+                  </a:lnTo>
+                  <a:lnTo>
+                    <a:pt x="304842" y="549149"/>
+                  </a:lnTo>
+                  <a:lnTo>
+                    <a:pt x="382476" y="675239"/>
+                  </a:lnTo>
+                  <a:lnTo>
+                    <a:pt x="460111" y="796205"/>
+                  </a:lnTo>
+                  <a:lnTo>
+                    <a:pt x="537745" y="912257"/>
+                  </a:lnTo>
+                  <a:lnTo>
+                    <a:pt x="615379" y="1023594"/>
+                  </a:lnTo>
+                  <a:lnTo>
+                    <a:pt x="693013" y="1130408"/>
+                  </a:lnTo>
+                  <a:lnTo>
+                    <a:pt x="770647" y="1232882"/>
+                  </a:lnTo>
+                  <a:lnTo>
+                    <a:pt x="848281" y="1331193"/>
+                  </a:lnTo>
+                  <a:lnTo>
+                    <a:pt x="925915" y="1425509"/>
+                  </a:lnTo>
+                  <a:lnTo>
+                    <a:pt x="1003549" y="1515994"/>
+                  </a:lnTo>
+                  <a:lnTo>
+                    <a:pt x="1081183" y="1602802"/>
+                  </a:lnTo>
+                  <a:lnTo>
+                    <a:pt x="1158817" y="1686083"/>
+                  </a:lnTo>
+                  <a:lnTo>
+                    <a:pt x="1236451" y="1765981"/>
+                  </a:lnTo>
+                  <a:lnTo>
+                    <a:pt x="1314085" y="1842633"/>
+                  </a:lnTo>
+                  <a:lnTo>
+                    <a:pt x="1391719" y="1916171"/>
+                  </a:lnTo>
+                  <a:lnTo>
+                    <a:pt x="1469353" y="1986720"/>
+                  </a:lnTo>
+                  <a:lnTo>
+                    <a:pt x="1546987" y="2054404"/>
+                  </a:lnTo>
+                  <a:lnTo>
+                    <a:pt x="1624621" y="2119338"/>
+                  </a:lnTo>
+                  <a:lnTo>
+                    <a:pt x="1702255" y="2181633"/>
+                  </a:lnTo>
+                  <a:lnTo>
+                    <a:pt x="1779889" y="2241398"/>
+                  </a:lnTo>
+                  <a:lnTo>
+                    <a:pt x="1857523" y="2298734"/>
+                  </a:lnTo>
+                  <a:lnTo>
+                    <a:pt x="1935157" y="2353741"/>
+                  </a:lnTo>
+                  <a:lnTo>
+                    <a:pt x="2012791" y="2406513"/>
+                  </a:lnTo>
+                  <a:lnTo>
+                    <a:pt x="2090425" y="2457141"/>
+                  </a:lnTo>
+                  <a:lnTo>
+                    <a:pt x="2168059" y="2505712"/>
+                  </a:lnTo>
+                  <a:lnTo>
+                    <a:pt x="2245694" y="2552310"/>
+                  </a:lnTo>
+                  <a:lnTo>
+                    <a:pt x="2323328" y="2597015"/>
+                  </a:lnTo>
+                  <a:lnTo>
+                    <a:pt x="2400962" y="2639903"/>
+                  </a:lnTo>
+                  <a:lnTo>
+                    <a:pt x="2478596" y="2681049"/>
+                  </a:lnTo>
+                  <a:lnTo>
+                    <a:pt x="2556230" y="2720523"/>
+                  </a:lnTo>
+                  <a:lnTo>
+                    <a:pt x="2633864" y="2758394"/>
+                  </a:lnTo>
+                  <a:lnTo>
+                    <a:pt x="2711498" y="2776928"/>
+                  </a:lnTo>
+                  <a:lnTo>
+                    <a:pt x="2789132" y="2758270"/>
+                  </a:lnTo>
+                  <a:lnTo>
+                    <a:pt x="2866766" y="2739215"/>
+                  </a:lnTo>
+                  <a:lnTo>
+                    <a:pt x="2944400" y="2719754"/>
+                  </a:lnTo>
+                  <a:lnTo>
+                    <a:pt x="3022034" y="2699878"/>
+                  </a:lnTo>
+                  <a:lnTo>
+                    <a:pt x="3099668" y="2679579"/>
+                  </a:lnTo>
+                  <a:lnTo>
+                    <a:pt x="3177302" y="2658847"/>
+                  </a:lnTo>
+                  <a:lnTo>
+                    <a:pt x="3254936" y="2637673"/>
+                  </a:lnTo>
+                  <a:lnTo>
+                    <a:pt x="3332570" y="2616049"/>
+                  </a:lnTo>
+                  <a:lnTo>
+                    <a:pt x="3410204" y="2593964"/>
+                  </a:lnTo>
+                  <a:lnTo>
+                    <a:pt x="3487838" y="2571408"/>
+                  </a:lnTo>
+                  <a:lnTo>
+                    <a:pt x="3565472" y="2548371"/>
+                  </a:lnTo>
+                  <a:lnTo>
+                    <a:pt x="3643106" y="2524844"/>
+                  </a:lnTo>
+                  <a:lnTo>
+                    <a:pt x="3720740" y="2500816"/>
+                  </a:lnTo>
+                  <a:lnTo>
+                    <a:pt x="3798374" y="2476275"/>
+                  </a:lnTo>
+                  <a:lnTo>
+                    <a:pt x="3876008" y="2451212"/>
+                  </a:lnTo>
+                  <a:lnTo>
+                    <a:pt x="3953643" y="2425615"/>
+                  </a:lnTo>
+                  <a:lnTo>
+                    <a:pt x="4031277" y="2399472"/>
+                  </a:lnTo>
+                  <a:lnTo>
+                    <a:pt x="4108911" y="2372773"/>
+                  </a:lnTo>
+                  <a:lnTo>
+                    <a:pt x="4186545" y="2345504"/>
+                  </a:lnTo>
+                  <a:lnTo>
+                    <a:pt x="4264179" y="2317655"/>
+                  </a:lnTo>
+                  <a:lnTo>
+                    <a:pt x="4341813" y="2289212"/>
+                  </a:lnTo>
+                  <a:lnTo>
+                    <a:pt x="4419447" y="2260164"/>
+                  </a:lnTo>
+                  <a:lnTo>
+                    <a:pt x="4497081" y="2230496"/>
+                  </a:lnTo>
+                  <a:lnTo>
+                    <a:pt x="4574715" y="2200196"/>
+                  </a:lnTo>
+                  <a:lnTo>
+                    <a:pt x="4652349" y="2169251"/>
+                  </a:lnTo>
+                  <a:lnTo>
+                    <a:pt x="4729983" y="2137646"/>
+                  </a:lnTo>
+                  <a:lnTo>
+                    <a:pt x="4807617" y="2105368"/>
+                  </a:lnTo>
+                  <a:lnTo>
+                    <a:pt x="4885251" y="2072403"/>
+                  </a:lnTo>
+                  <a:lnTo>
+                    <a:pt x="4962885" y="2038735"/>
+                  </a:lnTo>
+                  <a:lnTo>
+                    <a:pt x="5040519" y="2004350"/>
+                  </a:lnTo>
+                  <a:lnTo>
+                    <a:pt x="5118153" y="1969232"/>
+                  </a:lnTo>
+                  <a:lnTo>
+                    <a:pt x="5195787" y="1933366"/>
+                  </a:lnTo>
+                  <a:lnTo>
+                    <a:pt x="5273421" y="1896735"/>
+                  </a:lnTo>
+                  <a:lnTo>
+                    <a:pt x="5351055" y="1859325"/>
+                  </a:lnTo>
+                  <a:lnTo>
+                    <a:pt x="5428689" y="1821117"/>
+                  </a:lnTo>
+                  <a:lnTo>
+                    <a:pt x="5506323" y="1782095"/>
+                  </a:lnTo>
+                  <a:lnTo>
+                    <a:pt x="5583957" y="1742242"/>
+                  </a:lnTo>
+                  <a:lnTo>
+                    <a:pt x="5661592" y="1701540"/>
+                  </a:lnTo>
+                  <a:lnTo>
+                    <a:pt x="5739226" y="1659970"/>
+                  </a:lnTo>
+                  <a:lnTo>
+                    <a:pt x="5816860" y="1617515"/>
+                  </a:lnTo>
+                  <a:lnTo>
+                    <a:pt x="5894494" y="1574155"/>
+                  </a:lnTo>
+                  <a:lnTo>
+                    <a:pt x="5972128" y="1529872"/>
+                  </a:lnTo>
+                  <a:lnTo>
+                    <a:pt x="6049762" y="1484645"/>
+                  </a:lnTo>
+                  <a:lnTo>
+                    <a:pt x="6127396" y="1438455"/>
+                  </a:lnTo>
+                  <a:lnTo>
+                    <a:pt x="6205030" y="1391280"/>
+                  </a:lnTo>
+                  <a:lnTo>
+                    <a:pt x="6282664" y="1343100"/>
+                  </a:lnTo>
+                  <a:lnTo>
+                    <a:pt x="6360298" y="1293894"/>
+                  </a:lnTo>
+                  <a:lnTo>
+                    <a:pt x="6437932" y="1243639"/>
+                  </a:lnTo>
+                  <a:lnTo>
+                    <a:pt x="6515566" y="1192314"/>
+                  </a:lnTo>
+                  <a:lnTo>
+                    <a:pt x="6593200" y="1139895"/>
+                  </a:lnTo>
+                  <a:lnTo>
+                    <a:pt x="6670834" y="1086360"/>
                   </a:lnTo>
                 </a:path>
               </a:pathLst>
@@ -3826,300 +3868,300 @@
           </p:nvSpPr>
           <p:spPr>
             <a:xfrm>
-              <a:off x="817517" y="4692098"/>
-              <a:ext cx="7370972" cy="797308"/>
+              <a:off x="817517" y="4691289"/>
+              <a:ext cx="7370972" cy="754456"/>
             </a:xfrm>
             <a:custGeom>
               <a:avLst/>
               <a:pathLst>
-                <a:path w="7370972" h="797308">
+                <a:path w="7370972" h="754456">
                   <a:moveTo>
-                    <a:pt x="7370972" y="797308"/>
+                    <a:pt x="7370972" y="754456"/>
                   </a:moveTo>
                   <a:lnTo>
-                    <a:pt x="7293338" y="794106"/>
-                  </a:lnTo>
-                  <a:lnTo>
-                    <a:pt x="7215704" y="790733"/>
-                  </a:lnTo>
-                  <a:lnTo>
-                    <a:pt x="7138070" y="787179"/>
-                  </a:lnTo>
-                  <a:lnTo>
-                    <a:pt x="7060436" y="783435"/>
-                  </a:lnTo>
-                  <a:lnTo>
-                    <a:pt x="6982802" y="779490"/>
-                  </a:lnTo>
-                  <a:lnTo>
-                    <a:pt x="6905168" y="775335"/>
-                  </a:lnTo>
-                  <a:lnTo>
-                    <a:pt x="6827534" y="770956"/>
-                  </a:lnTo>
-                  <a:lnTo>
-                    <a:pt x="6749900" y="766344"/>
-                  </a:lnTo>
-                  <a:lnTo>
-                    <a:pt x="6672266" y="761484"/>
-                  </a:lnTo>
-                  <a:lnTo>
-                    <a:pt x="6594632" y="756364"/>
-                  </a:lnTo>
-                  <a:lnTo>
-                    <a:pt x="6516998" y="750970"/>
-                  </a:lnTo>
-                  <a:lnTo>
-                    <a:pt x="6439364" y="745288"/>
-                  </a:lnTo>
-                  <a:lnTo>
-                    <a:pt x="6361730" y="739301"/>
-                  </a:lnTo>
-                  <a:lnTo>
-                    <a:pt x="6284096" y="732993"/>
-                  </a:lnTo>
-                  <a:lnTo>
-                    <a:pt x="6206462" y="726348"/>
-                  </a:lnTo>
-                  <a:lnTo>
-                    <a:pt x="6128827" y="719347"/>
-                  </a:lnTo>
-                  <a:lnTo>
-                    <a:pt x="6051193" y="711971"/>
-                  </a:lnTo>
-                  <a:lnTo>
-                    <a:pt x="5973559" y="704200"/>
-                  </a:lnTo>
-                  <a:lnTo>
-                    <a:pt x="5895925" y="696014"/>
-                  </a:lnTo>
-                  <a:lnTo>
-                    <a:pt x="5818291" y="687389"/>
-                  </a:lnTo>
-                  <a:lnTo>
-                    <a:pt x="5740657" y="678302"/>
-                  </a:lnTo>
-                  <a:lnTo>
-                    <a:pt x="5663023" y="668728"/>
-                  </a:lnTo>
-                  <a:lnTo>
-                    <a:pt x="5585389" y="658642"/>
-                  </a:lnTo>
-                  <a:lnTo>
-                    <a:pt x="5507755" y="648016"/>
-                  </a:lnTo>
-                  <a:lnTo>
-                    <a:pt x="5430121" y="636821"/>
-                  </a:lnTo>
-                  <a:lnTo>
-                    <a:pt x="5352487" y="625027"/>
-                  </a:lnTo>
-                  <a:lnTo>
-                    <a:pt x="5274853" y="612601"/>
-                  </a:lnTo>
-                  <a:lnTo>
-                    <a:pt x="5197219" y="599510"/>
-                  </a:lnTo>
-                  <a:lnTo>
-                    <a:pt x="5119585" y="585718"/>
-                  </a:lnTo>
-                  <a:lnTo>
-                    <a:pt x="5041951" y="571188"/>
-                  </a:lnTo>
-                  <a:lnTo>
-                    <a:pt x="4964317" y="555879"/>
-                  </a:lnTo>
-                  <a:lnTo>
-                    <a:pt x="4886683" y="539751"/>
-                  </a:lnTo>
-                  <a:lnTo>
-                    <a:pt x="4809049" y="522760"/>
-                  </a:lnTo>
-                  <a:lnTo>
-                    <a:pt x="4731415" y="504858"/>
-                  </a:lnTo>
-                  <a:lnTo>
-                    <a:pt x="4653781" y="485999"/>
-                  </a:lnTo>
-                  <a:lnTo>
-                    <a:pt x="4576147" y="466129"/>
-                  </a:lnTo>
-                  <a:lnTo>
-                    <a:pt x="4498513" y="445196"/>
-                  </a:lnTo>
-                  <a:lnTo>
-                    <a:pt x="4420879" y="423142"/>
-                  </a:lnTo>
-                  <a:lnTo>
-                    <a:pt x="4343244" y="399907"/>
-                  </a:lnTo>
-                  <a:lnTo>
-                    <a:pt x="4265610" y="375428"/>
-                  </a:lnTo>
-                  <a:lnTo>
-                    <a:pt x="4187976" y="349639"/>
-                  </a:lnTo>
-                  <a:lnTo>
-                    <a:pt x="4110342" y="322468"/>
-                  </a:lnTo>
-                  <a:lnTo>
-                    <a:pt x="4032708" y="293843"/>
-                  </a:lnTo>
-                  <a:lnTo>
-                    <a:pt x="3955074" y="263686"/>
-                  </a:lnTo>
-                  <a:lnTo>
-                    <a:pt x="3877440" y="231913"/>
-                  </a:lnTo>
-                  <a:lnTo>
-                    <a:pt x="3799806" y="198440"/>
-                  </a:lnTo>
-                  <a:lnTo>
-                    <a:pt x="3722172" y="163174"/>
-                  </a:lnTo>
-                  <a:lnTo>
-                    <a:pt x="3644538" y="126021"/>
-                  </a:lnTo>
-                  <a:lnTo>
-                    <a:pt x="3566904" y="86878"/>
-                  </a:lnTo>
-                  <a:lnTo>
-                    <a:pt x="3489270" y="45639"/>
-                  </a:lnTo>
-                  <a:lnTo>
-                    <a:pt x="3411636" y="2192"/>
-                  </a:lnTo>
-                  <a:lnTo>
-                    <a:pt x="3334002" y="0"/>
-                  </a:lnTo>
-                  <a:lnTo>
-                    <a:pt x="3256368" y="18373"/>
-                  </a:lnTo>
-                  <a:lnTo>
-                    <a:pt x="3178734" y="36353"/>
-                  </a:lnTo>
-                  <a:lnTo>
-                    <a:pt x="3101100" y="53947"/>
-                  </a:lnTo>
-                  <a:lnTo>
-                    <a:pt x="3023466" y="71164"/>
-                  </a:lnTo>
-                  <a:lnTo>
-                    <a:pt x="2945832" y="88012"/>
-                  </a:lnTo>
-                  <a:lnTo>
-                    <a:pt x="2868198" y="104498"/>
-                  </a:lnTo>
-                  <a:lnTo>
-                    <a:pt x="2790564" y="120632"/>
-                  </a:lnTo>
-                  <a:lnTo>
-                    <a:pt x="2712930" y="136419"/>
-                  </a:lnTo>
-                  <a:lnTo>
-                    <a:pt x="2635295" y="151868"/>
-                  </a:lnTo>
-                  <a:lnTo>
-                    <a:pt x="2557661" y="166986"/>
-                  </a:lnTo>
-                  <a:lnTo>
-                    <a:pt x="2480027" y="181780"/>
-                  </a:lnTo>
-                  <a:lnTo>
-                    <a:pt x="2402393" y="196257"/>
-                  </a:lnTo>
-                  <a:lnTo>
-                    <a:pt x="2324759" y="210423"/>
-                  </a:lnTo>
-                  <a:lnTo>
-                    <a:pt x="2247125" y="224286"/>
-                  </a:lnTo>
-                  <a:lnTo>
-                    <a:pt x="2169491" y="237851"/>
-                  </a:lnTo>
-                  <a:lnTo>
-                    <a:pt x="2091857" y="251126"/>
-                  </a:lnTo>
-                  <a:lnTo>
-                    <a:pt x="2014223" y="264116"/>
-                  </a:lnTo>
-                  <a:lnTo>
-                    <a:pt x="1936589" y="276828"/>
-                  </a:lnTo>
-                  <a:lnTo>
-                    <a:pt x="1858955" y="289267"/>
-                  </a:lnTo>
-                  <a:lnTo>
-                    <a:pt x="1781321" y="301440"/>
-                  </a:lnTo>
-                  <a:lnTo>
-                    <a:pt x="1703687" y="313351"/>
-                  </a:lnTo>
-                  <a:lnTo>
-                    <a:pt x="1626053" y="325008"/>
-                  </a:lnTo>
-                  <a:lnTo>
-                    <a:pt x="1548419" y="336414"/>
-                  </a:lnTo>
-                  <a:lnTo>
-                    <a:pt x="1470785" y="347576"/>
-                  </a:lnTo>
-                  <a:lnTo>
-                    <a:pt x="1393151" y="358498"/>
-                  </a:lnTo>
-                  <a:lnTo>
-                    <a:pt x="1315517" y="369187"/>
-                  </a:lnTo>
-                  <a:lnTo>
-                    <a:pt x="1237883" y="379646"/>
-                  </a:lnTo>
-                  <a:lnTo>
-                    <a:pt x="1160249" y="389881"/>
-                  </a:lnTo>
-                  <a:lnTo>
-                    <a:pt x="1082615" y="399897"/>
-                  </a:lnTo>
-                  <a:lnTo>
-                    <a:pt x="1004981" y="409698"/>
-                  </a:lnTo>
-                  <a:lnTo>
-                    <a:pt x="927346" y="419289"/>
-                  </a:lnTo>
-                  <a:lnTo>
-                    <a:pt x="849712" y="428674"/>
-                  </a:lnTo>
-                  <a:lnTo>
-                    <a:pt x="772078" y="437859"/>
-                  </a:lnTo>
-                  <a:lnTo>
-                    <a:pt x="694444" y="446846"/>
-                  </a:lnTo>
-                  <a:lnTo>
-                    <a:pt x="616810" y="455640"/>
-                  </a:lnTo>
-                  <a:lnTo>
-                    <a:pt x="539176" y="464247"/>
-                  </a:lnTo>
-                  <a:lnTo>
-                    <a:pt x="461542" y="472668"/>
-                  </a:lnTo>
-                  <a:lnTo>
-                    <a:pt x="383908" y="480909"/>
-                  </a:lnTo>
-                  <a:lnTo>
-                    <a:pt x="306274" y="488974"/>
-                  </a:lnTo>
-                  <a:lnTo>
-                    <a:pt x="228640" y="496865"/>
-                  </a:lnTo>
-                  <a:lnTo>
-                    <a:pt x="151006" y="504588"/>
-                  </a:lnTo>
-                  <a:lnTo>
-                    <a:pt x="73372" y="512144"/>
-                  </a:lnTo>
-                  <a:lnTo>
-                    <a:pt x="0" y="519133"/>
+                    <a:pt x="7293338" y="750074"/>
+                  </a:lnTo>
+                  <a:lnTo>
+                    <a:pt x="7215704" y="745507"/>
+                  </a:lnTo>
+                  <a:lnTo>
+                    <a:pt x="7138070" y="740747"/>
+                  </a:lnTo>
+                  <a:lnTo>
+                    <a:pt x="7060436" y="735785"/>
+                  </a:lnTo>
+                  <a:lnTo>
+                    <a:pt x="6982802" y="730613"/>
+                  </a:lnTo>
+                  <a:lnTo>
+                    <a:pt x="6905168" y="725222"/>
+                  </a:lnTo>
+                  <a:lnTo>
+                    <a:pt x="6827534" y="719602"/>
+                  </a:lnTo>
+                  <a:lnTo>
+                    <a:pt x="6749900" y="713745"/>
+                  </a:lnTo>
+                  <a:lnTo>
+                    <a:pt x="6672266" y="707639"/>
+                  </a:lnTo>
+                  <a:lnTo>
+                    <a:pt x="6594632" y="701275"/>
+                  </a:lnTo>
+                  <a:lnTo>
+                    <a:pt x="6516998" y="694641"/>
+                  </a:lnTo>
+                  <a:lnTo>
+                    <a:pt x="6439364" y="687727"/>
+                  </a:lnTo>
+                  <a:lnTo>
+                    <a:pt x="6361730" y="680519"/>
+                  </a:lnTo>
+                  <a:lnTo>
+                    <a:pt x="6284096" y="673007"/>
+                  </a:lnTo>
+                  <a:lnTo>
+                    <a:pt x="6206462" y="665176"/>
+                  </a:lnTo>
+                  <a:lnTo>
+                    <a:pt x="6128827" y="657014"/>
+                  </a:lnTo>
+                  <a:lnTo>
+                    <a:pt x="6051193" y="648506"/>
+                  </a:lnTo>
+                  <a:lnTo>
+                    <a:pt x="5973559" y="639637"/>
+                  </a:lnTo>
+                  <a:lnTo>
+                    <a:pt x="5895925" y="630393"/>
+                  </a:lnTo>
+                  <a:lnTo>
+                    <a:pt x="5818291" y="620758"/>
+                  </a:lnTo>
+                  <a:lnTo>
+                    <a:pt x="5740657" y="610715"/>
+                  </a:lnTo>
+                  <a:lnTo>
+                    <a:pt x="5663023" y="600246"/>
+                  </a:lnTo>
+                  <a:lnTo>
+                    <a:pt x="5585389" y="589334"/>
+                  </a:lnTo>
+                  <a:lnTo>
+                    <a:pt x="5507755" y="577959"/>
+                  </a:lnTo>
+                  <a:lnTo>
+                    <a:pt x="5430121" y="566104"/>
+                  </a:lnTo>
+                  <a:lnTo>
+                    <a:pt x="5352487" y="553746"/>
+                  </a:lnTo>
+                  <a:lnTo>
+                    <a:pt x="5274853" y="540864"/>
+                  </a:lnTo>
+                  <a:lnTo>
+                    <a:pt x="5197219" y="527437"/>
+                  </a:lnTo>
+                  <a:lnTo>
+                    <a:pt x="5119585" y="513442"/>
+                  </a:lnTo>
+                  <a:lnTo>
+                    <a:pt x="5041951" y="498854"/>
+                  </a:lnTo>
+                  <a:lnTo>
+                    <a:pt x="4964317" y="483648"/>
+                  </a:lnTo>
+                  <a:lnTo>
+                    <a:pt x="4886683" y="467798"/>
+                  </a:lnTo>
+                  <a:lnTo>
+                    <a:pt x="4809049" y="451277"/>
+                  </a:lnTo>
+                  <a:lnTo>
+                    <a:pt x="4731415" y="434056"/>
+                  </a:lnTo>
+                  <a:lnTo>
+                    <a:pt x="4653781" y="416106"/>
+                  </a:lnTo>
+                  <a:lnTo>
+                    <a:pt x="4576147" y="397396"/>
+                  </a:lnTo>
+                  <a:lnTo>
+                    <a:pt x="4498513" y="377894"/>
+                  </a:lnTo>
+                  <a:lnTo>
+                    <a:pt x="4420879" y="357565"/>
+                  </a:lnTo>
+                  <a:lnTo>
+                    <a:pt x="4343244" y="336376"/>
+                  </a:lnTo>
+                  <a:lnTo>
+                    <a:pt x="4265610" y="314289"/>
+                  </a:lnTo>
+                  <a:lnTo>
+                    <a:pt x="4187976" y="291267"/>
+                  </a:lnTo>
+                  <a:lnTo>
+                    <a:pt x="4110342" y="267270"/>
+                  </a:lnTo>
+                  <a:lnTo>
+                    <a:pt x="4032708" y="242257"/>
+                  </a:lnTo>
+                  <a:lnTo>
+                    <a:pt x="3955074" y="216185"/>
+                  </a:lnTo>
+                  <a:lnTo>
+                    <a:pt x="3877440" y="189008"/>
+                  </a:lnTo>
+                  <a:lnTo>
+                    <a:pt x="3799806" y="160680"/>
+                  </a:lnTo>
+                  <a:lnTo>
+                    <a:pt x="3722172" y="131153"/>
+                  </a:lnTo>
+                  <a:lnTo>
+                    <a:pt x="3644538" y="100376"/>
+                  </a:lnTo>
+                  <a:lnTo>
+                    <a:pt x="3566904" y="68295"/>
+                  </a:lnTo>
+                  <a:lnTo>
+                    <a:pt x="3489270" y="34855"/>
+                  </a:lnTo>
+                  <a:lnTo>
+                    <a:pt x="3411636" y="0"/>
+                  </a:lnTo>
+                  <a:lnTo>
+                    <a:pt x="3334002" y="470"/>
+                  </a:lnTo>
+                  <a:lnTo>
+                    <a:pt x="3256368" y="18358"/>
+                  </a:lnTo>
+                  <a:lnTo>
+                    <a:pt x="3178734" y="35872"/>
+                  </a:lnTo>
+                  <a:lnTo>
+                    <a:pt x="3101100" y="53021"/>
+                  </a:lnTo>
+                  <a:lnTo>
+                    <a:pt x="3023466" y="69812"/>
+                  </a:lnTo>
+                  <a:lnTo>
+                    <a:pt x="2945832" y="86252"/>
+                  </a:lnTo>
+                  <a:lnTo>
+                    <a:pt x="2868198" y="102350"/>
+                  </a:lnTo>
+                  <a:lnTo>
+                    <a:pt x="2790564" y="118112"/>
+                  </a:lnTo>
+                  <a:lnTo>
+                    <a:pt x="2712930" y="133545"/>
+                  </a:lnTo>
+                  <a:lnTo>
+                    <a:pt x="2635295" y="148657"/>
+                  </a:lnTo>
+                  <a:lnTo>
+                    <a:pt x="2557661" y="163453"/>
+                  </a:lnTo>
+                  <a:lnTo>
+                    <a:pt x="2480027" y="177940"/>
+                  </a:lnTo>
+                  <a:lnTo>
+                    <a:pt x="2402393" y="192125"/>
+                  </a:lnTo>
+                  <a:lnTo>
+                    <a:pt x="2324759" y="206014"/>
+                  </a:lnTo>
+                  <a:lnTo>
+                    <a:pt x="2247125" y="219614"/>
+                  </a:lnTo>
+                  <a:lnTo>
+                    <a:pt x="2169491" y="232929"/>
+                  </a:lnTo>
+                  <a:lnTo>
+                    <a:pt x="2091857" y="245967"/>
+                  </a:lnTo>
+                  <a:lnTo>
+                    <a:pt x="2014223" y="258733"/>
+                  </a:lnTo>
+                  <a:lnTo>
+                    <a:pt x="1936589" y="271233"/>
+                  </a:lnTo>
+                  <a:lnTo>
+                    <a:pt x="1858955" y="283472"/>
+                  </a:lnTo>
+                  <a:lnTo>
+                    <a:pt x="1781321" y="295456"/>
+                  </a:lnTo>
+                  <a:lnTo>
+                    <a:pt x="1703687" y="307189"/>
+                  </a:lnTo>
+                  <a:lnTo>
+                    <a:pt x="1626053" y="318678"/>
+                  </a:lnTo>
+                  <a:lnTo>
+                    <a:pt x="1548419" y="329927"/>
+                  </a:lnTo>
+                  <a:lnTo>
+                    <a:pt x="1470785" y="340942"/>
+                  </a:lnTo>
+                  <a:lnTo>
+                    <a:pt x="1393151" y="351726"/>
+                  </a:lnTo>
+                  <a:lnTo>
+                    <a:pt x="1315517" y="362286"/>
+                  </a:lnTo>
+                  <a:lnTo>
+                    <a:pt x="1237883" y="372626"/>
+                  </a:lnTo>
+                  <a:lnTo>
+                    <a:pt x="1160249" y="382749"/>
+                  </a:lnTo>
+                  <a:lnTo>
+                    <a:pt x="1082615" y="392662"/>
+                  </a:lnTo>
+                  <a:lnTo>
+                    <a:pt x="1004981" y="402368"/>
+                  </a:lnTo>
+                  <a:lnTo>
+                    <a:pt x="927346" y="411871"/>
+                  </a:lnTo>
+                  <a:lnTo>
+                    <a:pt x="849712" y="421176"/>
+                  </a:lnTo>
+                  <a:lnTo>
+                    <a:pt x="772078" y="430287"/>
+                  </a:lnTo>
+                  <a:lnTo>
+                    <a:pt x="694444" y="439208"/>
+                  </a:lnTo>
+                  <a:lnTo>
+                    <a:pt x="616810" y="447943"/>
+                  </a:lnTo>
+                  <a:lnTo>
+                    <a:pt x="539176" y="456495"/>
+                  </a:lnTo>
+                  <a:lnTo>
+                    <a:pt x="461542" y="464869"/>
+                  </a:lnTo>
+                  <a:lnTo>
+                    <a:pt x="383908" y="473069"/>
+                  </a:lnTo>
+                  <a:lnTo>
+                    <a:pt x="306274" y="481097"/>
+                  </a:lnTo>
+                  <a:lnTo>
+                    <a:pt x="228640" y="488958"/>
+                  </a:lnTo>
+                  <a:lnTo>
+                    <a:pt x="151006" y="496655"/>
+                  </a:lnTo>
+                  <a:lnTo>
+                    <a:pt x="73372" y="504191"/>
+                  </a:lnTo>
+                  <a:lnTo>
+                    <a:pt x="0" y="511165"/>
                   </a:lnTo>
                 </a:path>
               </a:pathLst>
@@ -4139,300 +4181,300 @@
           </p:nvSpPr>
           <p:spPr>
             <a:xfrm>
-              <a:off x="817517" y="3858332"/>
-              <a:ext cx="7370972" cy="1293173"/>
+              <a:off x="817517" y="4192380"/>
+              <a:ext cx="7370972" cy="841548"/>
             </a:xfrm>
             <a:custGeom>
               <a:avLst/>
               <a:pathLst>
-                <a:path w="7370972" h="1293173">
+                <a:path w="7370972" h="841548">
                   <a:moveTo>
                     <a:pt x="0" y="0"/>
                   </a:moveTo>
                   <a:lnTo>
-                    <a:pt x="73372" y="24195"/>
-                  </a:lnTo>
-                  <a:lnTo>
-                    <a:pt x="151006" y="49408"/>
-                  </a:lnTo>
-                  <a:lnTo>
-                    <a:pt x="228640" y="74240"/>
-                  </a:lnTo>
-                  <a:lnTo>
-                    <a:pt x="306274" y="98696"/>
-                  </a:lnTo>
-                  <a:lnTo>
-                    <a:pt x="383908" y="122783"/>
-                  </a:lnTo>
-                  <a:lnTo>
-                    <a:pt x="461542" y="146505"/>
-                  </a:lnTo>
-                  <a:lnTo>
-                    <a:pt x="539176" y="169868"/>
-                  </a:lnTo>
-                  <a:lnTo>
-                    <a:pt x="616810" y="192877"/>
-                  </a:lnTo>
-                  <a:lnTo>
-                    <a:pt x="694444" y="215539"/>
-                  </a:lnTo>
-                  <a:lnTo>
-                    <a:pt x="772078" y="237857"/>
-                  </a:lnTo>
-                  <a:lnTo>
-                    <a:pt x="849712" y="259838"/>
-                  </a:lnTo>
-                  <a:lnTo>
-                    <a:pt x="927346" y="281487"/>
-                  </a:lnTo>
-                  <a:lnTo>
-                    <a:pt x="1004981" y="302808"/>
-                  </a:lnTo>
-                  <a:lnTo>
-                    <a:pt x="1082615" y="323807"/>
-                  </a:lnTo>
-                  <a:lnTo>
-                    <a:pt x="1160249" y="344487"/>
-                  </a:lnTo>
-                  <a:lnTo>
-                    <a:pt x="1237883" y="364855"/>
-                  </a:lnTo>
-                  <a:lnTo>
-                    <a:pt x="1315517" y="384915"/>
-                  </a:lnTo>
-                  <a:lnTo>
-                    <a:pt x="1393151" y="404672"/>
-                  </a:lnTo>
-                  <a:lnTo>
-                    <a:pt x="1470785" y="424129"/>
-                  </a:lnTo>
-                  <a:lnTo>
-                    <a:pt x="1548419" y="443292"/>
-                  </a:lnTo>
-                  <a:lnTo>
-                    <a:pt x="1626053" y="462166"/>
-                  </a:lnTo>
-                  <a:lnTo>
-                    <a:pt x="1703687" y="480753"/>
-                  </a:lnTo>
-                  <a:lnTo>
-                    <a:pt x="1781321" y="499060"/>
-                  </a:lnTo>
-                  <a:lnTo>
-                    <a:pt x="1858955" y="517090"/>
-                  </a:lnTo>
-                  <a:lnTo>
-                    <a:pt x="1936589" y="534846"/>
-                  </a:lnTo>
-                  <a:lnTo>
-                    <a:pt x="2014223" y="552335"/>
-                  </a:lnTo>
-                  <a:lnTo>
-                    <a:pt x="2091857" y="569558"/>
-                  </a:lnTo>
-                  <a:lnTo>
-                    <a:pt x="2169491" y="586522"/>
-                  </a:lnTo>
-                  <a:lnTo>
-                    <a:pt x="2247125" y="603228"/>
-                  </a:lnTo>
-                  <a:lnTo>
-                    <a:pt x="2324759" y="619682"/>
-                  </a:lnTo>
-                  <a:lnTo>
-                    <a:pt x="2402393" y="635887"/>
-                  </a:lnTo>
-                  <a:lnTo>
-                    <a:pt x="2480027" y="651846"/>
-                  </a:lnTo>
-                  <a:lnTo>
-                    <a:pt x="2557661" y="667565"/>
-                  </a:lnTo>
-                  <a:lnTo>
-                    <a:pt x="2635295" y="683045"/>
-                  </a:lnTo>
-                  <a:lnTo>
-                    <a:pt x="2712930" y="698292"/>
-                  </a:lnTo>
-                  <a:lnTo>
-                    <a:pt x="2790564" y="713307"/>
-                  </a:lnTo>
-                  <a:lnTo>
-                    <a:pt x="2868198" y="728096"/>
-                  </a:lnTo>
-                  <a:lnTo>
-                    <a:pt x="2945832" y="742661"/>
-                  </a:lnTo>
-                  <a:lnTo>
-                    <a:pt x="3023466" y="757005"/>
-                  </a:lnTo>
-                  <a:lnTo>
-                    <a:pt x="3101100" y="771133"/>
-                  </a:lnTo>
-                  <a:lnTo>
-                    <a:pt x="3178734" y="785046"/>
-                  </a:lnTo>
-                  <a:lnTo>
-                    <a:pt x="3256368" y="798750"/>
-                  </a:lnTo>
-                  <a:lnTo>
-                    <a:pt x="3334002" y="812246"/>
-                  </a:lnTo>
-                  <a:lnTo>
-                    <a:pt x="3411636" y="825537"/>
-                  </a:lnTo>
-                  <a:lnTo>
-                    <a:pt x="3489270" y="838628"/>
-                  </a:lnTo>
-                  <a:lnTo>
-                    <a:pt x="3566904" y="851521"/>
-                  </a:lnTo>
-                  <a:lnTo>
-                    <a:pt x="3644538" y="864218"/>
-                  </a:lnTo>
-                  <a:lnTo>
-                    <a:pt x="3722172" y="876724"/>
-                  </a:lnTo>
-                  <a:lnTo>
-                    <a:pt x="3799806" y="889040"/>
-                  </a:lnTo>
-                  <a:lnTo>
-                    <a:pt x="3877440" y="901170"/>
-                  </a:lnTo>
-                  <a:lnTo>
-                    <a:pt x="3955074" y="913117"/>
-                  </a:lnTo>
-                  <a:lnTo>
-                    <a:pt x="4032708" y="924883"/>
-                  </a:lnTo>
-                  <a:lnTo>
-                    <a:pt x="4110342" y="936471"/>
-                  </a:lnTo>
-                  <a:lnTo>
-                    <a:pt x="4187976" y="947883"/>
-                  </a:lnTo>
-                  <a:lnTo>
-                    <a:pt x="4265610" y="959123"/>
-                  </a:lnTo>
-                  <a:lnTo>
-                    <a:pt x="4343244" y="970193"/>
-                  </a:lnTo>
-                  <a:lnTo>
-                    <a:pt x="4420879" y="981095"/>
-                  </a:lnTo>
-                  <a:lnTo>
-                    <a:pt x="4498513" y="991833"/>
-                  </a:lnTo>
-                  <a:lnTo>
-                    <a:pt x="4576147" y="1002408"/>
-                  </a:lnTo>
-                  <a:lnTo>
-                    <a:pt x="4653781" y="1012823"/>
-                  </a:lnTo>
-                  <a:lnTo>
-                    <a:pt x="4731415" y="1023080"/>
-                  </a:lnTo>
-                  <a:lnTo>
-                    <a:pt x="4809049" y="1033182"/>
-                  </a:lnTo>
-                  <a:lnTo>
-                    <a:pt x="4886683" y="1043132"/>
-                  </a:lnTo>
-                  <a:lnTo>
-                    <a:pt x="4964317" y="1052931"/>
-                  </a:lnTo>
-                  <a:lnTo>
-                    <a:pt x="5041951" y="1062582"/>
-                  </a:lnTo>
-                  <a:lnTo>
-                    <a:pt x="5119585" y="1072086"/>
-                  </a:lnTo>
-                  <a:lnTo>
-                    <a:pt x="5197219" y="1081447"/>
-                  </a:lnTo>
-                  <a:lnTo>
-                    <a:pt x="5274853" y="1090667"/>
-                  </a:lnTo>
-                  <a:lnTo>
-                    <a:pt x="5352487" y="1099747"/>
-                  </a:lnTo>
-                  <a:lnTo>
-                    <a:pt x="5430121" y="1108689"/>
-                  </a:lnTo>
-                  <a:lnTo>
-                    <a:pt x="5507755" y="1117496"/>
-                  </a:lnTo>
-                  <a:lnTo>
-                    <a:pt x="5585389" y="1126170"/>
-                  </a:lnTo>
-                  <a:lnTo>
-                    <a:pt x="5663023" y="1134713"/>
-                  </a:lnTo>
-                  <a:lnTo>
-                    <a:pt x="5740657" y="1143127"/>
-                  </a:lnTo>
-                  <a:lnTo>
-                    <a:pt x="5818291" y="1151413"/>
-                  </a:lnTo>
-                  <a:lnTo>
-                    <a:pt x="5895925" y="1159574"/>
-                  </a:lnTo>
-                  <a:lnTo>
-                    <a:pt x="5973559" y="1167611"/>
-                  </a:lnTo>
-                  <a:lnTo>
-                    <a:pt x="6051193" y="1175527"/>
-                  </a:lnTo>
-                  <a:lnTo>
-                    <a:pt x="6128827" y="1183323"/>
-                  </a:lnTo>
-                  <a:lnTo>
-                    <a:pt x="6206462" y="1191001"/>
-                  </a:lnTo>
-                  <a:lnTo>
-                    <a:pt x="6284096" y="1198563"/>
-                  </a:lnTo>
-                  <a:lnTo>
-                    <a:pt x="6361730" y="1206011"/>
-                  </a:lnTo>
-                  <a:lnTo>
-                    <a:pt x="6439364" y="1213346"/>
-                  </a:lnTo>
-                  <a:lnTo>
-                    <a:pt x="6516998" y="1220570"/>
-                  </a:lnTo>
-                  <a:lnTo>
-                    <a:pt x="6594632" y="1227685"/>
-                  </a:lnTo>
-                  <a:lnTo>
-                    <a:pt x="6672266" y="1234692"/>
-                  </a:lnTo>
-                  <a:lnTo>
-                    <a:pt x="6749900" y="1241593"/>
-                  </a:lnTo>
-                  <a:lnTo>
-                    <a:pt x="6827534" y="1248389"/>
-                  </a:lnTo>
-                  <a:lnTo>
-                    <a:pt x="6905168" y="1255083"/>
-                  </a:lnTo>
-                  <a:lnTo>
-                    <a:pt x="6982802" y="1261676"/>
-                  </a:lnTo>
-                  <a:lnTo>
-                    <a:pt x="7060436" y="1268169"/>
-                  </a:lnTo>
-                  <a:lnTo>
-                    <a:pt x="7138070" y="1274563"/>
-                  </a:lnTo>
-                  <a:lnTo>
-                    <a:pt x="7215704" y="1280861"/>
-                  </a:lnTo>
-                  <a:lnTo>
-                    <a:pt x="7293338" y="1287064"/>
-                  </a:lnTo>
-                  <a:lnTo>
-                    <a:pt x="7370972" y="1293173"/>
+                    <a:pt x="73372" y="13017"/>
+                  </a:lnTo>
+                  <a:lnTo>
+                    <a:pt x="151006" y="26651"/>
+                  </a:lnTo>
+                  <a:lnTo>
+                    <a:pt x="228640" y="40146"/>
+                  </a:lnTo>
+                  <a:lnTo>
+                    <a:pt x="306274" y="53505"/>
+                  </a:lnTo>
+                  <a:lnTo>
+                    <a:pt x="383908" y="66728"/>
+                  </a:lnTo>
+                  <a:lnTo>
+                    <a:pt x="461542" y="79816"/>
+                  </a:lnTo>
+                  <a:lnTo>
+                    <a:pt x="539176" y="92772"/>
+                  </a:lnTo>
+                  <a:lnTo>
+                    <a:pt x="616810" y="105597"/>
+                  </a:lnTo>
+                  <a:lnTo>
+                    <a:pt x="694444" y="118291"/>
+                  </a:lnTo>
+                  <a:lnTo>
+                    <a:pt x="772078" y="130857"/>
+                  </a:lnTo>
+                  <a:lnTo>
+                    <a:pt x="849712" y="143295"/>
+                  </a:lnTo>
+                  <a:lnTo>
+                    <a:pt x="927346" y="155607"/>
+                  </a:lnTo>
+                  <a:lnTo>
+                    <a:pt x="1004981" y="167794"/>
+                  </a:lnTo>
+                  <a:lnTo>
+                    <a:pt x="1082615" y="179858"/>
+                  </a:lnTo>
+                  <a:lnTo>
+                    <a:pt x="1160249" y="191799"/>
+                  </a:lnTo>
+                  <a:lnTo>
+                    <a:pt x="1237883" y="203619"/>
+                  </a:lnTo>
+                  <a:lnTo>
+                    <a:pt x="1315517" y="215319"/>
+                  </a:lnTo>
+                  <a:lnTo>
+                    <a:pt x="1393151" y="226900"/>
+                  </a:lnTo>
+                  <a:lnTo>
+                    <a:pt x="1470785" y="238364"/>
+                  </a:lnTo>
+                  <a:lnTo>
+                    <a:pt x="1548419" y="249711"/>
+                  </a:lnTo>
+                  <a:lnTo>
+                    <a:pt x="1626053" y="260943"/>
+                  </a:lnTo>
+                  <a:lnTo>
+                    <a:pt x="1703687" y="272062"/>
+                  </a:lnTo>
+                  <a:lnTo>
+                    <a:pt x="1781321" y="283067"/>
+                  </a:lnTo>
+                  <a:lnTo>
+                    <a:pt x="1858955" y="293961"/>
+                  </a:lnTo>
+                  <a:lnTo>
+                    <a:pt x="1936589" y="304745"/>
+                  </a:lnTo>
+                  <a:lnTo>
+                    <a:pt x="2014223" y="315419"/>
+                  </a:lnTo>
+                  <a:lnTo>
+                    <a:pt x="2091857" y="325984"/>
+                  </a:lnTo>
+                  <a:lnTo>
+                    <a:pt x="2169491" y="336443"/>
+                  </a:lnTo>
+                  <a:lnTo>
+                    <a:pt x="2247125" y="346795"/>
+                  </a:lnTo>
+                  <a:lnTo>
+                    <a:pt x="2324759" y="357043"/>
+                  </a:lnTo>
+                  <a:lnTo>
+                    <a:pt x="2402393" y="367186"/>
+                  </a:lnTo>
+                  <a:lnTo>
+                    <a:pt x="2480027" y="377226"/>
+                  </a:lnTo>
+                  <a:lnTo>
+                    <a:pt x="2557661" y="387165"/>
+                  </a:lnTo>
+                  <a:lnTo>
+                    <a:pt x="2635295" y="397003"/>
+                  </a:lnTo>
+                  <a:lnTo>
+                    <a:pt x="2712930" y="406741"/>
+                  </a:lnTo>
+                  <a:lnTo>
+                    <a:pt x="2790564" y="416380"/>
+                  </a:lnTo>
+                  <a:lnTo>
+                    <a:pt x="2868198" y="425921"/>
+                  </a:lnTo>
+                  <a:lnTo>
+                    <a:pt x="2945832" y="435366"/>
+                  </a:lnTo>
+                  <a:lnTo>
+                    <a:pt x="3023466" y="444715"/>
+                  </a:lnTo>
+                  <a:lnTo>
+                    <a:pt x="3101100" y="453969"/>
+                  </a:lnTo>
+                  <a:lnTo>
+                    <a:pt x="3178734" y="463129"/>
+                  </a:lnTo>
+                  <a:lnTo>
+                    <a:pt x="3256368" y="472196"/>
+                  </a:lnTo>
+                  <a:lnTo>
+                    <a:pt x="3334002" y="481171"/>
+                  </a:lnTo>
+                  <a:lnTo>
+                    <a:pt x="3411636" y="490055"/>
+                  </a:lnTo>
+                  <a:lnTo>
+                    <a:pt x="3489270" y="498849"/>
+                  </a:lnTo>
+                  <a:lnTo>
+                    <a:pt x="3566904" y="507553"/>
+                  </a:lnTo>
+                  <a:lnTo>
+                    <a:pt x="3644538" y="516170"/>
+                  </a:lnTo>
+                  <a:lnTo>
+                    <a:pt x="3722172" y="524699"/>
+                  </a:lnTo>
+                  <a:lnTo>
+                    <a:pt x="3799806" y="533141"/>
+                  </a:lnTo>
+                  <a:lnTo>
+                    <a:pt x="3877440" y="541498"/>
+                  </a:lnTo>
+                  <a:lnTo>
+                    <a:pt x="3955074" y="549770"/>
+                  </a:lnTo>
+                  <a:lnTo>
+                    <a:pt x="4032708" y="557958"/>
+                  </a:lnTo>
+                  <a:lnTo>
+                    <a:pt x="4110342" y="566063"/>
+                  </a:lnTo>
+                  <a:lnTo>
+                    <a:pt x="4187976" y="574086"/>
+                  </a:lnTo>
+                  <a:lnTo>
+                    <a:pt x="4265610" y="582027"/>
+                  </a:lnTo>
+                  <a:lnTo>
+                    <a:pt x="4343244" y="589888"/>
+                  </a:lnTo>
+                  <a:lnTo>
+                    <a:pt x="4420879" y="597669"/>
+                  </a:lnTo>
+                  <a:lnTo>
+                    <a:pt x="4498513" y="605371"/>
+                  </a:lnTo>
+                  <a:lnTo>
+                    <a:pt x="4576147" y="612995"/>
+                  </a:lnTo>
+                  <a:lnTo>
+                    <a:pt x="4653781" y="620542"/>
+                  </a:lnTo>
+                  <a:lnTo>
+                    <a:pt x="4731415" y="628012"/>
+                  </a:lnTo>
+                  <a:lnTo>
+                    <a:pt x="4809049" y="635406"/>
+                  </a:lnTo>
+                  <a:lnTo>
+                    <a:pt x="4886683" y="642725"/>
+                  </a:lnTo>
+                  <a:lnTo>
+                    <a:pt x="4964317" y="649970"/>
+                  </a:lnTo>
+                  <a:lnTo>
+                    <a:pt x="5041951" y="657141"/>
+                  </a:lnTo>
+                  <a:lnTo>
+                    <a:pt x="5119585" y="664240"/>
+                  </a:lnTo>
+                  <a:lnTo>
+                    <a:pt x="5197219" y="671267"/>
+                  </a:lnTo>
+                  <a:lnTo>
+                    <a:pt x="5274853" y="678222"/>
+                  </a:lnTo>
+                  <a:lnTo>
+                    <a:pt x="5352487" y="685107"/>
+                  </a:lnTo>
+                  <a:lnTo>
+                    <a:pt x="5430121" y="691922"/>
+                  </a:lnTo>
+                  <a:lnTo>
+                    <a:pt x="5507755" y="698668"/>
+                  </a:lnTo>
+                  <a:lnTo>
+                    <a:pt x="5585389" y="705345"/>
+                  </a:lnTo>
+                  <a:lnTo>
+                    <a:pt x="5663023" y="711955"/>
+                  </a:lnTo>
+                  <a:lnTo>
+                    <a:pt x="5740657" y="718498"/>
+                  </a:lnTo>
+                  <a:lnTo>
+                    <a:pt x="5818291" y="724974"/>
+                  </a:lnTo>
+                  <a:lnTo>
+                    <a:pt x="5895925" y="731384"/>
+                  </a:lnTo>
+                  <a:lnTo>
+                    <a:pt x="5973559" y="737730"/>
+                  </a:lnTo>
+                  <a:lnTo>
+                    <a:pt x="6051193" y="744011"/>
+                  </a:lnTo>
+                  <a:lnTo>
+                    <a:pt x="6128827" y="750228"/>
+                  </a:lnTo>
+                  <a:lnTo>
+                    <a:pt x="6206462" y="756383"/>
+                  </a:lnTo>
+                  <a:lnTo>
+                    <a:pt x="6284096" y="762474"/>
+                  </a:lnTo>
+                  <a:lnTo>
+                    <a:pt x="6361730" y="768504"/>
+                  </a:lnTo>
+                  <a:lnTo>
+                    <a:pt x="6439364" y="774473"/>
+                  </a:lnTo>
+                  <a:lnTo>
+                    <a:pt x="6516998" y="780382"/>
+                  </a:lnTo>
+                  <a:lnTo>
+                    <a:pt x="6594632" y="786230"/>
+                  </a:lnTo>
+                  <a:lnTo>
+                    <a:pt x="6672266" y="792019"/>
+                  </a:lnTo>
+                  <a:lnTo>
+                    <a:pt x="6749900" y="797749"/>
+                  </a:lnTo>
+                  <a:lnTo>
+                    <a:pt x="6827534" y="803421"/>
+                  </a:lnTo>
+                  <a:lnTo>
+                    <a:pt x="6905168" y="809036"/>
+                  </a:lnTo>
+                  <a:lnTo>
+                    <a:pt x="6982802" y="814594"/>
+                  </a:lnTo>
+                  <a:lnTo>
+                    <a:pt x="7060436" y="820095"/>
+                  </a:lnTo>
+                  <a:lnTo>
+                    <a:pt x="7138070" y="825540"/>
+                  </a:lnTo>
+                  <a:lnTo>
+                    <a:pt x="7215704" y="830931"/>
+                  </a:lnTo>
+                  <a:lnTo>
+                    <a:pt x="7293338" y="836266"/>
+                  </a:lnTo>
+                  <a:lnTo>
+                    <a:pt x="7370972" y="841548"/>
                   </a:lnTo>
                 </a:path>
               </a:pathLst>

--- a/docs/plots/carbo/jx_carbo_linsubhr_ratio_hosp2.pptx
+++ b/docs/plots/carbo/jx_carbo_linsubhr_ratio_hosp2.pptx
@@ -3205,13 +3205,13 @@
                     <a:pt x="5663023" y="2038735"/>
                   </a:lnTo>
                   <a:lnTo>
-                    <a:pt x="5740657" y="2004350"/>
+                    <a:pt x="5740657" y="2004349"/>
                   </a:lnTo>
                   <a:lnTo>
                     <a:pt x="5818291" y="1969232"/>
                   </a:lnTo>
                   <a:lnTo>
-                    <a:pt x="5895925" y="1933366"/>
+                    <a:pt x="5895925" y="1933365"/>
                   </a:lnTo>
                   <a:lnTo>
                     <a:pt x="5973559" y="1896735"/>
@@ -3247,7 +3247,7 @@
                     <a:pt x="6749900" y="1484645"/>
                   </a:lnTo>
                   <a:lnTo>
-                    <a:pt x="6827534" y="1438455"/>
+                    <a:pt x="6827534" y="1438454"/>
                   </a:lnTo>
                   <a:lnTo>
                     <a:pt x="6905168" y="1391280"/>
@@ -3268,7 +3268,7 @@
                     <a:pt x="7293338" y="1139895"/>
                   </a:lnTo>
                   <a:lnTo>
-                    <a:pt x="7370972" y="1086360"/>
+                    <a:pt x="7370972" y="1086359"/>
                   </a:lnTo>
                   <a:lnTo>
                     <a:pt x="7370972" y="3549182"/>
@@ -3499,7 +3499,7 @@
                     <a:pt x="1548419" y="3124653"/>
                   </a:lnTo>
                   <a:lnTo>
-                    <a:pt x="1470785" y="3135667"/>
+                    <a:pt x="1470785" y="3135668"/>
                   </a:lnTo>
                   <a:lnTo>
                     <a:pt x="1393151" y="3146452"/>
@@ -3582,7 +3582,7 @@
           </p:nvSpPr>
           <p:spPr>
             <a:xfrm>
-              <a:off x="1517655" y="1896563"/>
+              <a:off x="1517656" y="1896563"/>
               <a:ext cx="6670834" cy="2776928"/>
             </a:xfrm>
             <a:custGeom>
@@ -3608,10 +3608,10 @@
                     <a:pt x="382476" y="675239"/>
                   </a:lnTo>
                   <a:lnTo>
-                    <a:pt x="460111" y="796205"/>
-                  </a:lnTo>
-                  <a:lnTo>
-                    <a:pt x="537745" y="912257"/>
+                    <a:pt x="460110" y="796205"/>
+                  </a:lnTo>
+                  <a:lnTo>
+                    <a:pt x="537744" y="912257"/>
                   </a:lnTo>
                   <a:lnTo>
                     <a:pt x="615379" y="1023594"/>
@@ -3677,7 +3677,7 @@
                     <a:pt x="2168059" y="2505712"/>
                   </a:lnTo>
                   <a:lnTo>
-                    <a:pt x="2245694" y="2552310"/>
+                    <a:pt x="2245693" y="2552310"/>
                   </a:lnTo>
                   <a:lnTo>
                     <a:pt x="2323328" y="2597015"/>
@@ -3743,7 +3743,7 @@
                     <a:pt x="3876008" y="2451212"/>
                   </a:lnTo>
                   <a:lnTo>
-                    <a:pt x="3953643" y="2425615"/>
+                    <a:pt x="3953642" y="2425615"/>
                   </a:lnTo>
                   <a:lnTo>
                     <a:pt x="4031277" y="2399472"/>
@@ -3785,13 +3785,13 @@
                     <a:pt x="4962885" y="2038735"/>
                   </a:lnTo>
                   <a:lnTo>
-                    <a:pt x="5040519" y="2004350"/>
+                    <a:pt x="5040519" y="2004349"/>
                   </a:lnTo>
                   <a:lnTo>
                     <a:pt x="5118153" y="1969232"/>
                   </a:lnTo>
                   <a:lnTo>
-                    <a:pt x="5195787" y="1933366"/>
+                    <a:pt x="5195787" y="1933365"/>
                   </a:lnTo>
                   <a:lnTo>
                     <a:pt x="5273421" y="1896735"/>
@@ -3809,7 +3809,7 @@
                     <a:pt x="5583957" y="1742242"/>
                   </a:lnTo>
                   <a:lnTo>
-                    <a:pt x="5661592" y="1701540"/>
+                    <a:pt x="5661591" y="1701540"/>
                   </a:lnTo>
                   <a:lnTo>
                     <a:pt x="5739226" y="1659970"/>
@@ -3827,7 +3827,7 @@
                     <a:pt x="6049762" y="1484645"/>
                   </a:lnTo>
                   <a:lnTo>
-                    <a:pt x="6127396" y="1438455"/>
+                    <a:pt x="6127396" y="1438454"/>
                   </a:lnTo>
                   <a:lnTo>
                     <a:pt x="6205030" y="1391280"/>
@@ -3848,7 +3848,7 @@
                     <a:pt x="6593200" y="1139895"/>
                   </a:lnTo>
                   <a:lnTo>
-                    <a:pt x="6670834" y="1086360"/>
+                    <a:pt x="6670834" y="1086359"/>
                   </a:lnTo>
                 </a:path>
               </a:pathLst>
@@ -4369,7 +4369,7 @@
                     <a:pt x="4576147" y="612995"/>
                   </a:lnTo>
                   <a:lnTo>
-                    <a:pt x="4653781" y="620542"/>
+                    <a:pt x="4653781" y="620541"/>
                   </a:lnTo>
                   <a:lnTo>
                     <a:pt x="4731415" y="628012"/>

--- a/docs/plots/carbo/jx_carbo_linsubhr_ratio_hosp2.pptx
+++ b/docs/plots/carbo/jx_carbo_linsubhr_ratio_hosp2.pptx
@@ -2271,7 +2271,7 @@
           </p:nvSpPr>
           <p:spPr>
             <a:xfrm>
-              <a:off x="817517" y="5114368"/>
+              <a:off x="817517" y="5142518"/>
               <a:ext cx="7799693" cy="0"/>
             </a:xfrm>
             <a:custGeom>
@@ -2314,7 +2314,7 @@
           </p:nvSpPr>
           <p:spPr>
             <a:xfrm>
-              <a:off x="817517" y="4244691"/>
+              <a:off x="817517" y="4313054"/>
               <a:ext cx="7799693" cy="0"/>
             </a:xfrm>
             <a:custGeom>
@@ -2357,7 +2357,7 @@
           </p:nvSpPr>
           <p:spPr>
             <a:xfrm>
-              <a:off x="817517" y="3375014"/>
+              <a:off x="817517" y="3483591"/>
               <a:ext cx="7799693" cy="0"/>
             </a:xfrm>
             <a:custGeom>
@@ -2400,7 +2400,7 @@
           </p:nvSpPr>
           <p:spPr>
             <a:xfrm>
-              <a:off x="817517" y="2505337"/>
+              <a:off x="817517" y="2654127"/>
               <a:ext cx="7799693" cy="0"/>
             </a:xfrm>
             <a:custGeom>
@@ -2443,15 +2443,15 @@
           </p:nvSpPr>
           <p:spPr>
             <a:xfrm>
-              <a:off x="1615213" y="1896563"/>
-              <a:ext cx="0" cy="3826579"/>
+              <a:off x="1615213" y="2073503"/>
+              <a:ext cx="0" cy="3649639"/>
             </a:xfrm>
             <a:custGeom>
               <a:avLst/>
               <a:pathLst>
-                <a:path w="0" h="3826579">
+                <a:path w="0" h="3649639">
                   <a:moveTo>
-                    <a:pt x="0" y="3826579"/>
+                    <a:pt x="0" y="3649639"/>
                   </a:moveTo>
                   <a:lnTo>
                     <a:pt x="0" y="0"/>
@@ -2486,15 +2486,15 @@
           </p:nvSpPr>
           <p:spPr>
             <a:xfrm>
-              <a:off x="3387871" y="1896563"/>
-              <a:ext cx="0" cy="3826579"/>
+              <a:off x="3387871" y="2073503"/>
+              <a:ext cx="0" cy="3649639"/>
             </a:xfrm>
             <a:custGeom>
               <a:avLst/>
               <a:pathLst>
-                <a:path w="0" h="3826579">
+                <a:path w="0" h="3649639">
                   <a:moveTo>
-                    <a:pt x="0" y="3826579"/>
+                    <a:pt x="0" y="3649639"/>
                   </a:moveTo>
                   <a:lnTo>
                     <a:pt x="0" y="0"/>
@@ -2529,15 +2529,15 @@
           </p:nvSpPr>
           <p:spPr>
             <a:xfrm>
-              <a:off x="5160528" y="1896563"/>
-              <a:ext cx="0" cy="3826579"/>
+              <a:off x="5160528" y="2073503"/>
+              <a:ext cx="0" cy="3649639"/>
             </a:xfrm>
             <a:custGeom>
               <a:avLst/>
               <a:pathLst>
-                <a:path w="0" h="3826579">
+                <a:path w="0" h="3649639">
                   <a:moveTo>
-                    <a:pt x="0" y="3826579"/>
+                    <a:pt x="0" y="3649639"/>
                   </a:moveTo>
                   <a:lnTo>
                     <a:pt x="0" y="0"/>
@@ -2572,15 +2572,15 @@
           </p:nvSpPr>
           <p:spPr>
             <a:xfrm>
-              <a:off x="6933186" y="1896563"/>
-              <a:ext cx="0" cy="3826579"/>
+              <a:off x="6933186" y="2073503"/>
+              <a:ext cx="0" cy="3649639"/>
             </a:xfrm>
             <a:custGeom>
               <a:avLst/>
               <a:pathLst>
-                <a:path w="0" h="3826579">
+                <a:path w="0" h="3649639">
                   <a:moveTo>
-                    <a:pt x="0" y="3826579"/>
+                    <a:pt x="0" y="3649639"/>
                   </a:moveTo>
                   <a:lnTo>
                     <a:pt x="0" y="0"/>
@@ -2615,7 +2615,7 @@
           </p:nvSpPr>
           <p:spPr>
             <a:xfrm>
-              <a:off x="817517" y="5549207"/>
+              <a:off x="817517" y="5557249"/>
               <a:ext cx="7799693" cy="0"/>
             </a:xfrm>
             <a:custGeom>
@@ -2658,7 +2658,7 @@
           </p:nvSpPr>
           <p:spPr>
             <a:xfrm>
-              <a:off x="817517" y="4679530"/>
+              <a:off x="817517" y="4727786"/>
               <a:ext cx="7799693" cy="0"/>
             </a:xfrm>
             <a:custGeom>
@@ -2701,7 +2701,7 @@
           </p:nvSpPr>
           <p:spPr>
             <a:xfrm>
-              <a:off x="817517" y="3809853"/>
+              <a:off x="817517" y="3898322"/>
               <a:ext cx="7799693" cy="0"/>
             </a:xfrm>
             <a:custGeom>
@@ -2744,7 +2744,7 @@
           </p:nvSpPr>
           <p:spPr>
             <a:xfrm>
-              <a:off x="817517" y="2940175"/>
+              <a:off x="817517" y="3068859"/>
               <a:ext cx="7799693" cy="0"/>
             </a:xfrm>
             <a:custGeom>
@@ -2787,7 +2787,7 @@
           </p:nvSpPr>
           <p:spPr>
             <a:xfrm>
-              <a:off x="817517" y="2070498"/>
+              <a:off x="817517" y="2239395"/>
               <a:ext cx="7799693" cy="0"/>
             </a:xfrm>
             <a:custGeom>
@@ -2830,15 +2830,15 @@
           </p:nvSpPr>
           <p:spPr>
             <a:xfrm>
-              <a:off x="2501542" y="1896563"/>
-              <a:ext cx="0" cy="3826579"/>
+              <a:off x="2501542" y="2073503"/>
+              <a:ext cx="0" cy="3649639"/>
             </a:xfrm>
             <a:custGeom>
               <a:avLst/>
               <a:pathLst>
-                <a:path w="0" h="3826579">
+                <a:path w="0" h="3649639">
                   <a:moveTo>
-                    <a:pt x="0" y="3826579"/>
+                    <a:pt x="0" y="3649639"/>
                   </a:moveTo>
                   <a:lnTo>
                     <a:pt x="0" y="0"/>
@@ -2873,15 +2873,15 @@
           </p:nvSpPr>
           <p:spPr>
             <a:xfrm>
-              <a:off x="4274200" y="1896563"/>
-              <a:ext cx="0" cy="3826579"/>
+              <a:off x="4274200" y="2073503"/>
+              <a:ext cx="0" cy="3649639"/>
             </a:xfrm>
             <a:custGeom>
               <a:avLst/>
               <a:pathLst>
-                <a:path w="0" h="3826579">
+                <a:path w="0" h="3649639">
                   <a:moveTo>
-                    <a:pt x="0" y="3826579"/>
+                    <a:pt x="0" y="3649639"/>
                   </a:moveTo>
                   <a:lnTo>
                     <a:pt x="0" y="0"/>
@@ -2916,15 +2916,15 @@
           </p:nvSpPr>
           <p:spPr>
             <a:xfrm>
-              <a:off x="6046857" y="1896563"/>
-              <a:ext cx="0" cy="3826579"/>
+              <a:off x="6046857" y="2073503"/>
+              <a:ext cx="0" cy="3649639"/>
             </a:xfrm>
             <a:custGeom>
               <a:avLst/>
               <a:pathLst>
-                <a:path w="0" h="3826579">
+                <a:path w="0" h="3649639">
                   <a:moveTo>
-                    <a:pt x="0" y="3826579"/>
+                    <a:pt x="0" y="3649639"/>
                   </a:moveTo>
                   <a:lnTo>
                     <a:pt x="0" y="0"/>
@@ -2959,15 +2959,15 @@
           </p:nvSpPr>
           <p:spPr>
             <a:xfrm>
-              <a:off x="7819515" y="1896563"/>
-              <a:ext cx="0" cy="3826579"/>
+              <a:off x="7819515" y="2073503"/>
+              <a:ext cx="0" cy="3649639"/>
             </a:xfrm>
             <a:custGeom>
               <a:avLst/>
               <a:pathLst>
-                <a:path w="0" h="3826579">
+                <a:path w="0" h="3649639">
                   <a:moveTo>
-                    <a:pt x="0" y="3826579"/>
+                    <a:pt x="0" y="3649639"/>
                   </a:moveTo>
                   <a:lnTo>
                     <a:pt x="0" y="0"/>
@@ -3002,561 +3002,561 @@
           </p:nvSpPr>
           <p:spPr>
             <a:xfrm>
-              <a:off x="817517" y="1896563"/>
-              <a:ext cx="7370972" cy="3549182"/>
+              <a:off x="817517" y="2073503"/>
+              <a:ext cx="7370972" cy="3385069"/>
             </a:xfrm>
             <a:custGeom>
               <a:avLst/>
               <a:pathLst>
-                <a:path w="7370972" h="3549182">
+                <a:path w="7370972" h="3385069">
                   <a:moveTo>
                     <a:pt x="700138" y="0"/>
                   </a:moveTo>
                   <a:lnTo>
-                    <a:pt x="772078" y="137928"/>
-                  </a:lnTo>
-                  <a:lnTo>
-                    <a:pt x="849712" y="280725"/>
-                  </a:lnTo>
-                  <a:lnTo>
-                    <a:pt x="927346" y="417720"/>
-                  </a:lnTo>
-                  <a:lnTo>
-                    <a:pt x="1004981" y="549149"/>
-                  </a:lnTo>
-                  <a:lnTo>
-                    <a:pt x="1082615" y="675239"/>
-                  </a:lnTo>
-                  <a:lnTo>
-                    <a:pt x="1160249" y="796205"/>
-                  </a:lnTo>
-                  <a:lnTo>
-                    <a:pt x="1237883" y="912257"/>
-                  </a:lnTo>
-                  <a:lnTo>
-                    <a:pt x="1315517" y="1023594"/>
-                  </a:lnTo>
-                  <a:lnTo>
-                    <a:pt x="1393151" y="1130408"/>
-                  </a:lnTo>
-                  <a:lnTo>
-                    <a:pt x="1470785" y="1232882"/>
-                  </a:lnTo>
-                  <a:lnTo>
-                    <a:pt x="1548419" y="1331193"/>
-                  </a:lnTo>
-                  <a:lnTo>
-                    <a:pt x="1626053" y="1425509"/>
-                  </a:lnTo>
-                  <a:lnTo>
-                    <a:pt x="1703687" y="1515994"/>
-                  </a:lnTo>
-                  <a:lnTo>
-                    <a:pt x="1781321" y="1602802"/>
-                  </a:lnTo>
-                  <a:lnTo>
-                    <a:pt x="1858955" y="1686083"/>
-                  </a:lnTo>
-                  <a:lnTo>
-                    <a:pt x="1936589" y="1765981"/>
-                  </a:lnTo>
-                  <a:lnTo>
-                    <a:pt x="2014223" y="1842633"/>
-                  </a:lnTo>
-                  <a:lnTo>
-                    <a:pt x="2091857" y="1916171"/>
-                  </a:lnTo>
-                  <a:lnTo>
-                    <a:pt x="2169491" y="1986720"/>
-                  </a:lnTo>
-                  <a:lnTo>
-                    <a:pt x="2247125" y="2054404"/>
-                  </a:lnTo>
-                  <a:lnTo>
-                    <a:pt x="2324759" y="2119338"/>
-                  </a:lnTo>
-                  <a:lnTo>
-                    <a:pt x="2402393" y="2181633"/>
-                  </a:lnTo>
-                  <a:lnTo>
-                    <a:pt x="2480027" y="2241398"/>
-                  </a:lnTo>
-                  <a:lnTo>
-                    <a:pt x="2557661" y="2298734"/>
-                  </a:lnTo>
-                  <a:lnTo>
-                    <a:pt x="2635295" y="2353741"/>
-                  </a:lnTo>
-                  <a:lnTo>
-                    <a:pt x="2712930" y="2406513"/>
-                  </a:lnTo>
-                  <a:lnTo>
-                    <a:pt x="2790564" y="2457141"/>
-                  </a:lnTo>
-                  <a:lnTo>
-                    <a:pt x="2868198" y="2505712"/>
-                  </a:lnTo>
-                  <a:lnTo>
-                    <a:pt x="2945832" y="2552310"/>
-                  </a:lnTo>
-                  <a:lnTo>
-                    <a:pt x="3023466" y="2597015"/>
-                  </a:lnTo>
-                  <a:lnTo>
-                    <a:pt x="3101100" y="2639903"/>
-                  </a:lnTo>
-                  <a:lnTo>
-                    <a:pt x="3178734" y="2681049"/>
-                  </a:lnTo>
-                  <a:lnTo>
-                    <a:pt x="3256368" y="2720523"/>
-                  </a:lnTo>
-                  <a:lnTo>
-                    <a:pt x="3334002" y="2758394"/>
-                  </a:lnTo>
-                  <a:lnTo>
-                    <a:pt x="3411636" y="2776928"/>
-                  </a:lnTo>
-                  <a:lnTo>
-                    <a:pt x="3489270" y="2758270"/>
-                  </a:lnTo>
-                  <a:lnTo>
-                    <a:pt x="3566904" y="2739215"/>
-                  </a:lnTo>
-                  <a:lnTo>
-                    <a:pt x="3644538" y="2719754"/>
-                  </a:lnTo>
-                  <a:lnTo>
-                    <a:pt x="3722172" y="2699878"/>
-                  </a:lnTo>
-                  <a:lnTo>
-                    <a:pt x="3799806" y="2679579"/>
-                  </a:lnTo>
-                  <a:lnTo>
-                    <a:pt x="3877440" y="2658847"/>
-                  </a:lnTo>
-                  <a:lnTo>
-                    <a:pt x="3955074" y="2637673"/>
-                  </a:lnTo>
-                  <a:lnTo>
-                    <a:pt x="4032708" y="2616049"/>
-                  </a:lnTo>
-                  <a:lnTo>
-                    <a:pt x="4110342" y="2593964"/>
-                  </a:lnTo>
-                  <a:lnTo>
-                    <a:pt x="4187976" y="2571408"/>
-                  </a:lnTo>
-                  <a:lnTo>
-                    <a:pt x="4265610" y="2548371"/>
-                  </a:lnTo>
-                  <a:lnTo>
-                    <a:pt x="4343244" y="2524844"/>
-                  </a:lnTo>
-                  <a:lnTo>
-                    <a:pt x="4420879" y="2500816"/>
-                  </a:lnTo>
-                  <a:lnTo>
-                    <a:pt x="4498513" y="2476275"/>
-                  </a:lnTo>
-                  <a:lnTo>
-                    <a:pt x="4576147" y="2451212"/>
-                  </a:lnTo>
-                  <a:lnTo>
-                    <a:pt x="4653781" y="2425615"/>
-                  </a:lnTo>
-                  <a:lnTo>
-                    <a:pt x="4731415" y="2399472"/>
-                  </a:lnTo>
-                  <a:lnTo>
-                    <a:pt x="4809049" y="2372773"/>
-                  </a:lnTo>
-                  <a:lnTo>
-                    <a:pt x="4886683" y="2345504"/>
-                  </a:lnTo>
-                  <a:lnTo>
-                    <a:pt x="4964317" y="2317655"/>
-                  </a:lnTo>
-                  <a:lnTo>
-                    <a:pt x="5041951" y="2289212"/>
-                  </a:lnTo>
-                  <a:lnTo>
-                    <a:pt x="5119585" y="2260164"/>
-                  </a:lnTo>
-                  <a:lnTo>
-                    <a:pt x="5197219" y="2230496"/>
-                  </a:lnTo>
-                  <a:lnTo>
-                    <a:pt x="5274853" y="2200196"/>
-                  </a:lnTo>
-                  <a:lnTo>
-                    <a:pt x="5352487" y="2169251"/>
-                  </a:lnTo>
-                  <a:lnTo>
-                    <a:pt x="5430121" y="2137646"/>
-                  </a:lnTo>
-                  <a:lnTo>
-                    <a:pt x="5507755" y="2105368"/>
-                  </a:lnTo>
-                  <a:lnTo>
-                    <a:pt x="5585389" y="2072403"/>
-                  </a:lnTo>
-                  <a:lnTo>
-                    <a:pt x="5663023" y="2038735"/>
-                  </a:lnTo>
-                  <a:lnTo>
-                    <a:pt x="5740657" y="2004349"/>
-                  </a:lnTo>
-                  <a:lnTo>
-                    <a:pt x="5818291" y="1969232"/>
-                  </a:lnTo>
-                  <a:lnTo>
-                    <a:pt x="5895925" y="1933365"/>
-                  </a:lnTo>
-                  <a:lnTo>
-                    <a:pt x="5973559" y="1896735"/>
-                  </a:lnTo>
-                  <a:lnTo>
-                    <a:pt x="6051193" y="1859325"/>
-                  </a:lnTo>
-                  <a:lnTo>
-                    <a:pt x="6128827" y="1821117"/>
-                  </a:lnTo>
-                  <a:lnTo>
-                    <a:pt x="6206462" y="1782095"/>
-                  </a:lnTo>
-                  <a:lnTo>
-                    <a:pt x="6284096" y="1742242"/>
-                  </a:lnTo>
-                  <a:lnTo>
-                    <a:pt x="6361730" y="1701540"/>
-                  </a:lnTo>
-                  <a:lnTo>
-                    <a:pt x="6439364" y="1659970"/>
-                  </a:lnTo>
-                  <a:lnTo>
-                    <a:pt x="6516998" y="1617515"/>
-                  </a:lnTo>
-                  <a:lnTo>
-                    <a:pt x="6594632" y="1574155"/>
-                  </a:lnTo>
-                  <a:lnTo>
-                    <a:pt x="6672266" y="1529872"/>
-                  </a:lnTo>
-                  <a:lnTo>
-                    <a:pt x="6749900" y="1484645"/>
-                  </a:lnTo>
-                  <a:lnTo>
-                    <a:pt x="6827534" y="1438454"/>
-                  </a:lnTo>
-                  <a:lnTo>
-                    <a:pt x="6905168" y="1391280"/>
-                  </a:lnTo>
-                  <a:lnTo>
-                    <a:pt x="6982802" y="1343100"/>
-                  </a:lnTo>
-                  <a:lnTo>
-                    <a:pt x="7060436" y="1293894"/>
-                  </a:lnTo>
-                  <a:lnTo>
-                    <a:pt x="7138070" y="1243639"/>
-                  </a:lnTo>
-                  <a:lnTo>
-                    <a:pt x="7215704" y="1192314"/>
-                  </a:lnTo>
-                  <a:lnTo>
-                    <a:pt x="7293338" y="1139895"/>
-                  </a:lnTo>
-                  <a:lnTo>
-                    <a:pt x="7370972" y="1086359"/>
-                  </a:lnTo>
-                  <a:lnTo>
-                    <a:pt x="7370972" y="3549182"/>
-                  </a:lnTo>
-                  <a:lnTo>
-                    <a:pt x="7293338" y="3544800"/>
-                  </a:lnTo>
-                  <a:lnTo>
-                    <a:pt x="7215704" y="3540233"/>
-                  </a:lnTo>
-                  <a:lnTo>
-                    <a:pt x="7138070" y="3535473"/>
-                  </a:lnTo>
-                  <a:lnTo>
-                    <a:pt x="7060436" y="3530511"/>
-                  </a:lnTo>
-                  <a:lnTo>
-                    <a:pt x="6982802" y="3525339"/>
-                  </a:lnTo>
-                  <a:lnTo>
-                    <a:pt x="6905168" y="3519947"/>
-                  </a:lnTo>
-                  <a:lnTo>
-                    <a:pt x="6827534" y="3514328"/>
-                  </a:lnTo>
-                  <a:lnTo>
-                    <a:pt x="6749900" y="3508470"/>
-                  </a:lnTo>
-                  <a:lnTo>
-                    <a:pt x="6672266" y="3502365"/>
-                  </a:lnTo>
-                  <a:lnTo>
-                    <a:pt x="6594632" y="3496001"/>
-                  </a:lnTo>
-                  <a:lnTo>
-                    <a:pt x="6516998" y="3489367"/>
-                  </a:lnTo>
-                  <a:lnTo>
-                    <a:pt x="6439364" y="3482453"/>
-                  </a:lnTo>
-                  <a:lnTo>
-                    <a:pt x="6361730" y="3475245"/>
-                  </a:lnTo>
-                  <a:lnTo>
-                    <a:pt x="6284096" y="3467733"/>
-                  </a:lnTo>
-                  <a:lnTo>
-                    <a:pt x="6206462" y="3459902"/>
-                  </a:lnTo>
-                  <a:lnTo>
-                    <a:pt x="6128827" y="3451739"/>
-                  </a:lnTo>
-                  <a:lnTo>
-                    <a:pt x="6051193" y="3443231"/>
-                  </a:lnTo>
-                  <a:lnTo>
-                    <a:pt x="5973559" y="3434363"/>
-                  </a:lnTo>
-                  <a:lnTo>
-                    <a:pt x="5895925" y="3425119"/>
-                  </a:lnTo>
-                  <a:lnTo>
-                    <a:pt x="5818291" y="3415484"/>
-                  </a:lnTo>
-                  <a:lnTo>
-                    <a:pt x="5740657" y="3405440"/>
-                  </a:lnTo>
-                  <a:lnTo>
-                    <a:pt x="5663023" y="3394972"/>
-                  </a:lnTo>
-                  <a:lnTo>
-                    <a:pt x="5585389" y="3384060"/>
-                  </a:lnTo>
-                  <a:lnTo>
-                    <a:pt x="5507755" y="3372685"/>
-                  </a:lnTo>
-                  <a:lnTo>
-                    <a:pt x="5430121" y="3360829"/>
-                  </a:lnTo>
-                  <a:lnTo>
-                    <a:pt x="5352487" y="3348471"/>
-                  </a:lnTo>
-                  <a:lnTo>
-                    <a:pt x="5274853" y="3335590"/>
-                  </a:lnTo>
-                  <a:lnTo>
-                    <a:pt x="5197219" y="3322163"/>
-                  </a:lnTo>
-                  <a:lnTo>
-                    <a:pt x="5119585" y="3308168"/>
-                  </a:lnTo>
-                  <a:lnTo>
-                    <a:pt x="5041951" y="3293580"/>
-                  </a:lnTo>
-                  <a:lnTo>
-                    <a:pt x="4964317" y="3278374"/>
-                  </a:lnTo>
-                  <a:lnTo>
-                    <a:pt x="4886683" y="3262524"/>
-                  </a:lnTo>
-                  <a:lnTo>
-                    <a:pt x="4809049" y="3246003"/>
-                  </a:lnTo>
-                  <a:lnTo>
-                    <a:pt x="4731415" y="3228782"/>
-                  </a:lnTo>
-                  <a:lnTo>
-                    <a:pt x="4653781" y="3210832"/>
-                  </a:lnTo>
-                  <a:lnTo>
-                    <a:pt x="4576147" y="3192122"/>
-                  </a:lnTo>
-                  <a:lnTo>
-                    <a:pt x="4498513" y="3172619"/>
-                  </a:lnTo>
-                  <a:lnTo>
-                    <a:pt x="4420879" y="3152291"/>
-                  </a:lnTo>
-                  <a:lnTo>
-                    <a:pt x="4343244" y="3131102"/>
-                  </a:lnTo>
-                  <a:lnTo>
-                    <a:pt x="4265610" y="3109015"/>
-                  </a:lnTo>
-                  <a:lnTo>
-                    <a:pt x="4187976" y="3085993"/>
-                  </a:lnTo>
-                  <a:lnTo>
-                    <a:pt x="4110342" y="3061996"/>
-                  </a:lnTo>
-                  <a:lnTo>
-                    <a:pt x="4032708" y="3036983"/>
-                  </a:lnTo>
-                  <a:lnTo>
-                    <a:pt x="3955074" y="3010910"/>
-                  </a:lnTo>
-                  <a:lnTo>
-                    <a:pt x="3877440" y="2983734"/>
-                  </a:lnTo>
-                  <a:lnTo>
-                    <a:pt x="3799806" y="2955406"/>
-                  </a:lnTo>
-                  <a:lnTo>
-                    <a:pt x="3722172" y="2925879"/>
-                  </a:lnTo>
-                  <a:lnTo>
-                    <a:pt x="3644538" y="2895102"/>
-                  </a:lnTo>
-                  <a:lnTo>
-                    <a:pt x="3566904" y="2863021"/>
-                  </a:lnTo>
-                  <a:lnTo>
-                    <a:pt x="3489270" y="2829581"/>
-                  </a:lnTo>
-                  <a:lnTo>
-                    <a:pt x="3411636" y="2794725"/>
-                  </a:lnTo>
-                  <a:lnTo>
-                    <a:pt x="3334002" y="2795196"/>
-                  </a:lnTo>
-                  <a:lnTo>
-                    <a:pt x="3256368" y="2813083"/>
-                  </a:lnTo>
-                  <a:lnTo>
-                    <a:pt x="3178734" y="2830598"/>
-                  </a:lnTo>
-                  <a:lnTo>
-                    <a:pt x="3101100" y="2847746"/>
-                  </a:lnTo>
-                  <a:lnTo>
-                    <a:pt x="3023466" y="2864537"/>
-                  </a:lnTo>
-                  <a:lnTo>
-                    <a:pt x="2945832" y="2880978"/>
-                  </a:lnTo>
-                  <a:lnTo>
-                    <a:pt x="2868198" y="2897076"/>
-                  </a:lnTo>
-                  <a:lnTo>
-                    <a:pt x="2790564" y="2912838"/>
-                  </a:lnTo>
-                  <a:lnTo>
-                    <a:pt x="2712930" y="2928271"/>
-                  </a:lnTo>
-                  <a:lnTo>
-                    <a:pt x="2635295" y="2943382"/>
-                  </a:lnTo>
-                  <a:lnTo>
-                    <a:pt x="2557661" y="2958178"/>
-                  </a:lnTo>
-                  <a:lnTo>
-                    <a:pt x="2480027" y="2972666"/>
-                  </a:lnTo>
-                  <a:lnTo>
-                    <a:pt x="2402393" y="2986851"/>
-                  </a:lnTo>
-                  <a:lnTo>
-                    <a:pt x="2324759" y="3000740"/>
-                  </a:lnTo>
-                  <a:lnTo>
-                    <a:pt x="2247125" y="3014340"/>
-                  </a:lnTo>
-                  <a:lnTo>
-                    <a:pt x="2169491" y="3027655"/>
-                  </a:lnTo>
-                  <a:lnTo>
-                    <a:pt x="2091857" y="3040693"/>
-                  </a:lnTo>
-                  <a:lnTo>
-                    <a:pt x="2014223" y="3053459"/>
-                  </a:lnTo>
-                  <a:lnTo>
-                    <a:pt x="1936589" y="3065959"/>
-                  </a:lnTo>
-                  <a:lnTo>
-                    <a:pt x="1858955" y="3078198"/>
-                  </a:lnTo>
-                  <a:lnTo>
-                    <a:pt x="1781321" y="3090181"/>
-                  </a:lnTo>
-                  <a:lnTo>
-                    <a:pt x="1703687" y="3101915"/>
-                  </a:lnTo>
-                  <a:lnTo>
-                    <a:pt x="1626053" y="3113404"/>
-                  </a:lnTo>
-                  <a:lnTo>
-                    <a:pt x="1548419" y="3124653"/>
-                  </a:lnTo>
-                  <a:lnTo>
-                    <a:pt x="1470785" y="3135668"/>
-                  </a:lnTo>
-                  <a:lnTo>
-                    <a:pt x="1393151" y="3146452"/>
-                  </a:lnTo>
-                  <a:lnTo>
-                    <a:pt x="1315517" y="3157012"/>
-                  </a:lnTo>
-                  <a:lnTo>
-                    <a:pt x="1237883" y="3167351"/>
-                  </a:lnTo>
-                  <a:lnTo>
-                    <a:pt x="1160249" y="3177475"/>
-                  </a:lnTo>
-                  <a:lnTo>
-                    <a:pt x="1082615" y="3187388"/>
-                  </a:lnTo>
-                  <a:lnTo>
-                    <a:pt x="1004981" y="3197093"/>
-                  </a:lnTo>
-                  <a:lnTo>
-                    <a:pt x="927346" y="3206597"/>
-                  </a:lnTo>
-                  <a:lnTo>
-                    <a:pt x="849712" y="3215902"/>
-                  </a:lnTo>
-                  <a:lnTo>
-                    <a:pt x="772078" y="3225013"/>
-                  </a:lnTo>
-                  <a:lnTo>
-                    <a:pt x="694444" y="3233934"/>
-                  </a:lnTo>
-                  <a:lnTo>
-                    <a:pt x="616810" y="3242668"/>
-                  </a:lnTo>
-                  <a:lnTo>
-                    <a:pt x="539176" y="3251221"/>
-                  </a:lnTo>
-                  <a:lnTo>
-                    <a:pt x="461542" y="3259595"/>
-                  </a:lnTo>
-                  <a:lnTo>
-                    <a:pt x="383908" y="3267794"/>
-                  </a:lnTo>
-                  <a:lnTo>
-                    <a:pt x="306274" y="3275823"/>
-                  </a:lnTo>
-                  <a:lnTo>
-                    <a:pt x="228640" y="3283684"/>
-                  </a:lnTo>
-                  <a:lnTo>
-                    <a:pt x="151006" y="3291381"/>
-                  </a:lnTo>
-                  <a:lnTo>
-                    <a:pt x="73372" y="3298917"/>
-                  </a:lnTo>
-                  <a:lnTo>
-                    <a:pt x="0" y="3305891"/>
+                    <a:pt x="772078" y="131550"/>
+                  </a:lnTo>
+                  <a:lnTo>
+                    <a:pt x="849712" y="267744"/>
+                  </a:lnTo>
+                  <a:lnTo>
+                    <a:pt x="927346" y="398405"/>
+                  </a:lnTo>
+                  <a:lnTo>
+                    <a:pt x="1004981" y="523757"/>
+                  </a:lnTo>
+                  <a:lnTo>
+                    <a:pt x="1082615" y="644016"/>
+                  </a:lnTo>
+                  <a:lnTo>
+                    <a:pt x="1160249" y="759389"/>
+                  </a:lnTo>
+                  <a:lnTo>
+                    <a:pt x="1237883" y="870075"/>
+                  </a:lnTo>
+                  <a:lnTo>
+                    <a:pt x="1315517" y="976264"/>
+                  </a:lnTo>
+                  <a:lnTo>
+                    <a:pt x="1393151" y="1078138"/>
+                  </a:lnTo>
+                  <a:lnTo>
+                    <a:pt x="1470785" y="1175874"/>
+                  </a:lnTo>
+                  <a:lnTo>
+                    <a:pt x="1548419" y="1269639"/>
+                  </a:lnTo>
+                  <a:lnTo>
+                    <a:pt x="1626053" y="1359594"/>
+                  </a:lnTo>
+                  <a:lnTo>
+                    <a:pt x="1703687" y="1445895"/>
+                  </a:lnTo>
+                  <a:lnTo>
+                    <a:pt x="1781321" y="1528689"/>
+                  </a:lnTo>
+                  <a:lnTo>
+                    <a:pt x="1858955" y="1608120"/>
+                  </a:lnTo>
+                  <a:lnTo>
+                    <a:pt x="1936589" y="1684323"/>
+                  </a:lnTo>
+                  <a:lnTo>
+                    <a:pt x="2014223" y="1757430"/>
+                  </a:lnTo>
+                  <a:lnTo>
+                    <a:pt x="2091857" y="1827568"/>
+                  </a:lnTo>
+                  <a:lnTo>
+                    <a:pt x="2169491" y="1894855"/>
+                  </a:lnTo>
+                  <a:lnTo>
+                    <a:pt x="2247125" y="1959409"/>
+                  </a:lnTo>
+                  <a:lnTo>
+                    <a:pt x="2324759" y="2021340"/>
+                  </a:lnTo>
+                  <a:lnTo>
+                    <a:pt x="2402393" y="2080755"/>
+                  </a:lnTo>
+                  <a:lnTo>
+                    <a:pt x="2480027" y="2137756"/>
+                  </a:lnTo>
+                  <a:lnTo>
+                    <a:pt x="2557661" y="2192441"/>
+                  </a:lnTo>
+                  <a:lnTo>
+                    <a:pt x="2635295" y="2244905"/>
+                  </a:lnTo>
+                  <a:lnTo>
+                    <a:pt x="2712930" y="2295237"/>
+                  </a:lnTo>
+                  <a:lnTo>
+                    <a:pt x="2790564" y="2343524"/>
+                  </a:lnTo>
+                  <a:lnTo>
+                    <a:pt x="2868198" y="2389849"/>
+                  </a:lnTo>
+                  <a:lnTo>
+                    <a:pt x="2945832" y="2434292"/>
+                  </a:lnTo>
+                  <a:lnTo>
+                    <a:pt x="3023466" y="2476930"/>
+                  </a:lnTo>
+                  <a:lnTo>
+                    <a:pt x="3101100" y="2517835"/>
+                  </a:lnTo>
+                  <a:lnTo>
+                    <a:pt x="3178734" y="2557078"/>
+                  </a:lnTo>
+                  <a:lnTo>
+                    <a:pt x="3256368" y="2594727"/>
+                  </a:lnTo>
+                  <a:lnTo>
+                    <a:pt x="3334002" y="2630846"/>
+                  </a:lnTo>
+                  <a:lnTo>
+                    <a:pt x="3411636" y="2648523"/>
+                  </a:lnTo>
+                  <a:lnTo>
+                    <a:pt x="3489270" y="2630729"/>
+                  </a:lnTo>
+                  <a:lnTo>
+                    <a:pt x="3566904" y="2612554"/>
+                  </a:lnTo>
+                  <a:lnTo>
+                    <a:pt x="3644538" y="2593993"/>
+                  </a:lnTo>
+                  <a:lnTo>
+                    <a:pt x="3722172" y="2575036"/>
+                  </a:lnTo>
+                  <a:lnTo>
+                    <a:pt x="3799806" y="2555676"/>
+                  </a:lnTo>
+                  <a:lnTo>
+                    <a:pt x="3877440" y="2535903"/>
+                  </a:lnTo>
+                  <a:lnTo>
+                    <a:pt x="3955074" y="2515708"/>
+                  </a:lnTo>
+                  <a:lnTo>
+                    <a:pt x="4032708" y="2495084"/>
+                  </a:lnTo>
+                  <a:lnTo>
+                    <a:pt x="4110342" y="2474020"/>
+                  </a:lnTo>
+                  <a:lnTo>
+                    <a:pt x="4187976" y="2452507"/>
+                  </a:lnTo>
+                  <a:lnTo>
+                    <a:pt x="4265610" y="2430536"/>
+                  </a:lnTo>
+                  <a:lnTo>
+                    <a:pt x="4343244" y="2408096"/>
+                  </a:lnTo>
+                  <a:lnTo>
+                    <a:pt x="4420879" y="2385179"/>
+                  </a:lnTo>
+                  <a:lnTo>
+                    <a:pt x="4498513" y="2361773"/>
+                  </a:lnTo>
+                  <a:lnTo>
+                    <a:pt x="4576147" y="2337869"/>
+                  </a:lnTo>
+                  <a:lnTo>
+                    <a:pt x="4653781" y="2313455"/>
+                  </a:lnTo>
+                  <a:lnTo>
+                    <a:pt x="4731415" y="2288522"/>
+                  </a:lnTo>
+                  <a:lnTo>
+                    <a:pt x="4809049" y="2263057"/>
+                  </a:lnTo>
+                  <a:lnTo>
+                    <a:pt x="4886683" y="2237049"/>
+                  </a:lnTo>
+                  <a:lnTo>
+                    <a:pt x="4964317" y="2210487"/>
+                  </a:lnTo>
+                  <a:lnTo>
+                    <a:pt x="5041951" y="2183360"/>
+                  </a:lnTo>
+                  <a:lnTo>
+                    <a:pt x="5119585" y="2155654"/>
+                  </a:lnTo>
+                  <a:lnTo>
+                    <a:pt x="5197219" y="2127359"/>
+                  </a:lnTo>
+                  <a:lnTo>
+                    <a:pt x="5274853" y="2098460"/>
+                  </a:lnTo>
+                  <a:lnTo>
+                    <a:pt x="5352487" y="2068946"/>
+                  </a:lnTo>
+                  <a:lnTo>
+                    <a:pt x="5430121" y="2038802"/>
+                  </a:lnTo>
+                  <a:lnTo>
+                    <a:pt x="5507755" y="2008017"/>
+                  </a:lnTo>
+                  <a:lnTo>
+                    <a:pt x="5585389" y="1976576"/>
+                  </a:lnTo>
+                  <a:lnTo>
+                    <a:pt x="5663023" y="1944464"/>
+                  </a:lnTo>
+                  <a:lnTo>
+                    <a:pt x="5740657" y="1911669"/>
+                  </a:lnTo>
+                  <a:lnTo>
+                    <a:pt x="5818291" y="1878175"/>
+                  </a:lnTo>
+                  <a:lnTo>
+                    <a:pt x="5895925" y="1843967"/>
+                  </a:lnTo>
+                  <a:lnTo>
+                    <a:pt x="5973559" y="1809031"/>
+                  </a:lnTo>
+                  <a:lnTo>
+                    <a:pt x="6051193" y="1773350"/>
+                  </a:lnTo>
+                  <a:lnTo>
+                    <a:pt x="6128827" y="1736909"/>
+                  </a:lnTo>
+                  <a:lnTo>
+                    <a:pt x="6206462" y="1699692"/>
+                  </a:lnTo>
+                  <a:lnTo>
+                    <a:pt x="6284096" y="1661681"/>
+                  </a:lnTo>
+                  <a:lnTo>
+                    <a:pt x="6361730" y="1622861"/>
+                  </a:lnTo>
+                  <a:lnTo>
+                    <a:pt x="6439364" y="1583214"/>
+                  </a:lnTo>
+                  <a:lnTo>
+                    <a:pt x="6516998" y="1542722"/>
+                  </a:lnTo>
+                  <a:lnTo>
+                    <a:pt x="6594632" y="1501367"/>
+                  </a:lnTo>
+                  <a:lnTo>
+                    <a:pt x="6672266" y="1459131"/>
+                  </a:lnTo>
+                  <a:lnTo>
+                    <a:pt x="6749900" y="1415995"/>
+                  </a:lnTo>
+                  <a:lnTo>
+                    <a:pt x="6827534" y="1371941"/>
+                  </a:lnTo>
+                  <a:lnTo>
+                    <a:pt x="6905168" y="1326947"/>
+                  </a:lnTo>
+                  <a:lnTo>
+                    <a:pt x="6982802" y="1280996"/>
+                  </a:lnTo>
+                  <a:lnTo>
+                    <a:pt x="7060436" y="1234065"/>
+                  </a:lnTo>
+                  <a:lnTo>
+                    <a:pt x="7138070" y="1186134"/>
+                  </a:lnTo>
+                  <a:lnTo>
+                    <a:pt x="7215704" y="1137182"/>
+                  </a:lnTo>
+                  <a:lnTo>
+                    <a:pt x="7293338" y="1087187"/>
+                  </a:lnTo>
+                  <a:lnTo>
+                    <a:pt x="7370972" y="1036127"/>
+                  </a:lnTo>
+                  <a:lnTo>
+                    <a:pt x="7370972" y="3385069"/>
+                  </a:lnTo>
+                  <a:lnTo>
+                    <a:pt x="7293338" y="3380890"/>
+                  </a:lnTo>
+                  <a:lnTo>
+                    <a:pt x="7215704" y="3376534"/>
+                  </a:lnTo>
+                  <a:lnTo>
+                    <a:pt x="7138070" y="3371994"/>
+                  </a:lnTo>
+                  <a:lnTo>
+                    <a:pt x="7060436" y="3367261"/>
+                  </a:lnTo>
+                  <a:lnTo>
+                    <a:pt x="6982802" y="3362328"/>
+                  </a:lnTo>
+                  <a:lnTo>
+                    <a:pt x="6905168" y="3357186"/>
+                  </a:lnTo>
+                  <a:lnTo>
+                    <a:pt x="6827534" y="3351827"/>
+                  </a:lnTo>
+                  <a:lnTo>
+                    <a:pt x="6749900" y="3346240"/>
+                  </a:lnTo>
+                  <a:lnTo>
+                    <a:pt x="6672266" y="3340417"/>
+                  </a:lnTo>
+                  <a:lnTo>
+                    <a:pt x="6594632" y="3334347"/>
+                  </a:lnTo>
+                  <a:lnTo>
+                    <a:pt x="6516998" y="3328020"/>
+                  </a:lnTo>
+                  <a:lnTo>
+                    <a:pt x="6439364" y="3321425"/>
+                  </a:lnTo>
+                  <a:lnTo>
+                    <a:pt x="6361730" y="3314551"/>
+                  </a:lnTo>
+                  <a:lnTo>
+                    <a:pt x="6284096" y="3307386"/>
+                  </a:lnTo>
+                  <a:lnTo>
+                    <a:pt x="6206462" y="3299917"/>
+                  </a:lnTo>
+                  <a:lnTo>
+                    <a:pt x="6128827" y="3292132"/>
+                  </a:lnTo>
+                  <a:lnTo>
+                    <a:pt x="6051193" y="3284018"/>
+                  </a:lnTo>
+                  <a:lnTo>
+                    <a:pt x="5973559" y="3275559"/>
+                  </a:lnTo>
+                  <a:lnTo>
+                    <a:pt x="5895925" y="3266743"/>
+                  </a:lnTo>
+                  <a:lnTo>
+                    <a:pt x="5818291" y="3257553"/>
+                  </a:lnTo>
+                  <a:lnTo>
+                    <a:pt x="5740657" y="3247974"/>
+                  </a:lnTo>
+                  <a:lnTo>
+                    <a:pt x="5663023" y="3237989"/>
+                  </a:lnTo>
+                  <a:lnTo>
+                    <a:pt x="5585389" y="3227582"/>
+                  </a:lnTo>
+                  <a:lnTo>
+                    <a:pt x="5507755" y="3216734"/>
+                  </a:lnTo>
+                  <a:lnTo>
+                    <a:pt x="5430121" y="3205426"/>
+                  </a:lnTo>
+                  <a:lnTo>
+                    <a:pt x="5352487" y="3193639"/>
+                  </a:lnTo>
+                  <a:lnTo>
+                    <a:pt x="5274853" y="3181354"/>
+                  </a:lnTo>
+                  <a:lnTo>
+                    <a:pt x="5197219" y="3168548"/>
+                  </a:lnTo>
+                  <a:lnTo>
+                    <a:pt x="5119585" y="3155199"/>
+                  </a:lnTo>
+                  <a:lnTo>
+                    <a:pt x="5041951" y="3141286"/>
+                  </a:lnTo>
+                  <a:lnTo>
+                    <a:pt x="4964317" y="3126783"/>
+                  </a:lnTo>
+                  <a:lnTo>
+                    <a:pt x="4886683" y="3111666"/>
+                  </a:lnTo>
+                  <a:lnTo>
+                    <a:pt x="4809049" y="3095909"/>
+                  </a:lnTo>
+                  <a:lnTo>
+                    <a:pt x="4731415" y="3079484"/>
+                  </a:lnTo>
+                  <a:lnTo>
+                    <a:pt x="4653781" y="3062364"/>
+                  </a:lnTo>
+                  <a:lnTo>
+                    <a:pt x="4576147" y="3044519"/>
+                  </a:lnTo>
+                  <a:lnTo>
+                    <a:pt x="4498513" y="3025919"/>
+                  </a:lnTo>
+                  <a:lnTo>
+                    <a:pt x="4420879" y="3006530"/>
+                  </a:lnTo>
+                  <a:lnTo>
+                    <a:pt x="4343244" y="2986321"/>
+                  </a:lnTo>
+                  <a:lnTo>
+                    <a:pt x="4265610" y="2965255"/>
+                  </a:lnTo>
+                  <a:lnTo>
+                    <a:pt x="4187976" y="2943298"/>
+                  </a:lnTo>
+                  <a:lnTo>
+                    <a:pt x="4110342" y="2920411"/>
+                  </a:lnTo>
+                  <a:lnTo>
+                    <a:pt x="4032708" y="2896554"/>
+                  </a:lnTo>
+                  <a:lnTo>
+                    <a:pt x="3955074" y="2871687"/>
+                  </a:lnTo>
+                  <a:lnTo>
+                    <a:pt x="3877440" y="2845767"/>
+                  </a:lnTo>
+                  <a:lnTo>
+                    <a:pt x="3799806" y="2818749"/>
+                  </a:lnTo>
+                  <a:lnTo>
+                    <a:pt x="3722172" y="2790588"/>
+                  </a:lnTo>
+                  <a:lnTo>
+                    <a:pt x="3644538" y="2761233"/>
+                  </a:lnTo>
+                  <a:lnTo>
+                    <a:pt x="3566904" y="2730636"/>
+                  </a:lnTo>
+                  <a:lnTo>
+                    <a:pt x="3489270" y="2698742"/>
+                  </a:lnTo>
+                  <a:lnTo>
+                    <a:pt x="3411636" y="2665498"/>
+                  </a:lnTo>
+                  <a:lnTo>
+                    <a:pt x="3334002" y="2665947"/>
+                  </a:lnTo>
+                  <a:lnTo>
+                    <a:pt x="3256368" y="2683007"/>
+                  </a:lnTo>
+                  <a:lnTo>
+                    <a:pt x="3178734" y="2699712"/>
+                  </a:lnTo>
+                  <a:lnTo>
+                    <a:pt x="3101100" y="2716068"/>
+                  </a:lnTo>
+                  <a:lnTo>
+                    <a:pt x="3023466" y="2732082"/>
+                  </a:lnTo>
+                  <a:lnTo>
+                    <a:pt x="2945832" y="2747763"/>
+                  </a:lnTo>
+                  <a:lnTo>
+                    <a:pt x="2868198" y="2763116"/>
+                  </a:lnTo>
+                  <a:lnTo>
+                    <a:pt x="2790564" y="2778150"/>
+                  </a:lnTo>
+                  <a:lnTo>
+                    <a:pt x="2712930" y="2792869"/>
+                  </a:lnTo>
+                  <a:lnTo>
+                    <a:pt x="2635295" y="2807282"/>
+                  </a:lnTo>
+                  <a:lnTo>
+                    <a:pt x="2557661" y="2821393"/>
+                  </a:lnTo>
+                  <a:lnTo>
+                    <a:pt x="2480027" y="2835211"/>
+                  </a:lnTo>
+                  <a:lnTo>
+                    <a:pt x="2402393" y="2848740"/>
+                  </a:lnTo>
+                  <a:lnTo>
+                    <a:pt x="2324759" y="2861987"/>
+                  </a:lnTo>
+                  <a:lnTo>
+                    <a:pt x="2247125" y="2874958"/>
+                  </a:lnTo>
+                  <a:lnTo>
+                    <a:pt x="2169491" y="2887658"/>
+                  </a:lnTo>
+                  <a:lnTo>
+                    <a:pt x="2091857" y="2900093"/>
+                  </a:lnTo>
+                  <a:lnTo>
+                    <a:pt x="2014223" y="2912268"/>
+                  </a:lnTo>
+                  <a:lnTo>
+                    <a:pt x="1936589" y="2924190"/>
+                  </a:lnTo>
+                  <a:lnTo>
+                    <a:pt x="1858955" y="2935863"/>
+                  </a:lnTo>
+                  <a:lnTo>
+                    <a:pt x="1781321" y="2947293"/>
+                  </a:lnTo>
+                  <a:lnTo>
+                    <a:pt x="1703687" y="2958484"/>
+                  </a:lnTo>
+                  <a:lnTo>
+                    <a:pt x="1626053" y="2969441"/>
+                  </a:lnTo>
+                  <a:lnTo>
+                    <a:pt x="1548419" y="2980170"/>
+                  </a:lnTo>
+                  <a:lnTo>
+                    <a:pt x="1470785" y="2990675"/>
+                  </a:lnTo>
+                  <a:lnTo>
+                    <a:pt x="1393151" y="3000961"/>
+                  </a:lnTo>
+                  <a:lnTo>
+                    <a:pt x="1315517" y="3011033"/>
+                  </a:lnTo>
+                  <a:lnTo>
+                    <a:pt x="1237883" y="3020894"/>
+                  </a:lnTo>
+                  <a:lnTo>
+                    <a:pt x="1160249" y="3030550"/>
+                  </a:lnTo>
+                  <a:lnTo>
+                    <a:pt x="1082615" y="3040004"/>
+                  </a:lnTo>
+                  <a:lnTo>
+                    <a:pt x="1004981" y="3049261"/>
+                  </a:lnTo>
+                  <a:lnTo>
+                    <a:pt x="927346" y="3058325"/>
+                  </a:lnTo>
+                  <a:lnTo>
+                    <a:pt x="849712" y="3067200"/>
+                  </a:lnTo>
+                  <a:lnTo>
+                    <a:pt x="772078" y="3075889"/>
+                  </a:lnTo>
+                  <a:lnTo>
+                    <a:pt x="694444" y="3084398"/>
+                  </a:lnTo>
+                  <a:lnTo>
+                    <a:pt x="616810" y="3092729"/>
+                  </a:lnTo>
+                  <a:lnTo>
+                    <a:pt x="539176" y="3100886"/>
+                  </a:lnTo>
+                  <a:lnTo>
+                    <a:pt x="461542" y="3108873"/>
+                  </a:lnTo>
+                  <a:lnTo>
+                    <a:pt x="383908" y="3116693"/>
+                  </a:lnTo>
+                  <a:lnTo>
+                    <a:pt x="306274" y="3124350"/>
+                  </a:lnTo>
+                  <a:lnTo>
+                    <a:pt x="228640" y="3131847"/>
+                  </a:lnTo>
+                  <a:lnTo>
+                    <a:pt x="151006" y="3139188"/>
+                  </a:lnTo>
+                  <a:lnTo>
+                    <a:pt x="73372" y="3146376"/>
+                  </a:lnTo>
+                  <a:lnTo>
+                    <a:pt x="0" y="3153028"/>
                   </a:lnTo>
                   <a:close/>
                 </a:path>
@@ -3582,273 +3582,273 @@
           </p:nvSpPr>
           <p:spPr>
             <a:xfrm>
-              <a:off x="1517656" y="1896563"/>
-              <a:ext cx="6670834" cy="2776928"/>
+              <a:off x="1517656" y="2073503"/>
+              <a:ext cx="6670834" cy="2648523"/>
             </a:xfrm>
             <a:custGeom>
               <a:avLst/>
               <a:pathLst>
-                <a:path w="6670834" h="2776928">
+                <a:path w="6670834" h="2648523">
                   <a:moveTo>
                     <a:pt x="0" y="0"/>
                   </a:moveTo>
                   <a:lnTo>
-                    <a:pt x="71940" y="137928"/>
-                  </a:lnTo>
-                  <a:lnTo>
-                    <a:pt x="149574" y="280725"/>
-                  </a:lnTo>
-                  <a:lnTo>
-                    <a:pt x="227208" y="417720"/>
-                  </a:lnTo>
-                  <a:lnTo>
-                    <a:pt x="304842" y="549149"/>
-                  </a:lnTo>
-                  <a:lnTo>
-                    <a:pt x="382476" y="675239"/>
-                  </a:lnTo>
-                  <a:lnTo>
-                    <a:pt x="460110" y="796205"/>
-                  </a:lnTo>
-                  <a:lnTo>
-                    <a:pt x="537744" y="912257"/>
-                  </a:lnTo>
-                  <a:lnTo>
-                    <a:pt x="615379" y="1023594"/>
-                  </a:lnTo>
-                  <a:lnTo>
-                    <a:pt x="693013" y="1130408"/>
-                  </a:lnTo>
-                  <a:lnTo>
-                    <a:pt x="770647" y="1232882"/>
-                  </a:lnTo>
-                  <a:lnTo>
-                    <a:pt x="848281" y="1331193"/>
-                  </a:lnTo>
-                  <a:lnTo>
-                    <a:pt x="925915" y="1425509"/>
-                  </a:lnTo>
-                  <a:lnTo>
-                    <a:pt x="1003549" y="1515994"/>
-                  </a:lnTo>
-                  <a:lnTo>
-                    <a:pt x="1081183" y="1602802"/>
-                  </a:lnTo>
-                  <a:lnTo>
-                    <a:pt x="1158817" y="1686083"/>
-                  </a:lnTo>
-                  <a:lnTo>
-                    <a:pt x="1236451" y="1765981"/>
-                  </a:lnTo>
-                  <a:lnTo>
-                    <a:pt x="1314085" y="1842633"/>
-                  </a:lnTo>
-                  <a:lnTo>
-                    <a:pt x="1391719" y="1916171"/>
-                  </a:lnTo>
-                  <a:lnTo>
-                    <a:pt x="1469353" y="1986720"/>
-                  </a:lnTo>
-                  <a:lnTo>
-                    <a:pt x="1546987" y="2054404"/>
-                  </a:lnTo>
-                  <a:lnTo>
-                    <a:pt x="1624621" y="2119338"/>
-                  </a:lnTo>
-                  <a:lnTo>
-                    <a:pt x="1702255" y="2181633"/>
-                  </a:lnTo>
-                  <a:lnTo>
-                    <a:pt x="1779889" y="2241398"/>
-                  </a:lnTo>
-                  <a:lnTo>
-                    <a:pt x="1857523" y="2298734"/>
-                  </a:lnTo>
-                  <a:lnTo>
-                    <a:pt x="1935157" y="2353741"/>
-                  </a:lnTo>
-                  <a:lnTo>
-                    <a:pt x="2012791" y="2406513"/>
-                  </a:lnTo>
-                  <a:lnTo>
-                    <a:pt x="2090425" y="2457141"/>
-                  </a:lnTo>
-                  <a:lnTo>
-                    <a:pt x="2168059" y="2505712"/>
-                  </a:lnTo>
-                  <a:lnTo>
-                    <a:pt x="2245693" y="2552310"/>
-                  </a:lnTo>
-                  <a:lnTo>
-                    <a:pt x="2323328" y="2597015"/>
-                  </a:lnTo>
-                  <a:lnTo>
-                    <a:pt x="2400962" y="2639903"/>
-                  </a:lnTo>
-                  <a:lnTo>
-                    <a:pt x="2478596" y="2681049"/>
-                  </a:lnTo>
-                  <a:lnTo>
-                    <a:pt x="2556230" y="2720523"/>
-                  </a:lnTo>
-                  <a:lnTo>
-                    <a:pt x="2633864" y="2758394"/>
-                  </a:lnTo>
-                  <a:lnTo>
-                    <a:pt x="2711498" y="2776928"/>
-                  </a:lnTo>
-                  <a:lnTo>
-                    <a:pt x="2789132" y="2758270"/>
-                  </a:lnTo>
-                  <a:lnTo>
-                    <a:pt x="2866766" y="2739215"/>
-                  </a:lnTo>
-                  <a:lnTo>
-                    <a:pt x="2944400" y="2719754"/>
-                  </a:lnTo>
-                  <a:lnTo>
-                    <a:pt x="3022034" y="2699878"/>
-                  </a:lnTo>
-                  <a:lnTo>
-                    <a:pt x="3099668" y="2679579"/>
-                  </a:lnTo>
-                  <a:lnTo>
-                    <a:pt x="3177302" y="2658847"/>
-                  </a:lnTo>
-                  <a:lnTo>
-                    <a:pt x="3254936" y="2637673"/>
-                  </a:lnTo>
-                  <a:lnTo>
-                    <a:pt x="3332570" y="2616049"/>
-                  </a:lnTo>
-                  <a:lnTo>
-                    <a:pt x="3410204" y="2593964"/>
-                  </a:lnTo>
-                  <a:lnTo>
-                    <a:pt x="3487838" y="2571408"/>
-                  </a:lnTo>
-                  <a:lnTo>
-                    <a:pt x="3565472" y="2548371"/>
-                  </a:lnTo>
-                  <a:lnTo>
-                    <a:pt x="3643106" y="2524844"/>
-                  </a:lnTo>
-                  <a:lnTo>
-                    <a:pt x="3720740" y="2500816"/>
-                  </a:lnTo>
-                  <a:lnTo>
-                    <a:pt x="3798374" y="2476275"/>
-                  </a:lnTo>
-                  <a:lnTo>
-                    <a:pt x="3876008" y="2451212"/>
-                  </a:lnTo>
-                  <a:lnTo>
-                    <a:pt x="3953642" y="2425615"/>
-                  </a:lnTo>
-                  <a:lnTo>
-                    <a:pt x="4031277" y="2399472"/>
-                  </a:lnTo>
-                  <a:lnTo>
-                    <a:pt x="4108911" y="2372773"/>
-                  </a:lnTo>
-                  <a:lnTo>
-                    <a:pt x="4186545" y="2345504"/>
-                  </a:lnTo>
-                  <a:lnTo>
-                    <a:pt x="4264179" y="2317655"/>
-                  </a:lnTo>
-                  <a:lnTo>
-                    <a:pt x="4341813" y="2289212"/>
-                  </a:lnTo>
-                  <a:lnTo>
-                    <a:pt x="4419447" y="2260164"/>
-                  </a:lnTo>
-                  <a:lnTo>
-                    <a:pt x="4497081" y="2230496"/>
-                  </a:lnTo>
-                  <a:lnTo>
-                    <a:pt x="4574715" y="2200196"/>
-                  </a:lnTo>
-                  <a:lnTo>
-                    <a:pt x="4652349" y="2169251"/>
-                  </a:lnTo>
-                  <a:lnTo>
-                    <a:pt x="4729983" y="2137646"/>
-                  </a:lnTo>
-                  <a:lnTo>
-                    <a:pt x="4807617" y="2105368"/>
-                  </a:lnTo>
-                  <a:lnTo>
-                    <a:pt x="4885251" y="2072403"/>
-                  </a:lnTo>
-                  <a:lnTo>
-                    <a:pt x="4962885" y="2038735"/>
-                  </a:lnTo>
-                  <a:lnTo>
-                    <a:pt x="5040519" y="2004349"/>
-                  </a:lnTo>
-                  <a:lnTo>
-                    <a:pt x="5118153" y="1969232"/>
-                  </a:lnTo>
-                  <a:lnTo>
-                    <a:pt x="5195787" y="1933365"/>
-                  </a:lnTo>
-                  <a:lnTo>
-                    <a:pt x="5273421" y="1896735"/>
-                  </a:lnTo>
-                  <a:lnTo>
-                    <a:pt x="5351055" y="1859325"/>
-                  </a:lnTo>
-                  <a:lnTo>
-                    <a:pt x="5428689" y="1821117"/>
-                  </a:lnTo>
-                  <a:lnTo>
-                    <a:pt x="5506323" y="1782095"/>
-                  </a:lnTo>
-                  <a:lnTo>
-                    <a:pt x="5583957" y="1742242"/>
-                  </a:lnTo>
-                  <a:lnTo>
-                    <a:pt x="5661591" y="1701540"/>
-                  </a:lnTo>
-                  <a:lnTo>
-                    <a:pt x="5739226" y="1659970"/>
-                  </a:lnTo>
-                  <a:lnTo>
-                    <a:pt x="5816860" y="1617515"/>
-                  </a:lnTo>
-                  <a:lnTo>
-                    <a:pt x="5894494" y="1574155"/>
-                  </a:lnTo>
-                  <a:lnTo>
-                    <a:pt x="5972128" y="1529872"/>
-                  </a:lnTo>
-                  <a:lnTo>
-                    <a:pt x="6049762" y="1484645"/>
-                  </a:lnTo>
-                  <a:lnTo>
-                    <a:pt x="6127396" y="1438454"/>
-                  </a:lnTo>
-                  <a:lnTo>
-                    <a:pt x="6205030" y="1391280"/>
-                  </a:lnTo>
-                  <a:lnTo>
-                    <a:pt x="6282664" y="1343100"/>
-                  </a:lnTo>
-                  <a:lnTo>
-                    <a:pt x="6360298" y="1293894"/>
-                  </a:lnTo>
-                  <a:lnTo>
-                    <a:pt x="6437932" y="1243639"/>
-                  </a:lnTo>
-                  <a:lnTo>
-                    <a:pt x="6515566" y="1192314"/>
-                  </a:lnTo>
-                  <a:lnTo>
-                    <a:pt x="6593200" y="1139895"/>
-                  </a:lnTo>
-                  <a:lnTo>
-                    <a:pt x="6670834" y="1086359"/>
+                    <a:pt x="71940" y="131550"/>
+                  </a:lnTo>
+                  <a:lnTo>
+                    <a:pt x="149574" y="267744"/>
+                  </a:lnTo>
+                  <a:lnTo>
+                    <a:pt x="227208" y="398405"/>
+                  </a:lnTo>
+                  <a:lnTo>
+                    <a:pt x="304842" y="523757"/>
+                  </a:lnTo>
+                  <a:lnTo>
+                    <a:pt x="382476" y="644016"/>
+                  </a:lnTo>
+                  <a:lnTo>
+                    <a:pt x="460110" y="759389"/>
+                  </a:lnTo>
+                  <a:lnTo>
+                    <a:pt x="537744" y="870075"/>
+                  </a:lnTo>
+                  <a:lnTo>
+                    <a:pt x="615379" y="976264"/>
+                  </a:lnTo>
+                  <a:lnTo>
+                    <a:pt x="693013" y="1078138"/>
+                  </a:lnTo>
+                  <a:lnTo>
+                    <a:pt x="770647" y="1175874"/>
+                  </a:lnTo>
+                  <a:lnTo>
+                    <a:pt x="848281" y="1269639"/>
+                  </a:lnTo>
+                  <a:lnTo>
+                    <a:pt x="925915" y="1359594"/>
+                  </a:lnTo>
+                  <a:lnTo>
+                    <a:pt x="1003549" y="1445895"/>
+                  </a:lnTo>
+                  <a:lnTo>
+                    <a:pt x="1081183" y="1528689"/>
+                  </a:lnTo>
+                  <a:lnTo>
+                    <a:pt x="1158817" y="1608120"/>
+                  </a:lnTo>
+                  <a:lnTo>
+                    <a:pt x="1236451" y="1684323"/>
+                  </a:lnTo>
+                  <a:lnTo>
+                    <a:pt x="1314085" y="1757430"/>
+                  </a:lnTo>
+                  <a:lnTo>
+                    <a:pt x="1391719" y="1827568"/>
+                  </a:lnTo>
+                  <a:lnTo>
+                    <a:pt x="1469353" y="1894855"/>
+                  </a:lnTo>
+                  <a:lnTo>
+                    <a:pt x="1546987" y="1959409"/>
+                  </a:lnTo>
+                  <a:lnTo>
+                    <a:pt x="1624621" y="2021340"/>
+                  </a:lnTo>
+                  <a:lnTo>
+                    <a:pt x="1702255" y="2080755"/>
+                  </a:lnTo>
+                  <a:lnTo>
+                    <a:pt x="1779889" y="2137756"/>
+                  </a:lnTo>
+                  <a:lnTo>
+                    <a:pt x="1857523" y="2192441"/>
+                  </a:lnTo>
+                  <a:lnTo>
+                    <a:pt x="1935157" y="2244905"/>
+                  </a:lnTo>
+                  <a:lnTo>
+                    <a:pt x="2012791" y="2295237"/>
+                  </a:lnTo>
+                  <a:lnTo>
+                    <a:pt x="2090425" y="2343524"/>
+                  </a:lnTo>
+                  <a:lnTo>
+                    <a:pt x="2168059" y="2389849"/>
+                  </a:lnTo>
+                  <a:lnTo>
+                    <a:pt x="2245693" y="2434292"/>
+                  </a:lnTo>
+                  <a:lnTo>
+                    <a:pt x="2323328" y="2476930"/>
+                  </a:lnTo>
+                  <a:lnTo>
+                    <a:pt x="2400962" y="2517835"/>
+                  </a:lnTo>
+                  <a:lnTo>
+                    <a:pt x="2478596" y="2557078"/>
+                  </a:lnTo>
+                  <a:lnTo>
+                    <a:pt x="2556230" y="2594727"/>
+                  </a:lnTo>
+                  <a:lnTo>
+                    <a:pt x="2633864" y="2630846"/>
+                  </a:lnTo>
+                  <a:lnTo>
+                    <a:pt x="2711498" y="2648523"/>
+                  </a:lnTo>
+                  <a:lnTo>
+                    <a:pt x="2789132" y="2630729"/>
+                  </a:lnTo>
+                  <a:lnTo>
+                    <a:pt x="2866766" y="2612554"/>
+                  </a:lnTo>
+                  <a:lnTo>
+                    <a:pt x="2944400" y="2593993"/>
+                  </a:lnTo>
+                  <a:lnTo>
+                    <a:pt x="3022034" y="2575036"/>
+                  </a:lnTo>
+                  <a:lnTo>
+                    <a:pt x="3099668" y="2555676"/>
+                  </a:lnTo>
+                  <a:lnTo>
+                    <a:pt x="3177302" y="2535903"/>
+                  </a:lnTo>
+                  <a:lnTo>
+                    <a:pt x="3254936" y="2515708"/>
+                  </a:lnTo>
+                  <a:lnTo>
+                    <a:pt x="3332570" y="2495084"/>
+                  </a:lnTo>
+                  <a:lnTo>
+                    <a:pt x="3410204" y="2474020"/>
+                  </a:lnTo>
+                  <a:lnTo>
+                    <a:pt x="3487838" y="2452507"/>
+                  </a:lnTo>
+                  <a:lnTo>
+                    <a:pt x="3565472" y="2430536"/>
+                  </a:lnTo>
+                  <a:lnTo>
+                    <a:pt x="3643106" y="2408096"/>
+                  </a:lnTo>
+                  <a:lnTo>
+                    <a:pt x="3720740" y="2385179"/>
+                  </a:lnTo>
+                  <a:lnTo>
+                    <a:pt x="3798374" y="2361773"/>
+                  </a:lnTo>
+                  <a:lnTo>
+                    <a:pt x="3876008" y="2337869"/>
+                  </a:lnTo>
+                  <a:lnTo>
+                    <a:pt x="3953642" y="2313455"/>
+                  </a:lnTo>
+                  <a:lnTo>
+                    <a:pt x="4031277" y="2288522"/>
+                  </a:lnTo>
+                  <a:lnTo>
+                    <a:pt x="4108911" y="2263057"/>
+                  </a:lnTo>
+                  <a:lnTo>
+                    <a:pt x="4186545" y="2237049"/>
+                  </a:lnTo>
+                  <a:lnTo>
+                    <a:pt x="4264179" y="2210487"/>
+                  </a:lnTo>
+                  <a:lnTo>
+                    <a:pt x="4341813" y="2183360"/>
+                  </a:lnTo>
+                  <a:lnTo>
+                    <a:pt x="4419447" y="2155654"/>
+                  </a:lnTo>
+                  <a:lnTo>
+                    <a:pt x="4497081" y="2127359"/>
+                  </a:lnTo>
+                  <a:lnTo>
+                    <a:pt x="4574715" y="2098460"/>
+                  </a:lnTo>
+                  <a:lnTo>
+                    <a:pt x="4652349" y="2068946"/>
+                  </a:lnTo>
+                  <a:lnTo>
+                    <a:pt x="4729983" y="2038802"/>
+                  </a:lnTo>
+                  <a:lnTo>
+                    <a:pt x="4807617" y="2008017"/>
+                  </a:lnTo>
+                  <a:lnTo>
+                    <a:pt x="4885251" y="1976576"/>
+                  </a:lnTo>
+                  <a:lnTo>
+                    <a:pt x="4962885" y="1944464"/>
+                  </a:lnTo>
+                  <a:lnTo>
+                    <a:pt x="5040519" y="1911669"/>
+                  </a:lnTo>
+                  <a:lnTo>
+                    <a:pt x="5118153" y="1878175"/>
+                  </a:lnTo>
+                  <a:lnTo>
+                    <a:pt x="5195787" y="1843967"/>
+                  </a:lnTo>
+                  <a:lnTo>
+                    <a:pt x="5273421" y="1809031"/>
+                  </a:lnTo>
+                  <a:lnTo>
+                    <a:pt x="5351055" y="1773350"/>
+                  </a:lnTo>
+                  <a:lnTo>
+                    <a:pt x="5428689" y="1736909"/>
+                  </a:lnTo>
+                  <a:lnTo>
+                    <a:pt x="5506323" y="1699692"/>
+                  </a:lnTo>
+                  <a:lnTo>
+                    <a:pt x="5583957" y="1661681"/>
+                  </a:lnTo>
+                  <a:lnTo>
+                    <a:pt x="5661591" y="1622861"/>
+                  </a:lnTo>
+                  <a:lnTo>
+                    <a:pt x="5739226" y="1583214"/>
+                  </a:lnTo>
+                  <a:lnTo>
+                    <a:pt x="5816860" y="1542722"/>
+                  </a:lnTo>
+                  <a:lnTo>
+                    <a:pt x="5894494" y="1501367"/>
+                  </a:lnTo>
+                  <a:lnTo>
+                    <a:pt x="5972128" y="1459131"/>
+                  </a:lnTo>
+                  <a:lnTo>
+                    <a:pt x="6049762" y="1415995"/>
+                  </a:lnTo>
+                  <a:lnTo>
+                    <a:pt x="6127396" y="1371941"/>
+                  </a:lnTo>
+                  <a:lnTo>
+                    <a:pt x="6205030" y="1326947"/>
+                  </a:lnTo>
+                  <a:lnTo>
+                    <a:pt x="6282664" y="1280996"/>
+                  </a:lnTo>
+                  <a:lnTo>
+                    <a:pt x="6360298" y="1234065"/>
+                  </a:lnTo>
+                  <a:lnTo>
+                    <a:pt x="6437932" y="1186134"/>
+                  </a:lnTo>
+                  <a:lnTo>
+                    <a:pt x="6515566" y="1137182"/>
+                  </a:lnTo>
+                  <a:lnTo>
+                    <a:pt x="6593200" y="1087187"/>
+                  </a:lnTo>
+                  <a:lnTo>
+                    <a:pt x="6670834" y="1036127"/>
                   </a:lnTo>
                 </a:path>
               </a:pathLst>
@@ -3868,300 +3868,300 @@
           </p:nvSpPr>
           <p:spPr>
             <a:xfrm>
-              <a:off x="817517" y="4691289"/>
-              <a:ext cx="7370972" cy="754456"/>
+              <a:off x="817517" y="4739001"/>
+              <a:ext cx="7370972" cy="719570"/>
             </a:xfrm>
             <a:custGeom>
               <a:avLst/>
               <a:pathLst>
-                <a:path w="7370972" h="754456">
+                <a:path w="7370972" h="719570">
                   <a:moveTo>
-                    <a:pt x="7370972" y="754456"/>
+                    <a:pt x="7370972" y="719570"/>
                   </a:moveTo>
                   <a:lnTo>
-                    <a:pt x="7293338" y="750074"/>
-                  </a:lnTo>
-                  <a:lnTo>
-                    <a:pt x="7215704" y="745507"/>
-                  </a:lnTo>
-                  <a:lnTo>
-                    <a:pt x="7138070" y="740747"/>
-                  </a:lnTo>
-                  <a:lnTo>
-                    <a:pt x="7060436" y="735785"/>
-                  </a:lnTo>
-                  <a:lnTo>
-                    <a:pt x="6982802" y="730613"/>
-                  </a:lnTo>
-                  <a:lnTo>
-                    <a:pt x="6905168" y="725222"/>
-                  </a:lnTo>
-                  <a:lnTo>
-                    <a:pt x="6827534" y="719602"/>
-                  </a:lnTo>
-                  <a:lnTo>
-                    <a:pt x="6749900" y="713745"/>
-                  </a:lnTo>
-                  <a:lnTo>
-                    <a:pt x="6672266" y="707639"/>
-                  </a:lnTo>
-                  <a:lnTo>
-                    <a:pt x="6594632" y="701275"/>
-                  </a:lnTo>
-                  <a:lnTo>
-                    <a:pt x="6516998" y="694641"/>
-                  </a:lnTo>
-                  <a:lnTo>
-                    <a:pt x="6439364" y="687727"/>
-                  </a:lnTo>
-                  <a:lnTo>
-                    <a:pt x="6361730" y="680519"/>
-                  </a:lnTo>
-                  <a:lnTo>
-                    <a:pt x="6284096" y="673007"/>
-                  </a:lnTo>
-                  <a:lnTo>
-                    <a:pt x="6206462" y="665176"/>
-                  </a:lnTo>
-                  <a:lnTo>
-                    <a:pt x="6128827" y="657014"/>
-                  </a:lnTo>
-                  <a:lnTo>
-                    <a:pt x="6051193" y="648506"/>
-                  </a:lnTo>
-                  <a:lnTo>
-                    <a:pt x="5973559" y="639637"/>
-                  </a:lnTo>
-                  <a:lnTo>
-                    <a:pt x="5895925" y="630393"/>
-                  </a:lnTo>
-                  <a:lnTo>
-                    <a:pt x="5818291" y="620758"/>
-                  </a:lnTo>
-                  <a:lnTo>
-                    <a:pt x="5740657" y="610715"/>
-                  </a:lnTo>
-                  <a:lnTo>
-                    <a:pt x="5663023" y="600246"/>
-                  </a:lnTo>
-                  <a:lnTo>
-                    <a:pt x="5585389" y="589334"/>
-                  </a:lnTo>
-                  <a:lnTo>
-                    <a:pt x="5507755" y="577959"/>
-                  </a:lnTo>
-                  <a:lnTo>
-                    <a:pt x="5430121" y="566104"/>
-                  </a:lnTo>
-                  <a:lnTo>
-                    <a:pt x="5352487" y="553746"/>
-                  </a:lnTo>
-                  <a:lnTo>
-                    <a:pt x="5274853" y="540864"/>
-                  </a:lnTo>
-                  <a:lnTo>
-                    <a:pt x="5197219" y="527437"/>
-                  </a:lnTo>
-                  <a:lnTo>
-                    <a:pt x="5119585" y="513442"/>
-                  </a:lnTo>
-                  <a:lnTo>
-                    <a:pt x="5041951" y="498854"/>
-                  </a:lnTo>
-                  <a:lnTo>
-                    <a:pt x="4964317" y="483648"/>
-                  </a:lnTo>
-                  <a:lnTo>
-                    <a:pt x="4886683" y="467798"/>
-                  </a:lnTo>
-                  <a:lnTo>
-                    <a:pt x="4809049" y="451277"/>
-                  </a:lnTo>
-                  <a:lnTo>
-                    <a:pt x="4731415" y="434056"/>
-                  </a:lnTo>
-                  <a:lnTo>
-                    <a:pt x="4653781" y="416106"/>
-                  </a:lnTo>
-                  <a:lnTo>
-                    <a:pt x="4576147" y="397396"/>
-                  </a:lnTo>
-                  <a:lnTo>
-                    <a:pt x="4498513" y="377894"/>
-                  </a:lnTo>
-                  <a:lnTo>
-                    <a:pt x="4420879" y="357565"/>
-                  </a:lnTo>
-                  <a:lnTo>
-                    <a:pt x="4343244" y="336376"/>
-                  </a:lnTo>
-                  <a:lnTo>
-                    <a:pt x="4265610" y="314289"/>
-                  </a:lnTo>
-                  <a:lnTo>
-                    <a:pt x="4187976" y="291267"/>
-                  </a:lnTo>
-                  <a:lnTo>
-                    <a:pt x="4110342" y="267270"/>
-                  </a:lnTo>
-                  <a:lnTo>
-                    <a:pt x="4032708" y="242257"/>
-                  </a:lnTo>
-                  <a:lnTo>
-                    <a:pt x="3955074" y="216185"/>
-                  </a:lnTo>
-                  <a:lnTo>
-                    <a:pt x="3877440" y="189008"/>
-                  </a:lnTo>
-                  <a:lnTo>
-                    <a:pt x="3799806" y="160680"/>
-                  </a:lnTo>
-                  <a:lnTo>
-                    <a:pt x="3722172" y="131153"/>
-                  </a:lnTo>
-                  <a:lnTo>
-                    <a:pt x="3644538" y="100376"/>
-                  </a:lnTo>
-                  <a:lnTo>
-                    <a:pt x="3566904" y="68295"/>
-                  </a:lnTo>
-                  <a:lnTo>
-                    <a:pt x="3489270" y="34855"/>
+                    <a:pt x="7293338" y="715391"/>
+                  </a:lnTo>
+                  <a:lnTo>
+                    <a:pt x="7215704" y="711035"/>
+                  </a:lnTo>
+                  <a:lnTo>
+                    <a:pt x="7138070" y="706495"/>
+                  </a:lnTo>
+                  <a:lnTo>
+                    <a:pt x="7060436" y="701762"/>
+                  </a:lnTo>
+                  <a:lnTo>
+                    <a:pt x="6982802" y="696829"/>
+                  </a:lnTo>
+                  <a:lnTo>
+                    <a:pt x="6905168" y="691688"/>
+                  </a:lnTo>
+                  <a:lnTo>
+                    <a:pt x="6827534" y="686328"/>
+                  </a:lnTo>
+                  <a:lnTo>
+                    <a:pt x="6749900" y="680741"/>
+                  </a:lnTo>
+                  <a:lnTo>
+                    <a:pt x="6672266" y="674918"/>
+                  </a:lnTo>
+                  <a:lnTo>
+                    <a:pt x="6594632" y="668848"/>
+                  </a:lnTo>
+                  <a:lnTo>
+                    <a:pt x="6516998" y="662521"/>
+                  </a:lnTo>
+                  <a:lnTo>
+                    <a:pt x="6439364" y="655926"/>
+                  </a:lnTo>
+                  <a:lnTo>
+                    <a:pt x="6361730" y="649052"/>
+                  </a:lnTo>
+                  <a:lnTo>
+                    <a:pt x="6284096" y="641887"/>
+                  </a:lnTo>
+                  <a:lnTo>
+                    <a:pt x="6206462" y="634418"/>
+                  </a:lnTo>
+                  <a:lnTo>
+                    <a:pt x="6128827" y="626634"/>
+                  </a:lnTo>
+                  <a:lnTo>
+                    <a:pt x="6051193" y="618519"/>
+                  </a:lnTo>
+                  <a:lnTo>
+                    <a:pt x="5973559" y="610061"/>
+                  </a:lnTo>
+                  <a:lnTo>
+                    <a:pt x="5895925" y="601244"/>
+                  </a:lnTo>
+                  <a:lnTo>
+                    <a:pt x="5818291" y="592054"/>
+                  </a:lnTo>
+                  <a:lnTo>
+                    <a:pt x="5740657" y="582475"/>
+                  </a:lnTo>
+                  <a:lnTo>
+                    <a:pt x="5663023" y="572491"/>
+                  </a:lnTo>
+                  <a:lnTo>
+                    <a:pt x="5585389" y="562083"/>
+                  </a:lnTo>
+                  <a:lnTo>
+                    <a:pt x="5507755" y="551235"/>
+                  </a:lnTo>
+                  <a:lnTo>
+                    <a:pt x="5430121" y="539927"/>
+                  </a:lnTo>
+                  <a:lnTo>
+                    <a:pt x="5352487" y="528141"/>
+                  </a:lnTo>
+                  <a:lnTo>
+                    <a:pt x="5274853" y="515855"/>
+                  </a:lnTo>
+                  <a:lnTo>
+                    <a:pt x="5197219" y="503049"/>
+                  </a:lnTo>
+                  <a:lnTo>
+                    <a:pt x="5119585" y="489701"/>
+                  </a:lnTo>
+                  <a:lnTo>
+                    <a:pt x="5041951" y="475787"/>
+                  </a:lnTo>
+                  <a:lnTo>
+                    <a:pt x="4964317" y="461284"/>
+                  </a:lnTo>
+                  <a:lnTo>
+                    <a:pt x="4886683" y="446167"/>
+                  </a:lnTo>
+                  <a:lnTo>
+                    <a:pt x="4809049" y="430410"/>
+                  </a:lnTo>
+                  <a:lnTo>
+                    <a:pt x="4731415" y="413986"/>
+                  </a:lnTo>
+                  <a:lnTo>
+                    <a:pt x="4653781" y="396866"/>
+                  </a:lnTo>
+                  <a:lnTo>
+                    <a:pt x="4576147" y="379021"/>
+                  </a:lnTo>
+                  <a:lnTo>
+                    <a:pt x="4498513" y="360420"/>
+                  </a:lnTo>
+                  <a:lnTo>
+                    <a:pt x="4420879" y="341032"/>
+                  </a:lnTo>
+                  <a:lnTo>
+                    <a:pt x="4343244" y="320822"/>
+                  </a:lnTo>
+                  <a:lnTo>
+                    <a:pt x="4265610" y="299757"/>
+                  </a:lnTo>
+                  <a:lnTo>
+                    <a:pt x="4187976" y="277799"/>
+                  </a:lnTo>
+                  <a:lnTo>
+                    <a:pt x="4110342" y="254912"/>
+                  </a:lnTo>
+                  <a:lnTo>
+                    <a:pt x="4032708" y="231055"/>
+                  </a:lnTo>
+                  <a:lnTo>
+                    <a:pt x="3955074" y="206188"/>
+                  </a:lnTo>
+                  <a:lnTo>
+                    <a:pt x="3877440" y="180268"/>
+                  </a:lnTo>
+                  <a:lnTo>
+                    <a:pt x="3799806" y="153251"/>
+                  </a:lnTo>
+                  <a:lnTo>
+                    <a:pt x="3722172" y="125089"/>
+                  </a:lnTo>
+                  <a:lnTo>
+                    <a:pt x="3644538" y="95734"/>
+                  </a:lnTo>
+                  <a:lnTo>
+                    <a:pt x="3566904" y="65137"/>
+                  </a:lnTo>
+                  <a:lnTo>
+                    <a:pt x="3489270" y="33243"/>
                   </a:lnTo>
                   <a:lnTo>
                     <a:pt x="3411636" y="0"/>
                   </a:lnTo>
                   <a:lnTo>
-                    <a:pt x="3334002" y="470"/>
-                  </a:lnTo>
-                  <a:lnTo>
-                    <a:pt x="3256368" y="18358"/>
-                  </a:lnTo>
-                  <a:lnTo>
-                    <a:pt x="3178734" y="35872"/>
-                  </a:lnTo>
-                  <a:lnTo>
-                    <a:pt x="3101100" y="53021"/>
-                  </a:lnTo>
-                  <a:lnTo>
-                    <a:pt x="3023466" y="69812"/>
-                  </a:lnTo>
-                  <a:lnTo>
-                    <a:pt x="2945832" y="86252"/>
-                  </a:lnTo>
-                  <a:lnTo>
-                    <a:pt x="2868198" y="102350"/>
-                  </a:lnTo>
-                  <a:lnTo>
-                    <a:pt x="2790564" y="118112"/>
-                  </a:lnTo>
-                  <a:lnTo>
-                    <a:pt x="2712930" y="133545"/>
-                  </a:lnTo>
-                  <a:lnTo>
-                    <a:pt x="2635295" y="148657"/>
-                  </a:lnTo>
-                  <a:lnTo>
-                    <a:pt x="2557661" y="163453"/>
-                  </a:lnTo>
-                  <a:lnTo>
-                    <a:pt x="2480027" y="177940"/>
-                  </a:lnTo>
-                  <a:lnTo>
-                    <a:pt x="2402393" y="192125"/>
-                  </a:lnTo>
-                  <a:lnTo>
-                    <a:pt x="2324759" y="206014"/>
-                  </a:lnTo>
-                  <a:lnTo>
-                    <a:pt x="2247125" y="219614"/>
-                  </a:lnTo>
-                  <a:lnTo>
-                    <a:pt x="2169491" y="232929"/>
-                  </a:lnTo>
-                  <a:lnTo>
-                    <a:pt x="2091857" y="245967"/>
-                  </a:lnTo>
-                  <a:lnTo>
-                    <a:pt x="2014223" y="258733"/>
-                  </a:lnTo>
-                  <a:lnTo>
-                    <a:pt x="1936589" y="271233"/>
-                  </a:lnTo>
-                  <a:lnTo>
-                    <a:pt x="1858955" y="283472"/>
-                  </a:lnTo>
-                  <a:lnTo>
-                    <a:pt x="1781321" y="295456"/>
-                  </a:lnTo>
-                  <a:lnTo>
-                    <a:pt x="1703687" y="307189"/>
-                  </a:lnTo>
-                  <a:lnTo>
-                    <a:pt x="1626053" y="318678"/>
-                  </a:lnTo>
-                  <a:lnTo>
-                    <a:pt x="1548419" y="329927"/>
-                  </a:lnTo>
-                  <a:lnTo>
-                    <a:pt x="1470785" y="340942"/>
-                  </a:lnTo>
-                  <a:lnTo>
-                    <a:pt x="1393151" y="351726"/>
-                  </a:lnTo>
-                  <a:lnTo>
-                    <a:pt x="1315517" y="362286"/>
-                  </a:lnTo>
-                  <a:lnTo>
-                    <a:pt x="1237883" y="372626"/>
-                  </a:lnTo>
-                  <a:lnTo>
-                    <a:pt x="1160249" y="382749"/>
-                  </a:lnTo>
-                  <a:lnTo>
-                    <a:pt x="1082615" y="392662"/>
-                  </a:lnTo>
-                  <a:lnTo>
-                    <a:pt x="1004981" y="402368"/>
-                  </a:lnTo>
-                  <a:lnTo>
-                    <a:pt x="927346" y="411871"/>
-                  </a:lnTo>
-                  <a:lnTo>
-                    <a:pt x="849712" y="421176"/>
-                  </a:lnTo>
-                  <a:lnTo>
-                    <a:pt x="772078" y="430287"/>
-                  </a:lnTo>
-                  <a:lnTo>
-                    <a:pt x="694444" y="439208"/>
-                  </a:lnTo>
-                  <a:lnTo>
-                    <a:pt x="616810" y="447943"/>
-                  </a:lnTo>
-                  <a:lnTo>
-                    <a:pt x="539176" y="456495"/>
-                  </a:lnTo>
-                  <a:lnTo>
-                    <a:pt x="461542" y="464869"/>
-                  </a:lnTo>
-                  <a:lnTo>
-                    <a:pt x="383908" y="473069"/>
-                  </a:lnTo>
-                  <a:lnTo>
-                    <a:pt x="306274" y="481097"/>
-                  </a:lnTo>
-                  <a:lnTo>
-                    <a:pt x="228640" y="488958"/>
-                  </a:lnTo>
-                  <a:lnTo>
-                    <a:pt x="151006" y="496655"/>
-                  </a:lnTo>
-                  <a:lnTo>
-                    <a:pt x="73372" y="504191"/>
-                  </a:lnTo>
-                  <a:lnTo>
-                    <a:pt x="0" y="511165"/>
+                    <a:pt x="3334002" y="448"/>
+                  </a:lnTo>
+                  <a:lnTo>
+                    <a:pt x="3256368" y="17509"/>
+                  </a:lnTo>
+                  <a:lnTo>
+                    <a:pt x="3178734" y="34213"/>
+                  </a:lnTo>
+                  <a:lnTo>
+                    <a:pt x="3101100" y="50569"/>
+                  </a:lnTo>
+                  <a:lnTo>
+                    <a:pt x="3023466" y="66584"/>
+                  </a:lnTo>
+                  <a:lnTo>
+                    <a:pt x="2945832" y="82264"/>
+                  </a:lnTo>
+                  <a:lnTo>
+                    <a:pt x="2868198" y="97618"/>
+                  </a:lnTo>
+                  <a:lnTo>
+                    <a:pt x="2790564" y="112651"/>
+                  </a:lnTo>
+                  <a:lnTo>
+                    <a:pt x="2712930" y="127370"/>
+                  </a:lnTo>
+                  <a:lnTo>
+                    <a:pt x="2635295" y="141783"/>
+                  </a:lnTo>
+                  <a:lnTo>
+                    <a:pt x="2557661" y="155895"/>
+                  </a:lnTo>
+                  <a:lnTo>
+                    <a:pt x="2480027" y="169712"/>
+                  </a:lnTo>
+                  <a:lnTo>
+                    <a:pt x="2402393" y="183241"/>
+                  </a:lnTo>
+                  <a:lnTo>
+                    <a:pt x="2324759" y="196488"/>
+                  </a:lnTo>
+                  <a:lnTo>
+                    <a:pt x="2247125" y="209459"/>
+                  </a:lnTo>
+                  <a:lnTo>
+                    <a:pt x="2169491" y="222159"/>
+                  </a:lnTo>
+                  <a:lnTo>
+                    <a:pt x="2091857" y="234594"/>
+                  </a:lnTo>
+                  <a:lnTo>
+                    <a:pt x="2014223" y="246770"/>
+                  </a:lnTo>
+                  <a:lnTo>
+                    <a:pt x="1936589" y="258691"/>
+                  </a:lnTo>
+                  <a:lnTo>
+                    <a:pt x="1858955" y="270364"/>
+                  </a:lnTo>
+                  <a:lnTo>
+                    <a:pt x="1781321" y="281794"/>
+                  </a:lnTo>
+                  <a:lnTo>
+                    <a:pt x="1703687" y="292985"/>
+                  </a:lnTo>
+                  <a:lnTo>
+                    <a:pt x="1626053" y="303942"/>
+                  </a:lnTo>
+                  <a:lnTo>
+                    <a:pt x="1548419" y="314671"/>
+                  </a:lnTo>
+                  <a:lnTo>
+                    <a:pt x="1470785" y="325177"/>
+                  </a:lnTo>
+                  <a:lnTo>
+                    <a:pt x="1393151" y="335463"/>
+                  </a:lnTo>
+                  <a:lnTo>
+                    <a:pt x="1315517" y="345534"/>
+                  </a:lnTo>
+                  <a:lnTo>
+                    <a:pt x="1237883" y="355395"/>
+                  </a:lnTo>
+                  <a:lnTo>
+                    <a:pt x="1160249" y="365051"/>
+                  </a:lnTo>
+                  <a:lnTo>
+                    <a:pt x="1082615" y="374505"/>
+                  </a:lnTo>
+                  <a:lnTo>
+                    <a:pt x="1004981" y="383762"/>
+                  </a:lnTo>
+                  <a:lnTo>
+                    <a:pt x="927346" y="392826"/>
+                  </a:lnTo>
+                  <a:lnTo>
+                    <a:pt x="849712" y="401701"/>
+                  </a:lnTo>
+                  <a:lnTo>
+                    <a:pt x="772078" y="410391"/>
+                  </a:lnTo>
+                  <a:lnTo>
+                    <a:pt x="694444" y="418899"/>
+                  </a:lnTo>
+                  <a:lnTo>
+                    <a:pt x="616810" y="427230"/>
+                  </a:lnTo>
+                  <a:lnTo>
+                    <a:pt x="539176" y="435387"/>
+                  </a:lnTo>
+                  <a:lnTo>
+                    <a:pt x="461542" y="443374"/>
+                  </a:lnTo>
+                  <a:lnTo>
+                    <a:pt x="383908" y="451194"/>
+                  </a:lnTo>
+                  <a:lnTo>
+                    <a:pt x="306274" y="458851"/>
+                  </a:lnTo>
+                  <a:lnTo>
+                    <a:pt x="228640" y="466349"/>
+                  </a:lnTo>
+                  <a:lnTo>
+                    <a:pt x="151006" y="473690"/>
+                  </a:lnTo>
+                  <a:lnTo>
+                    <a:pt x="73372" y="480878"/>
+                  </a:lnTo>
+                  <a:lnTo>
+                    <a:pt x="0" y="487529"/>
                   </a:lnTo>
                 </a:path>
               </a:pathLst>
@@ -4181,300 +4181,300 @@
           </p:nvSpPr>
           <p:spPr>
             <a:xfrm>
-              <a:off x="817517" y="4192380"/>
-              <a:ext cx="7370972" cy="841548"/>
+              <a:off x="817517" y="4263162"/>
+              <a:ext cx="7370972" cy="802635"/>
             </a:xfrm>
             <a:custGeom>
               <a:avLst/>
               <a:pathLst>
-                <a:path w="7370972" h="841548">
+                <a:path w="7370972" h="802635">
                   <a:moveTo>
                     <a:pt x="0" y="0"/>
                   </a:moveTo>
                   <a:lnTo>
-                    <a:pt x="73372" y="13017"/>
-                  </a:lnTo>
-                  <a:lnTo>
-                    <a:pt x="151006" y="26651"/>
-                  </a:lnTo>
-                  <a:lnTo>
-                    <a:pt x="228640" y="40146"/>
-                  </a:lnTo>
-                  <a:lnTo>
-                    <a:pt x="306274" y="53505"/>
-                  </a:lnTo>
-                  <a:lnTo>
-                    <a:pt x="383908" y="66728"/>
-                  </a:lnTo>
-                  <a:lnTo>
-                    <a:pt x="461542" y="79816"/>
-                  </a:lnTo>
-                  <a:lnTo>
-                    <a:pt x="539176" y="92772"/>
-                  </a:lnTo>
-                  <a:lnTo>
-                    <a:pt x="616810" y="105597"/>
-                  </a:lnTo>
-                  <a:lnTo>
-                    <a:pt x="694444" y="118291"/>
-                  </a:lnTo>
-                  <a:lnTo>
-                    <a:pt x="772078" y="130857"/>
-                  </a:lnTo>
-                  <a:lnTo>
-                    <a:pt x="849712" y="143295"/>
-                  </a:lnTo>
-                  <a:lnTo>
-                    <a:pt x="927346" y="155607"/>
-                  </a:lnTo>
-                  <a:lnTo>
-                    <a:pt x="1004981" y="167794"/>
-                  </a:lnTo>
-                  <a:lnTo>
-                    <a:pt x="1082615" y="179858"/>
-                  </a:lnTo>
-                  <a:lnTo>
-                    <a:pt x="1160249" y="191799"/>
-                  </a:lnTo>
-                  <a:lnTo>
-                    <a:pt x="1237883" y="203619"/>
-                  </a:lnTo>
-                  <a:lnTo>
-                    <a:pt x="1315517" y="215319"/>
-                  </a:lnTo>
-                  <a:lnTo>
-                    <a:pt x="1393151" y="226900"/>
-                  </a:lnTo>
-                  <a:lnTo>
-                    <a:pt x="1470785" y="238364"/>
-                  </a:lnTo>
-                  <a:lnTo>
-                    <a:pt x="1548419" y="249711"/>
-                  </a:lnTo>
-                  <a:lnTo>
-                    <a:pt x="1626053" y="260943"/>
-                  </a:lnTo>
-                  <a:lnTo>
-                    <a:pt x="1703687" y="272062"/>
-                  </a:lnTo>
-                  <a:lnTo>
-                    <a:pt x="1781321" y="283067"/>
-                  </a:lnTo>
-                  <a:lnTo>
-                    <a:pt x="1858955" y="293961"/>
-                  </a:lnTo>
-                  <a:lnTo>
-                    <a:pt x="1936589" y="304745"/>
-                  </a:lnTo>
-                  <a:lnTo>
-                    <a:pt x="2014223" y="315419"/>
-                  </a:lnTo>
-                  <a:lnTo>
-                    <a:pt x="2091857" y="325984"/>
-                  </a:lnTo>
-                  <a:lnTo>
-                    <a:pt x="2169491" y="336443"/>
-                  </a:lnTo>
-                  <a:lnTo>
-                    <a:pt x="2247125" y="346795"/>
-                  </a:lnTo>
-                  <a:lnTo>
-                    <a:pt x="2324759" y="357043"/>
-                  </a:lnTo>
-                  <a:lnTo>
-                    <a:pt x="2402393" y="367186"/>
-                  </a:lnTo>
-                  <a:lnTo>
-                    <a:pt x="2480027" y="377226"/>
-                  </a:lnTo>
-                  <a:lnTo>
-                    <a:pt x="2557661" y="387165"/>
-                  </a:lnTo>
-                  <a:lnTo>
-                    <a:pt x="2635295" y="397003"/>
-                  </a:lnTo>
-                  <a:lnTo>
-                    <a:pt x="2712930" y="406741"/>
-                  </a:lnTo>
-                  <a:lnTo>
-                    <a:pt x="2790564" y="416380"/>
-                  </a:lnTo>
-                  <a:lnTo>
-                    <a:pt x="2868198" y="425921"/>
-                  </a:lnTo>
-                  <a:lnTo>
-                    <a:pt x="2945832" y="435366"/>
-                  </a:lnTo>
-                  <a:lnTo>
-                    <a:pt x="3023466" y="444715"/>
-                  </a:lnTo>
-                  <a:lnTo>
-                    <a:pt x="3101100" y="453969"/>
-                  </a:lnTo>
-                  <a:lnTo>
-                    <a:pt x="3178734" y="463129"/>
-                  </a:lnTo>
-                  <a:lnTo>
-                    <a:pt x="3256368" y="472196"/>
-                  </a:lnTo>
-                  <a:lnTo>
-                    <a:pt x="3334002" y="481171"/>
-                  </a:lnTo>
-                  <a:lnTo>
-                    <a:pt x="3411636" y="490055"/>
-                  </a:lnTo>
-                  <a:lnTo>
-                    <a:pt x="3489270" y="498849"/>
-                  </a:lnTo>
-                  <a:lnTo>
-                    <a:pt x="3566904" y="507553"/>
-                  </a:lnTo>
-                  <a:lnTo>
-                    <a:pt x="3644538" y="516170"/>
-                  </a:lnTo>
-                  <a:lnTo>
-                    <a:pt x="3722172" y="524699"/>
-                  </a:lnTo>
-                  <a:lnTo>
-                    <a:pt x="3799806" y="533141"/>
-                  </a:lnTo>
-                  <a:lnTo>
-                    <a:pt x="3877440" y="541498"/>
-                  </a:lnTo>
-                  <a:lnTo>
-                    <a:pt x="3955074" y="549770"/>
-                  </a:lnTo>
-                  <a:lnTo>
-                    <a:pt x="4032708" y="557958"/>
-                  </a:lnTo>
-                  <a:lnTo>
-                    <a:pt x="4110342" y="566063"/>
-                  </a:lnTo>
-                  <a:lnTo>
-                    <a:pt x="4187976" y="574086"/>
-                  </a:lnTo>
-                  <a:lnTo>
-                    <a:pt x="4265610" y="582027"/>
-                  </a:lnTo>
-                  <a:lnTo>
-                    <a:pt x="4343244" y="589888"/>
-                  </a:lnTo>
-                  <a:lnTo>
-                    <a:pt x="4420879" y="597669"/>
-                  </a:lnTo>
-                  <a:lnTo>
-                    <a:pt x="4498513" y="605371"/>
-                  </a:lnTo>
-                  <a:lnTo>
-                    <a:pt x="4576147" y="612995"/>
-                  </a:lnTo>
-                  <a:lnTo>
-                    <a:pt x="4653781" y="620541"/>
-                  </a:lnTo>
-                  <a:lnTo>
-                    <a:pt x="4731415" y="628012"/>
-                  </a:lnTo>
-                  <a:lnTo>
-                    <a:pt x="4809049" y="635406"/>
-                  </a:lnTo>
-                  <a:lnTo>
-                    <a:pt x="4886683" y="642725"/>
-                  </a:lnTo>
-                  <a:lnTo>
-                    <a:pt x="4964317" y="649970"/>
-                  </a:lnTo>
-                  <a:lnTo>
-                    <a:pt x="5041951" y="657141"/>
-                  </a:lnTo>
-                  <a:lnTo>
-                    <a:pt x="5119585" y="664240"/>
-                  </a:lnTo>
-                  <a:lnTo>
-                    <a:pt x="5197219" y="671267"/>
-                  </a:lnTo>
-                  <a:lnTo>
-                    <a:pt x="5274853" y="678222"/>
-                  </a:lnTo>
-                  <a:lnTo>
-                    <a:pt x="5352487" y="685107"/>
-                  </a:lnTo>
-                  <a:lnTo>
-                    <a:pt x="5430121" y="691922"/>
-                  </a:lnTo>
-                  <a:lnTo>
-                    <a:pt x="5507755" y="698668"/>
-                  </a:lnTo>
-                  <a:lnTo>
-                    <a:pt x="5585389" y="705345"/>
-                  </a:lnTo>
-                  <a:lnTo>
-                    <a:pt x="5663023" y="711955"/>
-                  </a:lnTo>
-                  <a:lnTo>
-                    <a:pt x="5740657" y="718498"/>
-                  </a:lnTo>
-                  <a:lnTo>
-                    <a:pt x="5818291" y="724974"/>
-                  </a:lnTo>
-                  <a:lnTo>
-                    <a:pt x="5895925" y="731384"/>
-                  </a:lnTo>
-                  <a:lnTo>
-                    <a:pt x="5973559" y="737730"/>
-                  </a:lnTo>
-                  <a:lnTo>
-                    <a:pt x="6051193" y="744011"/>
-                  </a:lnTo>
-                  <a:lnTo>
-                    <a:pt x="6128827" y="750228"/>
-                  </a:lnTo>
-                  <a:lnTo>
-                    <a:pt x="6206462" y="756383"/>
-                  </a:lnTo>
-                  <a:lnTo>
-                    <a:pt x="6284096" y="762474"/>
-                  </a:lnTo>
-                  <a:lnTo>
-                    <a:pt x="6361730" y="768504"/>
-                  </a:lnTo>
-                  <a:lnTo>
-                    <a:pt x="6439364" y="774473"/>
-                  </a:lnTo>
-                  <a:lnTo>
-                    <a:pt x="6516998" y="780382"/>
-                  </a:lnTo>
-                  <a:lnTo>
-                    <a:pt x="6594632" y="786230"/>
-                  </a:lnTo>
-                  <a:lnTo>
-                    <a:pt x="6672266" y="792019"/>
-                  </a:lnTo>
-                  <a:lnTo>
-                    <a:pt x="6749900" y="797749"/>
-                  </a:lnTo>
-                  <a:lnTo>
-                    <a:pt x="6827534" y="803421"/>
-                  </a:lnTo>
-                  <a:lnTo>
-                    <a:pt x="6905168" y="809036"/>
-                  </a:lnTo>
-                  <a:lnTo>
-                    <a:pt x="6982802" y="814594"/>
-                  </a:lnTo>
-                  <a:lnTo>
-                    <a:pt x="7060436" y="820095"/>
-                  </a:lnTo>
-                  <a:lnTo>
-                    <a:pt x="7138070" y="825540"/>
-                  </a:lnTo>
-                  <a:lnTo>
-                    <a:pt x="7215704" y="830931"/>
-                  </a:lnTo>
-                  <a:lnTo>
-                    <a:pt x="7293338" y="836266"/>
-                  </a:lnTo>
-                  <a:lnTo>
-                    <a:pt x="7370972" y="841548"/>
+                    <a:pt x="73372" y="12415"/>
+                  </a:lnTo>
+                  <a:lnTo>
+                    <a:pt x="151006" y="25418"/>
+                  </a:lnTo>
+                  <a:lnTo>
+                    <a:pt x="228640" y="38290"/>
+                  </a:lnTo>
+                  <a:lnTo>
+                    <a:pt x="306274" y="51030"/>
+                  </a:lnTo>
+                  <a:lnTo>
+                    <a:pt x="383908" y="63642"/>
+                  </a:lnTo>
+                  <a:lnTo>
+                    <a:pt x="461542" y="76126"/>
+                  </a:lnTo>
+                  <a:lnTo>
+                    <a:pt x="539176" y="88483"/>
+                  </a:lnTo>
+                  <a:lnTo>
+                    <a:pt x="616810" y="100714"/>
+                  </a:lnTo>
+                  <a:lnTo>
+                    <a:pt x="694444" y="112822"/>
+                  </a:lnTo>
+                  <a:lnTo>
+                    <a:pt x="772078" y="124806"/>
+                  </a:lnTo>
+                  <a:lnTo>
+                    <a:pt x="849712" y="136669"/>
+                  </a:lnTo>
+                  <a:lnTo>
+                    <a:pt x="927346" y="148412"/>
+                  </a:lnTo>
+                  <a:lnTo>
+                    <a:pt x="1004981" y="160035"/>
+                  </a:lnTo>
+                  <a:lnTo>
+                    <a:pt x="1082615" y="171541"/>
+                  </a:lnTo>
+                  <a:lnTo>
+                    <a:pt x="1160249" y="182930"/>
+                  </a:lnTo>
+                  <a:lnTo>
+                    <a:pt x="1237883" y="194203"/>
+                  </a:lnTo>
+                  <a:lnTo>
+                    <a:pt x="1315517" y="205362"/>
+                  </a:lnTo>
+                  <a:lnTo>
+                    <a:pt x="1393151" y="216408"/>
+                  </a:lnTo>
+                  <a:lnTo>
+                    <a:pt x="1470785" y="227342"/>
+                  </a:lnTo>
+                  <a:lnTo>
+                    <a:pt x="1548419" y="238164"/>
+                  </a:lnTo>
+                  <a:lnTo>
+                    <a:pt x="1626053" y="248877"/>
+                  </a:lnTo>
+                  <a:lnTo>
+                    <a:pt x="1703687" y="259482"/>
+                  </a:lnTo>
+                  <a:lnTo>
+                    <a:pt x="1781321" y="269978"/>
+                  </a:lnTo>
+                  <a:lnTo>
+                    <a:pt x="1858955" y="280369"/>
+                  </a:lnTo>
+                  <a:lnTo>
+                    <a:pt x="1936589" y="290653"/>
+                  </a:lnTo>
+                  <a:lnTo>
+                    <a:pt x="2014223" y="300834"/>
+                  </a:lnTo>
+                  <a:lnTo>
+                    <a:pt x="2091857" y="310911"/>
+                  </a:lnTo>
+                  <a:lnTo>
+                    <a:pt x="2169491" y="320886"/>
+                  </a:lnTo>
+                  <a:lnTo>
+                    <a:pt x="2247125" y="330759"/>
+                  </a:lnTo>
+                  <a:lnTo>
+                    <a:pt x="2324759" y="340533"/>
+                  </a:lnTo>
+                  <a:lnTo>
+                    <a:pt x="2402393" y="350207"/>
+                  </a:lnTo>
+                  <a:lnTo>
+                    <a:pt x="2480027" y="359784"/>
+                  </a:lnTo>
+                  <a:lnTo>
+                    <a:pt x="2557661" y="369263"/>
+                  </a:lnTo>
+                  <a:lnTo>
+                    <a:pt x="2635295" y="378645"/>
+                  </a:lnTo>
+                  <a:lnTo>
+                    <a:pt x="2712930" y="387933"/>
+                  </a:lnTo>
+                  <a:lnTo>
+                    <a:pt x="2790564" y="397127"/>
+                  </a:lnTo>
+                  <a:lnTo>
+                    <a:pt x="2868198" y="406227"/>
+                  </a:lnTo>
+                  <a:lnTo>
+                    <a:pt x="2945832" y="415235"/>
+                  </a:lnTo>
+                  <a:lnTo>
+                    <a:pt x="3023466" y="424151"/>
+                  </a:lnTo>
+                  <a:lnTo>
+                    <a:pt x="3101100" y="432977"/>
+                  </a:lnTo>
+                  <a:lnTo>
+                    <a:pt x="3178734" y="441714"/>
+                  </a:lnTo>
+                  <a:lnTo>
+                    <a:pt x="3256368" y="450361"/>
+                  </a:lnTo>
+                  <a:lnTo>
+                    <a:pt x="3334002" y="458922"/>
+                  </a:lnTo>
+                  <a:lnTo>
+                    <a:pt x="3411636" y="467395"/>
+                  </a:lnTo>
+                  <a:lnTo>
+                    <a:pt x="3489270" y="475782"/>
+                  </a:lnTo>
+                  <a:lnTo>
+                    <a:pt x="3566904" y="484084"/>
+                  </a:lnTo>
+                  <a:lnTo>
+                    <a:pt x="3644538" y="492302"/>
+                  </a:lnTo>
+                  <a:lnTo>
+                    <a:pt x="3722172" y="500437"/>
+                  </a:lnTo>
+                  <a:lnTo>
+                    <a:pt x="3799806" y="508489"/>
+                  </a:lnTo>
+                  <a:lnTo>
+                    <a:pt x="3877440" y="516459"/>
+                  </a:lnTo>
+                  <a:lnTo>
+                    <a:pt x="3955074" y="524349"/>
+                  </a:lnTo>
+                  <a:lnTo>
+                    <a:pt x="4032708" y="532158"/>
+                  </a:lnTo>
+                  <a:lnTo>
+                    <a:pt x="4110342" y="539888"/>
+                  </a:lnTo>
+                  <a:lnTo>
+                    <a:pt x="4187976" y="547540"/>
+                  </a:lnTo>
+                  <a:lnTo>
+                    <a:pt x="4265610" y="555114"/>
+                  </a:lnTo>
+                  <a:lnTo>
+                    <a:pt x="4343244" y="562612"/>
+                  </a:lnTo>
+                  <a:lnTo>
+                    <a:pt x="4420879" y="570033"/>
+                  </a:lnTo>
+                  <a:lnTo>
+                    <a:pt x="4498513" y="577379"/>
+                  </a:lnTo>
+                  <a:lnTo>
+                    <a:pt x="4576147" y="584650"/>
+                  </a:lnTo>
+                  <a:lnTo>
+                    <a:pt x="4653781" y="591848"/>
+                  </a:lnTo>
+                  <a:lnTo>
+                    <a:pt x="4731415" y="598972"/>
+                  </a:lnTo>
+                  <a:lnTo>
+                    <a:pt x="4809049" y="606025"/>
+                  </a:lnTo>
+                  <a:lnTo>
+                    <a:pt x="4886683" y="613006"/>
+                  </a:lnTo>
+                  <a:lnTo>
+                    <a:pt x="4964317" y="619916"/>
+                  </a:lnTo>
+                  <a:lnTo>
+                    <a:pt x="5041951" y="626755"/>
+                  </a:lnTo>
+                  <a:lnTo>
+                    <a:pt x="5119585" y="633526"/>
+                  </a:lnTo>
+                  <a:lnTo>
+                    <a:pt x="5197219" y="640228"/>
+                  </a:lnTo>
+                  <a:lnTo>
+                    <a:pt x="5274853" y="646861"/>
+                  </a:lnTo>
+                  <a:lnTo>
+                    <a:pt x="5352487" y="653428"/>
+                  </a:lnTo>
+                  <a:lnTo>
+                    <a:pt x="5430121" y="659928"/>
+                  </a:lnTo>
+                  <a:lnTo>
+                    <a:pt x="5507755" y="666362"/>
+                  </a:lnTo>
+                  <a:lnTo>
+                    <a:pt x="5585389" y="672730"/>
+                  </a:lnTo>
+                  <a:lnTo>
+                    <a:pt x="5663023" y="679034"/>
+                  </a:lnTo>
+                  <a:lnTo>
+                    <a:pt x="5740657" y="685274"/>
+                  </a:lnTo>
+                  <a:lnTo>
+                    <a:pt x="5818291" y="691451"/>
+                  </a:lnTo>
+                  <a:lnTo>
+                    <a:pt x="5895925" y="697565"/>
+                  </a:lnTo>
+                  <a:lnTo>
+                    <a:pt x="5973559" y="703617"/>
+                  </a:lnTo>
+                  <a:lnTo>
+                    <a:pt x="6051193" y="709608"/>
+                  </a:lnTo>
+                  <a:lnTo>
+                    <a:pt x="6128827" y="715538"/>
+                  </a:lnTo>
+                  <a:lnTo>
+                    <a:pt x="6206462" y="721408"/>
+                  </a:lnTo>
+                  <a:lnTo>
+                    <a:pt x="6284096" y="727218"/>
+                  </a:lnTo>
+                  <a:lnTo>
+                    <a:pt x="6361730" y="732969"/>
+                  </a:lnTo>
+                  <a:lnTo>
+                    <a:pt x="6439364" y="738662"/>
+                  </a:lnTo>
+                  <a:lnTo>
+                    <a:pt x="6516998" y="744297"/>
+                  </a:lnTo>
+                  <a:lnTo>
+                    <a:pt x="6594632" y="749875"/>
+                  </a:lnTo>
+                  <a:lnTo>
+                    <a:pt x="6672266" y="755396"/>
+                  </a:lnTo>
+                  <a:lnTo>
+                    <a:pt x="6749900" y="760862"/>
+                  </a:lnTo>
+                  <a:lnTo>
+                    <a:pt x="6827534" y="766272"/>
+                  </a:lnTo>
+                  <a:lnTo>
+                    <a:pt x="6905168" y="771627"/>
+                  </a:lnTo>
+                  <a:lnTo>
+                    <a:pt x="6982802" y="776927"/>
+                  </a:lnTo>
+                  <a:lnTo>
+                    <a:pt x="7060436" y="782174"/>
+                  </a:lnTo>
+                  <a:lnTo>
+                    <a:pt x="7138070" y="787368"/>
+                  </a:lnTo>
+                  <a:lnTo>
+                    <a:pt x="7215704" y="792509"/>
+                  </a:lnTo>
+                  <a:lnTo>
+                    <a:pt x="7293338" y="797597"/>
+                  </a:lnTo>
+                  <a:lnTo>
+                    <a:pt x="7370972" y="802635"/>
                   </a:lnTo>
                 </a:path>
               </a:pathLst>
@@ -4503,7 +4503,7 @@
           </p:nvSpPr>
           <p:spPr>
             <a:xfrm>
-              <a:off x="817517" y="4679530"/>
+              <a:off x="817517" y="4727786"/>
               <a:ext cx="7799693" cy="0"/>
             </a:xfrm>
             <a:custGeom>
@@ -4546,15 +4546,15 @@
           </p:nvSpPr>
           <p:spPr>
             <a:xfrm>
-              <a:off x="4203673" y="1896563"/>
-              <a:ext cx="0" cy="3826579"/>
+              <a:off x="4203673" y="2073503"/>
+              <a:ext cx="0" cy="3649639"/>
             </a:xfrm>
             <a:custGeom>
               <a:avLst/>
               <a:pathLst>
-                <a:path w="0" h="3826579">
+                <a:path w="0" h="3649639">
                   <a:moveTo>
-                    <a:pt x="0" y="3826579"/>
+                    <a:pt x="0" y="3649639"/>
                   </a:moveTo>
                   <a:lnTo>
                     <a:pt x="0" y="0"/>
@@ -4589,7 +4589,7 @@
           </p:nvSpPr>
           <p:spPr>
             <a:xfrm>
-              <a:off x="692708" y="5509156"/>
+              <a:off x="692708" y="5517199"/>
               <a:ext cx="62179" cy="80101"/>
             </a:xfrm>
             <a:prstGeom prst="rect">
@@ -4635,7 +4635,7 @@
           </p:nvSpPr>
           <p:spPr>
             <a:xfrm>
-              <a:off x="692708" y="4639479"/>
+              <a:off x="692708" y="4687735"/>
               <a:ext cx="62179" cy="80101"/>
             </a:xfrm>
             <a:prstGeom prst="rect">
@@ -4681,7 +4681,7 @@
           </p:nvSpPr>
           <p:spPr>
             <a:xfrm>
-              <a:off x="692708" y="3769802"/>
+              <a:off x="692708" y="3858272"/>
               <a:ext cx="62179" cy="80101"/>
             </a:xfrm>
             <a:prstGeom prst="rect">
@@ -4727,7 +4727,7 @@
           </p:nvSpPr>
           <p:spPr>
             <a:xfrm>
-              <a:off x="692708" y="2900125"/>
+              <a:off x="692708" y="3028808"/>
               <a:ext cx="62179" cy="80101"/>
             </a:xfrm>
             <a:prstGeom prst="rect">
@@ -4773,7 +4773,7 @@
           </p:nvSpPr>
           <p:spPr>
             <a:xfrm>
-              <a:off x="692708" y="2030448"/>
+              <a:off x="692708" y="2199345"/>
               <a:ext cx="62179" cy="80101"/>
             </a:xfrm>
             <a:prstGeom prst="rect">
@@ -5049,7 +5049,7 @@
           </p:nvSpPr>
           <p:spPr>
             <a:xfrm rot="-5400000">
-              <a:off x="68446" y="3759743"/>
+              <a:off x="68446" y="3848213"/>
               <a:ext cx="1016904" cy="100218"/>
             </a:xfrm>
             <a:prstGeom prst="rect">
@@ -5090,6 +5090,52 @@
         <p:sp>
           <p:nvSpPr>
             <p:cNvPr id="38" name="tx38"/>
+            <p:cNvSpPr/>
+            <p:nvPr/>
+          </p:nvSpPr>
+          <p:spPr>
+            <a:xfrm>
+              <a:off x="817517" y="1896563"/>
+              <a:ext cx="4166463" cy="82021"/>
+            </a:xfrm>
+            <a:prstGeom prst="rect">
+              <a:avLst/>
+            </a:prstGeom>
+            <a:noFill/>
+          </p:spPr>
+          <p:txBody>
+            <a:bodyPr lIns="0" rIns="0" tIns="0" bIns="0" anchorCtr="1" anchor="ctr" wrap="none"/>
+            <a:lstStyle/>
+            <a:p>
+              <a:pPr algn="l" marL="0" marR="0" indent="0">
+                <a:lnSpc>
+                  <a:spcPts val="900"/>
+                </a:lnSpc>
+                <a:spcBef>
+                  <a:spcPts val="0"/>
+                </a:spcBef>
+                <a:spcAft>
+                  <a:spcPts val="0"/>
+                </a:spcAft>
+              </a:pPr>
+              <a:r>
+                <a:rPr sz="900">
+                  <a:solidFill>
+                    <a:srgbClr val="404040">
+                      <a:alpha val="100000"/>
+                    </a:srgbClr>
+                  </a:solidFill>
+                  <a:latin typeface="Helvetica"/>
+                  <a:cs typeface="Helvetica"/>
+                </a:rPr>
+                <a:t>subHR = 0.89 (95% CI 0.62-1.27), p = 0.523   (per 0.1-unit increase in eGFR ratio)</a:t>
+              </a:r>
+            </a:p>
+          </p:txBody>
+        </p:sp>
+        <p:sp>
+          <p:nvSpPr>
+            <p:cNvPr id="39" name="tx39"/>
             <p:cNvSpPr/>
             <p:nvPr/>
           </p:nvSpPr>

--- a/docs/plots/carbo/jx_carbo_linsubhr_ratio_hosp2.pptx
+++ b/docs/plots/carbo/jx_carbo_linsubhr_ratio_hosp2.pptx
@@ -2271,26 +2271,26 @@
           </p:nvSpPr>
           <p:spPr>
             <a:xfrm>
-              <a:off x="817517" y="5142518"/>
-              <a:ext cx="7799693" cy="0"/>
+              <a:off x="915645" y="5071743"/>
+              <a:ext cx="7682587" cy="0"/>
             </a:xfrm>
             <a:custGeom>
               <a:avLst/>
               <a:pathLst>
-                <a:path w="7799693" h="0">
+                <a:path w="7682587" h="0">
                   <a:moveTo>
                     <a:pt x="0" y="0"/>
                   </a:moveTo>
                   <a:lnTo>
-                    <a:pt x="7799693" y="0"/>
-                  </a:lnTo>
-                  <a:lnTo>
-                    <a:pt x="7799693" y="0"/>
+                    <a:pt x="7682587" y="0"/>
+                  </a:lnTo>
+                  <a:lnTo>
+                    <a:pt x="7682587" y="0"/>
                   </a:lnTo>
                 </a:path>
               </a:pathLst>
             </a:custGeom>
-            <a:ln w="6775" cap="flat">
+            <a:ln w="8623" cap="flat">
               <a:solidFill>
                 <a:srgbClr val="EBEBEB">
                   <a:alpha val="100000"/>
@@ -2314,26 +2314,26 @@
           </p:nvSpPr>
           <p:spPr>
             <a:xfrm>
-              <a:off x="817517" y="4313054"/>
-              <a:ext cx="7799693" cy="0"/>
+              <a:off x="915645" y="4298074"/>
+              <a:ext cx="7682587" cy="0"/>
             </a:xfrm>
             <a:custGeom>
               <a:avLst/>
               <a:pathLst>
-                <a:path w="7799693" h="0">
+                <a:path w="7682587" h="0">
                   <a:moveTo>
                     <a:pt x="0" y="0"/>
                   </a:moveTo>
                   <a:lnTo>
-                    <a:pt x="7799693" y="0"/>
-                  </a:lnTo>
-                  <a:lnTo>
-                    <a:pt x="7799693" y="0"/>
+                    <a:pt x="7682587" y="0"/>
+                  </a:lnTo>
+                  <a:lnTo>
+                    <a:pt x="7682587" y="0"/>
                   </a:lnTo>
                 </a:path>
               </a:pathLst>
             </a:custGeom>
-            <a:ln w="6775" cap="flat">
+            <a:ln w="8623" cap="flat">
               <a:solidFill>
                 <a:srgbClr val="EBEBEB">
                   <a:alpha val="100000"/>
@@ -2357,26 +2357,26 @@
           </p:nvSpPr>
           <p:spPr>
             <a:xfrm>
-              <a:off x="817517" y="3483591"/>
-              <a:ext cx="7799693" cy="0"/>
+              <a:off x="915645" y="3524405"/>
+              <a:ext cx="7682587" cy="0"/>
             </a:xfrm>
             <a:custGeom>
               <a:avLst/>
               <a:pathLst>
-                <a:path w="7799693" h="0">
+                <a:path w="7682587" h="0">
                   <a:moveTo>
                     <a:pt x="0" y="0"/>
                   </a:moveTo>
                   <a:lnTo>
-                    <a:pt x="7799693" y="0"/>
-                  </a:lnTo>
-                  <a:lnTo>
-                    <a:pt x="7799693" y="0"/>
+                    <a:pt x="7682587" y="0"/>
+                  </a:lnTo>
+                  <a:lnTo>
+                    <a:pt x="7682587" y="0"/>
                   </a:lnTo>
                 </a:path>
               </a:pathLst>
             </a:custGeom>
-            <a:ln w="6775" cap="flat">
+            <a:ln w="8623" cap="flat">
               <a:solidFill>
                 <a:srgbClr val="EBEBEB">
                   <a:alpha val="100000"/>
@@ -2400,26 +2400,26 @@
           </p:nvSpPr>
           <p:spPr>
             <a:xfrm>
-              <a:off x="817517" y="2654127"/>
-              <a:ext cx="7799693" cy="0"/>
+              <a:off x="915645" y="2750737"/>
+              <a:ext cx="7682587" cy="0"/>
             </a:xfrm>
             <a:custGeom>
               <a:avLst/>
               <a:pathLst>
-                <a:path w="7799693" h="0">
+                <a:path w="7682587" h="0">
                   <a:moveTo>
                     <a:pt x="0" y="0"/>
                   </a:moveTo>
                   <a:lnTo>
-                    <a:pt x="7799693" y="0"/>
-                  </a:lnTo>
-                  <a:lnTo>
-                    <a:pt x="7799693" y="0"/>
+                    <a:pt x="7682587" y="0"/>
+                  </a:lnTo>
+                  <a:lnTo>
+                    <a:pt x="7682587" y="0"/>
                   </a:lnTo>
                 </a:path>
               </a:pathLst>
             </a:custGeom>
-            <a:ln w="6775" cap="flat">
+            <a:ln w="8623" cap="flat">
               <a:solidFill>
                 <a:srgbClr val="EBEBEB">
                   <a:alpha val="100000"/>
@@ -2443,15 +2443,15 @@
           </p:nvSpPr>
           <p:spPr>
             <a:xfrm>
-              <a:off x="1615213" y="2073503"/>
-              <a:ext cx="0" cy="3649639"/>
+              <a:off x="1701364" y="2209169"/>
+              <a:ext cx="0" cy="3404141"/>
             </a:xfrm>
             <a:custGeom>
               <a:avLst/>
               <a:pathLst>
-                <a:path w="0" h="3649639">
+                <a:path w="0" h="3404141">
                   <a:moveTo>
-                    <a:pt x="0" y="3649639"/>
+                    <a:pt x="0" y="3404141"/>
                   </a:moveTo>
                   <a:lnTo>
                     <a:pt x="0" y="0"/>
@@ -2462,7 +2462,7 @@
                 </a:path>
               </a:pathLst>
             </a:custGeom>
-            <a:ln w="6775" cap="flat">
+            <a:ln w="8623" cap="flat">
               <a:solidFill>
                 <a:srgbClr val="EBEBEB">
                   <a:alpha val="100000"/>
@@ -2486,15 +2486,15 @@
           </p:nvSpPr>
           <p:spPr>
             <a:xfrm>
-              <a:off x="3387871" y="2073503"/>
-              <a:ext cx="0" cy="3649639"/>
+              <a:off x="3447406" y="2209169"/>
+              <a:ext cx="0" cy="3404141"/>
             </a:xfrm>
             <a:custGeom>
               <a:avLst/>
               <a:pathLst>
-                <a:path w="0" h="3649639">
+                <a:path w="0" h="3404141">
                   <a:moveTo>
-                    <a:pt x="0" y="3649639"/>
+                    <a:pt x="0" y="3404141"/>
                   </a:moveTo>
                   <a:lnTo>
                     <a:pt x="0" y="0"/>
@@ -2505,7 +2505,7 @@
                 </a:path>
               </a:pathLst>
             </a:custGeom>
-            <a:ln w="6775" cap="flat">
+            <a:ln w="8623" cap="flat">
               <a:solidFill>
                 <a:srgbClr val="EBEBEB">
                   <a:alpha val="100000"/>
@@ -2529,15 +2529,15 @@
           </p:nvSpPr>
           <p:spPr>
             <a:xfrm>
-              <a:off x="5160528" y="2073503"/>
-              <a:ext cx="0" cy="3649639"/>
+              <a:off x="5193449" y="2209169"/>
+              <a:ext cx="0" cy="3404141"/>
             </a:xfrm>
             <a:custGeom>
               <a:avLst/>
               <a:pathLst>
-                <a:path w="0" h="3649639">
+                <a:path w="0" h="3404141">
                   <a:moveTo>
-                    <a:pt x="0" y="3649639"/>
+                    <a:pt x="0" y="3404141"/>
                   </a:moveTo>
                   <a:lnTo>
                     <a:pt x="0" y="0"/>
@@ -2548,7 +2548,7 @@
                 </a:path>
               </a:pathLst>
             </a:custGeom>
-            <a:ln w="6775" cap="flat">
+            <a:ln w="8623" cap="flat">
               <a:solidFill>
                 <a:srgbClr val="EBEBEB">
                   <a:alpha val="100000"/>
@@ -2572,15 +2572,15 @@
           </p:nvSpPr>
           <p:spPr>
             <a:xfrm>
-              <a:off x="6933186" y="2073503"/>
-              <a:ext cx="0" cy="3649639"/>
+              <a:off x="6939491" y="2209169"/>
+              <a:ext cx="0" cy="3404141"/>
             </a:xfrm>
             <a:custGeom>
               <a:avLst/>
               <a:pathLst>
-                <a:path w="0" h="3649639">
+                <a:path w="0" h="3404141">
                   <a:moveTo>
-                    <a:pt x="0" y="3649639"/>
+                    <a:pt x="0" y="3404141"/>
                   </a:moveTo>
                   <a:lnTo>
                     <a:pt x="0" y="0"/>
@@ -2591,7 +2591,7 @@
                 </a:path>
               </a:pathLst>
             </a:custGeom>
-            <a:ln w="6775" cap="flat">
+            <a:ln w="8623" cap="flat">
               <a:solidFill>
                 <a:srgbClr val="EBEBEB">
                   <a:alpha val="100000"/>
@@ -2615,26 +2615,26 @@
           </p:nvSpPr>
           <p:spPr>
             <a:xfrm>
-              <a:off x="817517" y="5557249"/>
-              <a:ext cx="7799693" cy="0"/>
+              <a:off x="915645" y="5458577"/>
+              <a:ext cx="7682587" cy="0"/>
             </a:xfrm>
             <a:custGeom>
               <a:avLst/>
               <a:pathLst>
-                <a:path w="7799693" h="0">
+                <a:path w="7682587" h="0">
                   <a:moveTo>
                     <a:pt x="0" y="0"/>
                   </a:moveTo>
                   <a:lnTo>
-                    <a:pt x="7799693" y="0"/>
-                  </a:lnTo>
-                  <a:lnTo>
-                    <a:pt x="7799693" y="0"/>
+                    <a:pt x="7682587" y="0"/>
+                  </a:lnTo>
+                  <a:lnTo>
+                    <a:pt x="7682587" y="0"/>
                   </a:lnTo>
                 </a:path>
               </a:pathLst>
             </a:custGeom>
-            <a:ln w="13550" cap="flat">
+            <a:ln w="17246" cap="flat">
               <a:solidFill>
                 <a:srgbClr val="EBEBEB">
                   <a:alpha val="100000"/>
@@ -2658,26 +2658,26 @@
           </p:nvSpPr>
           <p:spPr>
             <a:xfrm>
-              <a:off x="817517" y="4727786"/>
-              <a:ext cx="7799693" cy="0"/>
+              <a:off x="915645" y="4684908"/>
+              <a:ext cx="7682587" cy="0"/>
             </a:xfrm>
             <a:custGeom>
               <a:avLst/>
               <a:pathLst>
-                <a:path w="7799693" h="0">
+                <a:path w="7682587" h="0">
                   <a:moveTo>
                     <a:pt x="0" y="0"/>
                   </a:moveTo>
                   <a:lnTo>
-                    <a:pt x="7799693" y="0"/>
-                  </a:lnTo>
-                  <a:lnTo>
-                    <a:pt x="7799693" y="0"/>
+                    <a:pt x="7682587" y="0"/>
+                  </a:lnTo>
+                  <a:lnTo>
+                    <a:pt x="7682587" y="0"/>
                   </a:lnTo>
                 </a:path>
               </a:pathLst>
             </a:custGeom>
-            <a:ln w="13550" cap="flat">
+            <a:ln w="17246" cap="flat">
               <a:solidFill>
                 <a:srgbClr val="EBEBEB">
                   <a:alpha val="100000"/>
@@ -2701,26 +2701,26 @@
           </p:nvSpPr>
           <p:spPr>
             <a:xfrm>
-              <a:off x="817517" y="3898322"/>
-              <a:ext cx="7799693" cy="0"/>
+              <a:off x="915645" y="3911240"/>
+              <a:ext cx="7682587" cy="0"/>
             </a:xfrm>
             <a:custGeom>
               <a:avLst/>
               <a:pathLst>
-                <a:path w="7799693" h="0">
+                <a:path w="7682587" h="0">
                   <a:moveTo>
                     <a:pt x="0" y="0"/>
                   </a:moveTo>
                   <a:lnTo>
-                    <a:pt x="7799693" y="0"/>
-                  </a:lnTo>
-                  <a:lnTo>
-                    <a:pt x="7799693" y="0"/>
+                    <a:pt x="7682587" y="0"/>
+                  </a:lnTo>
+                  <a:lnTo>
+                    <a:pt x="7682587" y="0"/>
                   </a:lnTo>
                 </a:path>
               </a:pathLst>
             </a:custGeom>
-            <a:ln w="13550" cap="flat">
+            <a:ln w="17246" cap="flat">
               <a:solidFill>
                 <a:srgbClr val="EBEBEB">
                   <a:alpha val="100000"/>
@@ -2744,26 +2744,26 @@
           </p:nvSpPr>
           <p:spPr>
             <a:xfrm>
-              <a:off x="817517" y="3068859"/>
-              <a:ext cx="7799693" cy="0"/>
+              <a:off x="915645" y="3137571"/>
+              <a:ext cx="7682587" cy="0"/>
             </a:xfrm>
             <a:custGeom>
               <a:avLst/>
               <a:pathLst>
-                <a:path w="7799693" h="0">
+                <a:path w="7682587" h="0">
                   <a:moveTo>
                     <a:pt x="0" y="0"/>
                   </a:moveTo>
                   <a:lnTo>
-                    <a:pt x="7799693" y="0"/>
-                  </a:lnTo>
-                  <a:lnTo>
-                    <a:pt x="7799693" y="0"/>
+                    <a:pt x="7682587" y="0"/>
+                  </a:lnTo>
+                  <a:lnTo>
+                    <a:pt x="7682587" y="0"/>
                   </a:lnTo>
                 </a:path>
               </a:pathLst>
             </a:custGeom>
-            <a:ln w="13550" cap="flat">
+            <a:ln w="17246" cap="flat">
               <a:solidFill>
                 <a:srgbClr val="EBEBEB">
                   <a:alpha val="100000"/>
@@ -2787,26 +2787,26 @@
           </p:nvSpPr>
           <p:spPr>
             <a:xfrm>
-              <a:off x="817517" y="2239395"/>
-              <a:ext cx="7799693" cy="0"/>
+              <a:off x="915645" y="2363903"/>
+              <a:ext cx="7682587" cy="0"/>
             </a:xfrm>
             <a:custGeom>
               <a:avLst/>
               <a:pathLst>
-                <a:path w="7799693" h="0">
+                <a:path w="7682587" h="0">
                   <a:moveTo>
                     <a:pt x="0" y="0"/>
                   </a:moveTo>
                   <a:lnTo>
-                    <a:pt x="7799693" y="0"/>
-                  </a:lnTo>
-                  <a:lnTo>
-                    <a:pt x="7799693" y="0"/>
+                    <a:pt x="7682587" y="0"/>
+                  </a:lnTo>
+                  <a:lnTo>
+                    <a:pt x="7682587" y="0"/>
                   </a:lnTo>
                 </a:path>
               </a:pathLst>
             </a:custGeom>
-            <a:ln w="13550" cap="flat">
+            <a:ln w="17246" cap="flat">
               <a:solidFill>
                 <a:srgbClr val="EBEBEB">
                   <a:alpha val="100000"/>
@@ -2830,15 +2830,15 @@
           </p:nvSpPr>
           <p:spPr>
             <a:xfrm>
-              <a:off x="2501542" y="2073503"/>
-              <a:ext cx="0" cy="3649639"/>
+              <a:off x="2574385" y="2209169"/>
+              <a:ext cx="0" cy="3404141"/>
             </a:xfrm>
             <a:custGeom>
               <a:avLst/>
               <a:pathLst>
-                <a:path w="0" h="3649639">
+                <a:path w="0" h="3404141">
                   <a:moveTo>
-                    <a:pt x="0" y="3649639"/>
+                    <a:pt x="0" y="3404141"/>
                   </a:moveTo>
                   <a:lnTo>
                     <a:pt x="0" y="0"/>
@@ -2849,7 +2849,7 @@
                 </a:path>
               </a:pathLst>
             </a:custGeom>
-            <a:ln w="13550" cap="flat">
+            <a:ln w="17246" cap="flat">
               <a:solidFill>
                 <a:srgbClr val="EBEBEB">
                   <a:alpha val="100000"/>
@@ -2873,15 +2873,15 @@
           </p:nvSpPr>
           <p:spPr>
             <a:xfrm>
-              <a:off x="4274200" y="2073503"/>
-              <a:ext cx="0" cy="3649639"/>
+              <a:off x="4320427" y="2209169"/>
+              <a:ext cx="0" cy="3404141"/>
             </a:xfrm>
             <a:custGeom>
               <a:avLst/>
               <a:pathLst>
-                <a:path w="0" h="3649639">
+                <a:path w="0" h="3404141">
                   <a:moveTo>
-                    <a:pt x="0" y="3649639"/>
+                    <a:pt x="0" y="3404141"/>
                   </a:moveTo>
                   <a:lnTo>
                     <a:pt x="0" y="0"/>
@@ -2892,7 +2892,7 @@
                 </a:path>
               </a:pathLst>
             </a:custGeom>
-            <a:ln w="13550" cap="flat">
+            <a:ln w="17246" cap="flat">
               <a:solidFill>
                 <a:srgbClr val="EBEBEB">
                   <a:alpha val="100000"/>
@@ -2916,15 +2916,15 @@
           </p:nvSpPr>
           <p:spPr>
             <a:xfrm>
-              <a:off x="6046857" y="2073503"/>
-              <a:ext cx="0" cy="3649639"/>
+              <a:off x="6066470" y="2209169"/>
+              <a:ext cx="0" cy="3404141"/>
             </a:xfrm>
             <a:custGeom>
               <a:avLst/>
               <a:pathLst>
-                <a:path w="0" h="3649639">
+                <a:path w="0" h="3404141">
                   <a:moveTo>
-                    <a:pt x="0" y="3649639"/>
+                    <a:pt x="0" y="3404141"/>
                   </a:moveTo>
                   <a:lnTo>
                     <a:pt x="0" y="0"/>
@@ -2935,7 +2935,7 @@
                 </a:path>
               </a:pathLst>
             </a:custGeom>
-            <a:ln w="13550" cap="flat">
+            <a:ln w="17246" cap="flat">
               <a:solidFill>
                 <a:srgbClr val="EBEBEB">
                   <a:alpha val="100000"/>
@@ -2959,15 +2959,15 @@
           </p:nvSpPr>
           <p:spPr>
             <a:xfrm>
-              <a:off x="7819515" y="2073503"/>
-              <a:ext cx="0" cy="3649639"/>
+              <a:off x="7812512" y="2209169"/>
+              <a:ext cx="0" cy="3404141"/>
             </a:xfrm>
             <a:custGeom>
               <a:avLst/>
               <a:pathLst>
-                <a:path w="0" h="3649639">
+                <a:path w="0" h="3404141">
                   <a:moveTo>
-                    <a:pt x="0" y="3649639"/>
+                    <a:pt x="0" y="3404141"/>
                   </a:moveTo>
                   <a:lnTo>
                     <a:pt x="0" y="0"/>
@@ -2978,7 +2978,7 @@
                 </a:path>
               </a:pathLst>
             </a:custGeom>
-            <a:ln w="13550" cap="flat">
+            <a:ln w="17246" cap="flat">
               <a:solidFill>
                 <a:srgbClr val="EBEBEB">
                   <a:alpha val="100000"/>
@@ -3002,561 +3002,561 @@
           </p:nvSpPr>
           <p:spPr>
             <a:xfrm>
-              <a:off x="817517" y="2073503"/>
-              <a:ext cx="7370972" cy="3385069"/>
+              <a:off x="915645" y="2209169"/>
+              <a:ext cx="7260303" cy="3157368"/>
             </a:xfrm>
             <a:custGeom>
               <a:avLst/>
               <a:pathLst>
-                <a:path w="7370972" h="3385069">
+                <a:path w="7260303" h="3157368">
                   <a:moveTo>
-                    <a:pt x="700138" y="0"/>
+                    <a:pt x="689626" y="0"/>
                   </a:moveTo>
                   <a:lnTo>
-                    <a:pt x="772078" y="131550"/>
-                  </a:lnTo>
-                  <a:lnTo>
-                    <a:pt x="849712" y="267744"/>
-                  </a:lnTo>
-                  <a:lnTo>
-                    <a:pt x="927346" y="398405"/>
-                  </a:lnTo>
-                  <a:lnTo>
-                    <a:pt x="1004981" y="523757"/>
-                  </a:lnTo>
-                  <a:lnTo>
-                    <a:pt x="1082615" y="644016"/>
-                  </a:lnTo>
-                  <a:lnTo>
-                    <a:pt x="1160249" y="759389"/>
-                  </a:lnTo>
-                  <a:lnTo>
-                    <a:pt x="1237883" y="870075"/>
-                  </a:lnTo>
-                  <a:lnTo>
-                    <a:pt x="1315517" y="976264"/>
-                  </a:lnTo>
-                  <a:lnTo>
-                    <a:pt x="1393151" y="1078138"/>
-                  </a:lnTo>
-                  <a:lnTo>
-                    <a:pt x="1470785" y="1175874"/>
-                  </a:lnTo>
-                  <a:lnTo>
-                    <a:pt x="1548419" y="1269639"/>
-                  </a:lnTo>
-                  <a:lnTo>
-                    <a:pt x="1626053" y="1359594"/>
-                  </a:lnTo>
-                  <a:lnTo>
-                    <a:pt x="1703687" y="1445895"/>
-                  </a:lnTo>
-                  <a:lnTo>
-                    <a:pt x="1781321" y="1528689"/>
-                  </a:lnTo>
-                  <a:lnTo>
-                    <a:pt x="1858955" y="1608120"/>
-                  </a:lnTo>
-                  <a:lnTo>
-                    <a:pt x="1936589" y="1684323"/>
-                  </a:lnTo>
-                  <a:lnTo>
-                    <a:pt x="2014223" y="1757430"/>
-                  </a:lnTo>
-                  <a:lnTo>
-                    <a:pt x="2091857" y="1827568"/>
-                  </a:lnTo>
-                  <a:lnTo>
-                    <a:pt x="2169491" y="1894855"/>
-                  </a:lnTo>
-                  <a:lnTo>
-                    <a:pt x="2247125" y="1959409"/>
-                  </a:lnTo>
-                  <a:lnTo>
-                    <a:pt x="2324759" y="2021340"/>
-                  </a:lnTo>
-                  <a:lnTo>
-                    <a:pt x="2402393" y="2080755"/>
-                  </a:lnTo>
-                  <a:lnTo>
-                    <a:pt x="2480027" y="2137756"/>
-                  </a:lnTo>
-                  <a:lnTo>
-                    <a:pt x="2557661" y="2192441"/>
-                  </a:lnTo>
-                  <a:lnTo>
-                    <a:pt x="2635295" y="2244905"/>
-                  </a:lnTo>
-                  <a:lnTo>
-                    <a:pt x="2712930" y="2295237"/>
-                  </a:lnTo>
-                  <a:lnTo>
-                    <a:pt x="2790564" y="2343524"/>
-                  </a:lnTo>
-                  <a:lnTo>
-                    <a:pt x="2868198" y="2389849"/>
-                  </a:lnTo>
-                  <a:lnTo>
-                    <a:pt x="2945832" y="2434292"/>
-                  </a:lnTo>
-                  <a:lnTo>
-                    <a:pt x="3023466" y="2476930"/>
-                  </a:lnTo>
-                  <a:lnTo>
-                    <a:pt x="3101100" y="2517835"/>
-                  </a:lnTo>
-                  <a:lnTo>
-                    <a:pt x="3178734" y="2557078"/>
-                  </a:lnTo>
-                  <a:lnTo>
-                    <a:pt x="3256368" y="2594727"/>
-                  </a:lnTo>
-                  <a:lnTo>
-                    <a:pt x="3334002" y="2630846"/>
-                  </a:lnTo>
-                  <a:lnTo>
-                    <a:pt x="3411636" y="2648523"/>
-                  </a:lnTo>
-                  <a:lnTo>
-                    <a:pt x="3489270" y="2630729"/>
-                  </a:lnTo>
-                  <a:lnTo>
-                    <a:pt x="3566904" y="2612554"/>
-                  </a:lnTo>
-                  <a:lnTo>
-                    <a:pt x="3644538" y="2593993"/>
-                  </a:lnTo>
-                  <a:lnTo>
-                    <a:pt x="3722172" y="2575036"/>
-                  </a:lnTo>
-                  <a:lnTo>
-                    <a:pt x="3799806" y="2555676"/>
-                  </a:lnTo>
-                  <a:lnTo>
-                    <a:pt x="3877440" y="2535903"/>
-                  </a:lnTo>
-                  <a:lnTo>
-                    <a:pt x="3955074" y="2515708"/>
-                  </a:lnTo>
-                  <a:lnTo>
-                    <a:pt x="4032708" y="2495084"/>
-                  </a:lnTo>
-                  <a:lnTo>
-                    <a:pt x="4110342" y="2474020"/>
-                  </a:lnTo>
-                  <a:lnTo>
-                    <a:pt x="4187976" y="2452507"/>
-                  </a:lnTo>
-                  <a:lnTo>
-                    <a:pt x="4265610" y="2430536"/>
-                  </a:lnTo>
-                  <a:lnTo>
-                    <a:pt x="4343244" y="2408096"/>
-                  </a:lnTo>
-                  <a:lnTo>
-                    <a:pt x="4420879" y="2385179"/>
-                  </a:lnTo>
-                  <a:lnTo>
-                    <a:pt x="4498513" y="2361773"/>
-                  </a:lnTo>
-                  <a:lnTo>
-                    <a:pt x="4576147" y="2337869"/>
-                  </a:lnTo>
-                  <a:lnTo>
-                    <a:pt x="4653781" y="2313455"/>
-                  </a:lnTo>
-                  <a:lnTo>
-                    <a:pt x="4731415" y="2288522"/>
-                  </a:lnTo>
-                  <a:lnTo>
-                    <a:pt x="4809049" y="2263057"/>
-                  </a:lnTo>
-                  <a:lnTo>
-                    <a:pt x="4886683" y="2237049"/>
-                  </a:lnTo>
-                  <a:lnTo>
-                    <a:pt x="4964317" y="2210487"/>
-                  </a:lnTo>
-                  <a:lnTo>
-                    <a:pt x="5041951" y="2183360"/>
-                  </a:lnTo>
-                  <a:lnTo>
-                    <a:pt x="5119585" y="2155654"/>
-                  </a:lnTo>
-                  <a:lnTo>
-                    <a:pt x="5197219" y="2127359"/>
-                  </a:lnTo>
-                  <a:lnTo>
-                    <a:pt x="5274853" y="2098460"/>
-                  </a:lnTo>
-                  <a:lnTo>
-                    <a:pt x="5352487" y="2068946"/>
-                  </a:lnTo>
-                  <a:lnTo>
-                    <a:pt x="5430121" y="2038802"/>
-                  </a:lnTo>
-                  <a:lnTo>
-                    <a:pt x="5507755" y="2008017"/>
-                  </a:lnTo>
-                  <a:lnTo>
-                    <a:pt x="5585389" y="1976576"/>
-                  </a:lnTo>
-                  <a:lnTo>
-                    <a:pt x="5663023" y="1944464"/>
-                  </a:lnTo>
-                  <a:lnTo>
-                    <a:pt x="5740657" y="1911669"/>
-                  </a:lnTo>
-                  <a:lnTo>
-                    <a:pt x="5818291" y="1878175"/>
-                  </a:lnTo>
-                  <a:lnTo>
-                    <a:pt x="5895925" y="1843967"/>
-                  </a:lnTo>
-                  <a:lnTo>
-                    <a:pt x="5973559" y="1809031"/>
-                  </a:lnTo>
-                  <a:lnTo>
-                    <a:pt x="6051193" y="1773350"/>
-                  </a:lnTo>
-                  <a:lnTo>
-                    <a:pt x="6128827" y="1736909"/>
-                  </a:lnTo>
-                  <a:lnTo>
-                    <a:pt x="6206462" y="1699692"/>
-                  </a:lnTo>
-                  <a:lnTo>
-                    <a:pt x="6284096" y="1661681"/>
-                  </a:lnTo>
-                  <a:lnTo>
-                    <a:pt x="6361730" y="1622861"/>
-                  </a:lnTo>
-                  <a:lnTo>
-                    <a:pt x="6439364" y="1583214"/>
-                  </a:lnTo>
-                  <a:lnTo>
-                    <a:pt x="6516998" y="1542722"/>
-                  </a:lnTo>
-                  <a:lnTo>
-                    <a:pt x="6594632" y="1501367"/>
-                  </a:lnTo>
-                  <a:lnTo>
-                    <a:pt x="6672266" y="1459131"/>
-                  </a:lnTo>
-                  <a:lnTo>
-                    <a:pt x="6749900" y="1415995"/>
-                  </a:lnTo>
-                  <a:lnTo>
-                    <a:pt x="6827534" y="1371941"/>
-                  </a:lnTo>
-                  <a:lnTo>
-                    <a:pt x="6905168" y="1326947"/>
-                  </a:lnTo>
-                  <a:lnTo>
-                    <a:pt x="6982802" y="1280996"/>
-                  </a:lnTo>
-                  <a:lnTo>
-                    <a:pt x="7060436" y="1234065"/>
-                  </a:lnTo>
-                  <a:lnTo>
-                    <a:pt x="7138070" y="1186134"/>
-                  </a:lnTo>
-                  <a:lnTo>
-                    <a:pt x="7215704" y="1137182"/>
-                  </a:lnTo>
-                  <a:lnTo>
-                    <a:pt x="7293338" y="1087187"/>
-                  </a:lnTo>
-                  <a:lnTo>
-                    <a:pt x="7370972" y="1036127"/>
-                  </a:lnTo>
-                  <a:lnTo>
-                    <a:pt x="7370972" y="3385069"/>
-                  </a:lnTo>
-                  <a:lnTo>
-                    <a:pt x="7293338" y="3380890"/>
-                  </a:lnTo>
-                  <a:lnTo>
-                    <a:pt x="7215704" y="3376534"/>
-                  </a:lnTo>
-                  <a:lnTo>
-                    <a:pt x="7138070" y="3371994"/>
-                  </a:lnTo>
-                  <a:lnTo>
-                    <a:pt x="7060436" y="3367261"/>
-                  </a:lnTo>
-                  <a:lnTo>
-                    <a:pt x="6982802" y="3362328"/>
-                  </a:lnTo>
-                  <a:lnTo>
-                    <a:pt x="6905168" y="3357186"/>
-                  </a:lnTo>
-                  <a:lnTo>
-                    <a:pt x="6827534" y="3351827"/>
-                  </a:lnTo>
-                  <a:lnTo>
-                    <a:pt x="6749900" y="3346240"/>
-                  </a:lnTo>
-                  <a:lnTo>
-                    <a:pt x="6672266" y="3340417"/>
-                  </a:lnTo>
-                  <a:lnTo>
-                    <a:pt x="6594632" y="3334347"/>
-                  </a:lnTo>
-                  <a:lnTo>
-                    <a:pt x="6516998" y="3328020"/>
-                  </a:lnTo>
-                  <a:lnTo>
-                    <a:pt x="6439364" y="3321425"/>
-                  </a:lnTo>
-                  <a:lnTo>
-                    <a:pt x="6361730" y="3314551"/>
-                  </a:lnTo>
-                  <a:lnTo>
-                    <a:pt x="6284096" y="3307386"/>
-                  </a:lnTo>
-                  <a:lnTo>
-                    <a:pt x="6206462" y="3299917"/>
-                  </a:lnTo>
-                  <a:lnTo>
-                    <a:pt x="6128827" y="3292132"/>
-                  </a:lnTo>
-                  <a:lnTo>
-                    <a:pt x="6051193" y="3284018"/>
-                  </a:lnTo>
-                  <a:lnTo>
-                    <a:pt x="5973559" y="3275559"/>
-                  </a:lnTo>
-                  <a:lnTo>
-                    <a:pt x="5895925" y="3266743"/>
-                  </a:lnTo>
-                  <a:lnTo>
-                    <a:pt x="5818291" y="3257553"/>
-                  </a:lnTo>
-                  <a:lnTo>
-                    <a:pt x="5740657" y="3247974"/>
-                  </a:lnTo>
-                  <a:lnTo>
-                    <a:pt x="5663023" y="3237989"/>
-                  </a:lnTo>
-                  <a:lnTo>
-                    <a:pt x="5585389" y="3227582"/>
-                  </a:lnTo>
-                  <a:lnTo>
-                    <a:pt x="5507755" y="3216734"/>
-                  </a:lnTo>
-                  <a:lnTo>
-                    <a:pt x="5430121" y="3205426"/>
-                  </a:lnTo>
-                  <a:lnTo>
-                    <a:pt x="5352487" y="3193639"/>
-                  </a:lnTo>
-                  <a:lnTo>
-                    <a:pt x="5274853" y="3181354"/>
-                  </a:lnTo>
-                  <a:lnTo>
-                    <a:pt x="5197219" y="3168548"/>
-                  </a:lnTo>
-                  <a:lnTo>
-                    <a:pt x="5119585" y="3155199"/>
-                  </a:lnTo>
-                  <a:lnTo>
-                    <a:pt x="5041951" y="3141286"/>
-                  </a:lnTo>
-                  <a:lnTo>
-                    <a:pt x="4964317" y="3126783"/>
-                  </a:lnTo>
-                  <a:lnTo>
-                    <a:pt x="4886683" y="3111666"/>
-                  </a:lnTo>
-                  <a:lnTo>
-                    <a:pt x="4809049" y="3095909"/>
-                  </a:lnTo>
-                  <a:lnTo>
-                    <a:pt x="4731415" y="3079484"/>
-                  </a:lnTo>
-                  <a:lnTo>
-                    <a:pt x="4653781" y="3062364"/>
-                  </a:lnTo>
-                  <a:lnTo>
-                    <a:pt x="4576147" y="3044519"/>
-                  </a:lnTo>
-                  <a:lnTo>
-                    <a:pt x="4498513" y="3025919"/>
-                  </a:lnTo>
-                  <a:lnTo>
-                    <a:pt x="4420879" y="3006530"/>
-                  </a:lnTo>
-                  <a:lnTo>
-                    <a:pt x="4343244" y="2986321"/>
-                  </a:lnTo>
-                  <a:lnTo>
-                    <a:pt x="4265610" y="2965255"/>
-                  </a:lnTo>
-                  <a:lnTo>
-                    <a:pt x="4187976" y="2943298"/>
-                  </a:lnTo>
-                  <a:lnTo>
-                    <a:pt x="4110342" y="2920411"/>
-                  </a:lnTo>
-                  <a:lnTo>
-                    <a:pt x="4032708" y="2896554"/>
-                  </a:lnTo>
-                  <a:lnTo>
-                    <a:pt x="3955074" y="2871687"/>
-                  </a:lnTo>
-                  <a:lnTo>
-                    <a:pt x="3877440" y="2845767"/>
-                  </a:lnTo>
-                  <a:lnTo>
-                    <a:pt x="3799806" y="2818749"/>
-                  </a:lnTo>
-                  <a:lnTo>
-                    <a:pt x="3722172" y="2790588"/>
-                  </a:lnTo>
-                  <a:lnTo>
-                    <a:pt x="3644538" y="2761233"/>
-                  </a:lnTo>
-                  <a:lnTo>
-                    <a:pt x="3566904" y="2730636"/>
-                  </a:lnTo>
-                  <a:lnTo>
-                    <a:pt x="3489270" y="2698742"/>
-                  </a:lnTo>
-                  <a:lnTo>
-                    <a:pt x="3411636" y="2665498"/>
-                  </a:lnTo>
-                  <a:lnTo>
-                    <a:pt x="3334002" y="2665947"/>
-                  </a:lnTo>
-                  <a:lnTo>
-                    <a:pt x="3256368" y="2683007"/>
-                  </a:lnTo>
-                  <a:lnTo>
-                    <a:pt x="3178734" y="2699712"/>
-                  </a:lnTo>
-                  <a:lnTo>
-                    <a:pt x="3101100" y="2716068"/>
-                  </a:lnTo>
-                  <a:lnTo>
-                    <a:pt x="3023466" y="2732082"/>
-                  </a:lnTo>
-                  <a:lnTo>
-                    <a:pt x="2945832" y="2747763"/>
-                  </a:lnTo>
-                  <a:lnTo>
-                    <a:pt x="2868198" y="2763116"/>
-                  </a:lnTo>
-                  <a:lnTo>
-                    <a:pt x="2790564" y="2778150"/>
-                  </a:lnTo>
-                  <a:lnTo>
-                    <a:pt x="2712930" y="2792869"/>
-                  </a:lnTo>
-                  <a:lnTo>
-                    <a:pt x="2635295" y="2807282"/>
-                  </a:lnTo>
-                  <a:lnTo>
-                    <a:pt x="2557661" y="2821393"/>
-                  </a:lnTo>
-                  <a:lnTo>
-                    <a:pt x="2480027" y="2835211"/>
-                  </a:lnTo>
-                  <a:lnTo>
-                    <a:pt x="2402393" y="2848740"/>
-                  </a:lnTo>
-                  <a:lnTo>
-                    <a:pt x="2324759" y="2861987"/>
-                  </a:lnTo>
-                  <a:lnTo>
-                    <a:pt x="2247125" y="2874958"/>
-                  </a:lnTo>
-                  <a:lnTo>
-                    <a:pt x="2169491" y="2887658"/>
-                  </a:lnTo>
-                  <a:lnTo>
-                    <a:pt x="2091857" y="2900093"/>
-                  </a:lnTo>
-                  <a:lnTo>
-                    <a:pt x="2014223" y="2912268"/>
-                  </a:lnTo>
-                  <a:lnTo>
-                    <a:pt x="1936589" y="2924190"/>
-                  </a:lnTo>
-                  <a:lnTo>
-                    <a:pt x="1858955" y="2935863"/>
-                  </a:lnTo>
-                  <a:lnTo>
-                    <a:pt x="1781321" y="2947293"/>
-                  </a:lnTo>
-                  <a:lnTo>
-                    <a:pt x="1703687" y="2958484"/>
-                  </a:lnTo>
-                  <a:lnTo>
-                    <a:pt x="1626053" y="2969441"/>
-                  </a:lnTo>
-                  <a:lnTo>
-                    <a:pt x="1548419" y="2980170"/>
-                  </a:lnTo>
-                  <a:lnTo>
-                    <a:pt x="1470785" y="2990675"/>
-                  </a:lnTo>
-                  <a:lnTo>
-                    <a:pt x="1393151" y="3000961"/>
-                  </a:lnTo>
-                  <a:lnTo>
-                    <a:pt x="1315517" y="3011033"/>
-                  </a:lnTo>
-                  <a:lnTo>
-                    <a:pt x="1237883" y="3020894"/>
-                  </a:lnTo>
-                  <a:lnTo>
-                    <a:pt x="1160249" y="3030550"/>
-                  </a:lnTo>
-                  <a:lnTo>
-                    <a:pt x="1082615" y="3040004"/>
-                  </a:lnTo>
-                  <a:lnTo>
-                    <a:pt x="1004981" y="3049261"/>
-                  </a:lnTo>
-                  <a:lnTo>
-                    <a:pt x="927346" y="3058325"/>
-                  </a:lnTo>
-                  <a:lnTo>
-                    <a:pt x="849712" y="3067200"/>
-                  </a:lnTo>
-                  <a:lnTo>
-                    <a:pt x="772078" y="3075889"/>
-                  </a:lnTo>
-                  <a:lnTo>
-                    <a:pt x="694444" y="3084398"/>
-                  </a:lnTo>
-                  <a:lnTo>
-                    <a:pt x="616810" y="3092729"/>
-                  </a:lnTo>
-                  <a:lnTo>
-                    <a:pt x="539176" y="3100886"/>
-                  </a:lnTo>
-                  <a:lnTo>
-                    <a:pt x="461542" y="3108873"/>
-                  </a:lnTo>
-                  <a:lnTo>
-                    <a:pt x="383908" y="3116693"/>
-                  </a:lnTo>
-                  <a:lnTo>
-                    <a:pt x="306274" y="3124350"/>
-                  </a:lnTo>
-                  <a:lnTo>
-                    <a:pt x="228640" y="3131847"/>
-                  </a:lnTo>
-                  <a:lnTo>
-                    <a:pt x="151006" y="3139188"/>
-                  </a:lnTo>
-                  <a:lnTo>
-                    <a:pt x="73372" y="3146376"/>
-                  </a:lnTo>
-                  <a:lnTo>
-                    <a:pt x="0" y="3153028"/>
+                    <a:pt x="760486" y="122701"/>
+                  </a:lnTo>
+                  <a:lnTo>
+                    <a:pt x="836955" y="249734"/>
+                  </a:lnTo>
+                  <a:lnTo>
+                    <a:pt x="913423" y="371605"/>
+                  </a:lnTo>
+                  <a:lnTo>
+                    <a:pt x="989892" y="488525"/>
+                  </a:lnTo>
+                  <a:lnTo>
+                    <a:pt x="1066360" y="600695"/>
+                  </a:lnTo>
+                  <a:lnTo>
+                    <a:pt x="1142828" y="708308"/>
+                  </a:lnTo>
+                  <a:lnTo>
+                    <a:pt x="1219297" y="811548"/>
+                  </a:lnTo>
+                  <a:lnTo>
+                    <a:pt x="1295765" y="910594"/>
+                  </a:lnTo>
+                  <a:lnTo>
+                    <a:pt x="1372234" y="1005616"/>
+                  </a:lnTo>
+                  <a:lnTo>
+                    <a:pt x="1448702" y="1096777"/>
+                  </a:lnTo>
+                  <a:lnTo>
+                    <a:pt x="1525171" y="1184235"/>
+                  </a:lnTo>
+                  <a:lnTo>
+                    <a:pt x="1601639" y="1268139"/>
+                  </a:lnTo>
+                  <a:lnTo>
+                    <a:pt x="1678107" y="1348635"/>
+                  </a:lnTo>
+                  <a:lnTo>
+                    <a:pt x="1754576" y="1425860"/>
+                  </a:lnTo>
+                  <a:lnTo>
+                    <a:pt x="1831044" y="1499947"/>
+                  </a:lnTo>
+                  <a:lnTo>
+                    <a:pt x="1907513" y="1571025"/>
+                  </a:lnTo>
+                  <a:lnTo>
+                    <a:pt x="1983981" y="1639214"/>
+                  </a:lnTo>
+                  <a:lnTo>
+                    <a:pt x="2060450" y="1704634"/>
+                  </a:lnTo>
+                  <a:lnTo>
+                    <a:pt x="2136918" y="1767395"/>
+                  </a:lnTo>
+                  <a:lnTo>
+                    <a:pt x="2213386" y="1827607"/>
+                  </a:lnTo>
+                  <a:lnTo>
+                    <a:pt x="2289855" y="1885372"/>
+                  </a:lnTo>
+                  <a:lnTo>
+                    <a:pt x="2366323" y="1940790"/>
+                  </a:lnTo>
+                  <a:lnTo>
+                    <a:pt x="2442792" y="1993957"/>
+                  </a:lnTo>
+                  <a:lnTo>
+                    <a:pt x="2519260" y="2044964"/>
+                  </a:lnTo>
+                  <a:lnTo>
+                    <a:pt x="2595729" y="2093898"/>
+                  </a:lnTo>
+                  <a:lnTo>
+                    <a:pt x="2672197" y="2140845"/>
+                  </a:lnTo>
+                  <a:lnTo>
+                    <a:pt x="2748666" y="2185884"/>
+                  </a:lnTo>
+                  <a:lnTo>
+                    <a:pt x="2825134" y="2229093"/>
+                  </a:lnTo>
+                  <a:lnTo>
+                    <a:pt x="2901602" y="2270546"/>
+                  </a:lnTo>
+                  <a:lnTo>
+                    <a:pt x="2978071" y="2310316"/>
+                  </a:lnTo>
+                  <a:lnTo>
+                    <a:pt x="3054539" y="2348469"/>
+                  </a:lnTo>
+                  <a:lnTo>
+                    <a:pt x="3131008" y="2385073"/>
+                  </a:lnTo>
+                  <a:lnTo>
+                    <a:pt x="3207476" y="2420189"/>
+                  </a:lnTo>
+                  <a:lnTo>
+                    <a:pt x="3283945" y="2453879"/>
+                  </a:lnTo>
+                  <a:lnTo>
+                    <a:pt x="3360413" y="2470367"/>
+                  </a:lnTo>
+                  <a:lnTo>
+                    <a:pt x="3436881" y="2453769"/>
+                  </a:lnTo>
+                  <a:lnTo>
+                    <a:pt x="3513350" y="2436818"/>
+                  </a:lnTo>
+                  <a:lnTo>
+                    <a:pt x="3589818" y="2419505"/>
+                  </a:lnTo>
+                  <a:lnTo>
+                    <a:pt x="3666287" y="2401823"/>
+                  </a:lnTo>
+                  <a:lnTo>
+                    <a:pt x="3742755" y="2383765"/>
+                  </a:lnTo>
+                  <a:lnTo>
+                    <a:pt x="3819224" y="2365322"/>
+                  </a:lnTo>
+                  <a:lnTo>
+                    <a:pt x="3895692" y="2346486"/>
+                  </a:lnTo>
+                  <a:lnTo>
+                    <a:pt x="3972160" y="2327249"/>
+                  </a:lnTo>
+                  <a:lnTo>
+                    <a:pt x="4048629" y="2307601"/>
+                  </a:lnTo>
+                  <a:lnTo>
+                    <a:pt x="4125097" y="2287536"/>
+                  </a:lnTo>
+                  <a:lnTo>
+                    <a:pt x="4201566" y="2267042"/>
+                  </a:lnTo>
+                  <a:lnTo>
+                    <a:pt x="4278034" y="2246113"/>
+                  </a:lnTo>
+                  <a:lnTo>
+                    <a:pt x="4354503" y="2224737"/>
+                  </a:lnTo>
+                  <a:lnTo>
+                    <a:pt x="4430971" y="2202905"/>
+                  </a:lnTo>
+                  <a:lnTo>
+                    <a:pt x="4507439" y="2180609"/>
+                  </a:lnTo>
+                  <a:lnTo>
+                    <a:pt x="4583908" y="2157838"/>
+                  </a:lnTo>
+                  <a:lnTo>
+                    <a:pt x="4660376" y="2134581"/>
+                  </a:lnTo>
+                  <a:lnTo>
+                    <a:pt x="4736845" y="2110829"/>
+                  </a:lnTo>
+                  <a:lnTo>
+                    <a:pt x="4813313" y="2086571"/>
+                  </a:lnTo>
+                  <a:lnTo>
+                    <a:pt x="4889782" y="2061796"/>
+                  </a:lnTo>
+                  <a:lnTo>
+                    <a:pt x="4966250" y="2036493"/>
+                  </a:lnTo>
+                  <a:lnTo>
+                    <a:pt x="5042719" y="2010651"/>
+                  </a:lnTo>
+                  <a:lnTo>
+                    <a:pt x="5119187" y="1984259"/>
+                  </a:lnTo>
+                  <a:lnTo>
+                    <a:pt x="5195655" y="1957304"/>
+                  </a:lnTo>
+                  <a:lnTo>
+                    <a:pt x="5272124" y="1929775"/>
+                  </a:lnTo>
+                  <a:lnTo>
+                    <a:pt x="5348592" y="1901660"/>
+                  </a:lnTo>
+                  <a:lnTo>
+                    <a:pt x="5425061" y="1872945"/>
+                  </a:lnTo>
+                  <a:lnTo>
+                    <a:pt x="5501529" y="1843619"/>
+                  </a:lnTo>
+                  <a:lnTo>
+                    <a:pt x="5577998" y="1813667"/>
+                  </a:lnTo>
+                  <a:lnTo>
+                    <a:pt x="5654466" y="1783078"/>
+                  </a:lnTo>
+                  <a:lnTo>
+                    <a:pt x="5730934" y="1751837"/>
+                  </a:lnTo>
+                  <a:lnTo>
+                    <a:pt x="5807403" y="1719930"/>
+                  </a:lnTo>
+                  <a:lnTo>
+                    <a:pt x="5883871" y="1687344"/>
+                  </a:lnTo>
+                  <a:lnTo>
+                    <a:pt x="5960340" y="1654063"/>
+                  </a:lnTo>
+                  <a:lnTo>
+                    <a:pt x="6036808" y="1620073"/>
+                  </a:lnTo>
+                  <a:lnTo>
+                    <a:pt x="6113277" y="1585360"/>
+                  </a:lnTo>
+                  <a:lnTo>
+                    <a:pt x="6189745" y="1549906"/>
+                  </a:lnTo>
+                  <a:lnTo>
+                    <a:pt x="6266213" y="1513697"/>
+                  </a:lnTo>
+                  <a:lnTo>
+                    <a:pt x="6342682" y="1476717"/>
+                  </a:lnTo>
+                  <a:lnTo>
+                    <a:pt x="6419150" y="1438948"/>
+                  </a:lnTo>
+                  <a:lnTo>
+                    <a:pt x="6495619" y="1400375"/>
+                  </a:lnTo>
+                  <a:lnTo>
+                    <a:pt x="6572087" y="1360981"/>
+                  </a:lnTo>
+                  <a:lnTo>
+                    <a:pt x="6648556" y="1320747"/>
+                  </a:lnTo>
+                  <a:lnTo>
+                    <a:pt x="6725024" y="1279655"/>
+                  </a:lnTo>
+                  <a:lnTo>
+                    <a:pt x="6801492" y="1237689"/>
+                  </a:lnTo>
+                  <a:lnTo>
+                    <a:pt x="6877961" y="1194828"/>
+                  </a:lnTo>
+                  <a:lnTo>
+                    <a:pt x="6954429" y="1151054"/>
+                  </a:lnTo>
+                  <a:lnTo>
+                    <a:pt x="7030898" y="1106347"/>
+                  </a:lnTo>
+                  <a:lnTo>
+                    <a:pt x="7107366" y="1060688"/>
+                  </a:lnTo>
+                  <a:lnTo>
+                    <a:pt x="7183835" y="1014056"/>
+                  </a:lnTo>
+                  <a:lnTo>
+                    <a:pt x="7260303" y="966430"/>
+                  </a:lnTo>
+                  <a:lnTo>
+                    <a:pt x="7260303" y="3157368"/>
+                  </a:lnTo>
+                  <a:lnTo>
+                    <a:pt x="7183835" y="3153470"/>
+                  </a:lnTo>
+                  <a:lnTo>
+                    <a:pt x="7107366" y="3149407"/>
+                  </a:lnTo>
+                  <a:lnTo>
+                    <a:pt x="7030898" y="3145172"/>
+                  </a:lnTo>
+                  <a:lnTo>
+                    <a:pt x="6954429" y="3140758"/>
+                  </a:lnTo>
+                  <a:lnTo>
+                    <a:pt x="6877961" y="3136157"/>
+                  </a:lnTo>
+                  <a:lnTo>
+                    <a:pt x="6801492" y="3131361"/>
+                  </a:lnTo>
+                  <a:lnTo>
+                    <a:pt x="6725024" y="3126362"/>
+                  </a:lnTo>
+                  <a:lnTo>
+                    <a:pt x="6648556" y="3121151"/>
+                  </a:lnTo>
+                  <a:lnTo>
+                    <a:pt x="6572087" y="3115719"/>
+                  </a:lnTo>
+                  <a:lnTo>
+                    <a:pt x="6495619" y="3110058"/>
+                  </a:lnTo>
+                  <a:lnTo>
+                    <a:pt x="6419150" y="3104156"/>
+                  </a:lnTo>
+                  <a:lnTo>
+                    <a:pt x="6342682" y="3098005"/>
+                  </a:lnTo>
+                  <a:lnTo>
+                    <a:pt x="6266213" y="3091593"/>
+                  </a:lnTo>
+                  <a:lnTo>
+                    <a:pt x="6189745" y="3084910"/>
+                  </a:lnTo>
+                  <a:lnTo>
+                    <a:pt x="6113277" y="3077944"/>
+                  </a:lnTo>
+                  <a:lnTo>
+                    <a:pt x="6036808" y="3070683"/>
+                  </a:lnTo>
+                  <a:lnTo>
+                    <a:pt x="5960340" y="3063114"/>
+                  </a:lnTo>
+                  <a:lnTo>
+                    <a:pt x="5883871" y="3055224"/>
+                  </a:lnTo>
+                  <a:lnTo>
+                    <a:pt x="5807403" y="3047001"/>
+                  </a:lnTo>
+                  <a:lnTo>
+                    <a:pt x="5730934" y="3038429"/>
+                  </a:lnTo>
+                  <a:lnTo>
+                    <a:pt x="5654466" y="3029495"/>
+                  </a:lnTo>
+                  <a:lnTo>
+                    <a:pt x="5577998" y="3020182"/>
+                  </a:lnTo>
+                  <a:lnTo>
+                    <a:pt x="5501529" y="3010474"/>
+                  </a:lnTo>
+                  <a:lnTo>
+                    <a:pt x="5425061" y="3000356"/>
+                  </a:lnTo>
+                  <a:lnTo>
+                    <a:pt x="5348592" y="2989809"/>
+                  </a:lnTo>
+                  <a:lnTo>
+                    <a:pt x="5272124" y="2978815"/>
+                  </a:lnTo>
+                  <a:lnTo>
+                    <a:pt x="5195655" y="2967356"/>
+                  </a:lnTo>
+                  <a:lnTo>
+                    <a:pt x="5119187" y="2955411"/>
+                  </a:lnTo>
+                  <a:lnTo>
+                    <a:pt x="5042719" y="2942961"/>
+                  </a:lnTo>
+                  <a:lnTo>
+                    <a:pt x="4966250" y="2929983"/>
+                  </a:lnTo>
+                  <a:lnTo>
+                    <a:pt x="4889782" y="2916456"/>
+                  </a:lnTo>
+                  <a:lnTo>
+                    <a:pt x="4813313" y="2902356"/>
+                  </a:lnTo>
+                  <a:lnTo>
+                    <a:pt x="4736845" y="2887658"/>
+                  </a:lnTo>
+                  <a:lnTo>
+                    <a:pt x="4660376" y="2872339"/>
+                  </a:lnTo>
+                  <a:lnTo>
+                    <a:pt x="4583908" y="2856370"/>
+                  </a:lnTo>
+                  <a:lnTo>
+                    <a:pt x="4507439" y="2839726"/>
+                  </a:lnTo>
+                  <a:lnTo>
+                    <a:pt x="4430971" y="2822376"/>
+                  </a:lnTo>
+                  <a:lnTo>
+                    <a:pt x="4354503" y="2804292"/>
+                  </a:lnTo>
+                  <a:lnTo>
+                    <a:pt x="4278034" y="2785442"/>
+                  </a:lnTo>
+                  <a:lnTo>
+                    <a:pt x="4201566" y="2765793"/>
+                  </a:lnTo>
+                  <a:lnTo>
+                    <a:pt x="4125097" y="2745313"/>
+                  </a:lnTo>
+                  <a:lnTo>
+                    <a:pt x="4048629" y="2723965"/>
+                  </a:lnTo>
+                  <a:lnTo>
+                    <a:pt x="3972160" y="2701713"/>
+                  </a:lnTo>
+                  <a:lnTo>
+                    <a:pt x="3895692" y="2678519"/>
+                  </a:lnTo>
+                  <a:lnTo>
+                    <a:pt x="3819224" y="2654343"/>
+                  </a:lnTo>
+                  <a:lnTo>
+                    <a:pt x="3742755" y="2629142"/>
+                  </a:lnTo>
+                  <a:lnTo>
+                    <a:pt x="3666287" y="2602875"/>
+                  </a:lnTo>
+                  <a:lnTo>
+                    <a:pt x="3589818" y="2575495"/>
+                  </a:lnTo>
+                  <a:lnTo>
+                    <a:pt x="3513350" y="2546956"/>
+                  </a:lnTo>
+                  <a:lnTo>
+                    <a:pt x="3436881" y="2517208"/>
+                  </a:lnTo>
+                  <a:lnTo>
+                    <a:pt x="3360413" y="2486200"/>
+                  </a:lnTo>
+                  <a:lnTo>
+                    <a:pt x="3283945" y="2486619"/>
+                  </a:lnTo>
+                  <a:lnTo>
+                    <a:pt x="3207476" y="2502531"/>
+                  </a:lnTo>
+                  <a:lnTo>
+                    <a:pt x="3131008" y="2518112"/>
+                  </a:lnTo>
+                  <a:lnTo>
+                    <a:pt x="3054539" y="2533368"/>
+                  </a:lnTo>
+                  <a:lnTo>
+                    <a:pt x="2978071" y="2548305"/>
+                  </a:lnTo>
+                  <a:lnTo>
+                    <a:pt x="2901602" y="2562931"/>
+                  </a:lnTo>
+                  <a:lnTo>
+                    <a:pt x="2825134" y="2577252"/>
+                  </a:lnTo>
+                  <a:lnTo>
+                    <a:pt x="2748666" y="2591274"/>
+                  </a:lnTo>
+                  <a:lnTo>
+                    <a:pt x="2672197" y="2605003"/>
+                  </a:lnTo>
+                  <a:lnTo>
+                    <a:pt x="2595729" y="2618446"/>
+                  </a:lnTo>
+                  <a:lnTo>
+                    <a:pt x="2519260" y="2631609"/>
+                  </a:lnTo>
+                  <a:lnTo>
+                    <a:pt x="2442792" y="2644497"/>
+                  </a:lnTo>
+                  <a:lnTo>
+                    <a:pt x="2366323" y="2657116"/>
+                  </a:lnTo>
+                  <a:lnTo>
+                    <a:pt x="2289855" y="2669472"/>
+                  </a:lnTo>
+                  <a:lnTo>
+                    <a:pt x="2213386" y="2681570"/>
+                  </a:lnTo>
+                  <a:lnTo>
+                    <a:pt x="2136918" y="2693415"/>
+                  </a:lnTo>
+                  <a:lnTo>
+                    <a:pt x="2060450" y="2705014"/>
+                  </a:lnTo>
+                  <a:lnTo>
+                    <a:pt x="1983981" y="2716371"/>
+                  </a:lnTo>
+                  <a:lnTo>
+                    <a:pt x="1907513" y="2727491"/>
+                  </a:lnTo>
+                  <a:lnTo>
+                    <a:pt x="1831044" y="2738378"/>
+                  </a:lnTo>
+                  <a:lnTo>
+                    <a:pt x="1754576" y="2749039"/>
+                  </a:lnTo>
+                  <a:lnTo>
+                    <a:pt x="1678107" y="2759477"/>
+                  </a:lnTo>
+                  <a:lnTo>
+                    <a:pt x="1601639" y="2769698"/>
+                  </a:lnTo>
+                  <a:lnTo>
+                    <a:pt x="1525171" y="2779705"/>
+                  </a:lnTo>
+                  <a:lnTo>
+                    <a:pt x="1448702" y="2789504"/>
+                  </a:lnTo>
+                  <a:lnTo>
+                    <a:pt x="1372234" y="2799098"/>
+                  </a:lnTo>
+                  <a:lnTo>
+                    <a:pt x="1295765" y="2808492"/>
+                  </a:lnTo>
+                  <a:lnTo>
+                    <a:pt x="1219297" y="2817690"/>
+                  </a:lnTo>
+                  <a:lnTo>
+                    <a:pt x="1142828" y="2826696"/>
+                  </a:lnTo>
+                  <a:lnTo>
+                    <a:pt x="1066360" y="2835514"/>
+                  </a:lnTo>
+                  <a:lnTo>
+                    <a:pt x="989892" y="2844148"/>
+                  </a:lnTo>
+                  <a:lnTo>
+                    <a:pt x="913423" y="2852603"/>
+                  </a:lnTo>
+                  <a:lnTo>
+                    <a:pt x="836955" y="2860880"/>
+                  </a:lnTo>
+                  <a:lnTo>
+                    <a:pt x="760486" y="2868986"/>
+                  </a:lnTo>
+                  <a:lnTo>
+                    <a:pt x="684018" y="2876922"/>
+                  </a:lnTo>
+                  <a:lnTo>
+                    <a:pt x="607549" y="2884692"/>
+                  </a:lnTo>
+                  <a:lnTo>
+                    <a:pt x="531081" y="2892300"/>
+                  </a:lnTo>
+                  <a:lnTo>
+                    <a:pt x="454613" y="2899750"/>
+                  </a:lnTo>
+                  <a:lnTo>
+                    <a:pt x="378144" y="2907044"/>
+                  </a:lnTo>
+                  <a:lnTo>
+                    <a:pt x="301676" y="2914186"/>
+                  </a:lnTo>
+                  <a:lnTo>
+                    <a:pt x="225207" y="2921180"/>
+                  </a:lnTo>
+                  <a:lnTo>
+                    <a:pt x="148739" y="2928027"/>
+                  </a:lnTo>
+                  <a:lnTo>
+                    <a:pt x="72270" y="2934731"/>
+                  </a:lnTo>
+                  <a:lnTo>
+                    <a:pt x="0" y="2940935"/>
                   </a:lnTo>
                   <a:close/>
                 </a:path>
@@ -3582,273 +3582,273 @@
           </p:nvSpPr>
           <p:spPr>
             <a:xfrm>
-              <a:off x="1517656" y="2073503"/>
-              <a:ext cx="6670834" cy="2648523"/>
+              <a:off x="1605271" y="2209169"/>
+              <a:ext cx="6570677" cy="2470367"/>
             </a:xfrm>
             <a:custGeom>
               <a:avLst/>
               <a:pathLst>
-                <a:path w="6670834" h="2648523">
+                <a:path w="6570677" h="2470367">
                   <a:moveTo>
                     <a:pt x="0" y="0"/>
                   </a:moveTo>
                   <a:lnTo>
-                    <a:pt x="71940" y="131550"/>
-                  </a:lnTo>
-                  <a:lnTo>
-                    <a:pt x="149574" y="267744"/>
-                  </a:lnTo>
-                  <a:lnTo>
-                    <a:pt x="227208" y="398405"/>
-                  </a:lnTo>
-                  <a:lnTo>
-                    <a:pt x="304842" y="523757"/>
-                  </a:lnTo>
-                  <a:lnTo>
-                    <a:pt x="382476" y="644016"/>
-                  </a:lnTo>
-                  <a:lnTo>
-                    <a:pt x="460110" y="759389"/>
-                  </a:lnTo>
-                  <a:lnTo>
-                    <a:pt x="537744" y="870075"/>
-                  </a:lnTo>
-                  <a:lnTo>
-                    <a:pt x="615379" y="976264"/>
-                  </a:lnTo>
-                  <a:lnTo>
-                    <a:pt x="693013" y="1078138"/>
-                  </a:lnTo>
-                  <a:lnTo>
-                    <a:pt x="770647" y="1175874"/>
-                  </a:lnTo>
-                  <a:lnTo>
-                    <a:pt x="848281" y="1269639"/>
-                  </a:lnTo>
-                  <a:lnTo>
-                    <a:pt x="925915" y="1359594"/>
-                  </a:lnTo>
-                  <a:lnTo>
-                    <a:pt x="1003549" y="1445895"/>
-                  </a:lnTo>
-                  <a:lnTo>
-                    <a:pt x="1081183" y="1528689"/>
-                  </a:lnTo>
-                  <a:lnTo>
-                    <a:pt x="1158817" y="1608120"/>
-                  </a:lnTo>
-                  <a:lnTo>
-                    <a:pt x="1236451" y="1684323"/>
-                  </a:lnTo>
-                  <a:lnTo>
-                    <a:pt x="1314085" y="1757430"/>
-                  </a:lnTo>
-                  <a:lnTo>
-                    <a:pt x="1391719" y="1827568"/>
-                  </a:lnTo>
-                  <a:lnTo>
-                    <a:pt x="1469353" y="1894855"/>
-                  </a:lnTo>
-                  <a:lnTo>
-                    <a:pt x="1546987" y="1959409"/>
-                  </a:lnTo>
-                  <a:lnTo>
-                    <a:pt x="1624621" y="2021340"/>
-                  </a:lnTo>
-                  <a:lnTo>
-                    <a:pt x="1702255" y="2080755"/>
-                  </a:lnTo>
-                  <a:lnTo>
-                    <a:pt x="1779889" y="2137756"/>
-                  </a:lnTo>
-                  <a:lnTo>
-                    <a:pt x="1857523" y="2192441"/>
-                  </a:lnTo>
-                  <a:lnTo>
-                    <a:pt x="1935157" y="2244905"/>
-                  </a:lnTo>
-                  <a:lnTo>
-                    <a:pt x="2012791" y="2295237"/>
-                  </a:lnTo>
-                  <a:lnTo>
-                    <a:pt x="2090425" y="2343524"/>
-                  </a:lnTo>
-                  <a:lnTo>
-                    <a:pt x="2168059" y="2389849"/>
-                  </a:lnTo>
-                  <a:lnTo>
-                    <a:pt x="2245693" y="2434292"/>
-                  </a:lnTo>
-                  <a:lnTo>
-                    <a:pt x="2323328" y="2476930"/>
-                  </a:lnTo>
-                  <a:lnTo>
-                    <a:pt x="2400962" y="2517835"/>
-                  </a:lnTo>
-                  <a:lnTo>
-                    <a:pt x="2478596" y="2557078"/>
-                  </a:lnTo>
-                  <a:lnTo>
-                    <a:pt x="2556230" y="2594727"/>
-                  </a:lnTo>
-                  <a:lnTo>
-                    <a:pt x="2633864" y="2630846"/>
-                  </a:lnTo>
-                  <a:lnTo>
-                    <a:pt x="2711498" y="2648523"/>
-                  </a:lnTo>
-                  <a:lnTo>
-                    <a:pt x="2789132" y="2630729"/>
-                  </a:lnTo>
-                  <a:lnTo>
-                    <a:pt x="2866766" y="2612554"/>
-                  </a:lnTo>
-                  <a:lnTo>
-                    <a:pt x="2944400" y="2593993"/>
-                  </a:lnTo>
-                  <a:lnTo>
-                    <a:pt x="3022034" y="2575036"/>
-                  </a:lnTo>
-                  <a:lnTo>
-                    <a:pt x="3099668" y="2555676"/>
-                  </a:lnTo>
-                  <a:lnTo>
-                    <a:pt x="3177302" y="2535903"/>
-                  </a:lnTo>
-                  <a:lnTo>
-                    <a:pt x="3254936" y="2515708"/>
-                  </a:lnTo>
-                  <a:lnTo>
-                    <a:pt x="3332570" y="2495084"/>
-                  </a:lnTo>
-                  <a:lnTo>
-                    <a:pt x="3410204" y="2474020"/>
-                  </a:lnTo>
-                  <a:lnTo>
-                    <a:pt x="3487838" y="2452507"/>
-                  </a:lnTo>
-                  <a:lnTo>
-                    <a:pt x="3565472" y="2430536"/>
-                  </a:lnTo>
-                  <a:lnTo>
-                    <a:pt x="3643106" y="2408096"/>
-                  </a:lnTo>
-                  <a:lnTo>
-                    <a:pt x="3720740" y="2385179"/>
-                  </a:lnTo>
-                  <a:lnTo>
-                    <a:pt x="3798374" y="2361773"/>
-                  </a:lnTo>
-                  <a:lnTo>
-                    <a:pt x="3876008" y="2337869"/>
-                  </a:lnTo>
-                  <a:lnTo>
-                    <a:pt x="3953642" y="2313455"/>
-                  </a:lnTo>
-                  <a:lnTo>
-                    <a:pt x="4031277" y="2288522"/>
-                  </a:lnTo>
-                  <a:lnTo>
-                    <a:pt x="4108911" y="2263057"/>
-                  </a:lnTo>
-                  <a:lnTo>
-                    <a:pt x="4186545" y="2237049"/>
-                  </a:lnTo>
-                  <a:lnTo>
-                    <a:pt x="4264179" y="2210487"/>
-                  </a:lnTo>
-                  <a:lnTo>
-                    <a:pt x="4341813" y="2183360"/>
-                  </a:lnTo>
-                  <a:lnTo>
-                    <a:pt x="4419447" y="2155654"/>
-                  </a:lnTo>
-                  <a:lnTo>
-                    <a:pt x="4497081" y="2127359"/>
-                  </a:lnTo>
-                  <a:lnTo>
-                    <a:pt x="4574715" y="2098460"/>
-                  </a:lnTo>
-                  <a:lnTo>
-                    <a:pt x="4652349" y="2068946"/>
-                  </a:lnTo>
-                  <a:lnTo>
-                    <a:pt x="4729983" y="2038802"/>
-                  </a:lnTo>
-                  <a:lnTo>
-                    <a:pt x="4807617" y="2008017"/>
-                  </a:lnTo>
-                  <a:lnTo>
-                    <a:pt x="4885251" y="1976576"/>
-                  </a:lnTo>
-                  <a:lnTo>
-                    <a:pt x="4962885" y="1944464"/>
-                  </a:lnTo>
-                  <a:lnTo>
-                    <a:pt x="5040519" y="1911669"/>
-                  </a:lnTo>
-                  <a:lnTo>
-                    <a:pt x="5118153" y="1878175"/>
-                  </a:lnTo>
-                  <a:lnTo>
-                    <a:pt x="5195787" y="1843967"/>
-                  </a:lnTo>
-                  <a:lnTo>
-                    <a:pt x="5273421" y="1809031"/>
-                  </a:lnTo>
-                  <a:lnTo>
-                    <a:pt x="5351055" y="1773350"/>
-                  </a:lnTo>
-                  <a:lnTo>
-                    <a:pt x="5428689" y="1736909"/>
-                  </a:lnTo>
-                  <a:lnTo>
-                    <a:pt x="5506323" y="1699692"/>
-                  </a:lnTo>
-                  <a:lnTo>
-                    <a:pt x="5583957" y="1661681"/>
-                  </a:lnTo>
-                  <a:lnTo>
-                    <a:pt x="5661591" y="1622861"/>
-                  </a:lnTo>
-                  <a:lnTo>
-                    <a:pt x="5739226" y="1583214"/>
-                  </a:lnTo>
-                  <a:lnTo>
-                    <a:pt x="5816860" y="1542722"/>
-                  </a:lnTo>
-                  <a:lnTo>
-                    <a:pt x="5894494" y="1501367"/>
-                  </a:lnTo>
-                  <a:lnTo>
-                    <a:pt x="5972128" y="1459131"/>
-                  </a:lnTo>
-                  <a:lnTo>
-                    <a:pt x="6049762" y="1415995"/>
-                  </a:lnTo>
-                  <a:lnTo>
-                    <a:pt x="6127396" y="1371941"/>
-                  </a:lnTo>
-                  <a:lnTo>
-                    <a:pt x="6205030" y="1326947"/>
-                  </a:lnTo>
-                  <a:lnTo>
-                    <a:pt x="6282664" y="1280996"/>
-                  </a:lnTo>
-                  <a:lnTo>
-                    <a:pt x="6360298" y="1234065"/>
-                  </a:lnTo>
-                  <a:lnTo>
-                    <a:pt x="6437932" y="1186134"/>
-                  </a:lnTo>
-                  <a:lnTo>
-                    <a:pt x="6515566" y="1137182"/>
-                  </a:lnTo>
-                  <a:lnTo>
-                    <a:pt x="6593200" y="1087187"/>
-                  </a:lnTo>
-                  <a:lnTo>
-                    <a:pt x="6670834" y="1036127"/>
+                    <a:pt x="70860" y="122701"/>
+                  </a:lnTo>
+                  <a:lnTo>
+                    <a:pt x="147329" y="249734"/>
+                  </a:lnTo>
+                  <a:lnTo>
+                    <a:pt x="223797" y="371605"/>
+                  </a:lnTo>
+                  <a:lnTo>
+                    <a:pt x="300265" y="488525"/>
+                  </a:lnTo>
+                  <a:lnTo>
+                    <a:pt x="376734" y="600695"/>
+                  </a:lnTo>
+                  <a:lnTo>
+                    <a:pt x="453202" y="708308"/>
+                  </a:lnTo>
+                  <a:lnTo>
+                    <a:pt x="529671" y="811548"/>
+                  </a:lnTo>
+                  <a:lnTo>
+                    <a:pt x="606139" y="910594"/>
+                  </a:lnTo>
+                  <a:lnTo>
+                    <a:pt x="682608" y="1005616"/>
+                  </a:lnTo>
+                  <a:lnTo>
+                    <a:pt x="759076" y="1096777"/>
+                  </a:lnTo>
+                  <a:lnTo>
+                    <a:pt x="835544" y="1184235"/>
+                  </a:lnTo>
+                  <a:lnTo>
+                    <a:pt x="912013" y="1268139"/>
+                  </a:lnTo>
+                  <a:lnTo>
+                    <a:pt x="988481" y="1348635"/>
+                  </a:lnTo>
+                  <a:lnTo>
+                    <a:pt x="1064950" y="1425860"/>
+                  </a:lnTo>
+                  <a:lnTo>
+                    <a:pt x="1141418" y="1499947"/>
+                  </a:lnTo>
+                  <a:lnTo>
+                    <a:pt x="1217887" y="1571025"/>
+                  </a:lnTo>
+                  <a:lnTo>
+                    <a:pt x="1294355" y="1639214"/>
+                  </a:lnTo>
+                  <a:lnTo>
+                    <a:pt x="1370823" y="1704634"/>
+                  </a:lnTo>
+                  <a:lnTo>
+                    <a:pt x="1447292" y="1767395"/>
+                  </a:lnTo>
+                  <a:lnTo>
+                    <a:pt x="1523760" y="1827607"/>
+                  </a:lnTo>
+                  <a:lnTo>
+                    <a:pt x="1600229" y="1885372"/>
+                  </a:lnTo>
+                  <a:lnTo>
+                    <a:pt x="1676697" y="1940790"/>
+                  </a:lnTo>
+                  <a:lnTo>
+                    <a:pt x="1753166" y="1993957"/>
+                  </a:lnTo>
+                  <a:lnTo>
+                    <a:pt x="1829634" y="2044964"/>
+                  </a:lnTo>
+                  <a:lnTo>
+                    <a:pt x="1906102" y="2093898"/>
+                  </a:lnTo>
+                  <a:lnTo>
+                    <a:pt x="1982571" y="2140845"/>
+                  </a:lnTo>
+                  <a:lnTo>
+                    <a:pt x="2059039" y="2185884"/>
+                  </a:lnTo>
+                  <a:lnTo>
+                    <a:pt x="2135508" y="2229093"/>
+                  </a:lnTo>
+                  <a:lnTo>
+                    <a:pt x="2211976" y="2270546"/>
+                  </a:lnTo>
+                  <a:lnTo>
+                    <a:pt x="2288445" y="2310316"/>
+                  </a:lnTo>
+                  <a:lnTo>
+                    <a:pt x="2364913" y="2348469"/>
+                  </a:lnTo>
+                  <a:lnTo>
+                    <a:pt x="2441382" y="2385073"/>
+                  </a:lnTo>
+                  <a:lnTo>
+                    <a:pt x="2517850" y="2420189"/>
+                  </a:lnTo>
+                  <a:lnTo>
+                    <a:pt x="2594318" y="2453879"/>
+                  </a:lnTo>
+                  <a:lnTo>
+                    <a:pt x="2670787" y="2470367"/>
+                  </a:lnTo>
+                  <a:lnTo>
+                    <a:pt x="2747255" y="2453769"/>
+                  </a:lnTo>
+                  <a:lnTo>
+                    <a:pt x="2823724" y="2436818"/>
+                  </a:lnTo>
+                  <a:lnTo>
+                    <a:pt x="2900192" y="2419505"/>
+                  </a:lnTo>
+                  <a:lnTo>
+                    <a:pt x="2976661" y="2401823"/>
+                  </a:lnTo>
+                  <a:lnTo>
+                    <a:pt x="3053129" y="2383765"/>
+                  </a:lnTo>
+                  <a:lnTo>
+                    <a:pt x="3129597" y="2365322"/>
+                  </a:lnTo>
+                  <a:lnTo>
+                    <a:pt x="3206066" y="2346486"/>
+                  </a:lnTo>
+                  <a:lnTo>
+                    <a:pt x="3282534" y="2327249"/>
+                  </a:lnTo>
+                  <a:lnTo>
+                    <a:pt x="3359003" y="2307601"/>
+                  </a:lnTo>
+                  <a:lnTo>
+                    <a:pt x="3435471" y="2287536"/>
+                  </a:lnTo>
+                  <a:lnTo>
+                    <a:pt x="3511940" y="2267042"/>
+                  </a:lnTo>
+                  <a:lnTo>
+                    <a:pt x="3588408" y="2246113"/>
+                  </a:lnTo>
+                  <a:lnTo>
+                    <a:pt x="3664876" y="2224737"/>
+                  </a:lnTo>
+                  <a:lnTo>
+                    <a:pt x="3741345" y="2202905"/>
+                  </a:lnTo>
+                  <a:lnTo>
+                    <a:pt x="3817813" y="2180609"/>
+                  </a:lnTo>
+                  <a:lnTo>
+                    <a:pt x="3894282" y="2157838"/>
+                  </a:lnTo>
+                  <a:lnTo>
+                    <a:pt x="3970750" y="2134581"/>
+                  </a:lnTo>
+                  <a:lnTo>
+                    <a:pt x="4047219" y="2110829"/>
+                  </a:lnTo>
+                  <a:lnTo>
+                    <a:pt x="4123687" y="2086571"/>
+                  </a:lnTo>
+                  <a:lnTo>
+                    <a:pt x="4200155" y="2061796"/>
+                  </a:lnTo>
+                  <a:lnTo>
+                    <a:pt x="4276624" y="2036493"/>
+                  </a:lnTo>
+                  <a:lnTo>
+                    <a:pt x="4353092" y="2010651"/>
+                  </a:lnTo>
+                  <a:lnTo>
+                    <a:pt x="4429561" y="1984259"/>
+                  </a:lnTo>
+                  <a:lnTo>
+                    <a:pt x="4506029" y="1957304"/>
+                  </a:lnTo>
+                  <a:lnTo>
+                    <a:pt x="4582498" y="1929775"/>
+                  </a:lnTo>
+                  <a:lnTo>
+                    <a:pt x="4658966" y="1901660"/>
+                  </a:lnTo>
+                  <a:lnTo>
+                    <a:pt x="4735435" y="1872945"/>
+                  </a:lnTo>
+                  <a:lnTo>
+                    <a:pt x="4811903" y="1843619"/>
+                  </a:lnTo>
+                  <a:lnTo>
+                    <a:pt x="4888371" y="1813667"/>
+                  </a:lnTo>
+                  <a:lnTo>
+                    <a:pt x="4964840" y="1783078"/>
+                  </a:lnTo>
+                  <a:lnTo>
+                    <a:pt x="5041308" y="1751837"/>
+                  </a:lnTo>
+                  <a:lnTo>
+                    <a:pt x="5117777" y="1719930"/>
+                  </a:lnTo>
+                  <a:lnTo>
+                    <a:pt x="5194245" y="1687344"/>
+                  </a:lnTo>
+                  <a:lnTo>
+                    <a:pt x="5270714" y="1654063"/>
+                  </a:lnTo>
+                  <a:lnTo>
+                    <a:pt x="5347182" y="1620073"/>
+                  </a:lnTo>
+                  <a:lnTo>
+                    <a:pt x="5423650" y="1585360"/>
+                  </a:lnTo>
+                  <a:lnTo>
+                    <a:pt x="5500119" y="1549906"/>
+                  </a:lnTo>
+                  <a:lnTo>
+                    <a:pt x="5576587" y="1513697"/>
+                  </a:lnTo>
+                  <a:lnTo>
+                    <a:pt x="5653056" y="1476717"/>
+                  </a:lnTo>
+                  <a:lnTo>
+                    <a:pt x="5729524" y="1438948"/>
+                  </a:lnTo>
+                  <a:lnTo>
+                    <a:pt x="5805993" y="1400375"/>
+                  </a:lnTo>
+                  <a:lnTo>
+                    <a:pt x="5882461" y="1360981"/>
+                  </a:lnTo>
+                  <a:lnTo>
+                    <a:pt x="5958929" y="1320747"/>
+                  </a:lnTo>
+                  <a:lnTo>
+                    <a:pt x="6035398" y="1279655"/>
+                  </a:lnTo>
+                  <a:lnTo>
+                    <a:pt x="6111866" y="1237689"/>
+                  </a:lnTo>
+                  <a:lnTo>
+                    <a:pt x="6188335" y="1194828"/>
+                  </a:lnTo>
+                  <a:lnTo>
+                    <a:pt x="6264803" y="1151054"/>
+                  </a:lnTo>
+                  <a:lnTo>
+                    <a:pt x="6341272" y="1106347"/>
+                  </a:lnTo>
+                  <a:lnTo>
+                    <a:pt x="6417740" y="1060688"/>
+                  </a:lnTo>
+                  <a:lnTo>
+                    <a:pt x="6494208" y="1014056"/>
+                  </a:lnTo>
+                  <a:lnTo>
+                    <a:pt x="6570677" y="966430"/>
                   </a:lnTo>
                 </a:path>
               </a:pathLst>
@@ -3868,300 +3868,300 @@
           </p:nvSpPr>
           <p:spPr>
             <a:xfrm>
-              <a:off x="817517" y="4739001"/>
-              <a:ext cx="7370972" cy="719570"/>
+              <a:off x="915645" y="4695369"/>
+              <a:ext cx="7260303" cy="671167"/>
             </a:xfrm>
             <a:custGeom>
               <a:avLst/>
               <a:pathLst>
-                <a:path w="7370972" h="719570">
+                <a:path w="7260303" h="671167">
                   <a:moveTo>
-                    <a:pt x="7370972" y="719570"/>
+                    <a:pt x="7260303" y="671167"/>
                   </a:moveTo>
                   <a:lnTo>
-                    <a:pt x="7293338" y="715391"/>
-                  </a:lnTo>
-                  <a:lnTo>
-                    <a:pt x="7215704" y="711035"/>
-                  </a:lnTo>
-                  <a:lnTo>
-                    <a:pt x="7138070" y="706495"/>
-                  </a:lnTo>
-                  <a:lnTo>
-                    <a:pt x="7060436" y="701762"/>
-                  </a:lnTo>
-                  <a:lnTo>
-                    <a:pt x="6982802" y="696829"/>
-                  </a:lnTo>
-                  <a:lnTo>
-                    <a:pt x="6905168" y="691688"/>
-                  </a:lnTo>
-                  <a:lnTo>
-                    <a:pt x="6827534" y="686328"/>
-                  </a:lnTo>
-                  <a:lnTo>
-                    <a:pt x="6749900" y="680741"/>
-                  </a:lnTo>
-                  <a:lnTo>
-                    <a:pt x="6672266" y="674918"/>
-                  </a:lnTo>
-                  <a:lnTo>
-                    <a:pt x="6594632" y="668848"/>
-                  </a:lnTo>
-                  <a:lnTo>
-                    <a:pt x="6516998" y="662521"/>
-                  </a:lnTo>
-                  <a:lnTo>
-                    <a:pt x="6439364" y="655926"/>
-                  </a:lnTo>
-                  <a:lnTo>
-                    <a:pt x="6361730" y="649052"/>
-                  </a:lnTo>
-                  <a:lnTo>
-                    <a:pt x="6284096" y="641887"/>
-                  </a:lnTo>
-                  <a:lnTo>
-                    <a:pt x="6206462" y="634418"/>
-                  </a:lnTo>
-                  <a:lnTo>
-                    <a:pt x="6128827" y="626634"/>
-                  </a:lnTo>
-                  <a:lnTo>
-                    <a:pt x="6051193" y="618519"/>
-                  </a:lnTo>
-                  <a:lnTo>
-                    <a:pt x="5973559" y="610061"/>
-                  </a:lnTo>
-                  <a:lnTo>
-                    <a:pt x="5895925" y="601244"/>
-                  </a:lnTo>
-                  <a:lnTo>
-                    <a:pt x="5818291" y="592054"/>
-                  </a:lnTo>
-                  <a:lnTo>
-                    <a:pt x="5740657" y="582475"/>
-                  </a:lnTo>
-                  <a:lnTo>
-                    <a:pt x="5663023" y="572491"/>
-                  </a:lnTo>
-                  <a:lnTo>
-                    <a:pt x="5585389" y="562083"/>
-                  </a:lnTo>
-                  <a:lnTo>
-                    <a:pt x="5507755" y="551235"/>
-                  </a:lnTo>
-                  <a:lnTo>
-                    <a:pt x="5430121" y="539927"/>
-                  </a:lnTo>
-                  <a:lnTo>
-                    <a:pt x="5352487" y="528141"/>
-                  </a:lnTo>
-                  <a:lnTo>
-                    <a:pt x="5274853" y="515855"/>
-                  </a:lnTo>
-                  <a:lnTo>
-                    <a:pt x="5197219" y="503049"/>
-                  </a:lnTo>
-                  <a:lnTo>
-                    <a:pt x="5119585" y="489701"/>
-                  </a:lnTo>
-                  <a:lnTo>
-                    <a:pt x="5041951" y="475787"/>
-                  </a:lnTo>
-                  <a:lnTo>
-                    <a:pt x="4964317" y="461284"/>
-                  </a:lnTo>
-                  <a:lnTo>
-                    <a:pt x="4886683" y="446167"/>
-                  </a:lnTo>
-                  <a:lnTo>
-                    <a:pt x="4809049" y="430410"/>
-                  </a:lnTo>
-                  <a:lnTo>
-                    <a:pt x="4731415" y="413986"/>
-                  </a:lnTo>
-                  <a:lnTo>
-                    <a:pt x="4653781" y="396866"/>
-                  </a:lnTo>
-                  <a:lnTo>
-                    <a:pt x="4576147" y="379021"/>
-                  </a:lnTo>
-                  <a:lnTo>
-                    <a:pt x="4498513" y="360420"/>
-                  </a:lnTo>
-                  <a:lnTo>
-                    <a:pt x="4420879" y="341032"/>
-                  </a:lnTo>
-                  <a:lnTo>
-                    <a:pt x="4343244" y="320822"/>
-                  </a:lnTo>
-                  <a:lnTo>
-                    <a:pt x="4265610" y="299757"/>
-                  </a:lnTo>
-                  <a:lnTo>
-                    <a:pt x="4187976" y="277799"/>
-                  </a:lnTo>
-                  <a:lnTo>
-                    <a:pt x="4110342" y="254912"/>
-                  </a:lnTo>
-                  <a:lnTo>
-                    <a:pt x="4032708" y="231055"/>
-                  </a:lnTo>
-                  <a:lnTo>
-                    <a:pt x="3955074" y="206188"/>
-                  </a:lnTo>
-                  <a:lnTo>
-                    <a:pt x="3877440" y="180268"/>
-                  </a:lnTo>
-                  <a:lnTo>
-                    <a:pt x="3799806" y="153251"/>
-                  </a:lnTo>
-                  <a:lnTo>
-                    <a:pt x="3722172" y="125089"/>
-                  </a:lnTo>
-                  <a:lnTo>
-                    <a:pt x="3644538" y="95734"/>
-                  </a:lnTo>
-                  <a:lnTo>
-                    <a:pt x="3566904" y="65137"/>
-                  </a:lnTo>
-                  <a:lnTo>
-                    <a:pt x="3489270" y="33243"/>
-                  </a:lnTo>
-                  <a:lnTo>
-                    <a:pt x="3411636" y="0"/>
-                  </a:lnTo>
-                  <a:lnTo>
-                    <a:pt x="3334002" y="448"/>
-                  </a:lnTo>
-                  <a:lnTo>
-                    <a:pt x="3256368" y="17509"/>
-                  </a:lnTo>
-                  <a:lnTo>
-                    <a:pt x="3178734" y="34213"/>
-                  </a:lnTo>
-                  <a:lnTo>
-                    <a:pt x="3101100" y="50569"/>
-                  </a:lnTo>
-                  <a:lnTo>
-                    <a:pt x="3023466" y="66584"/>
-                  </a:lnTo>
-                  <a:lnTo>
-                    <a:pt x="2945832" y="82264"/>
-                  </a:lnTo>
-                  <a:lnTo>
-                    <a:pt x="2868198" y="97618"/>
-                  </a:lnTo>
-                  <a:lnTo>
-                    <a:pt x="2790564" y="112651"/>
-                  </a:lnTo>
-                  <a:lnTo>
-                    <a:pt x="2712930" y="127370"/>
-                  </a:lnTo>
-                  <a:lnTo>
-                    <a:pt x="2635295" y="141783"/>
-                  </a:lnTo>
-                  <a:lnTo>
-                    <a:pt x="2557661" y="155895"/>
-                  </a:lnTo>
-                  <a:lnTo>
-                    <a:pt x="2480027" y="169712"/>
-                  </a:lnTo>
-                  <a:lnTo>
-                    <a:pt x="2402393" y="183241"/>
-                  </a:lnTo>
-                  <a:lnTo>
-                    <a:pt x="2324759" y="196488"/>
-                  </a:lnTo>
-                  <a:lnTo>
-                    <a:pt x="2247125" y="209459"/>
-                  </a:lnTo>
-                  <a:lnTo>
-                    <a:pt x="2169491" y="222159"/>
-                  </a:lnTo>
-                  <a:lnTo>
-                    <a:pt x="2091857" y="234594"/>
-                  </a:lnTo>
-                  <a:lnTo>
-                    <a:pt x="2014223" y="246770"/>
-                  </a:lnTo>
-                  <a:lnTo>
-                    <a:pt x="1936589" y="258691"/>
-                  </a:lnTo>
-                  <a:lnTo>
-                    <a:pt x="1858955" y="270364"/>
-                  </a:lnTo>
-                  <a:lnTo>
-                    <a:pt x="1781321" y="281794"/>
-                  </a:lnTo>
-                  <a:lnTo>
-                    <a:pt x="1703687" y="292985"/>
-                  </a:lnTo>
-                  <a:lnTo>
-                    <a:pt x="1626053" y="303942"/>
-                  </a:lnTo>
-                  <a:lnTo>
-                    <a:pt x="1548419" y="314671"/>
-                  </a:lnTo>
-                  <a:lnTo>
-                    <a:pt x="1470785" y="325177"/>
-                  </a:lnTo>
-                  <a:lnTo>
-                    <a:pt x="1393151" y="335463"/>
-                  </a:lnTo>
-                  <a:lnTo>
-                    <a:pt x="1315517" y="345534"/>
-                  </a:lnTo>
-                  <a:lnTo>
-                    <a:pt x="1237883" y="355395"/>
-                  </a:lnTo>
-                  <a:lnTo>
-                    <a:pt x="1160249" y="365051"/>
-                  </a:lnTo>
-                  <a:lnTo>
-                    <a:pt x="1082615" y="374505"/>
-                  </a:lnTo>
-                  <a:lnTo>
-                    <a:pt x="1004981" y="383762"/>
-                  </a:lnTo>
-                  <a:lnTo>
-                    <a:pt x="927346" y="392826"/>
-                  </a:lnTo>
-                  <a:lnTo>
-                    <a:pt x="849712" y="401701"/>
-                  </a:lnTo>
-                  <a:lnTo>
-                    <a:pt x="772078" y="410391"/>
-                  </a:lnTo>
-                  <a:lnTo>
-                    <a:pt x="694444" y="418899"/>
-                  </a:lnTo>
-                  <a:lnTo>
-                    <a:pt x="616810" y="427230"/>
-                  </a:lnTo>
-                  <a:lnTo>
-                    <a:pt x="539176" y="435387"/>
-                  </a:lnTo>
-                  <a:lnTo>
-                    <a:pt x="461542" y="443374"/>
-                  </a:lnTo>
-                  <a:lnTo>
-                    <a:pt x="383908" y="451194"/>
-                  </a:lnTo>
-                  <a:lnTo>
-                    <a:pt x="306274" y="458851"/>
-                  </a:lnTo>
-                  <a:lnTo>
-                    <a:pt x="228640" y="466349"/>
-                  </a:lnTo>
-                  <a:lnTo>
-                    <a:pt x="151006" y="473690"/>
-                  </a:lnTo>
-                  <a:lnTo>
-                    <a:pt x="73372" y="480878"/>
-                  </a:lnTo>
-                  <a:lnTo>
-                    <a:pt x="0" y="487529"/>
+                    <a:pt x="7183835" y="667269"/>
+                  </a:lnTo>
+                  <a:lnTo>
+                    <a:pt x="7107366" y="663207"/>
+                  </a:lnTo>
+                  <a:lnTo>
+                    <a:pt x="7030898" y="658972"/>
+                  </a:lnTo>
+                  <a:lnTo>
+                    <a:pt x="6954429" y="654557"/>
+                  </a:lnTo>
+                  <a:lnTo>
+                    <a:pt x="6877961" y="649956"/>
+                  </a:lnTo>
+                  <a:lnTo>
+                    <a:pt x="6801492" y="645160"/>
+                  </a:lnTo>
+                  <a:lnTo>
+                    <a:pt x="6725024" y="640161"/>
+                  </a:lnTo>
+                  <a:lnTo>
+                    <a:pt x="6648556" y="634950"/>
+                  </a:lnTo>
+                  <a:lnTo>
+                    <a:pt x="6572087" y="629519"/>
+                  </a:lnTo>
+                  <a:lnTo>
+                    <a:pt x="6495619" y="623857"/>
+                  </a:lnTo>
+                  <a:lnTo>
+                    <a:pt x="6419150" y="617956"/>
+                  </a:lnTo>
+                  <a:lnTo>
+                    <a:pt x="6342682" y="611805"/>
+                  </a:lnTo>
+                  <a:lnTo>
+                    <a:pt x="6266213" y="605393"/>
+                  </a:lnTo>
+                  <a:lnTo>
+                    <a:pt x="6189745" y="598710"/>
+                  </a:lnTo>
+                  <a:lnTo>
+                    <a:pt x="6113277" y="591743"/>
+                  </a:lnTo>
+                  <a:lnTo>
+                    <a:pt x="6036808" y="584482"/>
+                  </a:lnTo>
+                  <a:lnTo>
+                    <a:pt x="5960340" y="576913"/>
+                  </a:lnTo>
+                  <a:lnTo>
+                    <a:pt x="5883871" y="569024"/>
+                  </a:lnTo>
+                  <a:lnTo>
+                    <a:pt x="5807403" y="560801"/>
+                  </a:lnTo>
+                  <a:lnTo>
+                    <a:pt x="5730934" y="552229"/>
+                  </a:lnTo>
+                  <a:lnTo>
+                    <a:pt x="5654466" y="543294"/>
+                  </a:lnTo>
+                  <a:lnTo>
+                    <a:pt x="5577998" y="533981"/>
+                  </a:lnTo>
+                  <a:lnTo>
+                    <a:pt x="5501529" y="524274"/>
+                  </a:lnTo>
+                  <a:lnTo>
+                    <a:pt x="5425061" y="514155"/>
+                  </a:lnTo>
+                  <a:lnTo>
+                    <a:pt x="5348592" y="503608"/>
+                  </a:lnTo>
+                  <a:lnTo>
+                    <a:pt x="5272124" y="492615"/>
+                  </a:lnTo>
+                  <a:lnTo>
+                    <a:pt x="5195655" y="481155"/>
+                  </a:lnTo>
+                  <a:lnTo>
+                    <a:pt x="5119187" y="469211"/>
+                  </a:lnTo>
+                  <a:lnTo>
+                    <a:pt x="5042719" y="456760"/>
+                  </a:lnTo>
+                  <a:lnTo>
+                    <a:pt x="4966250" y="443783"/>
+                  </a:lnTo>
+                  <a:lnTo>
+                    <a:pt x="4889782" y="430255"/>
+                  </a:lnTo>
+                  <a:lnTo>
+                    <a:pt x="4813313" y="416155"/>
+                  </a:lnTo>
+                  <a:lnTo>
+                    <a:pt x="4736845" y="401458"/>
+                  </a:lnTo>
+                  <a:lnTo>
+                    <a:pt x="4660376" y="386138"/>
+                  </a:lnTo>
+                  <a:lnTo>
+                    <a:pt x="4583908" y="370170"/>
+                  </a:lnTo>
+                  <a:lnTo>
+                    <a:pt x="4507439" y="353525"/>
+                  </a:lnTo>
+                  <a:lnTo>
+                    <a:pt x="4430971" y="336176"/>
+                  </a:lnTo>
+                  <a:lnTo>
+                    <a:pt x="4354503" y="318092"/>
+                  </a:lnTo>
+                  <a:lnTo>
+                    <a:pt x="4278034" y="299241"/>
+                  </a:lnTo>
+                  <a:lnTo>
+                    <a:pt x="4201566" y="279593"/>
+                  </a:lnTo>
+                  <a:lnTo>
+                    <a:pt x="4125097" y="259113"/>
+                  </a:lnTo>
+                  <a:lnTo>
+                    <a:pt x="4048629" y="237765"/>
+                  </a:lnTo>
+                  <a:lnTo>
+                    <a:pt x="3972160" y="215513"/>
+                  </a:lnTo>
+                  <a:lnTo>
+                    <a:pt x="3895692" y="192319"/>
+                  </a:lnTo>
+                  <a:lnTo>
+                    <a:pt x="3819224" y="168142"/>
+                  </a:lnTo>
+                  <a:lnTo>
+                    <a:pt x="3742755" y="142942"/>
+                  </a:lnTo>
+                  <a:lnTo>
+                    <a:pt x="3666287" y="116675"/>
+                  </a:lnTo>
+                  <a:lnTo>
+                    <a:pt x="3589818" y="89295"/>
+                  </a:lnTo>
+                  <a:lnTo>
+                    <a:pt x="3513350" y="60755"/>
+                  </a:lnTo>
+                  <a:lnTo>
+                    <a:pt x="3436881" y="31007"/>
+                  </a:lnTo>
+                  <a:lnTo>
+                    <a:pt x="3360413" y="0"/>
+                  </a:lnTo>
+                  <a:lnTo>
+                    <a:pt x="3283945" y="418"/>
+                  </a:lnTo>
+                  <a:lnTo>
+                    <a:pt x="3207476" y="16331"/>
+                  </a:lnTo>
+                  <a:lnTo>
+                    <a:pt x="3131008" y="31912"/>
+                  </a:lnTo>
+                  <a:lnTo>
+                    <a:pt x="3054539" y="47167"/>
+                  </a:lnTo>
+                  <a:lnTo>
+                    <a:pt x="2978071" y="62105"/>
+                  </a:lnTo>
+                  <a:lnTo>
+                    <a:pt x="2901602" y="76730"/>
+                  </a:lnTo>
+                  <a:lnTo>
+                    <a:pt x="2825134" y="91051"/>
+                  </a:lnTo>
+                  <a:lnTo>
+                    <a:pt x="2748666" y="105073"/>
+                  </a:lnTo>
+                  <a:lnTo>
+                    <a:pt x="2672197" y="118803"/>
+                  </a:lnTo>
+                  <a:lnTo>
+                    <a:pt x="2595729" y="132246"/>
+                  </a:lnTo>
+                  <a:lnTo>
+                    <a:pt x="2519260" y="145408"/>
+                  </a:lnTo>
+                  <a:lnTo>
+                    <a:pt x="2442792" y="158296"/>
+                  </a:lnTo>
+                  <a:lnTo>
+                    <a:pt x="2366323" y="170915"/>
+                  </a:lnTo>
+                  <a:lnTo>
+                    <a:pt x="2289855" y="183271"/>
+                  </a:lnTo>
+                  <a:lnTo>
+                    <a:pt x="2213386" y="195369"/>
+                  </a:lnTo>
+                  <a:lnTo>
+                    <a:pt x="2136918" y="207215"/>
+                  </a:lnTo>
+                  <a:lnTo>
+                    <a:pt x="2060450" y="218814"/>
+                  </a:lnTo>
+                  <a:lnTo>
+                    <a:pt x="1983981" y="230170"/>
+                  </a:lnTo>
+                  <a:lnTo>
+                    <a:pt x="1907513" y="241290"/>
+                  </a:lnTo>
+                  <a:lnTo>
+                    <a:pt x="1831044" y="252178"/>
+                  </a:lnTo>
+                  <a:lnTo>
+                    <a:pt x="1754576" y="262839"/>
+                  </a:lnTo>
+                  <a:lnTo>
+                    <a:pt x="1678107" y="273277"/>
+                  </a:lnTo>
+                  <a:lnTo>
+                    <a:pt x="1601639" y="283497"/>
+                  </a:lnTo>
+                  <a:lnTo>
+                    <a:pt x="1525171" y="293505"/>
+                  </a:lnTo>
+                  <a:lnTo>
+                    <a:pt x="1448702" y="303303"/>
+                  </a:lnTo>
+                  <a:lnTo>
+                    <a:pt x="1372234" y="312897"/>
+                  </a:lnTo>
+                  <a:lnTo>
+                    <a:pt x="1295765" y="322291"/>
+                  </a:lnTo>
+                  <a:lnTo>
+                    <a:pt x="1219297" y="331489"/>
+                  </a:lnTo>
+                  <a:lnTo>
+                    <a:pt x="1142828" y="340495"/>
+                  </a:lnTo>
+                  <a:lnTo>
+                    <a:pt x="1066360" y="349314"/>
+                  </a:lnTo>
+                  <a:lnTo>
+                    <a:pt x="989892" y="357948"/>
+                  </a:lnTo>
+                  <a:lnTo>
+                    <a:pt x="913423" y="366402"/>
+                  </a:lnTo>
+                  <a:lnTo>
+                    <a:pt x="836955" y="374680"/>
+                  </a:lnTo>
+                  <a:lnTo>
+                    <a:pt x="760486" y="382785"/>
+                  </a:lnTo>
+                  <a:lnTo>
+                    <a:pt x="684018" y="390721"/>
+                  </a:lnTo>
+                  <a:lnTo>
+                    <a:pt x="607549" y="398492"/>
+                  </a:lnTo>
+                  <a:lnTo>
+                    <a:pt x="531081" y="406100"/>
+                  </a:lnTo>
+                  <a:lnTo>
+                    <a:pt x="454613" y="413550"/>
+                  </a:lnTo>
+                  <a:lnTo>
+                    <a:pt x="378144" y="420844"/>
+                  </a:lnTo>
+                  <a:lnTo>
+                    <a:pt x="301676" y="427986"/>
+                  </a:lnTo>
+                  <a:lnTo>
+                    <a:pt x="225207" y="434979"/>
+                  </a:lnTo>
+                  <a:lnTo>
+                    <a:pt x="148739" y="441826"/>
+                  </a:lnTo>
+                  <a:lnTo>
+                    <a:pt x="72270" y="448531"/>
+                  </a:lnTo>
+                  <a:lnTo>
+                    <a:pt x="0" y="454735"/>
                   </a:lnTo>
                 </a:path>
               </a:pathLst>
@@ -4181,300 +4181,300 @@
           </p:nvSpPr>
           <p:spPr>
             <a:xfrm>
-              <a:off x="817517" y="4263162"/>
-              <a:ext cx="7370972" cy="802635"/>
+              <a:off x="915645" y="4251538"/>
+              <a:ext cx="7260303" cy="748644"/>
             </a:xfrm>
             <a:custGeom>
               <a:avLst/>
               <a:pathLst>
-                <a:path w="7370972" h="802635">
+                <a:path w="7260303" h="748644">
                   <a:moveTo>
                     <a:pt x="0" y="0"/>
                   </a:moveTo>
                   <a:lnTo>
-                    <a:pt x="73372" y="12415"/>
-                  </a:lnTo>
-                  <a:lnTo>
-                    <a:pt x="151006" y="25418"/>
-                  </a:lnTo>
-                  <a:lnTo>
-                    <a:pt x="228640" y="38290"/>
-                  </a:lnTo>
-                  <a:lnTo>
-                    <a:pt x="306274" y="51030"/>
-                  </a:lnTo>
-                  <a:lnTo>
-                    <a:pt x="383908" y="63642"/>
-                  </a:lnTo>
-                  <a:lnTo>
-                    <a:pt x="461542" y="76126"/>
-                  </a:lnTo>
-                  <a:lnTo>
-                    <a:pt x="539176" y="88483"/>
-                  </a:lnTo>
-                  <a:lnTo>
-                    <a:pt x="616810" y="100714"/>
-                  </a:lnTo>
-                  <a:lnTo>
-                    <a:pt x="694444" y="112822"/>
-                  </a:lnTo>
-                  <a:lnTo>
-                    <a:pt x="772078" y="124806"/>
-                  </a:lnTo>
-                  <a:lnTo>
-                    <a:pt x="849712" y="136669"/>
-                  </a:lnTo>
-                  <a:lnTo>
-                    <a:pt x="927346" y="148412"/>
-                  </a:lnTo>
-                  <a:lnTo>
-                    <a:pt x="1004981" y="160035"/>
-                  </a:lnTo>
-                  <a:lnTo>
-                    <a:pt x="1082615" y="171541"/>
-                  </a:lnTo>
-                  <a:lnTo>
-                    <a:pt x="1160249" y="182930"/>
-                  </a:lnTo>
-                  <a:lnTo>
-                    <a:pt x="1237883" y="194203"/>
-                  </a:lnTo>
-                  <a:lnTo>
-                    <a:pt x="1315517" y="205362"/>
-                  </a:lnTo>
-                  <a:lnTo>
-                    <a:pt x="1393151" y="216408"/>
-                  </a:lnTo>
-                  <a:lnTo>
-                    <a:pt x="1470785" y="227342"/>
-                  </a:lnTo>
-                  <a:lnTo>
-                    <a:pt x="1548419" y="238164"/>
-                  </a:lnTo>
-                  <a:lnTo>
-                    <a:pt x="1626053" y="248877"/>
-                  </a:lnTo>
-                  <a:lnTo>
-                    <a:pt x="1703687" y="259482"/>
-                  </a:lnTo>
-                  <a:lnTo>
-                    <a:pt x="1781321" y="269978"/>
-                  </a:lnTo>
-                  <a:lnTo>
-                    <a:pt x="1858955" y="280369"/>
-                  </a:lnTo>
-                  <a:lnTo>
-                    <a:pt x="1936589" y="290653"/>
-                  </a:lnTo>
-                  <a:lnTo>
-                    <a:pt x="2014223" y="300834"/>
-                  </a:lnTo>
-                  <a:lnTo>
-                    <a:pt x="2091857" y="310911"/>
-                  </a:lnTo>
-                  <a:lnTo>
-                    <a:pt x="2169491" y="320886"/>
-                  </a:lnTo>
-                  <a:lnTo>
-                    <a:pt x="2247125" y="330759"/>
-                  </a:lnTo>
-                  <a:lnTo>
-                    <a:pt x="2324759" y="340533"/>
-                  </a:lnTo>
-                  <a:lnTo>
-                    <a:pt x="2402393" y="350207"/>
-                  </a:lnTo>
-                  <a:lnTo>
-                    <a:pt x="2480027" y="359784"/>
-                  </a:lnTo>
-                  <a:lnTo>
-                    <a:pt x="2557661" y="369263"/>
-                  </a:lnTo>
-                  <a:lnTo>
-                    <a:pt x="2635295" y="378645"/>
-                  </a:lnTo>
-                  <a:lnTo>
-                    <a:pt x="2712930" y="387933"/>
-                  </a:lnTo>
-                  <a:lnTo>
-                    <a:pt x="2790564" y="397127"/>
-                  </a:lnTo>
-                  <a:lnTo>
-                    <a:pt x="2868198" y="406227"/>
-                  </a:lnTo>
-                  <a:lnTo>
-                    <a:pt x="2945832" y="415235"/>
-                  </a:lnTo>
-                  <a:lnTo>
-                    <a:pt x="3023466" y="424151"/>
-                  </a:lnTo>
-                  <a:lnTo>
-                    <a:pt x="3101100" y="432977"/>
-                  </a:lnTo>
-                  <a:lnTo>
-                    <a:pt x="3178734" y="441714"/>
-                  </a:lnTo>
-                  <a:lnTo>
-                    <a:pt x="3256368" y="450361"/>
-                  </a:lnTo>
-                  <a:lnTo>
-                    <a:pt x="3334002" y="458922"/>
-                  </a:lnTo>
-                  <a:lnTo>
-                    <a:pt x="3411636" y="467395"/>
-                  </a:lnTo>
-                  <a:lnTo>
-                    <a:pt x="3489270" y="475782"/>
-                  </a:lnTo>
-                  <a:lnTo>
-                    <a:pt x="3566904" y="484084"/>
-                  </a:lnTo>
-                  <a:lnTo>
-                    <a:pt x="3644538" y="492302"/>
-                  </a:lnTo>
-                  <a:lnTo>
-                    <a:pt x="3722172" y="500437"/>
-                  </a:lnTo>
-                  <a:lnTo>
-                    <a:pt x="3799806" y="508489"/>
-                  </a:lnTo>
-                  <a:lnTo>
-                    <a:pt x="3877440" y="516459"/>
-                  </a:lnTo>
-                  <a:lnTo>
-                    <a:pt x="3955074" y="524349"/>
-                  </a:lnTo>
-                  <a:lnTo>
-                    <a:pt x="4032708" y="532158"/>
-                  </a:lnTo>
-                  <a:lnTo>
-                    <a:pt x="4110342" y="539888"/>
-                  </a:lnTo>
-                  <a:lnTo>
-                    <a:pt x="4187976" y="547540"/>
-                  </a:lnTo>
-                  <a:lnTo>
-                    <a:pt x="4265610" y="555114"/>
-                  </a:lnTo>
-                  <a:lnTo>
-                    <a:pt x="4343244" y="562612"/>
-                  </a:lnTo>
-                  <a:lnTo>
-                    <a:pt x="4420879" y="570033"/>
-                  </a:lnTo>
-                  <a:lnTo>
-                    <a:pt x="4498513" y="577379"/>
-                  </a:lnTo>
-                  <a:lnTo>
-                    <a:pt x="4576147" y="584650"/>
-                  </a:lnTo>
-                  <a:lnTo>
-                    <a:pt x="4653781" y="591848"/>
-                  </a:lnTo>
-                  <a:lnTo>
-                    <a:pt x="4731415" y="598972"/>
-                  </a:lnTo>
-                  <a:lnTo>
-                    <a:pt x="4809049" y="606025"/>
-                  </a:lnTo>
-                  <a:lnTo>
-                    <a:pt x="4886683" y="613006"/>
-                  </a:lnTo>
-                  <a:lnTo>
-                    <a:pt x="4964317" y="619916"/>
-                  </a:lnTo>
-                  <a:lnTo>
-                    <a:pt x="5041951" y="626755"/>
-                  </a:lnTo>
-                  <a:lnTo>
-                    <a:pt x="5119585" y="633526"/>
-                  </a:lnTo>
-                  <a:lnTo>
-                    <a:pt x="5197219" y="640228"/>
-                  </a:lnTo>
-                  <a:lnTo>
-                    <a:pt x="5274853" y="646861"/>
-                  </a:lnTo>
-                  <a:lnTo>
-                    <a:pt x="5352487" y="653428"/>
-                  </a:lnTo>
-                  <a:lnTo>
-                    <a:pt x="5430121" y="659928"/>
-                  </a:lnTo>
-                  <a:lnTo>
-                    <a:pt x="5507755" y="666362"/>
-                  </a:lnTo>
-                  <a:lnTo>
-                    <a:pt x="5585389" y="672730"/>
-                  </a:lnTo>
-                  <a:lnTo>
-                    <a:pt x="5663023" y="679034"/>
-                  </a:lnTo>
-                  <a:lnTo>
-                    <a:pt x="5740657" y="685274"/>
-                  </a:lnTo>
-                  <a:lnTo>
-                    <a:pt x="5818291" y="691451"/>
-                  </a:lnTo>
-                  <a:lnTo>
-                    <a:pt x="5895925" y="697565"/>
-                  </a:lnTo>
-                  <a:lnTo>
-                    <a:pt x="5973559" y="703617"/>
-                  </a:lnTo>
-                  <a:lnTo>
-                    <a:pt x="6051193" y="709608"/>
-                  </a:lnTo>
-                  <a:lnTo>
-                    <a:pt x="6128827" y="715538"/>
-                  </a:lnTo>
-                  <a:lnTo>
-                    <a:pt x="6206462" y="721408"/>
-                  </a:lnTo>
-                  <a:lnTo>
-                    <a:pt x="6284096" y="727218"/>
-                  </a:lnTo>
-                  <a:lnTo>
-                    <a:pt x="6361730" y="732969"/>
-                  </a:lnTo>
-                  <a:lnTo>
-                    <a:pt x="6439364" y="738662"/>
-                  </a:lnTo>
-                  <a:lnTo>
-                    <a:pt x="6516998" y="744297"/>
-                  </a:lnTo>
-                  <a:lnTo>
-                    <a:pt x="6594632" y="749875"/>
-                  </a:lnTo>
-                  <a:lnTo>
-                    <a:pt x="6672266" y="755396"/>
-                  </a:lnTo>
-                  <a:lnTo>
-                    <a:pt x="6749900" y="760862"/>
-                  </a:lnTo>
-                  <a:lnTo>
-                    <a:pt x="6827534" y="766272"/>
-                  </a:lnTo>
-                  <a:lnTo>
-                    <a:pt x="6905168" y="771627"/>
-                  </a:lnTo>
-                  <a:lnTo>
-                    <a:pt x="6982802" y="776927"/>
-                  </a:lnTo>
-                  <a:lnTo>
-                    <a:pt x="7060436" y="782174"/>
-                  </a:lnTo>
-                  <a:lnTo>
-                    <a:pt x="7138070" y="787368"/>
-                  </a:lnTo>
-                  <a:lnTo>
-                    <a:pt x="7215704" y="792509"/>
-                  </a:lnTo>
-                  <a:lnTo>
-                    <a:pt x="7293338" y="797597"/>
-                  </a:lnTo>
-                  <a:lnTo>
-                    <a:pt x="7370972" y="802635"/>
+                    <a:pt x="72270" y="11580"/>
+                  </a:lnTo>
+                  <a:lnTo>
+                    <a:pt x="148739" y="23708"/>
+                  </a:lnTo>
+                  <a:lnTo>
+                    <a:pt x="225207" y="35714"/>
+                  </a:lnTo>
+                  <a:lnTo>
+                    <a:pt x="301676" y="47598"/>
+                  </a:lnTo>
+                  <a:lnTo>
+                    <a:pt x="378144" y="59361"/>
+                  </a:lnTo>
+                  <a:lnTo>
+                    <a:pt x="454613" y="71005"/>
+                  </a:lnTo>
+                  <a:lnTo>
+                    <a:pt x="531081" y="82531"/>
+                  </a:lnTo>
+                  <a:lnTo>
+                    <a:pt x="607549" y="93939"/>
+                  </a:lnTo>
+                  <a:lnTo>
+                    <a:pt x="684018" y="105232"/>
+                  </a:lnTo>
+                  <a:lnTo>
+                    <a:pt x="760486" y="116411"/>
+                  </a:lnTo>
+                  <a:lnTo>
+                    <a:pt x="836955" y="127476"/>
+                  </a:lnTo>
+                  <a:lnTo>
+                    <a:pt x="913423" y="138429"/>
+                  </a:lnTo>
+                  <a:lnTo>
+                    <a:pt x="989892" y="149270"/>
+                  </a:lnTo>
+                  <a:lnTo>
+                    <a:pt x="1066360" y="160002"/>
+                  </a:lnTo>
+                  <a:lnTo>
+                    <a:pt x="1142828" y="170625"/>
+                  </a:lnTo>
+                  <a:lnTo>
+                    <a:pt x="1219297" y="181140"/>
+                  </a:lnTo>
+                  <a:lnTo>
+                    <a:pt x="1295765" y="191548"/>
+                  </a:lnTo>
+                  <a:lnTo>
+                    <a:pt x="1372234" y="201851"/>
+                  </a:lnTo>
+                  <a:lnTo>
+                    <a:pt x="1448702" y="212049"/>
+                  </a:lnTo>
+                  <a:lnTo>
+                    <a:pt x="1525171" y="222144"/>
+                  </a:lnTo>
+                  <a:lnTo>
+                    <a:pt x="1601639" y="232136"/>
+                  </a:lnTo>
+                  <a:lnTo>
+                    <a:pt x="1678107" y="242027"/>
+                  </a:lnTo>
+                  <a:lnTo>
+                    <a:pt x="1754576" y="251818"/>
+                  </a:lnTo>
+                  <a:lnTo>
+                    <a:pt x="1831044" y="261509"/>
+                  </a:lnTo>
+                  <a:lnTo>
+                    <a:pt x="1907513" y="271102"/>
+                  </a:lnTo>
+                  <a:lnTo>
+                    <a:pt x="1983981" y="280598"/>
+                  </a:lnTo>
+                  <a:lnTo>
+                    <a:pt x="2060450" y="289997"/>
+                  </a:lnTo>
+                  <a:lnTo>
+                    <a:pt x="2136918" y="299301"/>
+                  </a:lnTo>
+                  <a:lnTo>
+                    <a:pt x="2213386" y="308510"/>
+                  </a:lnTo>
+                  <a:lnTo>
+                    <a:pt x="2289855" y="317627"/>
+                  </a:lnTo>
+                  <a:lnTo>
+                    <a:pt x="2366323" y="326650"/>
+                  </a:lnTo>
+                  <a:lnTo>
+                    <a:pt x="2442792" y="335582"/>
+                  </a:lnTo>
+                  <a:lnTo>
+                    <a:pt x="2519260" y="344424"/>
+                  </a:lnTo>
+                  <a:lnTo>
+                    <a:pt x="2595729" y="353175"/>
+                  </a:lnTo>
+                  <a:lnTo>
+                    <a:pt x="2672197" y="361838"/>
+                  </a:lnTo>
+                  <a:lnTo>
+                    <a:pt x="2748666" y="370413"/>
+                  </a:lnTo>
+                  <a:lnTo>
+                    <a:pt x="2825134" y="378901"/>
+                  </a:lnTo>
+                  <a:lnTo>
+                    <a:pt x="2901602" y="387303"/>
+                  </a:lnTo>
+                  <a:lnTo>
+                    <a:pt x="2978071" y="395620"/>
+                  </a:lnTo>
+                  <a:lnTo>
+                    <a:pt x="3054539" y="403852"/>
+                  </a:lnTo>
+                  <a:lnTo>
+                    <a:pt x="3131008" y="412001"/>
+                  </a:lnTo>
+                  <a:lnTo>
+                    <a:pt x="3207476" y="420067"/>
+                  </a:lnTo>
+                  <a:lnTo>
+                    <a:pt x="3283945" y="428052"/>
+                  </a:lnTo>
+                  <a:lnTo>
+                    <a:pt x="3360413" y="435955"/>
+                  </a:lnTo>
+                  <a:lnTo>
+                    <a:pt x="3436881" y="443778"/>
+                  </a:lnTo>
+                  <a:lnTo>
+                    <a:pt x="3513350" y="451522"/>
+                  </a:lnTo>
+                  <a:lnTo>
+                    <a:pt x="3589818" y="459187"/>
+                  </a:lnTo>
+                  <a:lnTo>
+                    <a:pt x="3666287" y="466774"/>
+                  </a:lnTo>
+                  <a:lnTo>
+                    <a:pt x="3742755" y="474285"/>
+                  </a:lnTo>
+                  <a:lnTo>
+                    <a:pt x="3819224" y="481719"/>
+                  </a:lnTo>
+                  <a:lnTo>
+                    <a:pt x="3895692" y="489078"/>
+                  </a:lnTo>
+                  <a:lnTo>
+                    <a:pt x="3972160" y="496362"/>
+                  </a:lnTo>
+                  <a:lnTo>
+                    <a:pt x="4048629" y="503572"/>
+                  </a:lnTo>
+                  <a:lnTo>
+                    <a:pt x="4125097" y="510709"/>
+                  </a:lnTo>
+                  <a:lnTo>
+                    <a:pt x="4201566" y="517774"/>
+                  </a:lnTo>
+                  <a:lnTo>
+                    <a:pt x="4278034" y="524767"/>
+                  </a:lnTo>
+                  <a:lnTo>
+                    <a:pt x="4354503" y="531689"/>
+                  </a:lnTo>
+                  <a:lnTo>
+                    <a:pt x="4430971" y="538541"/>
+                  </a:lnTo>
+                  <a:lnTo>
+                    <a:pt x="4507439" y="545323"/>
+                  </a:lnTo>
+                  <a:lnTo>
+                    <a:pt x="4583908" y="552036"/>
+                  </a:lnTo>
+                  <a:lnTo>
+                    <a:pt x="4660376" y="558682"/>
+                  </a:lnTo>
+                  <a:lnTo>
+                    <a:pt x="4736845" y="565260"/>
+                  </a:lnTo>
+                  <a:lnTo>
+                    <a:pt x="4813313" y="571771"/>
+                  </a:lnTo>
+                  <a:lnTo>
+                    <a:pt x="4889782" y="578216"/>
+                  </a:lnTo>
+                  <a:lnTo>
+                    <a:pt x="4966250" y="584596"/>
+                  </a:lnTo>
+                  <a:lnTo>
+                    <a:pt x="5042719" y="590911"/>
+                  </a:lnTo>
+                  <a:lnTo>
+                    <a:pt x="5119187" y="597162"/>
+                  </a:lnTo>
+                  <a:lnTo>
+                    <a:pt x="5195655" y="603349"/>
+                  </a:lnTo>
+                  <a:lnTo>
+                    <a:pt x="5272124" y="609474"/>
+                  </a:lnTo>
+                  <a:lnTo>
+                    <a:pt x="5348592" y="615537"/>
+                  </a:lnTo>
+                  <a:lnTo>
+                    <a:pt x="5425061" y="621538"/>
+                  </a:lnTo>
+                  <a:lnTo>
+                    <a:pt x="5501529" y="627478"/>
+                  </a:lnTo>
+                  <a:lnTo>
+                    <a:pt x="5577998" y="633358"/>
+                  </a:lnTo>
+                  <a:lnTo>
+                    <a:pt x="5654466" y="639179"/>
+                  </a:lnTo>
+                  <a:lnTo>
+                    <a:pt x="5730934" y="644940"/>
+                  </a:lnTo>
+                  <a:lnTo>
+                    <a:pt x="5807403" y="650643"/>
+                  </a:lnTo>
+                  <a:lnTo>
+                    <a:pt x="5883871" y="656288"/>
+                  </a:lnTo>
+                  <a:lnTo>
+                    <a:pt x="5960340" y="661875"/>
+                  </a:lnTo>
+                  <a:lnTo>
+                    <a:pt x="6036808" y="667406"/>
+                  </a:lnTo>
+                  <a:lnTo>
+                    <a:pt x="6113277" y="672881"/>
+                  </a:lnTo>
+                  <a:lnTo>
+                    <a:pt x="6189745" y="678301"/>
+                  </a:lnTo>
+                  <a:lnTo>
+                    <a:pt x="6266213" y="683665"/>
+                  </a:lnTo>
+                  <a:lnTo>
+                    <a:pt x="6342682" y="688975"/>
+                  </a:lnTo>
+                  <a:lnTo>
+                    <a:pt x="6419150" y="694231"/>
+                  </a:lnTo>
+                  <a:lnTo>
+                    <a:pt x="6495619" y="699434"/>
+                  </a:lnTo>
+                  <a:lnTo>
+                    <a:pt x="6572087" y="704584"/>
+                  </a:lnTo>
+                  <a:lnTo>
+                    <a:pt x="6648556" y="709681"/>
+                  </a:lnTo>
+                  <a:lnTo>
+                    <a:pt x="6725024" y="714727"/>
+                  </a:lnTo>
+                  <a:lnTo>
+                    <a:pt x="6801492" y="719722"/>
+                  </a:lnTo>
+                  <a:lnTo>
+                    <a:pt x="6877961" y="724666"/>
+                  </a:lnTo>
+                  <a:lnTo>
+                    <a:pt x="6954429" y="729560"/>
+                  </a:lnTo>
+                  <a:lnTo>
+                    <a:pt x="7030898" y="734404"/>
+                  </a:lnTo>
+                  <a:lnTo>
+                    <a:pt x="7107366" y="739200"/>
+                  </a:lnTo>
+                  <a:lnTo>
+                    <a:pt x="7183835" y="743946"/>
+                  </a:lnTo>
+                  <a:lnTo>
+                    <a:pt x="7260303" y="748644"/>
                   </a:lnTo>
                 </a:path>
               </a:pathLst>
@@ -4503,21 +4503,21 @@
           </p:nvSpPr>
           <p:spPr>
             <a:xfrm>
-              <a:off x="817517" y="4727786"/>
-              <a:ext cx="7799693" cy="0"/>
+              <a:off x="915645" y="4684908"/>
+              <a:ext cx="7682587" cy="0"/>
             </a:xfrm>
             <a:custGeom>
               <a:avLst/>
               <a:pathLst>
-                <a:path w="7799693" h="0">
+                <a:path w="7682587" h="0">
                   <a:moveTo>
                     <a:pt x="0" y="0"/>
                   </a:moveTo>
                   <a:lnTo>
-                    <a:pt x="7799693" y="0"/>
-                  </a:lnTo>
-                  <a:lnTo>
-                    <a:pt x="7799693" y="0"/>
+                    <a:pt x="7682587" y="0"/>
+                  </a:lnTo>
+                  <a:lnTo>
+                    <a:pt x="7682587" y="0"/>
                   </a:lnTo>
                 </a:path>
               </a:pathLst>
@@ -4546,15 +4546,15 @@
           </p:nvSpPr>
           <p:spPr>
             <a:xfrm>
-              <a:off x="4203673" y="2073503"/>
-              <a:ext cx="0" cy="3649639"/>
+              <a:off x="4250960" y="2209169"/>
+              <a:ext cx="0" cy="3404141"/>
             </a:xfrm>
             <a:custGeom>
               <a:avLst/>
               <a:pathLst>
-                <a:path w="0" h="3649639">
+                <a:path w="0" h="3404141">
                   <a:moveTo>
-                    <a:pt x="0" y="3649639"/>
+                    <a:pt x="0" y="3404141"/>
                   </a:moveTo>
                   <a:lnTo>
                     <a:pt x="0" y="0"/>
@@ -4589,8 +4589,8 @@
           </p:nvSpPr>
           <p:spPr>
             <a:xfrm>
-              <a:off x="692708" y="5517199"/>
-              <a:ext cx="62179" cy="80101"/>
+              <a:off x="756929" y="5407599"/>
+              <a:ext cx="79004" cy="101955"/>
             </a:xfrm>
             <a:prstGeom prst="rect">
               <a:avLst/>
@@ -4603,7 +4603,7 @@
             <a:p>
               <a:pPr algn="l" marL="0" marR="0" indent="0">
                 <a:lnSpc>
-                  <a:spcPts val="880"/>
+                  <a:spcPts val="1120"/>
                 </a:lnSpc>
                 <a:spcBef>
                   <a:spcPts val="0"/>
@@ -4613,7 +4613,7 @@
                 </a:spcAft>
               </a:pPr>
               <a:r>
-                <a:rPr sz="880">
+                <a:rPr sz="1120">
                   <a:solidFill>
                     <a:srgbClr val="4D4D4D">
                       <a:alpha val="100000"/>
@@ -4635,8 +4635,8 @@
           </p:nvSpPr>
           <p:spPr>
             <a:xfrm>
-              <a:off x="692708" y="4687735"/>
-              <a:ext cx="62179" cy="80101"/>
+              <a:off x="756929" y="4633931"/>
+              <a:ext cx="79004" cy="101955"/>
             </a:xfrm>
             <a:prstGeom prst="rect">
               <a:avLst/>
@@ -4649,7 +4649,7 @@
             <a:p>
               <a:pPr algn="l" marL="0" marR="0" indent="0">
                 <a:lnSpc>
-                  <a:spcPts val="880"/>
+                  <a:spcPts val="1120"/>
                 </a:lnSpc>
                 <a:spcBef>
                   <a:spcPts val="0"/>
@@ -4659,7 +4659,7 @@
                 </a:spcAft>
               </a:pPr>
               <a:r>
-                <a:rPr sz="880">
+                <a:rPr sz="1120">
                   <a:solidFill>
                     <a:srgbClr val="4D4D4D">
                       <a:alpha val="100000"/>
@@ -4681,8 +4681,8 @@
           </p:nvSpPr>
           <p:spPr>
             <a:xfrm>
-              <a:off x="692708" y="3858272"/>
-              <a:ext cx="62179" cy="80101"/>
+              <a:off x="756929" y="3860262"/>
+              <a:ext cx="79004" cy="101955"/>
             </a:xfrm>
             <a:prstGeom prst="rect">
               <a:avLst/>
@@ -4695,7 +4695,7 @@
             <a:p>
               <a:pPr algn="l" marL="0" marR="0" indent="0">
                 <a:lnSpc>
-                  <a:spcPts val="880"/>
+                  <a:spcPts val="1120"/>
                 </a:lnSpc>
                 <a:spcBef>
                   <a:spcPts val="0"/>
@@ -4705,7 +4705,7 @@
                 </a:spcAft>
               </a:pPr>
               <a:r>
-                <a:rPr sz="880">
+                <a:rPr sz="1120">
                   <a:solidFill>
                     <a:srgbClr val="4D4D4D">
                       <a:alpha val="100000"/>
@@ -4727,8 +4727,8 @@
           </p:nvSpPr>
           <p:spPr>
             <a:xfrm>
-              <a:off x="692708" y="3028808"/>
-              <a:ext cx="62179" cy="80101"/>
+              <a:off x="756929" y="3086593"/>
+              <a:ext cx="79004" cy="101955"/>
             </a:xfrm>
             <a:prstGeom prst="rect">
               <a:avLst/>
@@ -4741,7 +4741,7 @@
             <a:p>
               <a:pPr algn="l" marL="0" marR="0" indent="0">
                 <a:lnSpc>
-                  <a:spcPts val="880"/>
+                  <a:spcPts val="1120"/>
                 </a:lnSpc>
                 <a:spcBef>
                   <a:spcPts val="0"/>
@@ -4751,7 +4751,7 @@
                 </a:spcAft>
               </a:pPr>
               <a:r>
-                <a:rPr sz="880">
+                <a:rPr sz="1120">
                   <a:solidFill>
                     <a:srgbClr val="4D4D4D">
                       <a:alpha val="100000"/>
@@ -4773,8 +4773,8 @@
           </p:nvSpPr>
           <p:spPr>
             <a:xfrm>
-              <a:off x="692708" y="2199345"/>
-              <a:ext cx="62179" cy="80101"/>
+              <a:off x="756929" y="2312925"/>
+              <a:ext cx="79004" cy="101955"/>
             </a:xfrm>
             <a:prstGeom prst="rect">
               <a:avLst/>
@@ -4787,7 +4787,7 @@
             <a:p>
               <a:pPr algn="l" marL="0" marR="0" indent="0">
                 <a:lnSpc>
-                  <a:spcPts val="880"/>
+                  <a:spcPts val="1120"/>
                 </a:lnSpc>
                 <a:spcBef>
                   <a:spcPts val="0"/>
@@ -4797,7 +4797,7 @@
                 </a:spcAft>
               </a:pPr>
               <a:r>
-                <a:rPr sz="880">
+                <a:rPr sz="1120">
                   <a:solidFill>
                     <a:srgbClr val="4D4D4D">
                       <a:alpha val="100000"/>
@@ -4819,8 +4819,8 @@
           </p:nvSpPr>
           <p:spPr>
             <a:xfrm>
-              <a:off x="2423864" y="5785772"/>
-              <a:ext cx="155356" cy="80101"/>
+              <a:off x="2475630" y="5693022"/>
+              <a:ext cx="197510" cy="101955"/>
             </a:xfrm>
             <a:prstGeom prst="rect">
               <a:avLst/>
@@ -4833,7 +4833,7 @@
             <a:p>
               <a:pPr algn="l" marL="0" marR="0" indent="0">
                 <a:lnSpc>
-                  <a:spcPts val="880"/>
+                  <a:spcPts val="1120"/>
                 </a:lnSpc>
                 <a:spcBef>
                   <a:spcPts val="0"/>
@@ -4843,7 +4843,7 @@
                 </a:spcAft>
               </a:pPr>
               <a:r>
-                <a:rPr sz="880">
+                <a:rPr sz="1120">
                   <a:solidFill>
                     <a:srgbClr val="4D4D4D">
                       <a:alpha val="100000"/>
@@ -4865,8 +4865,8 @@
           </p:nvSpPr>
           <p:spPr>
             <a:xfrm>
-              <a:off x="4196521" y="5785772"/>
-              <a:ext cx="155356" cy="80101"/>
+              <a:off x="4221672" y="5693022"/>
+              <a:ext cx="197510" cy="101955"/>
             </a:xfrm>
             <a:prstGeom prst="rect">
               <a:avLst/>
@@ -4879,7 +4879,7 @@
             <a:p>
               <a:pPr algn="l" marL="0" marR="0" indent="0">
                 <a:lnSpc>
-                  <a:spcPts val="880"/>
+                  <a:spcPts val="1120"/>
                 </a:lnSpc>
                 <a:spcBef>
                   <a:spcPts val="0"/>
@@ -4889,7 +4889,7 @@
                 </a:spcAft>
               </a:pPr>
               <a:r>
-                <a:rPr sz="880">
+                <a:rPr sz="1120">
                   <a:solidFill>
                     <a:srgbClr val="4D4D4D">
                       <a:alpha val="100000"/>
@@ -4911,8 +4911,8 @@
           </p:nvSpPr>
           <p:spPr>
             <a:xfrm>
-              <a:off x="5969179" y="5785772"/>
-              <a:ext cx="155356" cy="80101"/>
+              <a:off x="5967715" y="5693022"/>
+              <a:ext cx="197510" cy="101955"/>
             </a:xfrm>
             <a:prstGeom prst="rect">
               <a:avLst/>
@@ -4925,7 +4925,7 @@
             <a:p>
               <a:pPr algn="l" marL="0" marR="0" indent="0">
                 <a:lnSpc>
-                  <a:spcPts val="880"/>
+                  <a:spcPts val="1120"/>
                 </a:lnSpc>
                 <a:spcBef>
                   <a:spcPts val="0"/>
@@ -4935,7 +4935,7 @@
                 </a:spcAft>
               </a:pPr>
               <a:r>
-                <a:rPr sz="880">
+                <a:rPr sz="1120">
                   <a:solidFill>
                     <a:srgbClr val="4D4D4D">
                       <a:alpha val="100000"/>
@@ -4957,8 +4957,8 @@
           </p:nvSpPr>
           <p:spPr>
             <a:xfrm>
-              <a:off x="7741836" y="5785772"/>
-              <a:ext cx="155356" cy="80101"/>
+              <a:off x="7713757" y="5693022"/>
+              <a:ext cx="197510" cy="101955"/>
             </a:xfrm>
             <a:prstGeom prst="rect">
               <a:avLst/>
@@ -4971,7 +4971,7 @@
             <a:p>
               <a:pPr algn="l" marL="0" marR="0" indent="0">
                 <a:lnSpc>
-                  <a:spcPts val="880"/>
+                  <a:spcPts val="1120"/>
                 </a:lnSpc>
                 <a:spcBef>
                   <a:spcPts val="0"/>
@@ -4981,7 +4981,7 @@
                 </a:spcAft>
               </a:pPr>
               <a:r>
-                <a:rPr sz="880">
+                <a:rPr sz="1120">
                   <a:solidFill>
                     <a:srgbClr val="4D4D4D">
                       <a:alpha val="100000"/>
@@ -5003,8 +5003,8 @@
           </p:nvSpPr>
           <p:spPr>
             <a:xfrm>
-              <a:off x="3879271" y="5925448"/>
-              <a:ext cx="1676186" cy="100218"/>
+              <a:off x="3690153" y="5870717"/>
+              <a:ext cx="2133569" cy="127558"/>
             </a:xfrm>
             <a:prstGeom prst="rect">
               <a:avLst/>
@@ -5017,7 +5017,7 @@
             <a:p>
               <a:pPr algn="l" marL="0" marR="0" indent="0">
                 <a:lnSpc>
-                  <a:spcPts val="1100"/>
+                  <a:spcPts val="1400"/>
                 </a:lnSpc>
                 <a:spcBef>
                   <a:spcPts val="0"/>
@@ -5027,7 +5027,7 @@
                 </a:spcAft>
               </a:pPr>
               <a:r>
-                <a:rPr sz="1100">
+                <a:rPr sz="1400">
                   <a:solidFill>
                     <a:srgbClr val="000000">
                       <a:alpha val="100000"/>
@@ -5049,8 +5049,8 @@
           </p:nvSpPr>
           <p:spPr>
             <a:xfrm rot="-5400000">
-              <a:off x="68446" y="3848213"/>
-              <a:ext cx="1016904" cy="100218"/>
+              <a:off x="-37527" y="3847460"/>
+              <a:ext cx="1294150" cy="127558"/>
             </a:xfrm>
             <a:prstGeom prst="rect">
               <a:avLst/>
@@ -5063,7 +5063,7 @@
             <a:p>
               <a:pPr algn="l" marL="0" marR="0" indent="0">
                 <a:lnSpc>
-                  <a:spcPts val="1100"/>
+                  <a:spcPts val="1400"/>
                 </a:lnSpc>
                 <a:spcBef>
                   <a:spcPts val="0"/>
@@ -5073,7 +5073,7 @@
                 </a:spcAft>
               </a:pPr>
               <a:r>
-                <a:rPr sz="1100">
+                <a:rPr sz="1400">
                   <a:solidFill>
                     <a:srgbClr val="000000">
                       <a:alpha val="100000"/>
@@ -5095,8 +5095,8 @@
           </p:nvSpPr>
           <p:spPr>
             <a:xfrm>
-              <a:off x="817517" y="1896563"/>
-              <a:ext cx="4166463" cy="82021"/>
+              <a:off x="915645" y="1977589"/>
+              <a:ext cx="5556900" cy="109362"/>
             </a:xfrm>
             <a:prstGeom prst="rect">
               <a:avLst/>
@@ -5109,7 +5109,7 @@
             <a:p>
               <a:pPr algn="l" marL="0" marR="0" indent="0">
                 <a:lnSpc>
-                  <a:spcPts val="900"/>
+                  <a:spcPts val="1200"/>
                 </a:lnSpc>
                 <a:spcBef>
                   <a:spcPts val="0"/>
@@ -5119,7 +5119,7 @@
                 </a:spcAft>
               </a:pPr>
               <a:r>
-                <a:rPr sz="900">
+                <a:rPr sz="1200">
                   <a:solidFill>
                     <a:srgbClr val="404040">
                       <a:alpha val="100000"/>
@@ -5141,8 +5141,8 @@
           </p:nvSpPr>
           <p:spPr>
             <a:xfrm>
-              <a:off x="817517" y="1669789"/>
-              <a:ext cx="3780403" cy="120152"/>
+              <a:off x="915645" y="1688767"/>
+              <a:ext cx="4812578" cy="153070"/>
             </a:xfrm>
             <a:prstGeom prst="rect">
               <a:avLst/>
@@ -5155,7 +5155,7 @@
             <a:p>
               <a:pPr algn="l" marL="0" marR="0" indent="0">
                 <a:lnSpc>
-                  <a:spcPts val="1320"/>
+                  <a:spcPts val="1680"/>
                 </a:lnSpc>
                 <a:spcBef>
                   <a:spcPts val="0"/>
@@ -5165,7 +5165,7 @@
                 </a:spcAft>
               </a:pPr>
               <a:r>
-                <a:rPr sz="1320">
+                <a:rPr sz="1680">
                   <a:solidFill>
                     <a:srgbClr val="000000">
                       <a:alpha val="100000"/>
